--- a/docs/prezentacja_obrona.pptx
+++ b/docs/prezentacja_obrona.pptx
@@ -17,6 +17,8 @@
     <p:sldId id="265" r:id="rId16"/>
     <p:sldId id="266" r:id="rId17"/>
     <p:sldId id="267" r:id="rId18"/>
+    <p:sldId id="268" r:id="rId19"/>
+    <p:sldId id="269" r:id="rId20"/>
   </p:sldIdLst>
   <p:sldSz cx="12191695" cy="6858000" type="screen4x3"/>
   <p:notesSz cx="6858000" cy="9144000"/>
@@ -3115,8 +3117,8 @@
         </p:nvSpPr>
         <p:spPr>
           <a:xfrm>
-            <a:off x="0" y="2194560"/>
-            <a:ext cx="12191695" cy="1737360"/>
+            <a:off x="0" y="2103120"/>
+            <a:ext cx="12191695" cy="1828800"/>
           </a:xfrm>
           <a:prstGeom prst="rect">
             <a:avLst/>
@@ -3158,8 +3160,8 @@
         </p:nvSpPr>
         <p:spPr>
           <a:xfrm>
-            <a:off x="731520" y="2377440"/>
-            <a:ext cx="10728655" cy="822960"/>
+            <a:off x="731520" y="2286000"/>
+            <a:ext cx="10728655" cy="731520"/>
           </a:xfrm>
           <a:prstGeom prst="rect">
             <a:avLst/>
@@ -3174,13 +3176,13 @@
           <a:p>
             <a:pPr algn="l"/>
             <a:r>
-              <a:rPr sz="4400" b="1">
+              <a:rPr sz="3800" b="1">
                 <a:solidFill>
                   <a:srgbClr val="FFFFFF"/>
                 </a:solidFill>
                 <a:latin typeface="Segoe UI"/>
               </a:rPr>
-              <a:t>Hurtownia danych ACLED</a:t>
+              <a:t>Hurtownia danych ACLED — przegląd realizacji</a:t>
             </a:r>
           </a:p>
         </p:txBody>
@@ -3193,8 +3195,8 @@
         </p:nvSpPr>
         <p:spPr>
           <a:xfrm>
-            <a:off x="731520" y="3200400"/>
-            <a:ext cx="10728655" cy="548640"/>
+            <a:off x="731520" y="3063240"/>
+            <a:ext cx="10728655" cy="731520"/>
           </a:xfrm>
           <a:prstGeom prst="rect">
             <a:avLst/>
@@ -3209,13 +3211,25 @@
           <a:p>
             <a:pPr algn="l"/>
             <a:r>
-              <a:rPr sz="2000" b="0">
+              <a:rPr sz="1800" b="0">
                 <a:solidFill>
                   <a:srgbClr val="FFFFFF"/>
                 </a:solidFill>
                 <a:latin typeface="Segoe UI"/>
               </a:rPr>
-              <a:t>Konflikty zbrojne na świecie 1997–2025  ·  lakehouse AWS  ·  Airflow  ·  Power BI</a:t>
+              <a:t>Pokazujemy wszystko, co mamy — prosimy o ocenę, czy taka realizacja</a:t>
+            </a:r>
+          </a:p>
+          <a:p>
+            <a:pPr algn="l"/>
+            <a:r>
+              <a:rPr sz="1800" b="0">
+                <a:solidFill>
+                  <a:srgbClr val="FFFFFF"/>
+                </a:solidFill>
+                <a:latin typeface="Segoe UI"/>
+              </a:rPr>
+              <a:t>spełnia wymagania projektu (i co poprawić, zanim będzie za późno).</a:t>
             </a:r>
           </a:p>
         </p:txBody>
@@ -3285,7 +3299,7 @@
                 </a:solidFill>
                 <a:latin typeface="Segoe UI"/>
               </a:rPr>
-              <a:t>Integracja danych i hurtownie danych — projekt zaliczeniowy, lipiec 2026</a:t>
+              <a:t>Integracja danych i hurtownie danych · lipiec 2026 · repo: github.com/mac-v/acled-etl-dashboard</a:t>
             </a:r>
           </a:p>
         </p:txBody>
@@ -3367,8 +3381,8 @@
         </p:nvSpPr>
         <p:spPr>
           <a:xfrm>
-            <a:off x="457200" y="320040"/>
-            <a:ext cx="11277295" cy="640080"/>
+            <a:off x="457200" y="292608"/>
+            <a:ext cx="8899855" cy="640080"/>
           </a:xfrm>
           <a:prstGeom prst="rect">
             <a:avLst/>
@@ -3383,27 +3397,79 @@
           <a:p>
             <a:pPr algn="l"/>
             <a:r>
-              <a:rPr sz="3000" b="1">
+              <a:rPr sz="2800" b="1">
                 <a:solidFill>
                   <a:srgbClr val="1F6F8B"/>
                 </a:solidFill>
                 <a:latin typeface="Segoe UI"/>
               </a:rPr>
-              <a:t>Warstwa semantyczna i raporty — Power BI</a:t>
-            </a:r>
-          </a:p>
-        </p:txBody>
-      </p:sp>
-      <p:sp>
-        <p:nvSpPr>
-          <p:cNvPr id="4" name="TextBox 3"/>
+              <a:t>Warstwa semantyczna — model Power BI</a:t>
+            </a:r>
+          </a:p>
+        </p:txBody>
+      </p:sp>
+      <p:sp>
+        <p:nvSpPr>
+          <p:cNvPr id="4" name="Rectangle 3"/>
+          <p:cNvSpPr/>
+          <p:nvPr/>
+        </p:nvSpPr>
+        <p:spPr>
+          <a:xfrm>
+            <a:off x="9448495" y="292608"/>
+            <a:ext cx="2286000" cy="502920"/>
+          </a:xfrm>
+          <a:prstGeom prst="rect">
+            <a:avLst/>
+          </a:prstGeom>
+          <a:solidFill>
+            <a:srgbClr val="E08E45"/>
+          </a:solidFill>
+          <a:ln>
+            <a:noFill/>
+          </a:ln>
+        </p:spPr>
+        <p:style>
+          <a:lnRef idx="1">
+            <a:schemeClr val="accent1"/>
+          </a:lnRef>
+          <a:fillRef idx="3">
+            <a:schemeClr val="accent1"/>
+          </a:fillRef>
+          <a:effectRef idx="2">
+            <a:schemeClr val="accent1"/>
+          </a:effectRef>
+          <a:fontRef idx="minor">
+            <a:schemeClr val="lt1"/>
+          </a:fontRef>
+        </p:style>
+        <p:txBody>
+          <a:bodyPr rtlCol="0" anchor="ctr"/>
+          <a:lstStyle/>
+          <a:p>
+            <a:pPr algn="ctr"/>
+            <a:r>
+              <a:rPr sz="1500" b="1">
+                <a:solidFill>
+                  <a:srgbClr val="FFFFFF"/>
+                </a:solidFill>
+                <a:latin typeface="Segoe UI"/>
+              </a:rPr>
+              <a:t>wymóg 10 pkt</a:t>
+            </a:r>
+          </a:p>
+        </p:txBody>
+      </p:sp>
+      <p:sp>
+        <p:nvSpPr>
+          <p:cNvPr id="5" name="TextBox 4"/>
           <p:cNvSpPr txBox="1"/>
           <p:nvPr/>
         </p:nvSpPr>
         <p:spPr>
           <a:xfrm>
-            <a:off x="548640" y="1371600"/>
-            <a:ext cx="5852160" cy="4937760"/>
+            <a:off x="548640" y="1234440"/>
+            <a:ext cx="6035040" cy="4754880"/>
           </a:xfrm>
           <a:prstGeom prst="rect">
             <a:avLst/>
@@ -3416,7 +3482,6 @@
           </a:bodyPr>
           <a:lstStyle/>
           <a:p>
-            <a:pPr/>
             <a:r>
               <a:rPr sz="1600" b="1">
                 <a:solidFill>
@@ -3424,11 +3489,21 @@
                 </a:solidFill>
                 <a:latin typeface="Segoe UI"/>
               </a:rPr>
-              <a:t>• Import gwiazdy „na płasko" (ODBC/Athena)</a:t>
-            </a:r>
-          </a:p>
-          <a:p>
-            <a:pPr/>
+              <a:t>• Import gwiazdy przez ODBC/Athena (tryb Import)</a:t>
+            </a:r>
+          </a:p>
+          <a:p>
+            <a:r>
+              <a:rPr sz="1600" b="0">
+                <a:solidFill>
+                  <a:srgbClr val="1A1A2E"/>
+                </a:solidFill>
+                <a:latin typeface="Segoe UI"/>
+              </a:rPr>
+              <a:t>• 7 relacji *:1 — wymiar filtruje fakt</a:t>
+            </a:r>
+          </a:p>
+          <a:p>
             <a:r>
               <a:rPr sz="1400" b="0">
                 <a:solidFill>
@@ -3436,11 +3511,21 @@
                 </a:solidFill>
                 <a:latin typeface="Segoe UI"/>
               </a:rPr>
-              <a:t>   – 7 relacji *:1 — wymiar filtruje fakt</a:t>
-            </a:r>
-          </a:p>
-          <a:p>
-            <a:pPr/>
+              <a:t>   – populacja: cross-filter Both (inaczej per capita liczy się źle)</a:t>
+            </a:r>
+          </a:p>
+          <a:p>
+            <a:r>
+              <a:rPr sz="1600" b="1">
+                <a:solidFill>
+                  <a:srgbClr val="1A1A2E"/>
+                </a:solidFill>
+                <a:latin typeface="Segoe UI"/>
+              </a:rPr>
+              <a:t>• 15 miar DAX</a:t>
+            </a:r>
+          </a:p>
+          <a:p>
             <a:r>
               <a:rPr sz="1400" b="0">
                 <a:solidFill>
@@ -3448,11 +3533,21 @@
                 </a:solidFill>
                 <a:latin typeface="Segoe UI"/>
               </a:rPr>
-              <a:t>   – populacja: cross-filter Both (klucz iso_year)</a:t>
-            </a:r>
-          </a:p>
-          <a:p>
-            <a:pPr/>
+              <a:t>   – SUM/COUNTROWS/DIVIDE · CALCULATE (protesty vs przemoc)</a:t>
+            </a:r>
+          </a:p>
+          <a:p>
+            <a:r>
+              <a:rPr sz="1400" b="0">
+                <a:solidFill>
+                  <a:srgbClr val="6B6B7B"/>
+                </a:solidFill>
+                <a:latin typeface="Segoe UI"/>
+              </a:rPr>
+              <a:t>   – DATEADD → YoY · DISTINCTCOUNT · per-100k</a:t>
+            </a:r>
+          </a:p>
+          <a:p>
             <a:r>
               <a:rPr sz="1600" b="1">
                 <a:solidFill>
@@ -3460,11 +3555,10 @@
                 </a:solidFill>
                 <a:latin typeface="Segoe UI"/>
               </a:rPr>
-              <a:t>• 15 miar DAX</a:t>
-            </a:r>
-          </a:p>
-          <a:p>
-            <a:pPr/>
+              <a:t>• 3 hierarchie z drill-down + sort miesięcy po numerze</a:t>
+            </a:r>
+          </a:p>
+          <a:p>
             <a:r>
               <a:rPr sz="1400" b="0">
                 <a:solidFill>
@@ -3472,11 +3566,21 @@
                 </a:solidFill>
                 <a:latin typeface="Segoe UI"/>
               </a:rPr>
-              <a:t>   – COUNTROWS, DIVIDE, CALCULATE, DATEADD (YoY), DISTINCTCOUNT, per-100k</a:t>
-            </a:r>
-          </a:p>
-          <a:p>
-            <a:pPr/>
+              <a:t>   – Rok→Kwartał→Miesiąc · Region→Kraj · Disorder→Event→Sub</a:t>
+            </a:r>
+          </a:p>
+          <a:p>
+            <a:r>
+              <a:rPr sz="1600" b="0">
+                <a:solidFill>
+                  <a:srgbClr val="1A1A2E"/>
+                </a:solidFill>
+                <a:latin typeface="Segoe UI"/>
+              </a:rPr>
+              <a:t>• dim_date oznaczona jako tabela dat</a:t>
+            </a:r>
+          </a:p>
+          <a:p>
             <a:r>
               <a:rPr sz="1600" b="1">
                 <a:solidFill>
@@ -3484,81 +3588,21 @@
                 </a:solidFill>
                 <a:latin typeface="Segoe UI"/>
               </a:rPr>
-              <a:t>• Hierarchie + drill-down</a:t>
-            </a:r>
-          </a:p>
-          <a:p>
-            <a:pPr/>
-            <a:r>
-              <a:rPr sz="1400" b="0">
-                <a:solidFill>
-                  <a:srgbClr val="6B6B7B"/>
-                </a:solidFill>
-                <a:latin typeface="Segoe UI"/>
-              </a:rPr>
-              <a:t>   – Rok→Kwartał→Miesiąc · Region→Kraj · Disorder→Event→Sub-event</a:t>
-            </a:r>
-          </a:p>
-          <a:p>
-            <a:pPr/>
-            <a:r>
-              <a:rPr sz="1400" b="0">
-                <a:solidFill>
-                  <a:srgbClr val="6B6B7B"/>
-                </a:solidFill>
-                <a:latin typeface="Segoe UI"/>
-              </a:rPr>
-              <a:t>   – miesiące sortowane chronologicznie, dim_date = tabela dat</a:t>
-            </a:r>
-          </a:p>
-          <a:p>
-            <a:pPr/>
-            <a:r>
-              <a:rPr sz="1600" b="1">
-                <a:solidFill>
-                  <a:srgbClr val="1A1A2E"/>
-                </a:solidFill>
-                <a:latin typeface="Segoe UI"/>
-              </a:rPr>
-              <a:t>• Raport: dashboard KPI + strona per pytanie</a:t>
-            </a:r>
-          </a:p>
-          <a:p>
-            <a:pPr/>
-            <a:r>
-              <a:rPr sz="1400" b="0">
-                <a:solidFill>
-                  <a:srgbClr val="6B6B7B"/>
-                </a:solidFill>
-                <a:latin typeface="Segoe UI"/>
-              </a:rPr>
-              <a:t>   – slicery zsynchronizowane, heatmapa, interakcje, nawigacja</a:t>
-            </a:r>
-          </a:p>
-          <a:p>
-            <a:pPr/>
-            <a:r>
-              <a:rPr sz="1400" b="0">
-                <a:solidFill>
-                  <a:srgbClr val="6B6B7B"/>
-                </a:solidFill>
-                <a:latin typeface="Segoe UI"/>
-              </a:rPr>
-              <a:t>   – jeden model odpowiada na wszystkie 12 pytań</a:t>
-            </a:r>
-          </a:p>
-        </p:txBody>
-      </p:sp>
-      <p:sp>
-        <p:nvSpPr>
-          <p:cNvPr id="5" name="Rectangle 4"/>
+              <a:t>• Jeden model odpowiada na WSZYSTKIE 12 pytań</a:t>
+            </a:r>
+          </a:p>
+        </p:txBody>
+      </p:sp>
+      <p:sp>
+        <p:nvSpPr>
+          <p:cNvPr id="6" name="Rectangle 5"/>
           <p:cNvSpPr/>
           <p:nvPr/>
         </p:nvSpPr>
         <p:spPr>
           <a:xfrm>
-            <a:off x="6766560" y="1554480"/>
-            <a:ext cx="4846320" cy="4023360"/>
+            <a:off x="6858000" y="1463040"/>
+            <a:ext cx="4754880" cy="3840480"/>
           </a:xfrm>
           <a:prstGeom prst="rect">
             <a:avLst/>
@@ -3568,7 +3612,7 @@
           </a:solidFill>
           <a:ln>
             <a:solidFill>
-              <a:srgbClr val="E08E45"/>
+              <a:srgbClr val="1F6F8B"/>
             </a:solidFill>
           </a:ln>
         </p:spPr>
@@ -3596,14 +3640,14 @@
       </p:sp>
       <p:sp>
         <p:nvSpPr>
-          <p:cNvPr id="6" name="TextBox 5"/>
+          <p:cNvPr id="7" name="TextBox 6"/>
           <p:cNvSpPr txBox="1"/>
           <p:nvPr/>
         </p:nvSpPr>
         <p:spPr>
           <a:xfrm>
-            <a:off x="7040880" y="1828800"/>
-            <a:ext cx="4297680" cy="457200"/>
+            <a:off x="7132320" y="1691640"/>
+            <a:ext cx="4206240" cy="457200"/>
           </a:xfrm>
           <a:prstGeom prst="rect">
             <a:avLst/>
@@ -3618,27 +3662,27 @@
           <a:p>
             <a:pPr algn="l"/>
             <a:r>
-              <a:rPr sz="2000" b="1">
-                <a:solidFill>
-                  <a:srgbClr val="E08E45"/>
-                </a:solidFill>
-                <a:latin typeface="Segoe UI"/>
-              </a:rPr>
-              <a:t>DEMO NA ŻYWO</a:t>
-            </a:r>
-          </a:p>
-        </p:txBody>
-      </p:sp>
-      <p:sp>
-        <p:nvSpPr>
-          <p:cNvPr id="7" name="TextBox 6"/>
+              <a:rPr sz="1700" b="1">
+                <a:solidFill>
+                  <a:srgbClr val="1F6F8B"/>
+                </a:solidFill>
+                <a:latin typeface="Segoe UI"/>
+              </a:rPr>
+              <a:t>Rola SQL-i per-pytanie (gold_*)</a:t>
+            </a:r>
+          </a:p>
+        </p:txBody>
+      </p:sp>
+      <p:sp>
+        <p:nvSpPr>
+          <p:cNvPr id="8" name="TextBox 7"/>
           <p:cNvSpPr txBox="1"/>
           <p:nvPr/>
         </p:nvSpPr>
         <p:spPr>
           <a:xfrm>
-            <a:off x="7040880" y="2377440"/>
-            <a:ext cx="4297680" cy="2926080"/>
+            <a:off x="7132320" y="2194560"/>
+            <a:ext cx="4206240" cy="2926080"/>
           </a:xfrm>
           <a:prstGeom prst="rect">
             <a:avLst/>
@@ -3653,49 +3697,115 @@
           <a:p>
             <a:pPr algn="l"/>
             <a:r>
-              <a:rPr sz="1700" b="0">
+              <a:rPr sz="1500" b="0">
                 <a:solidFill>
                   <a:srgbClr val="1A1A2E"/>
                 </a:solidFill>
                 <a:latin typeface="Segoe UI"/>
               </a:rPr>
-              <a:t>1. Airflow: Trigger DAG → zielony graf</a:t>
+              <a:t>To NIE jest warstwa semantyczna —</a:t>
             </a:r>
           </a:p>
           <a:p>
             <a:pPr algn="l"/>
             <a:r>
-              <a:rPr sz="1700" b="0">
+              <a:rPr sz="1500" b="0">
                 <a:solidFill>
                   <a:srgbClr val="1A1A2E"/>
                 </a:solidFill>
                 <a:latin typeface="Segoe UI"/>
               </a:rPr>
-              <a:t>2. Athena: count + suma = inwariant</a:t>
+              <a:t>to uzasadnienie doboru wymiarów</a:t>
             </a:r>
           </a:p>
           <a:p>
             <a:pPr algn="l"/>
             <a:r>
-              <a:rPr sz="1700" b="0">
+              <a:rPr sz="1500" b="0">
                 <a:solidFill>
                   <a:srgbClr val="1A1A2E"/>
                 </a:solidFill>
                 <a:latin typeface="Segoe UI"/>
               </a:rPr>
-              <a:t>3. Power BI: model gwiazdy,</a:t>
+              <a:t>i miar oraz niezależna ścieżka</a:t>
             </a:r>
           </a:p>
           <a:p>
             <a:pPr algn="l"/>
             <a:r>
-              <a:rPr sz="1700" b="0">
+              <a:rPr sz="1500" b="0">
                 <a:solidFill>
                   <a:srgbClr val="1A1A2E"/>
                 </a:solidFill>
                 <a:latin typeface="Segoe UI"/>
               </a:rPr>
-              <a:t>    miary DAX, drill-down, slicery</a:t>
+              <a:t>weryfikacji wyników (to ona wykryła</a:t>
+            </a:r>
+          </a:p>
+          <a:p>
+            <a:pPr algn="l"/>
+            <a:r>
+              <a:rPr sz="1500" b="0">
+                <a:solidFill>
+                  <a:srgbClr val="1A1A2E"/>
+                </a:solidFill>
+                <a:latin typeface="Segoe UI"/>
+              </a:rPr>
+              <a:t>błąd zaniżonych ofiar 7×).</a:t>
+            </a:r>
+          </a:p>
+        </p:txBody>
+      </p:sp>
+      <p:sp>
+        <p:nvSpPr>
+          <p:cNvPr id="9" name="Rectangle 8"/>
+          <p:cNvSpPr/>
+          <p:nvPr/>
+        </p:nvSpPr>
+        <p:spPr>
+          <a:xfrm>
+            <a:off x="457200" y="5806440"/>
+            <a:ext cx="11277295" cy="777240"/>
+          </a:xfrm>
+          <a:prstGeom prst="rect">
+            <a:avLst/>
+          </a:prstGeom>
+          <a:solidFill>
+            <a:srgbClr val="FFFFFF"/>
+          </a:solidFill>
+          <a:ln w="19050">
+            <a:solidFill>
+              <a:srgbClr val="A50F15"/>
+            </a:solidFill>
+          </a:ln>
+        </p:spPr>
+        <p:style>
+          <a:lnRef idx="1">
+            <a:schemeClr val="accent1"/>
+          </a:lnRef>
+          <a:fillRef idx="3">
+            <a:schemeClr val="accent1"/>
+          </a:fillRef>
+          <a:effectRef idx="2">
+            <a:schemeClr val="accent1"/>
+          </a:effectRef>
+          <a:fontRef idx="minor">
+            <a:schemeClr val="lt1"/>
+          </a:fontRef>
+        </p:style>
+        <p:txBody>
+          <a:bodyPr rtlCol="0" anchor="ctr" wrap="square"/>
+          <a:lstStyle/>
+          <a:p>
+            <a:pPr algn="ctr"/>
+            <a:r>
+              <a:rPr sz="1500" b="1">
+                <a:solidFill>
+                  <a:srgbClr val="A50F15"/>
+                </a:solidFill>
+                <a:latin typeface="Segoe UI"/>
+              </a:rPr>
+              <a:t>PYTANIE DO PANI:  czy model Power BI jest akceptowalny jako warstwa semantyczna (zamiast SSAS)?</a:t>
             </a:r>
           </a:p>
         </p:txBody>
@@ -3777,8 +3887,8 @@
         </p:nvSpPr>
         <p:spPr>
           <a:xfrm>
-            <a:off x="457200" y="320040"/>
-            <a:ext cx="11277295" cy="640080"/>
+            <a:off x="457200" y="292608"/>
+            <a:ext cx="8899855" cy="640080"/>
           </a:xfrm>
           <a:prstGeom prst="rect">
             <a:avLst/>
@@ -3793,13 +3903,13 @@
           <a:p>
             <a:pPr algn="l"/>
             <a:r>
-              <a:rPr sz="3000" b="1">
+              <a:rPr sz="2800" b="1">
                 <a:solidFill>
                   <a:srgbClr val="1F6F8B"/>
                 </a:solidFill>
                 <a:latin typeface="Segoe UI"/>
               </a:rPr>
-              <a:t>Co mówią dane — przykładowe odpowiedzi</a:t>
+              <a:t>Raporty — stan: W TRAKCIE</a:t>
             </a:r>
           </a:p>
         </p:txBody>
@@ -3812,8 +3922,8 @@
         </p:nvSpPr>
         <p:spPr>
           <a:xfrm>
-            <a:off x="548640" y="1371600"/>
-            <a:ext cx="11155680" cy="4937760"/>
+            <a:off x="457200" y="868680"/>
+            <a:ext cx="11277295" cy="365760"/>
           </a:xfrm>
           <a:prstGeom prst="rect">
             <a:avLst/>
@@ -3826,87 +3936,199 @@
           </a:bodyPr>
           <a:lstStyle/>
           <a:p>
-            <a:pPr/>
-            <a:r>
-              <a:rPr sz="1800" b="0">
+            <a:pPr algn="l"/>
+            <a:r>
+              <a:rPr sz="1400" b="0">
+                <a:solidFill>
+                  <a:srgbClr val="6B6B7B"/>
+                </a:solidFill>
+                <a:latin typeface="Segoe UI"/>
+              </a:rPr>
+              <a:t>model gotowy; strony klikamy według poniższego planu — do pokazania na zjeździe</a:t>
+            </a:r>
+          </a:p>
+        </p:txBody>
+      </p:sp>
+      <p:sp>
+        <p:nvSpPr>
+          <p:cNvPr id="5" name="Rectangle 4"/>
+          <p:cNvSpPr/>
+          <p:nvPr/>
+        </p:nvSpPr>
+        <p:spPr>
+          <a:xfrm>
+            <a:off x="9448495" y="292608"/>
+            <a:ext cx="2286000" cy="502920"/>
+          </a:xfrm>
+          <a:prstGeom prst="rect">
+            <a:avLst/>
+          </a:prstGeom>
+          <a:solidFill>
+            <a:srgbClr val="E08E45"/>
+          </a:solidFill>
+          <a:ln>
+            <a:noFill/>
+          </a:ln>
+        </p:spPr>
+        <p:style>
+          <a:lnRef idx="1">
+            <a:schemeClr val="accent1"/>
+          </a:lnRef>
+          <a:fillRef idx="3">
+            <a:schemeClr val="accent1"/>
+          </a:fillRef>
+          <a:effectRef idx="2">
+            <a:schemeClr val="accent1"/>
+          </a:effectRef>
+          <a:fontRef idx="minor">
+            <a:schemeClr val="lt1"/>
+          </a:fontRef>
+        </p:style>
+        <p:txBody>
+          <a:bodyPr rtlCol="0" anchor="ctr"/>
+          <a:lstStyle/>
+          <a:p>
+            <a:pPr algn="ctr"/>
+            <a:r>
+              <a:rPr sz="1500" b="1">
+                <a:solidFill>
+                  <a:srgbClr val="FFFFFF"/>
+                </a:solidFill>
+                <a:latin typeface="Segoe UI"/>
+              </a:rPr>
+              <a:t>do dokończenia</a:t>
+            </a:r>
+          </a:p>
+        </p:txBody>
+      </p:sp>
+      <p:sp>
+        <p:nvSpPr>
+          <p:cNvPr id="6" name="TextBox 5"/>
+          <p:cNvSpPr txBox="1"/>
+          <p:nvPr/>
+        </p:nvSpPr>
+        <p:spPr>
+          <a:xfrm>
+            <a:off x="548640" y="1371600"/>
+            <a:ext cx="11155680" cy="4206240"/>
+          </a:xfrm>
+          <a:prstGeom prst="rect">
+            <a:avLst/>
+          </a:prstGeom>
+          <a:noFill/>
+        </p:spPr>
+        <p:txBody>
+          <a:bodyPr wrap="square">
+            <a:spAutoFit/>
+          </a:bodyPr>
+          <a:lstStyle/>
+          <a:p>
+            <a:r>
+              <a:rPr sz="1600" b="1">
                 <a:solidFill>
                   <a:srgbClr val="1A1A2E"/>
                 </a:solidFill>
                 <a:latin typeface="Segoe UI"/>
               </a:rPr>
-              <a:t>• Najwięcej zdarzeń: Ukraina, Indie, Syria (Q1)</a:t>
-            </a:r>
-          </a:p>
-          <a:p>
-            <a:pPr/>
-            <a:r>
-              <a:rPr sz="1800" b="0">
+              <a:t>• Dashboard (pierwsza strona): 4 karty KPI + trend + struktura + slicery + przyciski nawigacji</a:t>
+            </a:r>
+          </a:p>
+          <a:p>
+            <a:r>
+              <a:rPr sz="1600" b="0">
                 <a:solidFill>
                   <a:srgbClr val="1A1A2E"/>
                 </a:solidFill>
                 <a:latin typeface="Segoe UI"/>
               </a:rPr>
-              <a:t>• Największa eskalacja YoY: Ukraina 2022 (+35 tys. — inwazja), Birma 2021 (+17 tys. — pucz) (Q11)</a:t>
-            </a:r>
-          </a:p>
-          <a:p>
-            <a:pPr/>
-            <a:r>
-              <a:rPr sz="1800" b="1">
+              <a:t>• 7 stron = 12 pytań: mapa, słupkowe Top N, liniowe z legendą, macierz-heatmapa, punktowy, tabele rankingowe</a:t>
+            </a:r>
+          </a:p>
+          <a:p>
+            <a:r>
+              <a:rPr sz="1600" b="0">
                 <a:solidFill>
                   <a:srgbClr val="1A1A2E"/>
                 </a:solidFill>
                 <a:latin typeface="Segoe UI"/>
               </a:rPr>
-              <a:t>• Per capita odwraca ranking: Palestyna z #10 → #1 (401 zdarzeń/100 tys.), Liban #2 (Q12)</a:t>
-            </a:r>
-          </a:p>
-          <a:p>
-            <a:pPr/>
-            <a:r>
-              <a:rPr sz="1800" b="0">
+              <a:t>• Mechaniki ze skryptu zajęć: slicery zsynchronizowane · drill-down · formatowanie warunkowe · interakcje</a:t>
+            </a:r>
+          </a:p>
+          <a:p>
+            <a:r>
+              <a:rPr sz="1600" b="0">
                 <a:solidFill>
                   <a:srgbClr val="1A1A2E"/>
                 </a:solidFill>
                 <a:latin typeface="Segoe UI"/>
               </a:rPr>
-              <a:t>• Najkrwawsza interakcja: Państwo–Rebelianci — 612 tys. ofiar (Q8)</a:t>
-            </a:r>
-          </a:p>
-          <a:p>
-            <a:pPr/>
-            <a:r>
-              <a:rPr sz="1800" b="0">
+              <a:t>• Zasady wizualizacji (wykład 8): słupki od zera, oś czasu chronologicznie, bez 3D</a:t>
+            </a:r>
+          </a:p>
+          <a:p>
+            <a:r>
+              <a:rPr sz="1600" b="1">
                 <a:solidFill>
                   <a:srgbClr val="1A1A2E"/>
                 </a:solidFill>
                 <a:latin typeface="Segoe UI"/>
               </a:rPr>
-              <a:t>• Celowanie w cywilów: najwyższy odsetek Afryka Środkowa ~38%; globalnie ~16% zdarzeń (Q9)</a:t>
-            </a:r>
-          </a:p>
-          <a:p>
-            <a:pPr/>
-            <a:r>
-              <a:rPr sz="1800" b="0">
-                <a:solidFill>
-                  <a:srgbClr val="1A1A2E"/>
-                </a:solidFill>
-                <a:latin typeface="Segoe UI"/>
-              </a:rPr>
-              <a:t>• Sezonowość: szczyty marzec–czerwiec; grudzień najmniej zdarzeń, ale wysokie ofiary (Q4)</a:t>
-            </a:r>
-          </a:p>
-          <a:p>
-            <a:pPr/>
-            <a:r>
-              <a:rPr sz="1800" b="0">
-                <a:solidFill>
-                  <a:srgbClr val="1A1A2E"/>
-                </a:solidFill>
-                <a:latin typeface="Segoe UI"/>
-              </a:rPr>
-              <a:t>• Protesty pokojowe : przemoc ≈ 8:1, rosnący udział protestów od 2019 (Q6)</a:t>
+              <a:t>• Przykładowe odpowiedzi już z SQL: Ukraina 2022 +35 tys. (inwazja) · Palestyna #10→#1 per capita · Państwo–Rebelianci 612 tys. ofiar · Afryka Środkowa ~38% celowania w cywilów</a:t>
+            </a:r>
+          </a:p>
+        </p:txBody>
+      </p:sp>
+      <p:sp>
+        <p:nvSpPr>
+          <p:cNvPr id="7" name="Rectangle 6"/>
+          <p:cNvSpPr/>
+          <p:nvPr/>
+        </p:nvSpPr>
+        <p:spPr>
+          <a:xfrm>
+            <a:off x="457200" y="5806440"/>
+            <a:ext cx="11277295" cy="777240"/>
+          </a:xfrm>
+          <a:prstGeom prst="rect">
+            <a:avLst/>
+          </a:prstGeom>
+          <a:solidFill>
+            <a:srgbClr val="FFFFFF"/>
+          </a:solidFill>
+          <a:ln w="19050">
+            <a:solidFill>
+              <a:srgbClr val="A50F15"/>
+            </a:solidFill>
+          </a:ln>
+        </p:spPr>
+        <p:style>
+          <a:lnRef idx="1">
+            <a:schemeClr val="accent1"/>
+          </a:lnRef>
+          <a:fillRef idx="3">
+            <a:schemeClr val="accent1"/>
+          </a:fillRef>
+          <a:effectRef idx="2">
+            <a:schemeClr val="accent1"/>
+          </a:effectRef>
+          <a:fontRef idx="minor">
+            <a:schemeClr val="lt1"/>
+          </a:fontRef>
+        </p:style>
+        <p:txBody>
+          <a:bodyPr rtlCol="0" anchor="ctr" wrap="square"/>
+          <a:lstStyle/>
+          <a:p>
+            <a:pPr algn="ctr"/>
+            <a:r>
+              <a:rPr sz="1500" b="1">
+                <a:solidFill>
+                  <a:srgbClr val="A50F15"/>
+                </a:solidFill>
+                <a:latin typeface="Segoe UI"/>
+              </a:rPr>
+              <a:t>PYTANIE DO PANI:  czy taki układ raportu (dashboard + strona per pytanie) odpowiada oczekiwaniom?</a:t>
             </a:r>
           </a:p>
         </p:txBody>
@@ -3988,8 +4210,8 @@
         </p:nvSpPr>
         <p:spPr>
           <a:xfrm>
-            <a:off x="457200" y="320040"/>
-            <a:ext cx="11277295" cy="640080"/>
+            <a:off x="457200" y="292608"/>
+            <a:ext cx="8899855" cy="640080"/>
           </a:xfrm>
           <a:prstGeom prst="rect">
             <a:avLst/>
@@ -4004,27 +4226,79 @@
           <a:p>
             <a:pPr algn="l"/>
             <a:r>
-              <a:rPr sz="3000" b="1">
+              <a:rPr sz="2800" b="1">
                 <a:solidFill>
                   <a:srgbClr val="1F6F8B"/>
                 </a:solidFill>
                 <a:latin typeface="Segoe UI"/>
               </a:rPr>
-              <a:t>Podsumowanie</a:t>
-            </a:r>
-          </a:p>
-        </p:txBody>
-      </p:sp>
-      <p:sp>
-        <p:nvSpPr>
-          <p:cNvPr id="4" name="TextBox 3"/>
+              <a:t>Jakość danych — co znaleźliśmy i naprawiliśmy</a:t>
+            </a:r>
+          </a:p>
+        </p:txBody>
+      </p:sp>
+      <p:sp>
+        <p:nvSpPr>
+          <p:cNvPr id="4" name="Rectangle 3"/>
+          <p:cNvSpPr/>
+          <p:nvPr/>
+        </p:nvSpPr>
+        <p:spPr>
+          <a:xfrm>
+            <a:off x="9448495" y="292608"/>
+            <a:ext cx="2286000" cy="502920"/>
+          </a:xfrm>
+          <a:prstGeom prst="rect">
+            <a:avLst/>
+          </a:prstGeom>
+          <a:solidFill>
+            <a:srgbClr val="E08E45"/>
+          </a:solidFill>
+          <a:ln>
+            <a:noFill/>
+          </a:ln>
+        </p:spPr>
+        <p:style>
+          <a:lnRef idx="1">
+            <a:schemeClr val="accent1"/>
+          </a:lnRef>
+          <a:fillRef idx="3">
+            <a:schemeClr val="accent1"/>
+          </a:fillRef>
+          <a:effectRef idx="2">
+            <a:schemeClr val="accent1"/>
+          </a:effectRef>
+          <a:fontRef idx="minor">
+            <a:schemeClr val="lt1"/>
+          </a:fontRef>
+        </p:style>
+        <p:txBody>
+          <a:bodyPr rtlCol="0" anchor="ctr"/>
+          <a:lstStyle/>
+          <a:p>
+            <a:pPr algn="ctr"/>
+            <a:r>
+              <a:rPr sz="1500" b="1">
+                <a:solidFill>
+                  <a:srgbClr val="FFFFFF"/>
+                </a:solidFill>
+                <a:latin typeface="Segoe UI"/>
+              </a:rPr>
+              <a:t>bonus</a:t>
+            </a:r>
+          </a:p>
+        </p:txBody>
+      </p:sp>
+      <p:sp>
+        <p:nvSpPr>
+          <p:cNvPr id="5" name="TextBox 4"/>
           <p:cNvSpPr txBox="1"/>
           <p:nvPr/>
         </p:nvSpPr>
         <p:spPr>
           <a:xfrm>
-            <a:off x="548640" y="1371600"/>
-            <a:ext cx="11155680" cy="4206240"/>
+            <a:off x="548640" y="1280160"/>
+            <a:ext cx="11155680" cy="4572000"/>
           </a:xfrm>
           <a:prstGeom prst="rect">
             <a:avLst/>
@@ -4037,89 +4311,152 @@
           </a:bodyPr>
           <a:lstStyle/>
           <a:p>
-            <a:pPr/>
-            <a:r>
-              <a:rPr sz="1800" b="1">
+            <a:r>
+              <a:rPr sz="1600" b="1">
                 <a:solidFill>
                   <a:srgbClr val="1A1A2E"/>
                 </a:solidFill>
                 <a:latin typeface="Segoe UI"/>
               </a:rPr>
-              <a:t>• Kompletny lakehouse: API → bronze → silver → gold → gwiazda → Power BI</a:t>
-            </a:r>
-          </a:p>
-          <a:p>
-            <a:pPr/>
-            <a:r>
-              <a:rPr sz="1800" b="0">
+              <a:t>• Cudzysłowy w CSV psuły kolumny liczbowe przy odczycie przez Athenę — suma ofiar 7× zaniżona (324 tys. zamiast 2,35 mln)</a:t>
+            </a:r>
+          </a:p>
+          <a:p>
+            <a:r>
+              <a:rPr sz="1400" b="0">
+                <a:solidFill>
+                  <a:srgbClr val="6B6B7B"/>
+                </a:solidFill>
+                <a:latin typeface="Segoe UI"/>
+              </a:rPr>
+              <a:t>   – wykryte rekoncyliacją dwóch niezależnych ścieżek liczenia; fix: odczyt z Parquet silvera</a:t>
+            </a:r>
+          </a:p>
+          <a:p>
+            <a:r>
+              <a:rPr sz="1600" b="0">
                 <a:solidFill>
                   <a:srgbClr val="1A1A2E"/>
                 </a:solidFill>
                 <a:latin typeface="Segoe UI"/>
               </a:rPr>
-              <a:t>• ETL zautomatyzowany (Airflow), idempotentny, samowalidujący się — uruchamialny na żywo</a:t>
-            </a:r>
-          </a:p>
-          <a:p>
-            <a:pPr/>
-            <a:r>
-              <a:rPr sz="1800" b="0">
+              <a:t>• Cast interaction→INT w jobie Spark kasował kolumnę (etykieta tekstowa) — obejście: hybryda z bronze</a:t>
+            </a:r>
+          </a:p>
+          <a:p>
+            <a:r>
+              <a:rPr sz="1600" b="0">
                 <a:solidFill>
                   <a:srgbClr val="1A1A2E"/>
                 </a:solidFill>
                 <a:latin typeface="Segoe UI"/>
               </a:rPr>
-              <a:t>• Czysty schemat gwiazdy: klucze sztuczne, fakt = klucze+miary, Unknown za pseudo-nulle</a:t>
-            </a:r>
-          </a:p>
-          <a:p>
-            <a:pPr/>
-            <a:r>
-              <a:rPr sz="1800" b="0">
+              <a:t>• Pseudo-nulle („") → wiersz Unknown(−1); dziurawy kalendarz → ciągły sequence(); 12 błędów łącznie</a:t>
+            </a:r>
+          </a:p>
+          <a:p>
+            <a:r>
+              <a:rPr sz="1600" b="1">
                 <a:solidFill>
                   <a:srgbClr val="1A1A2E"/>
                 </a:solidFill>
                 <a:latin typeface="Segoe UI"/>
               </a:rPr>
-              <a:t>• Warstwa semantyczna: 15 miar DAX, hierarchie, jeden model = 12 pytań</a:t>
-            </a:r>
-          </a:p>
-          <a:p>
-            <a:pPr/>
-            <a:r>
-              <a:rPr sz="1800" b="0">
+              <a:t>• Wniosek: walidacja automatyczna po każdym runie — liczba zdarzeń ORAZ suma miary, między warstwami</a:t>
+            </a:r>
+          </a:p>
+          <a:p>
+            <a:r>
+              <a:rPr sz="1600" b="0">
                 <a:solidFill>
                   <a:srgbClr val="1A1A2E"/>
                 </a:solidFill>
                 <a:latin typeface="Segoe UI"/>
               </a:rPr>
-              <a:t>• Jakość danych: wykryte i naprawione realne bugi produkcyjne (SerDe, casty, pseudo-nulle)</a:t>
-            </a:r>
-          </a:p>
-          <a:p>
-            <a:pPr/>
-            <a:r>
-              <a:rPr sz="1800" b="0">
-                <a:solidFill>
-                  <a:srgbClr val="1A1A2E"/>
-                </a:solidFill>
-                <a:latin typeface="Segoe UI"/>
-              </a:rPr>
-              <a:t>• Wszystko w repozytorium: kod, SQL, DAG-i, dokumentacja, tabela mapowań, screeny</a:t>
-            </a:r>
-          </a:p>
-        </p:txBody>
-      </p:sp>
-      <p:sp>
-        <p:nvSpPr>
-          <p:cNvPr id="5" name="TextBox 4"/>
+              <a:t>• Dane żywe: świeży ingest (2.07) dodał +198 zdarzeń — pipeline przetrawił bez zmiany linii kodu</a:t>
+            </a:r>
+          </a:p>
+        </p:txBody>
+      </p:sp>
+    </p:spTree>
+  </p:cSld>
+  <p:clrMapOvr>
+    <a:masterClrMapping/>
+  </p:clrMapOvr>
+</p:sld>
+</file>
+
+<file path=ppt/slides/slide13.xml><?xml version="1.0" encoding="utf-8"?>
+<p:sld xmlns:a="http://schemas.openxmlformats.org/drawingml/2006/main" xmlns:p="http://schemas.openxmlformats.org/presentationml/2006/main" xmlns:r="http://schemas.openxmlformats.org/officeDocument/2006/relationships">
+  <p:cSld>
+    <p:bg>
+      <p:bgPr>
+        <a:solidFill>
+          <a:srgbClr val="F7F7F5"/>
+        </a:solidFill>
+        <a:effectLst/>
+      </p:bgPr>
+    </p:bg>
+    <p:spTree>
+      <p:nvGrpSpPr>
+        <p:cNvPr id="1" name=""/>
+        <p:cNvGrpSpPr/>
+        <p:nvPr/>
+      </p:nvGrpSpPr>
+      <p:grpSpPr/>
+      <p:sp>
+        <p:nvSpPr>
+          <p:cNvPr id="2" name="Rectangle 1"/>
+          <p:cNvSpPr/>
+          <p:nvPr/>
+        </p:nvSpPr>
+        <p:spPr>
+          <a:xfrm>
+            <a:off x="0" y="0"/>
+            <a:ext cx="12191695" cy="164592"/>
+          </a:xfrm>
+          <a:prstGeom prst="rect">
+            <a:avLst/>
+          </a:prstGeom>
+          <a:solidFill>
+            <a:srgbClr val="1F6F8B"/>
+          </a:solidFill>
+          <a:ln>
+            <a:noFill/>
+          </a:ln>
+        </p:spPr>
+        <p:style>
+          <a:lnRef idx="1">
+            <a:schemeClr val="accent1"/>
+          </a:lnRef>
+          <a:fillRef idx="3">
+            <a:schemeClr val="accent1"/>
+          </a:fillRef>
+          <a:effectRef idx="2">
+            <a:schemeClr val="accent1"/>
+          </a:effectRef>
+          <a:fontRef idx="minor">
+            <a:schemeClr val="lt1"/>
+          </a:fontRef>
+        </p:style>
+        <p:txBody>
+          <a:bodyPr rtlCol="0" anchor="ctr"/>
+          <a:lstStyle/>
+          <a:p>
+            <a:pPr algn="ctr"/>
+          </a:p>
+        </p:txBody>
+      </p:sp>
+      <p:sp>
+        <p:nvSpPr>
+          <p:cNvPr id="3" name="TextBox 2"/>
           <p:cNvSpPr txBox="1"/>
           <p:nvPr/>
         </p:nvSpPr>
         <p:spPr>
           <a:xfrm>
-            <a:off x="548640" y="5760720"/>
-            <a:ext cx="10972800" cy="548640"/>
+            <a:off x="457200" y="292608"/>
+            <a:ext cx="8899855" cy="640080"/>
           </a:xfrm>
           <a:prstGeom prst="rect">
             <a:avLst/>
@@ -4134,13 +4471,383 @@
           <a:p>
             <a:pPr algn="l"/>
             <a:r>
-              <a:rPr sz="2200" b="1">
+              <a:rPr sz="2800" b="1">
                 <a:solidFill>
                   <a:srgbClr val="1F6F8B"/>
                 </a:solidFill>
                 <a:latin typeface="Segoe UI"/>
               </a:rPr>
-              <a:t>Dziękujemy — zapraszamy do pytań i demo.</a:t>
+              <a:t>Pytania, na które potrzebujemy Pani decyzji</a:t>
+            </a:r>
+          </a:p>
+        </p:txBody>
+      </p:sp>
+      <p:sp>
+        <p:nvSpPr>
+          <p:cNvPr id="4" name="Rectangle 3"/>
+          <p:cNvSpPr/>
+          <p:nvPr/>
+        </p:nvSpPr>
+        <p:spPr>
+          <a:xfrm>
+            <a:off x="9448495" y="292608"/>
+            <a:ext cx="2286000" cy="502920"/>
+          </a:xfrm>
+          <a:prstGeom prst="rect">
+            <a:avLst/>
+          </a:prstGeom>
+          <a:solidFill>
+            <a:srgbClr val="E08E45"/>
+          </a:solidFill>
+          <a:ln>
+            <a:noFill/>
+          </a:ln>
+        </p:spPr>
+        <p:style>
+          <a:lnRef idx="1">
+            <a:schemeClr val="accent1"/>
+          </a:lnRef>
+          <a:fillRef idx="3">
+            <a:schemeClr val="accent1"/>
+          </a:fillRef>
+          <a:effectRef idx="2">
+            <a:schemeClr val="accent1"/>
+          </a:effectRef>
+          <a:fontRef idx="minor">
+            <a:schemeClr val="lt1"/>
+          </a:fontRef>
+        </p:style>
+        <p:txBody>
+          <a:bodyPr rtlCol="0" anchor="ctr"/>
+          <a:lstStyle/>
+          <a:p>
+            <a:pPr algn="ctr"/>
+            <a:r>
+              <a:rPr sz="1500" b="1">
+                <a:solidFill>
+                  <a:srgbClr val="FFFFFF"/>
+                </a:solidFill>
+                <a:latin typeface="Segoe UI"/>
+              </a:rPr>
+              <a:t>PROSIMY O FEEDBACK</a:t>
+            </a:r>
+          </a:p>
+        </p:txBody>
+      </p:sp>
+      <p:sp>
+        <p:nvSpPr>
+          <p:cNvPr id="5" name="TextBox 4"/>
+          <p:cNvSpPr txBox="1"/>
+          <p:nvPr/>
+        </p:nvSpPr>
+        <p:spPr>
+          <a:xfrm>
+            <a:off x="548640" y="1280160"/>
+            <a:ext cx="11155680" cy="4937760"/>
+          </a:xfrm>
+          <a:prstGeom prst="rect">
+            <a:avLst/>
+          </a:prstGeom>
+          <a:noFill/>
+        </p:spPr>
+        <p:txBody>
+          <a:bodyPr wrap="square">
+            <a:spAutoFit/>
+          </a:bodyPr>
+          <a:lstStyle/>
+          <a:p>
+            <a:r>
+              <a:rPr sz="1700" b="1">
+                <a:solidFill>
+                  <a:srgbClr val="1A1A2E"/>
+                </a:solidFill>
+                <a:latin typeface="Segoe UI"/>
+              </a:rPr>
+              <a:t>• 1. Czy SCHEMAT GWIAZDY jest poprawny? (kluczowe — prosimy o formalne „sprawdzenie schematu")</a:t>
+            </a:r>
+          </a:p>
+          <a:p>
+            <a:r>
+              <a:rPr sz="1700" b="0">
+                <a:solidFill>
+                  <a:srgbClr val="1A1A2E"/>
+                </a:solidFill>
+                <a:latin typeface="Segoe UI"/>
+              </a:rPr>
+              <a:t>• 2. Stack: Airflow + Athena/S3 + model Power BI zamiast SSIS/SSAS/SSRS — akceptowalny?</a:t>
+            </a:r>
+          </a:p>
+          <a:p>
+            <a:r>
+              <a:rPr sz="1700" b="0">
+                <a:solidFill>
+                  <a:srgbClr val="1A1A2E"/>
+                </a:solidFill>
+                <a:latin typeface="Segoe UI"/>
+              </a:rPr>
+              <a:t>• 3. event_id_cnty jako wymiar zdegenerowany — dopuszczalny? (liczność = liczności faktu)</a:t>
+            </a:r>
+          </a:p>
+          <a:p>
+            <a:r>
+              <a:rPr sz="1700" b="0">
+                <a:solidFill>
+                  <a:srgbClr val="1A1A2E"/>
+                </a:solidFill>
+                <a:latin typeface="Segoe UI"/>
+              </a:rPr>
+              <a:t>• 4. Klucz iso_year (iso·10000+rok) dla populacji — czy woli Pani inne rozwiązanie klucza złożonego?</a:t>
+            </a:r>
+          </a:p>
+          <a:p>
+            <a:r>
+              <a:rPr sz="1700" b="0">
+                <a:solidFill>
+                  <a:srgbClr val="1A1A2E"/>
+                </a:solidFill>
+                <a:latin typeface="Segoe UI"/>
+              </a:rPr>
+              <a:t>• 5. Rejestrowanie historii: SCD typ 1 (nadpisanie) + rejestr usunięć — wystarczające uzasadnienie?</a:t>
+            </a:r>
+          </a:p>
+          <a:p>
+            <a:r>
+              <a:rPr sz="1700" b="0">
+                <a:solidFill>
+                  <a:srgbClr val="1A1A2E"/>
+                </a:solidFill>
+                <a:latin typeface="Segoe UI"/>
+              </a:rPr>
+              <a:t>• 6. Rok 2025 jest niepełny (dane do czerwca) — jak prezentować YoY?</a:t>
+            </a:r>
+          </a:p>
+          <a:p>
+            <a:r>
+              <a:rPr sz="1700" b="0">
+                <a:solidFill>
+                  <a:srgbClr val="1A1A2E"/>
+                </a:solidFill>
+                <a:latin typeface="Segoe UI"/>
+              </a:rPr>
+              <a:t>• 7. Per capita: brak populacji dla Kosowa (brak kodu ISO numeric, 0,4% zdarzeń) — akceptowalna luka?</a:t>
+            </a:r>
+          </a:p>
+          <a:p>
+            <a:r>
+              <a:rPr sz="1700" b="0">
+                <a:solidFill>
+                  <a:srgbClr val="1A1A2E"/>
+                </a:solidFill>
+                <a:latin typeface="Segoe UI"/>
+              </a:rPr>
+              <a:t>• 8. Czy forma dowodów (screeny z Airflow) i tabeli mapowań odpowiada wymaganiom zadań?</a:t>
+            </a:r>
+          </a:p>
+        </p:txBody>
+      </p:sp>
+    </p:spTree>
+  </p:cSld>
+  <p:clrMapOvr>
+    <a:masterClrMapping/>
+  </p:clrMapOvr>
+</p:sld>
+</file>
+
+<file path=ppt/slides/slide14.xml><?xml version="1.0" encoding="utf-8"?>
+<p:sld xmlns:a="http://schemas.openxmlformats.org/drawingml/2006/main" xmlns:p="http://schemas.openxmlformats.org/presentationml/2006/main" xmlns:r="http://schemas.openxmlformats.org/officeDocument/2006/relationships">
+  <p:cSld>
+    <p:bg>
+      <p:bgPr>
+        <a:solidFill>
+          <a:srgbClr val="F7F7F5"/>
+        </a:solidFill>
+        <a:effectLst/>
+      </p:bgPr>
+    </p:bg>
+    <p:spTree>
+      <p:nvGrpSpPr>
+        <p:cNvPr id="1" name=""/>
+        <p:cNvGrpSpPr/>
+        <p:nvPr/>
+      </p:nvGrpSpPr>
+      <p:grpSpPr/>
+      <p:sp>
+        <p:nvSpPr>
+          <p:cNvPr id="2" name="Rectangle 1"/>
+          <p:cNvSpPr/>
+          <p:nvPr/>
+        </p:nvSpPr>
+        <p:spPr>
+          <a:xfrm>
+            <a:off x="0" y="0"/>
+            <a:ext cx="12191695" cy="164592"/>
+          </a:xfrm>
+          <a:prstGeom prst="rect">
+            <a:avLst/>
+          </a:prstGeom>
+          <a:solidFill>
+            <a:srgbClr val="1F6F8B"/>
+          </a:solidFill>
+          <a:ln>
+            <a:noFill/>
+          </a:ln>
+        </p:spPr>
+        <p:style>
+          <a:lnRef idx="1">
+            <a:schemeClr val="accent1"/>
+          </a:lnRef>
+          <a:fillRef idx="3">
+            <a:schemeClr val="accent1"/>
+          </a:fillRef>
+          <a:effectRef idx="2">
+            <a:schemeClr val="accent1"/>
+          </a:effectRef>
+          <a:fontRef idx="minor">
+            <a:schemeClr val="lt1"/>
+          </a:fontRef>
+        </p:style>
+        <p:txBody>
+          <a:bodyPr rtlCol="0" anchor="ctr"/>
+          <a:lstStyle/>
+          <a:p>
+            <a:pPr algn="ctr"/>
+          </a:p>
+        </p:txBody>
+      </p:sp>
+      <p:sp>
+        <p:nvSpPr>
+          <p:cNvPr id="3" name="TextBox 2"/>
+          <p:cNvSpPr txBox="1"/>
+          <p:nvPr/>
+        </p:nvSpPr>
+        <p:spPr>
+          <a:xfrm>
+            <a:off x="457200" y="292608"/>
+            <a:ext cx="8899855" cy="640080"/>
+          </a:xfrm>
+          <a:prstGeom prst="rect">
+            <a:avLst/>
+          </a:prstGeom>
+          <a:noFill/>
+        </p:spPr>
+        <p:txBody>
+          <a:bodyPr wrap="square">
+            <a:spAutoFit/>
+          </a:bodyPr>
+          <a:lstStyle/>
+          <a:p>
+            <a:pPr algn="l"/>
+            <a:r>
+              <a:rPr sz="2800" b="1">
+                <a:solidFill>
+                  <a:srgbClr val="1F6F8B"/>
+                </a:solidFill>
+                <a:latin typeface="Segoe UI"/>
+              </a:rPr>
+              <a:t>Podsumowanie stanu</a:t>
+            </a:r>
+          </a:p>
+        </p:txBody>
+      </p:sp>
+      <p:sp>
+        <p:nvSpPr>
+          <p:cNvPr id="4" name="TextBox 3"/>
+          <p:cNvSpPr txBox="1"/>
+          <p:nvPr/>
+        </p:nvSpPr>
+        <p:spPr>
+          <a:xfrm>
+            <a:off x="548640" y="1371600"/>
+            <a:ext cx="11155680" cy="3291840"/>
+          </a:xfrm>
+          <a:prstGeom prst="rect">
+            <a:avLst/>
+          </a:prstGeom>
+          <a:noFill/>
+        </p:spPr>
+        <p:txBody>
+          <a:bodyPr wrap="square">
+            <a:spAutoFit/>
+          </a:bodyPr>
+          <a:lstStyle/>
+          <a:p>
+            <a:r>
+              <a:rPr sz="1800" b="1">
+                <a:solidFill>
+                  <a:srgbClr val="1A1A2E"/>
+                </a:solidFill>
+                <a:latin typeface="Segoe UI"/>
+              </a:rPr>
+              <a:t>• GOTOWE: pipeline E2E (żywy, walidowany) · gwiazda · model semantyczny · mapowania · screeny · dokumentacja</a:t>
+            </a:r>
+          </a:p>
+          <a:p>
+            <a:r>
+              <a:rPr sz="1800" b="1">
+                <a:solidFill>
+                  <a:srgbClr val="1A1A2E"/>
+                </a:solidFill>
+                <a:latin typeface="Segoe UI"/>
+              </a:rPr>
+              <a:t>• W TRAKCIE: strony raportu w Power BI (model już stoi — zostało klikanie wykresów)</a:t>
+            </a:r>
+          </a:p>
+          <a:p>
+            <a:r>
+              <a:rPr sz="1800" b="0">
+                <a:solidFill>
+                  <a:srgbClr val="1A1A2E"/>
+                </a:solidFill>
+                <a:latin typeface="Segoe UI"/>
+              </a:rPr>
+              <a:t>• Wszystko w repozytorium — kod, SQL, DAG-i, diagramy, dowody</a:t>
+            </a:r>
+          </a:p>
+        </p:txBody>
+      </p:sp>
+      <p:sp>
+        <p:nvSpPr>
+          <p:cNvPr id="5" name="TextBox 4"/>
+          <p:cNvSpPr txBox="1"/>
+          <p:nvPr/>
+        </p:nvSpPr>
+        <p:spPr>
+          <a:xfrm>
+            <a:off x="548640" y="4937760"/>
+            <a:ext cx="10972800" cy="914400"/>
+          </a:xfrm>
+          <a:prstGeom prst="rect">
+            <a:avLst/>
+          </a:prstGeom>
+          <a:noFill/>
+        </p:spPr>
+        <p:txBody>
+          <a:bodyPr wrap="square">
+            <a:spAutoFit/>
+          </a:bodyPr>
+          <a:lstStyle/>
+          <a:p>
+            <a:pPr algn="l"/>
+            <a:r>
+              <a:rPr sz="2000" b="1">
+                <a:solidFill>
+                  <a:srgbClr val="1F6F8B"/>
+                </a:solidFill>
+                <a:latin typeface="Segoe UI"/>
+              </a:rPr>
+              <a:t>Chętnie pokażemy wszystko na żywo (Airflow / Athena / Power BI)</a:t>
+            </a:r>
+          </a:p>
+          <a:p>
+            <a:pPr algn="l"/>
+            <a:r>
+              <a:rPr sz="2000" b="1">
+                <a:solidFill>
+                  <a:srgbClr val="1F6F8B"/>
+                </a:solidFill>
+                <a:latin typeface="Segoe UI"/>
+              </a:rPr>
+              <a:t>i prosimy o wskazanie, co poprawić przed oddaniem.</a:t>
             </a:r>
           </a:p>
         </p:txBody>
@@ -4222,8 +4929,8 @@
         </p:nvSpPr>
         <p:spPr>
           <a:xfrm>
-            <a:off x="457200" y="320040"/>
-            <a:ext cx="11277295" cy="640080"/>
+            <a:off x="457200" y="292608"/>
+            <a:ext cx="8899855" cy="640080"/>
           </a:xfrm>
           <a:prstGeom prst="rect">
             <a:avLst/>
@@ -4238,13 +4945,13 @@
           <a:p>
             <a:pPr algn="l"/>
             <a:r>
-              <a:rPr sz="3000" b="1">
+              <a:rPr sz="2800" b="1">
                 <a:solidFill>
                   <a:srgbClr val="1F6F8B"/>
                 </a:solidFill>
                 <a:latin typeface="Segoe UI"/>
               </a:rPr>
-              <a:t>Temat i dane źródłowe</a:t>
+              <a:t>Mapa wymagań — co pokażemy po kolei</a:t>
             </a:r>
           </a:p>
         </p:txBody>
@@ -4257,8 +4964,8 @@
         </p:nvSpPr>
         <p:spPr>
           <a:xfrm>
-            <a:off x="457200" y="914400"/>
-            <a:ext cx="11277295" cy="365760"/>
+            <a:off x="548640" y="1371600"/>
+            <a:ext cx="4206240" cy="457200"/>
           </a:xfrm>
           <a:prstGeom prst="rect">
             <a:avLst/>
@@ -4273,13 +4980,13 @@
           <a:p>
             <a:pPr algn="l"/>
             <a:r>
-              <a:rPr sz="1400" b="0">
-                <a:solidFill>
-                  <a:srgbClr val="6B6B7B"/>
-                </a:solidFill>
-                <a:latin typeface="Segoe UI"/>
-              </a:rPr>
-              <a:t>dane realne, NIE generowane</a:t>
+              <a:rPr sz="1700" b="1">
+                <a:solidFill>
+                  <a:srgbClr val="1A1A2E"/>
+                </a:solidFill>
+                <a:latin typeface="Segoe UI"/>
+              </a:rPr>
+              <a:t>1. Pytania biznesowe (7–12)</a:t>
             </a:r>
           </a:p>
         </p:txBody>
@@ -4292,8 +4999,8 @@
         </p:nvSpPr>
         <p:spPr>
           <a:xfrm>
-            <a:off x="548640" y="1280160"/>
-            <a:ext cx="6035040" cy="4937760"/>
+            <a:off x="4846320" y="1371600"/>
+            <a:ext cx="5486400" cy="457200"/>
           </a:xfrm>
           <a:prstGeom prst="rect">
             <a:avLst/>
@@ -4306,182 +5013,29 @@
           </a:bodyPr>
           <a:lstStyle/>
           <a:p>
-            <a:pPr/>
-            <a:r>
-              <a:rPr sz="1800" b="1">
-                <a:solidFill>
-                  <a:srgbClr val="1A1A2E"/>
-                </a:solidFill>
-                <a:latin typeface="Segoe UI"/>
-              </a:rPr>
-              <a:t>• ACLED — Armed Conflict Location &amp; Event Data</a:t>
-            </a:r>
-          </a:p>
-          <a:p>
-            <a:pPr/>
-            <a:r>
-              <a:rPr sz="1600" b="0">
+            <a:pPr algn="l"/>
+            <a:r>
+              <a:rPr sz="1500" b="0">
                 <a:solidFill>
                   <a:srgbClr val="6B6B7B"/>
                 </a:solidFill>
                 <a:latin typeface="Segoe UI"/>
               </a:rPr>
-              <a:t>   – ekspercki rejestr zdarzeń konfliktowych: bitwy, protesty, zamieszki, przemoc wobec cywilów</a:t>
-            </a:r>
-          </a:p>
-          <a:p>
-            <a:pPr/>
-            <a:r>
-              <a:rPr sz="1600" b="0">
-                <a:solidFill>
-                  <a:srgbClr val="6B6B7B"/>
-                </a:solidFill>
-                <a:latin typeface="Segoe UI"/>
-              </a:rPr>
-              <a:t>   – pobierane z oficjalnego API (OAuth, paginacja, ładowanie przyrostowe)</a:t>
-            </a:r>
-          </a:p>
-          <a:p>
-            <a:pPr/>
-            <a:r>
-              <a:rPr sz="1600" b="0">
-                <a:solidFill>
-                  <a:srgbClr val="6B6B7B"/>
-                </a:solidFill>
-                <a:latin typeface="Segoe UI"/>
-              </a:rPr>
-              <a:t>   – 2 669 294 zdarzeń po deduplikacji  ·  1997–2025  ·  cały świat</a:t>
-            </a:r>
-          </a:p>
-          <a:p>
-            <a:pPr/>
-            <a:r>
-              <a:rPr sz="1800" b="1">
-                <a:solidFill>
-                  <a:srgbClr val="1A1A2E"/>
-                </a:solidFill>
-                <a:latin typeface="Segoe UI"/>
-              </a:rPr>
-              <a:t>• World Bank — SP.POP.TOTL (populacja)</a:t>
-            </a:r>
-          </a:p>
-          <a:p>
-            <a:pPr/>
-            <a:r>
-              <a:rPr sz="1600" b="0">
-                <a:solidFill>
-                  <a:srgbClr val="6B6B7B"/>
-                </a:solidFill>
-                <a:latin typeface="Segoe UI"/>
-              </a:rPr>
-              <a:t>   – 215 krajów × 29 lat — do analiz per capita</a:t>
-            </a:r>
-          </a:p>
-          <a:p>
-            <a:pPr/>
-            <a:r>
-              <a:rPr sz="1600" b="0">
-                <a:solidFill>
-                  <a:srgbClr val="6B6B7B"/>
-                </a:solidFill>
-                <a:latin typeface="Segoe UI"/>
-              </a:rPr>
-              <a:t>   – klucz wspólny: ISO 3166-1 numeric (Ukraina = 804)</a:t>
-            </a:r>
-          </a:p>
-          <a:p>
-            <a:pPr/>
-            <a:r>
-              <a:rPr sz="1800" b="1">
-                <a:solidFill>
-                  <a:srgbClr val="1A1A2E"/>
-                </a:solidFill>
-                <a:latin typeface="Segoe UI"/>
-              </a:rPr>
-              <a:t>• Temat hurtowni: zdarzenia konfliktów zbrojnych</a:t>
-            </a:r>
-          </a:p>
-          <a:p>
-            <a:pPr/>
-            <a:r>
-              <a:rPr sz="1600" b="0">
-                <a:solidFill>
-                  <a:srgbClr val="6B6B7B"/>
-                </a:solidFill>
-                <a:latin typeface="Segoe UI"/>
-              </a:rPr>
-              <a:t>   – ziarnistość: jedno zdarzenie (fakt transakcyjny)</a:t>
-            </a:r>
-          </a:p>
-          <a:p>
-            <a:pPr/>
-            <a:r>
-              <a:rPr sz="1600" b="0">
-                <a:solidFill>
-                  <a:srgbClr val="6B6B7B"/>
-                </a:solidFill>
-                <a:latin typeface="Segoe UI"/>
-              </a:rPr>
-              <a:t>   – miary: fatalities (addytywna), flaga celowania w cywilów (0/1)</a:t>
-            </a:r>
-          </a:p>
-        </p:txBody>
-      </p:sp>
-      <p:sp>
-        <p:nvSpPr>
-          <p:cNvPr id="6" name="Rectangle 5"/>
-          <p:cNvSpPr/>
-          <p:nvPr/>
-        </p:nvSpPr>
-        <p:spPr>
-          <a:xfrm>
-            <a:off x="6949440" y="1463040"/>
-            <a:ext cx="4663440" cy="4206240"/>
-          </a:xfrm>
-          <a:prstGeom prst="rect">
-            <a:avLst/>
-          </a:prstGeom>
-          <a:solidFill>
-            <a:srgbClr val="FFFFFF"/>
-          </a:solidFill>
-          <a:ln>
-            <a:solidFill>
-              <a:srgbClr val="1F6F8B"/>
-            </a:solidFill>
-          </a:ln>
-        </p:spPr>
-        <p:style>
-          <a:lnRef idx="1">
-            <a:schemeClr val="accent1"/>
-          </a:lnRef>
-          <a:fillRef idx="3">
-            <a:schemeClr val="accent1"/>
-          </a:fillRef>
-          <a:effectRef idx="2">
-            <a:schemeClr val="accent1"/>
-          </a:effectRef>
-          <a:fontRef idx="minor">
-            <a:schemeClr val="lt1"/>
-          </a:fontRef>
-        </p:style>
-        <p:txBody>
-          <a:bodyPr rtlCol="0" anchor="ctr"/>
-          <a:lstStyle/>
-          <a:p>
-            <a:pPr algn="ctr"/>
-          </a:p>
-        </p:txBody>
-      </p:sp>
-      <p:sp>
-        <p:nvSpPr>
-          <p:cNvPr id="7" name="TextBox 6"/>
+              <a:t>12 pytań, wszystkie z odpowiedzią w danych</a:t>
+            </a:r>
+          </a:p>
+        </p:txBody>
+      </p:sp>
+      <p:sp>
+        <p:nvSpPr>
+          <p:cNvPr id="6" name="TextBox 5"/>
           <p:cNvSpPr txBox="1"/>
           <p:nvPr/>
         </p:nvSpPr>
         <p:spPr>
           <a:xfrm>
-            <a:off x="7223760" y="1737360"/>
-            <a:ext cx="4114800" cy="457200"/>
+            <a:off x="10424160" y="1371600"/>
+            <a:ext cx="1463040" cy="457200"/>
           </a:xfrm>
           <a:prstGeom prst="rect">
             <a:avLst/>
@@ -4496,27 +5050,27 @@
           <a:p>
             <a:pPr algn="l"/>
             <a:r>
-              <a:rPr sz="1800" b="1">
+              <a:rPr sz="1400" b="0">
                 <a:solidFill>
                   <a:srgbClr val="1F6F8B"/>
                 </a:solidFill>
                 <a:latin typeface="Segoe UI"/>
               </a:rPr>
-              <a:t>Liczby do zapamiętania</a:t>
-            </a:r>
-          </a:p>
-        </p:txBody>
-      </p:sp>
-      <p:sp>
-        <p:nvSpPr>
-          <p:cNvPr id="8" name="TextBox 7"/>
+              <a:t>slajd 3</a:t>
+            </a:r>
+          </a:p>
+        </p:txBody>
+      </p:sp>
+      <p:sp>
+        <p:nvSpPr>
+          <p:cNvPr id="7" name="TextBox 6"/>
           <p:cNvSpPr txBox="1"/>
           <p:nvPr/>
         </p:nvSpPr>
         <p:spPr>
           <a:xfrm>
-            <a:off x="7223760" y="2286000"/>
-            <a:ext cx="4114800" cy="3291840"/>
+            <a:off x="548640" y="2029968"/>
+            <a:ext cx="4206240" cy="457200"/>
           </a:xfrm>
           <a:prstGeom prst="rect">
             <a:avLst/>
@@ -4531,73 +5085,643 @@
           <a:p>
             <a:pPr algn="l"/>
             <a:r>
-              <a:rPr sz="2000" b="0">
+              <a:rPr sz="1700" b="1">
                 <a:solidFill>
                   <a:srgbClr val="1A1A2E"/>
                 </a:solidFill>
                 <a:latin typeface="Segoe UI"/>
               </a:rPr>
-              <a:t>2 669 294  zdarzeń</a:t>
-            </a:r>
-          </a:p>
+              <a:t>2. Schemat gwiazdy</a:t>
+            </a:r>
+          </a:p>
+        </p:txBody>
+      </p:sp>
+      <p:sp>
+        <p:nvSpPr>
+          <p:cNvPr id="8" name="TextBox 7"/>
+          <p:cNvSpPr txBox="1"/>
+          <p:nvPr/>
+        </p:nvSpPr>
+        <p:spPr>
+          <a:xfrm>
+            <a:off x="4846320" y="2029968"/>
+            <a:ext cx="5486400" cy="457200"/>
+          </a:xfrm>
+          <a:prstGeom prst="rect">
+            <a:avLst/>
+          </a:prstGeom>
+          <a:noFill/>
+        </p:spPr>
+        <p:txBody>
+          <a:bodyPr wrap="square">
+            <a:spAutoFit/>
+          </a:bodyPr>
+          <a:lstStyle/>
           <a:p>
             <a:pPr algn="l"/>
             <a:r>
-              <a:rPr sz="2000" b="0">
+              <a:rPr sz="1500" b="0">
+                <a:solidFill>
+                  <a:srgbClr val="6B6B7B"/>
+                </a:solidFill>
+                <a:latin typeface="Segoe UI"/>
+              </a:rPr>
+              <a:t>czysta gwiazda, klucze sztuczne, 7 wymiarów</a:t>
+            </a:r>
+          </a:p>
+        </p:txBody>
+      </p:sp>
+      <p:sp>
+        <p:nvSpPr>
+          <p:cNvPr id="9" name="TextBox 8"/>
+          <p:cNvSpPr txBox="1"/>
+          <p:nvPr/>
+        </p:nvSpPr>
+        <p:spPr>
+          <a:xfrm>
+            <a:off x="10424160" y="2029968"/>
+            <a:ext cx="1463040" cy="457200"/>
+          </a:xfrm>
+          <a:prstGeom prst="rect">
+            <a:avLst/>
+          </a:prstGeom>
+          <a:noFill/>
+        </p:spPr>
+        <p:txBody>
+          <a:bodyPr wrap="square">
+            <a:spAutoFit/>
+          </a:bodyPr>
+          <a:lstStyle/>
+          <a:p>
+            <a:pPr algn="l"/>
+            <a:r>
+              <a:rPr sz="1400" b="0">
+                <a:solidFill>
+                  <a:srgbClr val="1F6F8B"/>
+                </a:solidFill>
+                <a:latin typeface="Segoe UI"/>
+              </a:rPr>
+              <a:t>slajdy 4–5</a:t>
+            </a:r>
+          </a:p>
+        </p:txBody>
+      </p:sp>
+      <p:sp>
+        <p:nvSpPr>
+          <p:cNvPr id="10" name="TextBox 9"/>
+          <p:cNvSpPr txBox="1"/>
+          <p:nvPr/>
+        </p:nvSpPr>
+        <p:spPr>
+          <a:xfrm>
+            <a:off x="548640" y="2688336"/>
+            <a:ext cx="4206240" cy="457200"/>
+          </a:xfrm>
+          <a:prstGeom prst="rect">
+            <a:avLst/>
+          </a:prstGeom>
+          <a:noFill/>
+        </p:spPr>
+        <p:txBody>
+          <a:bodyPr wrap="square">
+            <a:spAutoFit/>
+          </a:bodyPr>
+          <a:lstStyle/>
+          <a:p>
+            <a:pPr algn="l"/>
+            <a:r>
+              <a:rPr sz="1700" b="1">
                 <a:solidFill>
                   <a:srgbClr val="1A1A2E"/>
                 </a:solidFill>
                 <a:latin typeface="Segoe UI"/>
               </a:rPr>
-              <a:t>2 346 567  ofiar</a:t>
-            </a:r>
-          </a:p>
+              <a:t>3. ETL uruchomiony na żywo</a:t>
+            </a:r>
+          </a:p>
+        </p:txBody>
+      </p:sp>
+      <p:sp>
+        <p:nvSpPr>
+          <p:cNvPr id="11" name="TextBox 10"/>
+          <p:cNvSpPr txBox="1"/>
+          <p:nvPr/>
+        </p:nvSpPr>
+        <p:spPr>
+          <a:xfrm>
+            <a:off x="4846320" y="2688336"/>
+            <a:ext cx="5486400" cy="457200"/>
+          </a:xfrm>
+          <a:prstGeom prst="rect">
+            <a:avLst/>
+          </a:prstGeom>
+          <a:noFill/>
+        </p:spPr>
+        <p:txBody>
+          <a:bodyPr wrap="square">
+            <a:spAutoFit/>
+          </a:bodyPr>
+          <a:lstStyle/>
           <a:p>
             <a:pPr algn="l"/>
             <a:r>
-              <a:rPr sz="2000" b="0">
+              <a:rPr sz="1500" b="0">
+                <a:solidFill>
+                  <a:srgbClr val="6B6B7B"/>
+                </a:solidFill>
+                <a:latin typeface="Segoe UI"/>
+              </a:rPr>
+              <a:t>Airflow + Glue + Athena, idempotentny, walidowany</a:t>
+            </a:r>
+          </a:p>
+        </p:txBody>
+      </p:sp>
+      <p:sp>
+        <p:nvSpPr>
+          <p:cNvPr id="12" name="TextBox 11"/>
+          <p:cNvSpPr txBox="1"/>
+          <p:nvPr/>
+        </p:nvSpPr>
+        <p:spPr>
+          <a:xfrm>
+            <a:off x="10424160" y="2688336"/>
+            <a:ext cx="1463040" cy="457200"/>
+          </a:xfrm>
+          <a:prstGeom prst="rect">
+            <a:avLst/>
+          </a:prstGeom>
+          <a:noFill/>
+        </p:spPr>
+        <p:txBody>
+          <a:bodyPr wrap="square">
+            <a:spAutoFit/>
+          </a:bodyPr>
+          <a:lstStyle/>
+          <a:p>
+            <a:pPr algn="l"/>
+            <a:r>
+              <a:rPr sz="1400" b="0">
+                <a:solidFill>
+                  <a:srgbClr val="1F6F8B"/>
+                </a:solidFill>
+                <a:latin typeface="Segoe UI"/>
+              </a:rPr>
+              <a:t>slajdy 6–9</a:t>
+            </a:r>
+          </a:p>
+        </p:txBody>
+      </p:sp>
+      <p:sp>
+        <p:nvSpPr>
+          <p:cNvPr id="13" name="TextBox 12"/>
+          <p:cNvSpPr txBox="1"/>
+          <p:nvPr/>
+        </p:nvSpPr>
+        <p:spPr>
+          <a:xfrm>
+            <a:off x="548640" y="3346704"/>
+            <a:ext cx="4206240" cy="457200"/>
+          </a:xfrm>
+          <a:prstGeom prst="rect">
+            <a:avLst/>
+          </a:prstGeom>
+          <a:noFill/>
+        </p:spPr>
+        <p:txBody>
+          <a:bodyPr wrap="square">
+            <a:spAutoFit/>
+          </a:bodyPr>
+          <a:lstStyle/>
+          <a:p>
+            <a:pPr algn="l"/>
+            <a:r>
+              <a:rPr sz="1700" b="1">
                 <a:solidFill>
                   <a:srgbClr val="1A1A2E"/>
                 </a:solidFill>
                 <a:latin typeface="Segoe UI"/>
               </a:rPr>
-              <a:t>242  kraje · 16 494  aktorów</a:t>
-            </a:r>
-          </a:p>
+              <a:t>4. Warstwa semantyczna</a:t>
+            </a:r>
+          </a:p>
+        </p:txBody>
+      </p:sp>
+      <p:sp>
+        <p:nvSpPr>
+          <p:cNvPr id="14" name="TextBox 13"/>
+          <p:cNvSpPr txBox="1"/>
+          <p:nvPr/>
+        </p:nvSpPr>
+        <p:spPr>
+          <a:xfrm>
+            <a:off x="4846320" y="3346704"/>
+            <a:ext cx="5486400" cy="457200"/>
+          </a:xfrm>
+          <a:prstGeom prst="rect">
+            <a:avLst/>
+          </a:prstGeom>
+          <a:noFill/>
+        </p:spPr>
+        <p:txBody>
+          <a:bodyPr wrap="square">
+            <a:spAutoFit/>
+          </a:bodyPr>
+          <a:lstStyle/>
           <a:p>
             <a:pPr algn="l"/>
             <a:r>
-              <a:rPr sz="2000" b="0">
+              <a:rPr sz="1500" b="0">
+                <a:solidFill>
+                  <a:srgbClr val="6B6B7B"/>
+                </a:solidFill>
+                <a:latin typeface="Segoe UI"/>
+              </a:rPr>
+              <a:t>model Power BI: relacje, 15 miar DAX, hierarchie</a:t>
+            </a:r>
+          </a:p>
+        </p:txBody>
+      </p:sp>
+      <p:sp>
+        <p:nvSpPr>
+          <p:cNvPr id="15" name="TextBox 14"/>
+          <p:cNvSpPr txBox="1"/>
+          <p:nvPr/>
+        </p:nvSpPr>
+        <p:spPr>
+          <a:xfrm>
+            <a:off x="10424160" y="3346704"/>
+            <a:ext cx="1463040" cy="457200"/>
+          </a:xfrm>
+          <a:prstGeom prst="rect">
+            <a:avLst/>
+          </a:prstGeom>
+          <a:noFill/>
+        </p:spPr>
+        <p:txBody>
+          <a:bodyPr wrap="square">
+            <a:spAutoFit/>
+          </a:bodyPr>
+          <a:lstStyle/>
+          <a:p>
+            <a:pPr algn="l"/>
+            <a:r>
+              <a:rPr sz="1400" b="0">
+                <a:solidFill>
+                  <a:srgbClr val="1F6F8B"/>
+                </a:solidFill>
+                <a:latin typeface="Segoe UI"/>
+              </a:rPr>
+              <a:t>slajd 10</a:t>
+            </a:r>
+          </a:p>
+        </p:txBody>
+      </p:sp>
+      <p:sp>
+        <p:nvSpPr>
+          <p:cNvPr id="16" name="TextBox 15"/>
+          <p:cNvSpPr txBox="1"/>
+          <p:nvPr/>
+        </p:nvSpPr>
+        <p:spPr>
+          <a:xfrm>
+            <a:off x="548640" y="4005072"/>
+            <a:ext cx="4206240" cy="457200"/>
+          </a:xfrm>
+          <a:prstGeom prst="rect">
+            <a:avLst/>
+          </a:prstGeom>
+          <a:noFill/>
+        </p:spPr>
+        <p:txBody>
+          <a:bodyPr wrap="square">
+            <a:spAutoFit/>
+          </a:bodyPr>
+          <a:lstStyle/>
+          <a:p>
+            <a:pPr algn="l"/>
+            <a:r>
+              <a:rPr sz="1700" b="1">
                 <a:solidFill>
                   <a:srgbClr val="1A1A2E"/>
                 </a:solidFill>
                 <a:latin typeface="Segoe UI"/>
               </a:rPr>
-              <a:t>134  typy interakcji</a:t>
-            </a:r>
-          </a:p>
+              <a:t>5. Raporty z wykresami</a:t>
+            </a:r>
+          </a:p>
+        </p:txBody>
+      </p:sp>
+      <p:sp>
+        <p:nvSpPr>
+          <p:cNvPr id="17" name="TextBox 16"/>
+          <p:cNvSpPr txBox="1"/>
+          <p:nvPr/>
+        </p:nvSpPr>
+        <p:spPr>
+          <a:xfrm>
+            <a:off x="4846320" y="4005072"/>
+            <a:ext cx="5486400" cy="457200"/>
+          </a:xfrm>
+          <a:prstGeom prst="rect">
+            <a:avLst/>
+          </a:prstGeom>
+          <a:noFill/>
+        </p:spPr>
+        <p:txBody>
+          <a:bodyPr wrap="square">
+            <a:spAutoFit/>
+          </a:bodyPr>
+          <a:lstStyle/>
           <a:p>
             <a:pPr algn="l"/>
             <a:r>
-              <a:rPr sz="2000" b="0">
+              <a:rPr sz="1500" b="0">
+                <a:solidFill>
+                  <a:srgbClr val="6B6B7B"/>
+                </a:solidFill>
+                <a:latin typeface="Segoe UI"/>
+              </a:rPr>
+              <a:t>dashboard + strona per pytanie — W TRAKCIE</a:t>
+            </a:r>
+          </a:p>
+        </p:txBody>
+      </p:sp>
+      <p:sp>
+        <p:nvSpPr>
+          <p:cNvPr id="18" name="TextBox 17"/>
+          <p:cNvSpPr txBox="1"/>
+          <p:nvPr/>
+        </p:nvSpPr>
+        <p:spPr>
+          <a:xfrm>
+            <a:off x="10424160" y="4005072"/>
+            <a:ext cx="1463040" cy="457200"/>
+          </a:xfrm>
+          <a:prstGeom prst="rect">
+            <a:avLst/>
+          </a:prstGeom>
+          <a:noFill/>
+        </p:spPr>
+        <p:txBody>
+          <a:bodyPr wrap="square">
+            <a:spAutoFit/>
+          </a:bodyPr>
+          <a:lstStyle/>
+          <a:p>
+            <a:pPr algn="l"/>
+            <a:r>
+              <a:rPr sz="1400" b="0">
+                <a:solidFill>
+                  <a:srgbClr val="1F6F8B"/>
+                </a:solidFill>
+                <a:latin typeface="Segoe UI"/>
+              </a:rPr>
+              <a:t>slajd 11</a:t>
+            </a:r>
+          </a:p>
+        </p:txBody>
+      </p:sp>
+      <p:sp>
+        <p:nvSpPr>
+          <p:cNvPr id="19" name="TextBox 18"/>
+          <p:cNvSpPr txBox="1"/>
+          <p:nvPr/>
+        </p:nvSpPr>
+        <p:spPr>
+          <a:xfrm>
+            <a:off x="548640" y="4663440"/>
+            <a:ext cx="4206240" cy="457200"/>
+          </a:xfrm>
+          <a:prstGeom prst="rect">
+            <a:avLst/>
+          </a:prstGeom>
+          <a:noFill/>
+        </p:spPr>
+        <p:txBody>
+          <a:bodyPr wrap="square">
+            <a:spAutoFit/>
+          </a:bodyPr>
+          <a:lstStyle/>
+          <a:p>
+            <a:pPr algn="l"/>
+            <a:r>
+              <a:rPr sz="1700" b="1">
                 <a:solidFill>
                   <a:srgbClr val="1A1A2E"/>
                 </a:solidFill>
                 <a:latin typeface="Segoe UI"/>
               </a:rPr>
-              <a:t>10 592  dni w kalendarzu</a:t>
-            </a:r>
-          </a:p>
+              <a:t>Zadanie: tabela mapowań</a:t>
+            </a:r>
+          </a:p>
+        </p:txBody>
+      </p:sp>
+      <p:sp>
+        <p:nvSpPr>
+          <p:cNvPr id="20" name="TextBox 19"/>
+          <p:cNvSpPr txBox="1"/>
+          <p:nvPr/>
+        </p:nvSpPr>
+        <p:spPr>
+          <a:xfrm>
+            <a:off x="4846320" y="4663440"/>
+            <a:ext cx="5486400" cy="457200"/>
+          </a:xfrm>
+          <a:prstGeom prst="rect">
+            <a:avLst/>
+          </a:prstGeom>
+          <a:noFill/>
+        </p:spPr>
+        <p:txBody>
+          <a:bodyPr wrap="square">
+            <a:spAutoFit/>
+          </a:bodyPr>
+          <a:lstStyle/>
           <a:p>
             <a:pPr algn="l"/>
             <a:r>
-              <a:rPr sz="2000" b="0">
+              <a:rPr sz="1500" b="0">
+                <a:solidFill>
+                  <a:srgbClr val="6B6B7B"/>
+                </a:solidFill>
+                <a:latin typeface="Segoe UI"/>
+              </a:rPr>
+              <a:t>docs/etl_mapowania.md — etap po etapie</a:t>
+            </a:r>
+          </a:p>
+        </p:txBody>
+      </p:sp>
+      <p:sp>
+        <p:nvSpPr>
+          <p:cNvPr id="21" name="TextBox 20"/>
+          <p:cNvSpPr txBox="1"/>
+          <p:nvPr/>
+        </p:nvSpPr>
+        <p:spPr>
+          <a:xfrm>
+            <a:off x="10424160" y="4663440"/>
+            <a:ext cx="1463040" cy="457200"/>
+          </a:xfrm>
+          <a:prstGeom prst="rect">
+            <a:avLst/>
+          </a:prstGeom>
+          <a:noFill/>
+        </p:spPr>
+        <p:txBody>
+          <a:bodyPr wrap="square">
+            <a:spAutoFit/>
+          </a:bodyPr>
+          <a:lstStyle/>
+          <a:p>
+            <a:pPr algn="l"/>
+            <a:r>
+              <a:rPr sz="1400" b="0">
+                <a:solidFill>
+                  <a:srgbClr val="1F6F8B"/>
+                </a:solidFill>
+                <a:latin typeface="Segoe UI"/>
+              </a:rPr>
+              <a:t>slajd 7</a:t>
+            </a:r>
+          </a:p>
+        </p:txBody>
+      </p:sp>
+      <p:sp>
+        <p:nvSpPr>
+          <p:cNvPr id="22" name="TextBox 21"/>
+          <p:cNvSpPr txBox="1"/>
+          <p:nvPr/>
+        </p:nvSpPr>
+        <p:spPr>
+          <a:xfrm>
+            <a:off x="548640" y="5321808"/>
+            <a:ext cx="4206240" cy="457200"/>
+          </a:xfrm>
+          <a:prstGeom prst="rect">
+            <a:avLst/>
+          </a:prstGeom>
+          <a:noFill/>
+        </p:spPr>
+        <p:txBody>
+          <a:bodyPr wrap="square">
+            <a:spAutoFit/>
+          </a:bodyPr>
+          <a:lstStyle/>
+          <a:p>
+            <a:pPr algn="l"/>
+            <a:r>
+              <a:rPr sz="1700" b="1">
                 <a:solidFill>
                   <a:srgbClr val="1A1A2E"/>
                 </a:solidFill>
                 <a:latin typeface="Segoe UI"/>
               </a:rPr>
-              <a:t>6 235  wierszy populacji</a:t>
+              <a:t>Zadanie: screeny ładowań</a:t>
+            </a:r>
+          </a:p>
+        </p:txBody>
+      </p:sp>
+      <p:sp>
+        <p:nvSpPr>
+          <p:cNvPr id="23" name="TextBox 22"/>
+          <p:cNvSpPr txBox="1"/>
+          <p:nvPr/>
+        </p:nvSpPr>
+        <p:spPr>
+          <a:xfrm>
+            <a:off x="4846320" y="5321808"/>
+            <a:ext cx="5486400" cy="457200"/>
+          </a:xfrm>
+          <a:prstGeom prst="rect">
+            <a:avLst/>
+          </a:prstGeom>
+          <a:noFill/>
+        </p:spPr>
+        <p:txBody>
+          <a:bodyPr wrap="square">
+            <a:spAutoFit/>
+          </a:bodyPr>
+          <a:lstStyle/>
+          <a:p>
+            <a:pPr algn="l"/>
+            <a:r>
+              <a:rPr sz="1500" b="0">
+                <a:solidFill>
+                  <a:srgbClr val="6B6B7B"/>
+                </a:solidFill>
+                <a:latin typeface="Segoe UI"/>
+              </a:rPr>
+              <a:t>13 zrzutów: każdy wymiar + fakt + walidacja</a:t>
+            </a:r>
+          </a:p>
+        </p:txBody>
+      </p:sp>
+      <p:sp>
+        <p:nvSpPr>
+          <p:cNvPr id="24" name="TextBox 23"/>
+          <p:cNvSpPr txBox="1"/>
+          <p:nvPr/>
+        </p:nvSpPr>
+        <p:spPr>
+          <a:xfrm>
+            <a:off x="10424160" y="5321808"/>
+            <a:ext cx="1463040" cy="457200"/>
+          </a:xfrm>
+          <a:prstGeom prst="rect">
+            <a:avLst/>
+          </a:prstGeom>
+          <a:noFill/>
+        </p:spPr>
+        <p:txBody>
+          <a:bodyPr wrap="square">
+            <a:spAutoFit/>
+          </a:bodyPr>
+          <a:lstStyle/>
+          <a:p>
+            <a:pPr algn="l"/>
+            <a:r>
+              <a:rPr sz="1400" b="0">
+                <a:solidFill>
+                  <a:srgbClr val="1F6F8B"/>
+                </a:solidFill>
+                <a:latin typeface="Segoe UI"/>
+              </a:rPr>
+              <a:t>slajd 9</a:t>
+            </a:r>
+          </a:p>
+        </p:txBody>
+      </p:sp>
+      <p:sp>
+        <p:nvSpPr>
+          <p:cNvPr id="25" name="TextBox 24"/>
+          <p:cNvSpPr txBox="1"/>
+          <p:nvPr/>
+        </p:nvSpPr>
+        <p:spPr>
+          <a:xfrm>
+            <a:off x="548640" y="6117336"/>
+            <a:ext cx="10972800" cy="457200"/>
+          </a:xfrm>
+          <a:prstGeom prst="rect">
+            <a:avLst/>
+          </a:prstGeom>
+          <a:noFill/>
+        </p:spPr>
+        <p:txBody>
+          <a:bodyPr wrap="square">
+            <a:spAutoFit/>
+          </a:bodyPr>
+          <a:lstStyle/>
+          <a:p>
+            <a:pPr algn="l"/>
+            <a:r>
+              <a:rPr sz="1600" b="1">
+                <a:solidFill>
+                  <a:srgbClr val="A50F15"/>
+                </a:solidFill>
+                <a:latin typeface="Segoe UI"/>
+              </a:rPr>
+              <a:t>Na końcu: lista otwartych pytań, na które potrzebujemy Pani decyzji.</a:t>
             </a:r>
           </a:p>
         </p:txBody>
@@ -4679,8 +5803,8 @@
         </p:nvSpPr>
         <p:spPr>
           <a:xfrm>
-            <a:off x="457200" y="320040"/>
-            <a:ext cx="11277295" cy="640080"/>
+            <a:off x="457200" y="292608"/>
+            <a:ext cx="8899855" cy="640080"/>
           </a:xfrm>
           <a:prstGeom prst="rect">
             <a:avLst/>
@@ -4695,27 +5819,79 @@
           <a:p>
             <a:pPr algn="l"/>
             <a:r>
-              <a:rPr sz="3000" b="1">
+              <a:rPr sz="2800" b="1">
                 <a:solidFill>
                   <a:srgbClr val="1F6F8B"/>
                 </a:solidFill>
                 <a:latin typeface="Segoe UI"/>
               </a:rPr>
-              <a:t>12 pytań biznesowych</a:t>
-            </a:r>
-          </a:p>
-        </p:txBody>
-      </p:sp>
-      <p:sp>
-        <p:nvSpPr>
-          <p:cNvPr id="4" name="TextBox 3"/>
+              <a:t>Dane źródłowe i 12 pytań biznesowych</a:t>
+            </a:r>
+          </a:p>
+        </p:txBody>
+      </p:sp>
+      <p:sp>
+        <p:nvSpPr>
+          <p:cNvPr id="4" name="Rectangle 3"/>
+          <p:cNvSpPr/>
+          <p:nvPr/>
+        </p:nvSpPr>
+        <p:spPr>
+          <a:xfrm>
+            <a:off x="9448495" y="292608"/>
+            <a:ext cx="2286000" cy="502920"/>
+          </a:xfrm>
+          <a:prstGeom prst="rect">
+            <a:avLst/>
+          </a:prstGeom>
+          <a:solidFill>
+            <a:srgbClr val="E08E45"/>
+          </a:solidFill>
+          <a:ln>
+            <a:noFill/>
+          </a:ln>
+        </p:spPr>
+        <p:style>
+          <a:lnRef idx="1">
+            <a:schemeClr val="accent1"/>
+          </a:lnRef>
+          <a:fillRef idx="3">
+            <a:schemeClr val="accent1"/>
+          </a:fillRef>
+          <a:effectRef idx="2">
+            <a:schemeClr val="accent1"/>
+          </a:effectRef>
+          <a:fontRef idx="minor">
+            <a:schemeClr val="lt1"/>
+          </a:fontRef>
+        </p:style>
+        <p:txBody>
+          <a:bodyPr rtlCol="0" anchor="ctr"/>
+          <a:lstStyle/>
+          <a:p>
+            <a:pPr algn="ctr"/>
+            <a:r>
+              <a:rPr sz="1500" b="1">
+                <a:solidFill>
+                  <a:srgbClr val="FFFFFF"/>
+                </a:solidFill>
+                <a:latin typeface="Segoe UI"/>
+              </a:rPr>
+              <a:t>wymóg 1–3</a:t>
+            </a:r>
+          </a:p>
+        </p:txBody>
+      </p:sp>
+      <p:sp>
+        <p:nvSpPr>
+          <p:cNvPr id="5" name="TextBox 4"/>
           <p:cNvSpPr txBox="1"/>
           <p:nvPr/>
         </p:nvSpPr>
         <p:spPr>
           <a:xfrm>
-            <a:off x="457200" y="914400"/>
-            <a:ext cx="11277295" cy="365760"/>
+            <a:off x="548640" y="1280160"/>
+            <a:ext cx="5394960" cy="2286000"/>
           </a:xfrm>
           <a:prstGeom prst="rect">
             <a:avLst/>
@@ -4728,29 +5904,61 @@
           </a:bodyPr>
           <a:lstStyle/>
           <a:p>
-            <a:pPr algn="l"/>
-            <a:r>
-              <a:rPr sz="1400" b="0">
+            <a:r>
+              <a:rPr sz="1500" b="1">
+                <a:solidFill>
+                  <a:srgbClr val="1A1A2E"/>
+                </a:solidFill>
+                <a:latin typeface="Segoe UI"/>
+              </a:rPr>
+              <a:t>• ACLED (API, OAuth) — realne dane o konfliktach</a:t>
+            </a:r>
+          </a:p>
+          <a:p>
+            <a:r>
+              <a:rPr sz="1300" b="0">
                 <a:solidFill>
                   <a:srgbClr val="6B6B7B"/>
                 </a:solidFill>
                 <a:latin typeface="Segoe UI"/>
               </a:rPr>
-              <a:t>8 kategorii — wszystkie zrealizowane w raportach</a:t>
-            </a:r>
-          </a:p>
-        </p:txBody>
-      </p:sp>
-      <p:sp>
-        <p:nvSpPr>
-          <p:cNvPr id="5" name="TextBox 4"/>
+              <a:t>   – 2 669 294 zdarzeń · 1997–2025 · cały świat</a:t>
+            </a:r>
+          </a:p>
+          <a:p>
+            <a:r>
+              <a:rPr sz="1500" b="1">
+                <a:solidFill>
+                  <a:srgbClr val="1A1A2E"/>
+                </a:solidFill>
+                <a:latin typeface="Segoe UI"/>
+              </a:rPr>
+              <a:t>• World Bank SP.POP.TOTL — populacja do per capita</a:t>
+            </a:r>
+          </a:p>
+          <a:p>
+            <a:r>
+              <a:rPr sz="1300" b="0">
+                <a:solidFill>
+                  <a:srgbClr val="6B6B7B"/>
+                </a:solidFill>
+                <a:latin typeface="Segoe UI"/>
+              </a:rPr>
+              <a:t>   – integracja po kodzie ISO 3166-1 numeric</a:t>
+            </a:r>
+          </a:p>
+        </p:txBody>
+      </p:sp>
+      <p:sp>
+        <p:nvSpPr>
+          <p:cNvPr id="6" name="TextBox 5"/>
           <p:cNvSpPr txBox="1"/>
           <p:nvPr/>
         </p:nvSpPr>
         <p:spPr>
           <a:xfrm>
-            <a:off x="548640" y="1371600"/>
-            <a:ext cx="5669280" cy="5120640"/>
+            <a:off x="548640" y="3291840"/>
+            <a:ext cx="5577840" cy="3017520"/>
           </a:xfrm>
           <a:prstGeom prst="rect">
             <a:avLst/>
@@ -4763,89 +5971,83 @@
           </a:bodyPr>
           <a:lstStyle/>
           <a:p>
-            <a:pPr/>
-            <a:r>
-              <a:rPr sz="1500" b="0">
+            <a:r>
+              <a:rPr sz="1300" b="0">
                 <a:solidFill>
                   <a:srgbClr val="1A1A2E"/>
                 </a:solidFill>
                 <a:latin typeface="Segoe UI"/>
               </a:rPr>
-              <a:t>• 1. Które kraje i regiony mają najwięcej zdarzeń i jakie typy tam dominują?</a:t>
-            </a:r>
-          </a:p>
-          <a:p>
-            <a:pPr/>
-            <a:r>
-              <a:rPr sz="1500" b="0">
+              <a:t>• 1. Kraje/regiony z największą liczbą zdarzeń + typy</a:t>
+            </a:r>
+          </a:p>
+          <a:p>
+            <a:r>
+              <a:rPr sz="1300" b="0">
                 <a:solidFill>
                   <a:srgbClr val="1A1A2E"/>
                 </a:solidFill>
                 <a:latin typeface="Segoe UI"/>
               </a:rPr>
-              <a:t>• 2. Gdzie na mapie jest najwięcej ofiar i gdzie najwyższe ofiary/zdarzenie?</a:t>
-            </a:r>
-          </a:p>
-          <a:p>
-            <a:pPr/>
-            <a:r>
-              <a:rPr sz="1500" b="0">
+              <a:t>• 2. Ofiary na mapie; ofiary na zdarzenie</a:t>
+            </a:r>
+          </a:p>
+          <a:p>
+            <a:r>
+              <a:rPr sz="1300" b="0">
                 <a:solidFill>
                   <a:srgbClr val="1A1A2E"/>
                 </a:solidFill>
                 <a:latin typeface="Segoe UI"/>
               </a:rPr>
-              <a:t>• 3. Jak liczba zdarzeń zmieniała się w czasie per typ niepokoju?</a:t>
-            </a:r>
-          </a:p>
-          <a:p>
-            <a:pPr/>
-            <a:r>
-              <a:rPr sz="1500" b="0">
+              <a:t>• 3. Trend zdarzeń w czasie per typ niepokoju</a:t>
+            </a:r>
+          </a:p>
+          <a:p>
+            <a:r>
+              <a:rPr sz="1300" b="0">
                 <a:solidFill>
                   <a:srgbClr val="1A1A2E"/>
                 </a:solidFill>
                 <a:latin typeface="Segoe UI"/>
               </a:rPr>
-              <a:t>• 4. Czy istnieje sezonowość (miesiące)?</a:t>
-            </a:r>
-          </a:p>
-          <a:p>
-            <a:pPr/>
-            <a:r>
-              <a:rPr sz="1500" b="0">
+              <a:t>• 4. Sezonowość (miesiące)</a:t>
+            </a:r>
+          </a:p>
+          <a:p>
+            <a:r>
+              <a:rPr sz="1300" b="0">
                 <a:solidFill>
                   <a:srgbClr val="1A1A2E"/>
                 </a:solidFill>
                 <a:latin typeface="Segoe UI"/>
               </a:rPr>
-              <a:t>• 5. Które typy zdarzeń zabijają najwięcej (łącznie i na zdarzenie)?</a:t>
-            </a:r>
-          </a:p>
-          <a:p>
-            <a:pPr/>
-            <a:r>
-              <a:rPr sz="1500" b="0">
+              <a:t>• 5. Najbardziej śmiertelne typy zdarzeń</a:t>
+            </a:r>
+          </a:p>
+          <a:p>
+            <a:r>
+              <a:rPr sz="1300" b="0">
                 <a:solidFill>
                   <a:srgbClr val="1A1A2E"/>
                 </a:solidFill>
                 <a:latin typeface="Segoe UI"/>
               </a:rPr>
-              <a:t>• 6. Protesty pokojowe vs przemoc — stosunek i trend?</a:t>
-            </a:r>
-          </a:p>
-        </p:txBody>
-      </p:sp>
-      <p:sp>
-        <p:nvSpPr>
-          <p:cNvPr id="6" name="TextBox 5"/>
+              <a:t>• 6. Protesty pokojowe vs przemoc + trend</a:t>
+            </a:r>
+          </a:p>
+        </p:txBody>
+      </p:sp>
+      <p:sp>
+        <p:nvSpPr>
+          <p:cNvPr id="7" name="TextBox 6"/>
           <p:cNvSpPr txBox="1"/>
           <p:nvPr/>
         </p:nvSpPr>
         <p:spPr>
           <a:xfrm>
-            <a:off x="6309360" y="1371600"/>
-            <a:ext cx="5669280" cy="5120640"/>
+            <a:off x="6309360" y="3291840"/>
+            <a:ext cx="5577840" cy="3017520"/>
           </a:xfrm>
           <a:prstGeom prst="rect">
             <a:avLst/>
@@ -4858,75 +6060,123 @@
           </a:bodyPr>
           <a:lstStyle/>
           <a:p>
-            <a:pPr/>
-            <a:r>
-              <a:rPr sz="1500" b="0">
+            <a:r>
+              <a:rPr sz="1300" b="0">
                 <a:solidFill>
                   <a:srgbClr val="1A1A2E"/>
                 </a:solidFill>
                 <a:latin typeface="Segoe UI"/>
               </a:rPr>
-              <a:t>• 7. Którzy aktorzy generują najwięcej zdarzeń i ofiar?</a:t>
-            </a:r>
-          </a:p>
-          <a:p>
-            <a:pPr/>
-            <a:r>
-              <a:rPr sz="1500" b="0">
+              <a:t>• 7. Aktorzy: zdarzenia, ofiary, aktywność w czasie</a:t>
+            </a:r>
+          </a:p>
+          <a:p>
+            <a:r>
+              <a:rPr sz="1300" b="0">
                 <a:solidFill>
                   <a:srgbClr val="1A1A2E"/>
                 </a:solidFill>
                 <a:latin typeface="Segoe UI"/>
               </a:rPr>
-              <a:t>• 8. Które interakcje (np. państwo–rebelianci) najczęstsze i najkrwawsze?</a:t>
-            </a:r>
-          </a:p>
-          <a:p>
-            <a:pPr/>
-            <a:r>
-              <a:rPr sz="1500" b="0">
+              <a:t>• 8. Interakcje (państwo–rebelianci itd.)</a:t>
+            </a:r>
+          </a:p>
+          <a:p>
+            <a:r>
+              <a:rPr sz="1300" b="0">
                 <a:solidFill>
                   <a:srgbClr val="1A1A2E"/>
                 </a:solidFill>
                 <a:latin typeface="Segoe UI"/>
               </a:rPr>
-              <a:t>• 9. Jaki % zdarzeń celuje w cywilów — po regionach i aktorach?</a:t>
-            </a:r>
-          </a:p>
-          <a:p>
-            <a:pPr/>
-            <a:r>
-              <a:rPr sz="1500" b="0">
+              <a:t>• 9. % celowania w cywilów po regionach/aktorach</a:t>
+            </a:r>
+          </a:p>
+          <a:p>
+            <a:r>
+              <a:rPr sz="1300" b="0">
                 <a:solidFill>
                   <a:srgbClr val="1A1A2E"/>
                 </a:solidFill>
                 <a:latin typeface="Segoe UI"/>
               </a:rPr>
-              <a:t>• 10. Skąd pochodzą źródła (lokalne vs międzynarodowe) per region?</a:t>
-            </a:r>
-          </a:p>
-          <a:p>
-            <a:pPr/>
-            <a:r>
-              <a:rPr sz="1500" b="0">
+              <a:t>• 10. Źródła lokalne vs międzynarodowe per region</a:t>
+            </a:r>
+          </a:p>
+          <a:p>
+            <a:r>
+              <a:rPr sz="1300" b="0">
                 <a:solidFill>
                   <a:srgbClr val="1A1A2E"/>
                 </a:solidFill>
                 <a:latin typeface="Segoe UI"/>
               </a:rPr>
-              <a:t>• 11. Które kraje mają największy wzrost rok-do-roku?</a:t>
-            </a:r>
-          </a:p>
-          <a:p>
-            <a:pPr/>
-            <a:r>
-              <a:rPr sz="1500" b="0">
+              <a:t>• 11. Największe wzrosty rok-do-roku</a:t>
+            </a:r>
+          </a:p>
+          <a:p>
+            <a:r>
+              <a:rPr sz="1300" b="0">
                 <a:solidFill>
                   <a:srgbClr val="1A1A2E"/>
                 </a:solidFill>
                 <a:latin typeface="Segoe UI"/>
               </a:rPr>
-              <a:t>• 12. Per capita (na 100 tys.) — jak zmienia się ranking krajów?</a:t>
+              <a:t>• 12. Per capita — zmiana rankingu</a:t>
+            </a:r>
+          </a:p>
+        </p:txBody>
+      </p:sp>
+      <p:sp>
+        <p:nvSpPr>
+          <p:cNvPr id="8" name="Rectangle 7"/>
+          <p:cNvSpPr/>
+          <p:nvPr/>
+        </p:nvSpPr>
+        <p:spPr>
+          <a:xfrm>
+            <a:off x="457200" y="1234440"/>
+            <a:ext cx="11277295" cy="777240"/>
+          </a:xfrm>
+          <a:prstGeom prst="rect">
+            <a:avLst/>
+          </a:prstGeom>
+          <a:solidFill>
+            <a:srgbClr val="FFFFFF"/>
+          </a:solidFill>
+          <a:ln w="19050">
+            <a:solidFill>
+              <a:srgbClr val="A50F15"/>
+            </a:solidFill>
+          </a:ln>
+        </p:spPr>
+        <p:style>
+          <a:lnRef idx="1">
+            <a:schemeClr val="accent1"/>
+          </a:lnRef>
+          <a:fillRef idx="3">
+            <a:schemeClr val="accent1"/>
+          </a:fillRef>
+          <a:effectRef idx="2">
+            <a:schemeClr val="accent1"/>
+          </a:effectRef>
+          <a:fontRef idx="minor">
+            <a:schemeClr val="lt1"/>
+          </a:fontRef>
+        </p:style>
+        <p:txBody>
+          <a:bodyPr rtlCol="0" anchor="ctr" wrap="square"/>
+          <a:lstStyle/>
+          <a:p>
+            <a:pPr algn="ctr"/>
+            <a:r>
+              <a:rPr sz="1500" b="1">
+                <a:solidFill>
+                  <a:srgbClr val="A50F15"/>
+                </a:solidFill>
+                <a:latin typeface="Segoe UI"/>
+              </a:rPr>
+              <a:t>PYTANIE DO PANI:  czy zakres i liczba pytań są wystarczające?</a:t>
             </a:r>
           </a:p>
         </p:txBody>
@@ -5008,8 +6258,8 @@
         </p:nvSpPr>
         <p:spPr>
           <a:xfrm>
-            <a:off x="457200" y="320040"/>
-            <a:ext cx="11277295" cy="640080"/>
+            <a:off x="457200" y="292608"/>
+            <a:ext cx="8899855" cy="640080"/>
           </a:xfrm>
           <a:prstGeom prst="rect">
             <a:avLst/>
@@ -5024,20 +6274,72 @@
           <a:p>
             <a:pPr algn="l"/>
             <a:r>
-              <a:rPr sz="3000" b="1">
+              <a:rPr sz="2800" b="1">
                 <a:solidFill>
                   <a:srgbClr val="1F6F8B"/>
                 </a:solidFill>
                 <a:latin typeface="Segoe UI"/>
               </a:rPr>
-              <a:t>Architektura — lakehouse w układzie medalionu</a:t>
+              <a:t>Schemat gwiazdy — model</a:t>
+            </a:r>
+          </a:p>
+        </p:txBody>
+      </p:sp>
+      <p:sp>
+        <p:nvSpPr>
+          <p:cNvPr id="4" name="Rectangle 3"/>
+          <p:cNvSpPr/>
+          <p:nvPr/>
+        </p:nvSpPr>
+        <p:spPr>
+          <a:xfrm>
+            <a:off x="9448495" y="292608"/>
+            <a:ext cx="2286000" cy="502920"/>
+          </a:xfrm>
+          <a:prstGeom prst="rect">
+            <a:avLst/>
+          </a:prstGeom>
+          <a:solidFill>
+            <a:srgbClr val="E08E45"/>
+          </a:solidFill>
+          <a:ln>
+            <a:noFill/>
+          </a:ln>
+        </p:spPr>
+        <p:style>
+          <a:lnRef idx="1">
+            <a:schemeClr val="accent1"/>
+          </a:lnRef>
+          <a:fillRef idx="3">
+            <a:schemeClr val="accent1"/>
+          </a:fillRef>
+          <a:effectRef idx="2">
+            <a:schemeClr val="accent1"/>
+          </a:effectRef>
+          <a:fontRef idx="minor">
+            <a:schemeClr val="lt1"/>
+          </a:fontRef>
+        </p:style>
+        <p:txBody>
+          <a:bodyPr rtlCol="0" anchor="ctr"/>
+          <a:lstStyle/>
+          <a:p>
+            <a:pPr algn="ctr"/>
+            <a:r>
+              <a:rPr sz="1500" b="1">
+                <a:solidFill>
+                  <a:srgbClr val="FFFFFF"/>
+                </a:solidFill>
+                <a:latin typeface="Segoe UI"/>
+              </a:rPr>
+              <a:t>wymóg: gwiazda</a:t>
             </a:r>
           </a:p>
         </p:txBody>
       </p:sp>
       <p:pic>
         <p:nvPicPr>
-          <p:cNvPr id="4" name="Picture 3" descr="architecture.png"/>
+          <p:cNvPr id="5" name="Picture 4" descr="star_schema.png"/>
           <p:cNvPicPr>
             <a:picLocks noChangeAspect="1"/>
           </p:cNvPicPr>
@@ -5051,14 +6353,68 @@
         </p:blipFill>
         <p:spPr>
           <a:xfrm>
-            <a:off x="365760" y="2579895"/>
-            <a:ext cx="11460175" cy="2429730"/>
+            <a:off x="2732868" y="1051560"/>
+            <a:ext cx="6725959" cy="4709160"/>
           </a:xfrm>
           <a:prstGeom prst="rect">
             <a:avLst/>
           </a:prstGeom>
         </p:spPr>
       </p:pic>
+      <p:sp>
+        <p:nvSpPr>
+          <p:cNvPr id="6" name="Rectangle 5"/>
+          <p:cNvSpPr/>
+          <p:nvPr/>
+        </p:nvSpPr>
+        <p:spPr>
+          <a:xfrm>
+            <a:off x="457200" y="5806440"/>
+            <a:ext cx="11277295" cy="777240"/>
+          </a:xfrm>
+          <a:prstGeom prst="rect">
+            <a:avLst/>
+          </a:prstGeom>
+          <a:solidFill>
+            <a:srgbClr val="FFFFFF"/>
+          </a:solidFill>
+          <a:ln w="19050">
+            <a:solidFill>
+              <a:srgbClr val="A50F15"/>
+            </a:solidFill>
+          </a:ln>
+        </p:spPr>
+        <p:style>
+          <a:lnRef idx="1">
+            <a:schemeClr val="accent1"/>
+          </a:lnRef>
+          <a:fillRef idx="3">
+            <a:schemeClr val="accent1"/>
+          </a:fillRef>
+          <a:effectRef idx="2">
+            <a:schemeClr val="accent1"/>
+          </a:effectRef>
+          <a:fontRef idx="minor">
+            <a:schemeClr val="lt1"/>
+          </a:fontRef>
+        </p:style>
+        <p:txBody>
+          <a:bodyPr rtlCol="0" anchor="ctr" wrap="square"/>
+          <a:lstStyle/>
+          <a:p>
+            <a:pPr algn="ctr"/>
+            <a:r>
+              <a:rPr sz="1500" b="1">
+                <a:solidFill>
+                  <a:srgbClr val="A50F15"/>
+                </a:solidFill>
+                <a:latin typeface="Segoe UI"/>
+              </a:rPr>
+              <a:t>PYTANIE DO PANI:  prosimy o weryfikację schematu (wiemy, że błędny schemat = odrzucenie projektu)</a:t>
+            </a:r>
+          </a:p>
+        </p:txBody>
+      </p:sp>
     </p:spTree>
   </p:cSld>
   <p:clrMapOvr>
@@ -5136,8 +6492,8 @@
         </p:nvSpPr>
         <p:spPr>
           <a:xfrm>
-            <a:off x="457200" y="320040"/>
-            <a:ext cx="11277295" cy="640080"/>
+            <a:off x="457200" y="292608"/>
+            <a:ext cx="8899855" cy="640080"/>
           </a:xfrm>
           <a:prstGeom prst="rect">
             <a:avLst/>
@@ -5152,62 +6508,27 @@
           <a:p>
             <a:pPr algn="l"/>
             <a:r>
-              <a:rPr sz="3000" b="1">
+              <a:rPr sz="2800" b="1">
                 <a:solidFill>
                   <a:srgbClr val="1F6F8B"/>
                 </a:solidFill>
                 <a:latin typeface="Segoe UI"/>
               </a:rPr>
-              <a:t>Warstwy: bronze → silver → gold</a:t>
-            </a:r>
-          </a:p>
-        </p:txBody>
-      </p:sp>
-      <p:sp>
-        <p:nvSpPr>
-          <p:cNvPr id="4" name="TextBox 3"/>
-          <p:cNvSpPr txBox="1"/>
-          <p:nvPr/>
-        </p:nvSpPr>
-        <p:spPr>
-          <a:xfrm>
-            <a:off x="457200" y="914400"/>
-            <a:ext cx="11277295" cy="365760"/>
-          </a:xfrm>
-          <a:prstGeom prst="rect">
-            <a:avLst/>
-          </a:prstGeom>
-          <a:noFill/>
-        </p:spPr>
-        <p:txBody>
-          <a:bodyPr wrap="square">
-            <a:spAutoFit/>
-          </a:bodyPr>
-          <a:lstStyle/>
-          <a:p>
-            <a:pPr algn="l"/>
-            <a:r>
-              <a:rPr sz="1400" b="0">
-                <a:solidFill>
-                  <a:srgbClr val="6B6B7B"/>
-                </a:solidFill>
-                <a:latin typeface="Segoe UI"/>
-              </a:rPr>
-              <a:t>zasada: bliżej źródła = więcej danych, bliżej raportu = więcej sensu</a:t>
-            </a:r>
-          </a:p>
-        </p:txBody>
-      </p:sp>
-      <p:sp>
-        <p:nvSpPr>
-          <p:cNvPr id="5" name="Rectangle 4"/>
+              <a:t>Schemat gwiazdy — decyzje projektowe</a:t>
+            </a:r>
+          </a:p>
+        </p:txBody>
+      </p:sp>
+      <p:sp>
+        <p:nvSpPr>
+          <p:cNvPr id="4" name="Rectangle 3"/>
           <p:cNvSpPr/>
           <p:nvPr/>
         </p:nvSpPr>
         <p:spPr>
           <a:xfrm>
-            <a:off x="548640" y="1463040"/>
-            <a:ext cx="2011680" cy="1280160"/>
+            <a:off x="9448495" y="292608"/>
+            <a:ext cx="2286000" cy="502920"/>
           </a:xfrm>
           <a:prstGeom prst="rect">
             <a:avLst/>
@@ -5234,31 +6555,32 @@
           </a:fontRef>
         </p:style>
         <p:txBody>
-          <a:bodyPr rtlCol="0" anchor="ctr" wrap="square"/>
+          <a:bodyPr rtlCol="0" anchor="ctr"/>
           <a:lstStyle/>
           <a:p>
             <a:pPr algn="ctr"/>
             <a:r>
-              <a:rPr sz="2200" b="1">
+              <a:rPr sz="1500" b="1">
                 <a:solidFill>
                   <a:srgbClr val="FFFFFF"/>
                 </a:solidFill>
-              </a:rPr>
-              <a:t>BRONZE</a:t>
-            </a:r>
-          </a:p>
-        </p:txBody>
-      </p:sp>
-      <p:sp>
-        <p:nvSpPr>
-          <p:cNvPr id="6" name="TextBox 5"/>
+                <a:latin typeface="Segoe UI"/>
+              </a:rPr>
+              <a:t>do oceny</a:t>
+            </a:r>
+          </a:p>
+        </p:txBody>
+      </p:sp>
+      <p:sp>
+        <p:nvSpPr>
+          <p:cNvPr id="5" name="TextBox 4"/>
           <p:cNvSpPr txBox="1"/>
           <p:nvPr/>
         </p:nvSpPr>
         <p:spPr>
           <a:xfrm>
-            <a:off x="2834640" y="1691640"/>
-            <a:ext cx="8778240" cy="1005840"/>
+            <a:off x="548640" y="1234440"/>
+            <a:ext cx="11155680" cy="4206240"/>
           </a:xfrm>
           <a:prstGeom prst="rect">
             <a:avLst/>
@@ -5271,7 +6593,17 @@
           </a:bodyPr>
           <a:lstStyle/>
           <a:p>
-            <a:pPr algn="l"/>
+            <a:r>
+              <a:rPr sz="1600" b="1">
+                <a:solidFill>
+                  <a:srgbClr val="1A1A2E"/>
+                </a:solidFill>
+                <a:latin typeface="Segoe UI"/>
+              </a:rPr>
+              <a:t>• Hurtownia JEDNOTEMATYCZNA (jeden fakt) → czysta gwiazda, bez bus matrix</a:t>
+            </a:r>
+          </a:p>
+          <a:p>
             <a:r>
               <a:rPr sz="1600" b="0">
                 <a:solidFill>
@@ -5279,30 +6611,109 @@
                 </a:solidFill>
                 <a:latin typeface="Segoe UI"/>
               </a:rPr>
-              <a:t>surowe CSV z API, append-only, nigdy nie modyfikowane — archiwum i nieulotność</a:t>
-            </a:r>
-          </a:p>
-        </p:txBody>
-      </p:sp>
-      <p:sp>
-        <p:nvSpPr>
-          <p:cNvPr id="7" name="Rectangle 6"/>
+              <a:t>• Fakt = wyłącznie klucze wymiarów + miary addytywne (fatalities, flaga 0/1)</a:t>
+            </a:r>
+          </a:p>
+          <a:p>
+            <a:r>
+              <a:rPr sz="1400" b="0">
+                <a:solidFill>
+                  <a:srgbClr val="6B6B7B"/>
+                </a:solidFill>
+                <a:latin typeface="Segoe UI"/>
+              </a:rPr>
+              <a:t>   – wyjątek: event_id_cnty jako wymiar zdegenerowany (unikalny per wiersz — jak NrZamówienia z wykładu)</a:t>
+            </a:r>
+          </a:p>
+          <a:p>
+            <a:r>
+              <a:rPr sz="1600" b="0">
+                <a:solidFill>
+                  <a:srgbClr val="1A1A2E"/>
+                </a:solidFill>
+                <a:latin typeface="Segoe UI"/>
+              </a:rPr>
+              <a:t>• Klucze sztuczne we wszystkich wymiarach (ROW_NUMBER; data = yyyymmdd)</a:t>
+            </a:r>
+          </a:p>
+          <a:p>
+            <a:r>
+              <a:rPr sz="1600" b="0">
+                <a:solidFill>
+                  <a:srgbClr val="1A1A2E"/>
+                </a:solidFill>
+                <a:latin typeface="Segoe UI"/>
+              </a:rPr>
+              <a:t>• interaction = NORMALNY wymiar (134 wartości — za mała liczność na zdegenerowany)</a:t>
+            </a:r>
+          </a:p>
+          <a:p>
+            <a:r>
+              <a:rPr sz="1600" b="0">
+                <a:solidFill>
+                  <a:srgbClr val="1A1A2E"/>
+                </a:solidFill>
+                <a:latin typeface="Segoe UI"/>
+              </a:rPr>
+              <a:t>• Pseudo-nulle → wiersz „Unknown" (id = −1) w każdym wymiarze (wykład 12)</a:t>
+            </a:r>
+          </a:p>
+          <a:p>
+            <a:r>
+              <a:rPr sz="1600" b="0">
+                <a:solidFill>
+                  <a:srgbClr val="1A1A2E"/>
+                </a:solidFill>
+                <a:latin typeface="Segoe UI"/>
+              </a:rPr>
+              <a:t>• dim_date = ciągły kalendarz 1997–2025 (wymóg time-intelligence Power BI)</a:t>
+            </a:r>
+          </a:p>
+          <a:p>
+            <a:r>
+              <a:rPr sz="1600" b="0">
+                <a:solidFill>
+                  <a:srgbClr val="1A1A2E"/>
+                </a:solidFill>
+                <a:latin typeface="Segoe UI"/>
+              </a:rPr>
+              <a:t>• populacja: klucz złożony (iso, rok) spłaszczony do iso_year — relacje Power BI są 1-kolumnowe</a:t>
+            </a:r>
+          </a:p>
+          <a:p>
+            <a:r>
+              <a:rPr sz="1600" b="1">
+                <a:solidFill>
+                  <a:srgbClr val="1A1A2E"/>
+                </a:solidFill>
+                <a:latin typeface="Segoe UI"/>
+              </a:rPr>
+              <a:t>• Zasady z wykładu 3: ≤25 wymiarów ✓ (7) · fakt ~160× większy od największego wymiaru ✓</a:t>
+            </a:r>
+          </a:p>
+        </p:txBody>
+      </p:sp>
+      <p:sp>
+        <p:nvSpPr>
+          <p:cNvPr id="6" name="Rectangle 5"/>
           <p:cNvSpPr/>
           <p:nvPr/>
         </p:nvSpPr>
         <p:spPr>
           <a:xfrm>
-            <a:off x="548640" y="3017520"/>
-            <a:ext cx="2011680" cy="1280160"/>
+            <a:off x="457200" y="5806440"/>
+            <a:ext cx="11277295" cy="777240"/>
           </a:xfrm>
           <a:prstGeom prst="rect">
             <a:avLst/>
           </a:prstGeom>
           <a:solidFill>
-            <a:srgbClr val="6B6B7B"/>
+            <a:srgbClr val="FFFFFF"/>
           </a:solidFill>
-          <a:ln>
-            <a:noFill/>
+          <a:ln w="19050">
+            <a:solidFill>
+              <a:srgbClr val="A50F15"/>
+            </a:solidFill>
           </a:ln>
         </p:spPr>
         <p:style>
@@ -5325,168 +6736,13 @@
           <a:p>
             <a:pPr algn="ctr"/>
             <a:r>
-              <a:rPr sz="2200" b="1">
-                <a:solidFill>
-                  <a:srgbClr val="FFFFFF"/>
-                </a:solidFill>
-              </a:rPr>
-              <a:t>SILVER</a:t>
-            </a:r>
-          </a:p>
-        </p:txBody>
-      </p:sp>
-      <p:sp>
-        <p:nvSpPr>
-          <p:cNvPr id="8" name="TextBox 7"/>
-          <p:cNvSpPr txBox="1"/>
-          <p:nvPr/>
-        </p:nvSpPr>
-        <p:spPr>
-          <a:xfrm>
-            <a:off x="2834640" y="3246120"/>
-            <a:ext cx="8778240" cy="1005840"/>
-          </a:xfrm>
-          <a:prstGeom prst="rect">
-            <a:avLst/>
-          </a:prstGeom>
-          <a:noFill/>
-        </p:spPr>
-        <p:txBody>
-          <a:bodyPr wrap="square">
-            <a:spAutoFit/>
-          </a:bodyPr>
-          <a:lstStyle/>
-          <a:p>
-            <a:pPr algn="l"/>
-            <a:r>
-              <a:rPr sz="1600" b="0">
-                <a:solidFill>
-                  <a:srgbClr val="1A1A2E"/>
-                </a:solidFill>
-                <a:latin typeface="Segoe UI"/>
-              </a:rPr>
-              <a:t>Glue/Spark: deduplikacja (najnowszy timestamp = SCD typ 1), anti-join z rejestrem usunięć, typowanie, Parquet</a:t>
-            </a:r>
-          </a:p>
-        </p:txBody>
-      </p:sp>
-      <p:sp>
-        <p:nvSpPr>
-          <p:cNvPr id="9" name="Rectangle 8"/>
-          <p:cNvSpPr/>
-          <p:nvPr/>
-        </p:nvSpPr>
-        <p:spPr>
-          <a:xfrm>
-            <a:off x="548640" y="4572000"/>
-            <a:ext cx="2011680" cy="1280160"/>
-          </a:xfrm>
-          <a:prstGeom prst="rect">
-            <a:avLst/>
-          </a:prstGeom>
-          <a:solidFill>
-            <a:srgbClr val="1F6F8B"/>
-          </a:solidFill>
-          <a:ln>
-            <a:noFill/>
-          </a:ln>
-        </p:spPr>
-        <p:style>
-          <a:lnRef idx="1">
-            <a:schemeClr val="accent1"/>
-          </a:lnRef>
-          <a:fillRef idx="3">
-            <a:schemeClr val="accent1"/>
-          </a:fillRef>
-          <a:effectRef idx="2">
-            <a:schemeClr val="accent1"/>
-          </a:effectRef>
-          <a:fontRef idx="minor">
-            <a:schemeClr val="lt1"/>
-          </a:fontRef>
-        </p:style>
-        <p:txBody>
-          <a:bodyPr rtlCol="0" anchor="ctr" wrap="square"/>
-          <a:lstStyle/>
-          <a:p>
-            <a:pPr algn="ctr"/>
-            <a:r>
-              <a:rPr sz="2200" b="1">
-                <a:solidFill>
-                  <a:srgbClr val="FFFFFF"/>
-                </a:solidFill>
-              </a:rPr>
-              <a:t>GOLD</a:t>
-            </a:r>
-          </a:p>
-        </p:txBody>
-      </p:sp>
-      <p:sp>
-        <p:nvSpPr>
-          <p:cNvPr id="10" name="TextBox 9"/>
-          <p:cNvSpPr txBox="1"/>
-          <p:nvPr/>
-        </p:nvSpPr>
-        <p:spPr>
-          <a:xfrm>
-            <a:off x="2834640" y="4800600"/>
-            <a:ext cx="8778240" cy="1005840"/>
-          </a:xfrm>
-          <a:prstGeom prst="rect">
-            <a:avLst/>
-          </a:prstGeom>
-          <a:noFill/>
-        </p:spPr>
-        <p:txBody>
-          <a:bodyPr wrap="square">
-            <a:spAutoFit/>
-          </a:bodyPr>
-          <a:lstStyle/>
-          <a:p>
-            <a:pPr algn="l"/>
-            <a:r>
-              <a:rPr sz="1600" b="0">
-                <a:solidFill>
-                  <a:srgbClr val="1A1A2E"/>
-                </a:solidFill>
-                <a:latin typeface="Segoe UI"/>
-              </a:rPr>
-              <a:t>Athena CTAS: integracja źródeł, czyszczenie, flagi + czysty SCHEMAT GWIAZDY</a:t>
-            </a:r>
-          </a:p>
-        </p:txBody>
-      </p:sp>
-      <p:sp>
-        <p:nvSpPr>
-          <p:cNvPr id="11" name="TextBox 10"/>
-          <p:cNvSpPr txBox="1"/>
-          <p:nvPr/>
-        </p:nvSpPr>
-        <p:spPr>
-          <a:xfrm>
-            <a:off x="548640" y="6217920"/>
-            <a:ext cx="10972800" cy="457200"/>
-          </a:xfrm>
-          <a:prstGeom prst="rect">
-            <a:avLst/>
-          </a:prstGeom>
-          <a:noFill/>
-        </p:spPr>
-        <p:txBody>
-          <a:bodyPr wrap="square">
-            <a:spAutoFit/>
-          </a:bodyPr>
-          <a:lstStyle/>
-          <a:p>
-            <a:pPr algn="l"/>
-            <a:r>
               <a:rPr sz="1500" b="1">
                 <a:solidFill>
-                  <a:srgbClr val="1A1A2E"/>
-                </a:solidFill>
-                <a:latin typeface="Segoe UI"/>
-              </a:rPr>
-              <a:t>Orkiestracja: Apache Airflow — 2 DAG-i (backfill: API→silver  ·  pipeline: gold→gwiazda→walidacja), kroki idempotentne</a:t>
+                  <a:srgbClr val="A50F15"/>
+                </a:solidFill>
+                <a:latin typeface="Segoe UI"/>
+              </a:rPr>
+              <a:t>PYTANIE DO PANI:  czy akceptuje Pani: degenerate event_id_cnty · klucz iso_year · lat/long poza gwiazdą (zostały w tabeli gold)?</a:t>
             </a:r>
           </a:p>
         </p:txBody>
@@ -5568,8 +6824,8 @@
         </p:nvSpPr>
         <p:spPr>
           <a:xfrm>
-            <a:off x="457200" y="320040"/>
-            <a:ext cx="11277295" cy="640080"/>
+            <a:off x="457200" y="292608"/>
+            <a:ext cx="8899855" cy="640080"/>
           </a:xfrm>
           <a:prstGeom prst="rect">
             <a:avLst/>
@@ -5584,55 +6840,72 @@
           <a:p>
             <a:pPr algn="l"/>
             <a:r>
-              <a:rPr sz="3000" b="1">
+              <a:rPr sz="2800" b="1">
                 <a:solidFill>
                   <a:srgbClr val="1F6F8B"/>
                 </a:solidFill>
                 <a:latin typeface="Segoe UI"/>
               </a:rPr>
-              <a:t>Czysty schemat gwiazdy</a:t>
-            </a:r>
-          </a:p>
-        </p:txBody>
-      </p:sp>
-      <p:sp>
-        <p:nvSpPr>
-          <p:cNvPr id="4" name="TextBox 3"/>
-          <p:cNvSpPr txBox="1"/>
-          <p:nvPr/>
-        </p:nvSpPr>
-        <p:spPr>
-          <a:xfrm>
-            <a:off x="457200" y="914400"/>
-            <a:ext cx="11277295" cy="365760"/>
-          </a:xfrm>
-          <a:prstGeom prst="rect">
-            <a:avLst/>
-          </a:prstGeom>
-          <a:noFill/>
-        </p:spPr>
-        <p:txBody>
-          <a:bodyPr wrap="square">
-            <a:spAutoFit/>
-          </a:bodyPr>
-          <a:lstStyle/>
-          <a:p>
-            <a:pPr algn="l"/>
-            <a:r>
-              <a:rPr sz="1400" b="0">
-                <a:solidFill>
-                  <a:srgbClr val="6B6B7B"/>
-                </a:solidFill>
-                <a:latin typeface="Segoe UI"/>
-              </a:rPr>
-              <a:t>fakt = tylko klucze i miary  ·  klucze sztuczne  ·  wiersz Unknown(−1) za pseudo-nulle</a:t>
+              <a:t>ETL — architektura</a:t>
+            </a:r>
+          </a:p>
+        </p:txBody>
+      </p:sp>
+      <p:sp>
+        <p:nvSpPr>
+          <p:cNvPr id="4" name="Rectangle 3"/>
+          <p:cNvSpPr/>
+          <p:nvPr/>
+        </p:nvSpPr>
+        <p:spPr>
+          <a:xfrm>
+            <a:off x="9448495" y="292608"/>
+            <a:ext cx="2286000" cy="502920"/>
+          </a:xfrm>
+          <a:prstGeom prst="rect">
+            <a:avLst/>
+          </a:prstGeom>
+          <a:solidFill>
+            <a:srgbClr val="E08E45"/>
+          </a:solidFill>
+          <a:ln>
+            <a:noFill/>
+          </a:ln>
+        </p:spPr>
+        <p:style>
+          <a:lnRef idx="1">
+            <a:schemeClr val="accent1"/>
+          </a:lnRef>
+          <a:fillRef idx="3">
+            <a:schemeClr val="accent1"/>
+          </a:fillRef>
+          <a:effectRef idx="2">
+            <a:schemeClr val="accent1"/>
+          </a:effectRef>
+          <a:fontRef idx="minor">
+            <a:schemeClr val="lt1"/>
+          </a:fontRef>
+        </p:style>
+        <p:txBody>
+          <a:bodyPr rtlCol="0" anchor="ctr"/>
+          <a:lstStyle/>
+          <a:p>
+            <a:pPr algn="ctr"/>
+            <a:r>
+              <a:rPr sz="1500" b="1">
+                <a:solidFill>
+                  <a:srgbClr val="FFFFFF"/>
+                </a:solidFill>
+                <a:latin typeface="Segoe UI"/>
+              </a:rPr>
+              <a:t>wymóg: ETL 20 pkt</a:t>
             </a:r>
           </a:p>
         </p:txBody>
       </p:sp>
       <p:pic>
         <p:nvPicPr>
-          <p:cNvPr id="5" name="Picture 4" descr="star_schema.png"/>
+          <p:cNvPr id="5" name="Picture 4" descr="architecture.png"/>
           <p:cNvPicPr>
             <a:picLocks noChangeAspect="1"/>
           </p:cNvPicPr>
@@ -5646,14 +6919,68 @@
         </p:blipFill>
         <p:spPr>
           <a:xfrm>
-            <a:off x="2439015" y="1188720"/>
-            <a:ext cx="7313664" cy="5120640"/>
+            <a:off x="365760" y="2191275"/>
+            <a:ext cx="11460175" cy="2429730"/>
           </a:xfrm>
           <a:prstGeom prst="rect">
             <a:avLst/>
           </a:prstGeom>
         </p:spPr>
       </p:pic>
+      <p:sp>
+        <p:nvSpPr>
+          <p:cNvPr id="6" name="Rectangle 5"/>
+          <p:cNvSpPr/>
+          <p:nvPr/>
+        </p:nvSpPr>
+        <p:spPr>
+          <a:xfrm>
+            <a:off x="457200" y="5806440"/>
+            <a:ext cx="11277295" cy="777240"/>
+          </a:xfrm>
+          <a:prstGeom prst="rect">
+            <a:avLst/>
+          </a:prstGeom>
+          <a:solidFill>
+            <a:srgbClr val="FFFFFF"/>
+          </a:solidFill>
+          <a:ln w="19050">
+            <a:solidFill>
+              <a:srgbClr val="A50F15"/>
+            </a:solidFill>
+          </a:ln>
+        </p:spPr>
+        <p:style>
+          <a:lnRef idx="1">
+            <a:schemeClr val="accent1"/>
+          </a:lnRef>
+          <a:fillRef idx="3">
+            <a:schemeClr val="accent1"/>
+          </a:fillRef>
+          <a:effectRef idx="2">
+            <a:schemeClr val="accent1"/>
+          </a:effectRef>
+          <a:fontRef idx="minor">
+            <a:schemeClr val="lt1"/>
+          </a:fontRef>
+        </p:style>
+        <p:txBody>
+          <a:bodyPr rtlCol="0" anchor="ctr" wrap="square"/>
+          <a:lstStyle/>
+          <a:p>
+            <a:pPr algn="ctr"/>
+            <a:r>
+              <a:rPr sz="1500" b="1">
+                <a:solidFill>
+                  <a:srgbClr val="A50F15"/>
+                </a:solidFill>
+                <a:latin typeface="Segoe UI"/>
+              </a:rPr>
+              <a:t>PYTANIE DO PANI:  czy stack AWS+Airflow+Power BI jest OK jako zamiennik SSIS/SSAS/SSRS? (wg dokumentu ARCHITEKTURA — tak)</a:t>
+            </a:r>
+          </a:p>
+        </p:txBody>
+      </p:sp>
     </p:spTree>
   </p:cSld>
   <p:clrMapOvr>
@@ -5731,8 +7058,8 @@
         </p:nvSpPr>
         <p:spPr>
           <a:xfrm>
-            <a:off x="457200" y="320040"/>
-            <a:ext cx="11277295" cy="640080"/>
+            <a:off x="457200" y="292608"/>
+            <a:ext cx="8899855" cy="640080"/>
           </a:xfrm>
           <a:prstGeom prst="rect">
             <a:avLst/>
@@ -5747,13 +7074,13 @@
           <a:p>
             <a:pPr algn="l"/>
             <a:r>
-              <a:rPr sz="3000" b="1">
+              <a:rPr sz="2800" b="1">
                 <a:solidFill>
                   <a:srgbClr val="1F6F8B"/>
                 </a:solidFill>
                 <a:latin typeface="Segoe UI"/>
               </a:rPr>
-              <a:t>ETL uruchamiany na żywo — Airflow</a:t>
+              <a:t>ETL — tabela mapowań (skrót)</a:t>
             </a:r>
           </a:p>
         </p:txBody>
@@ -5766,7 +7093,7 @@
         </p:nvSpPr>
         <p:spPr>
           <a:xfrm>
-            <a:off x="457200" y="914400"/>
+            <a:off x="457200" y="868680"/>
             <a:ext cx="11277295" cy="365760"/>
           </a:xfrm>
           <a:prstGeom prst="rect">
@@ -5788,35 +7115,537 @@
                 </a:solidFill>
                 <a:latin typeface="Segoe UI"/>
               </a:rPr>
-              <a:t>pełny przebieg: crawler → Spark → gold → gwiazda → walidacja (~8 min)</a:t>
-            </a:r>
-          </a:p>
-        </p:txBody>
-      </p:sp>
-      <p:pic>
-        <p:nvPicPr>
-          <p:cNvPr id="5" name="Picture 4" descr="01_graf.png"/>
-          <p:cNvPicPr>
-            <a:picLocks noChangeAspect="1"/>
-          </p:cNvPicPr>
-          <p:nvPr/>
-        </p:nvPicPr>
-        <p:blipFill>
-          <a:blip r:embed="rId2"/>
-          <a:stretch>
-            <a:fillRect/>
-          </a:stretch>
-        </p:blipFill>
-        <p:spPr>
-          <a:xfrm>
-            <a:off x="1999335" y="1188720"/>
-            <a:ext cx="8193024" cy="5120640"/>
-          </a:xfrm>
-          <a:prstGeom prst="rect">
-            <a:avLst/>
-          </a:prstGeom>
-        </p:spPr>
-      </p:pic>
+              <a:t>pełna wersja: docs/etl_mapowania.md — źródło → transformacja → cel dla każdej kolumny</a:t>
+            </a:r>
+          </a:p>
+        </p:txBody>
+      </p:sp>
+      <p:sp>
+        <p:nvSpPr>
+          <p:cNvPr id="5" name="Rectangle 4"/>
+          <p:cNvSpPr/>
+          <p:nvPr/>
+        </p:nvSpPr>
+        <p:spPr>
+          <a:xfrm>
+            <a:off x="9448495" y="292608"/>
+            <a:ext cx="2286000" cy="502920"/>
+          </a:xfrm>
+          <a:prstGeom prst="rect">
+            <a:avLst/>
+          </a:prstGeom>
+          <a:solidFill>
+            <a:srgbClr val="E08E45"/>
+          </a:solidFill>
+          <a:ln>
+            <a:noFill/>
+          </a:ln>
+        </p:spPr>
+        <p:style>
+          <a:lnRef idx="1">
+            <a:schemeClr val="accent1"/>
+          </a:lnRef>
+          <a:fillRef idx="3">
+            <a:schemeClr val="accent1"/>
+          </a:fillRef>
+          <a:effectRef idx="2">
+            <a:schemeClr val="accent1"/>
+          </a:effectRef>
+          <a:fontRef idx="minor">
+            <a:schemeClr val="lt1"/>
+          </a:fontRef>
+        </p:style>
+        <p:txBody>
+          <a:bodyPr rtlCol="0" anchor="ctr"/>
+          <a:lstStyle/>
+          <a:p>
+            <a:pPr algn="ctr"/>
+            <a:r>
+              <a:rPr sz="1500" b="1">
+                <a:solidFill>
+                  <a:srgbClr val="FFFFFF"/>
+                </a:solidFill>
+                <a:latin typeface="Segoe UI"/>
+              </a:rPr>
+              <a:t>zadanie ✓</a:t>
+            </a:r>
+          </a:p>
+        </p:txBody>
+      </p:sp>
+      <p:sp>
+        <p:nvSpPr>
+          <p:cNvPr id="6" name="TextBox 5"/>
+          <p:cNvSpPr txBox="1"/>
+          <p:nvPr/>
+        </p:nvSpPr>
+        <p:spPr>
+          <a:xfrm>
+            <a:off x="548640" y="1417320"/>
+            <a:ext cx="3108960" cy="731520"/>
+          </a:xfrm>
+          <a:prstGeom prst="rect">
+            <a:avLst/>
+          </a:prstGeom>
+          <a:noFill/>
+        </p:spPr>
+        <p:txBody>
+          <a:bodyPr wrap="square">
+            <a:spAutoFit/>
+          </a:bodyPr>
+          <a:lstStyle/>
+          <a:p>
+            <a:pPr algn="l"/>
+            <a:r>
+              <a:rPr sz="1600" b="1">
+                <a:solidFill>
+                  <a:srgbClr val="1F6F8B"/>
+                </a:solidFill>
+                <a:latin typeface="Segoe UI"/>
+              </a:rPr>
+              <a:t>E: API → bronze</a:t>
+            </a:r>
+          </a:p>
+        </p:txBody>
+      </p:sp>
+      <p:sp>
+        <p:nvSpPr>
+          <p:cNvPr id="7" name="TextBox 6"/>
+          <p:cNvSpPr txBox="1"/>
+          <p:nvPr/>
+        </p:nvSpPr>
+        <p:spPr>
+          <a:xfrm>
+            <a:off x="3749039" y="1417320"/>
+            <a:ext cx="7955279" cy="731520"/>
+          </a:xfrm>
+          <a:prstGeom prst="rect">
+            <a:avLst/>
+          </a:prstGeom>
+          <a:noFill/>
+        </p:spPr>
+        <p:txBody>
+          <a:bodyPr wrap="square">
+            <a:spAutoFit/>
+          </a:bodyPr>
+          <a:lstStyle/>
+          <a:p>
+            <a:pPr algn="l"/>
+            <a:r>
+              <a:rPr sz="1400" b="0">
+                <a:solidFill>
+                  <a:srgbClr val="1A1A2E"/>
+                </a:solidFill>
+                <a:latin typeface="Segoe UI"/>
+              </a:rPr>
+              <a:t>Python, OAuth, paginacja, przyrostowo po timestamp; surowe CSV append-only</a:t>
+            </a:r>
+          </a:p>
+        </p:txBody>
+      </p:sp>
+      <p:sp>
+        <p:nvSpPr>
+          <p:cNvPr id="8" name="TextBox 7"/>
+          <p:cNvSpPr txBox="1"/>
+          <p:nvPr/>
+        </p:nvSpPr>
+        <p:spPr>
+          <a:xfrm>
+            <a:off x="548640" y="2167128"/>
+            <a:ext cx="3108960" cy="731520"/>
+          </a:xfrm>
+          <a:prstGeom prst="rect">
+            <a:avLst/>
+          </a:prstGeom>
+          <a:noFill/>
+        </p:spPr>
+        <p:txBody>
+          <a:bodyPr wrap="square">
+            <a:spAutoFit/>
+          </a:bodyPr>
+          <a:lstStyle/>
+          <a:p>
+            <a:pPr algn="l"/>
+            <a:r>
+              <a:rPr sz="1600" b="1">
+                <a:solidFill>
+                  <a:srgbClr val="1F6F8B"/>
+                </a:solidFill>
+                <a:latin typeface="Segoe UI"/>
+              </a:rPr>
+              <a:t>T1: bronze → silver</a:t>
+            </a:r>
+          </a:p>
+        </p:txBody>
+      </p:sp>
+      <p:sp>
+        <p:nvSpPr>
+          <p:cNvPr id="9" name="TextBox 8"/>
+          <p:cNvSpPr txBox="1"/>
+          <p:nvPr/>
+        </p:nvSpPr>
+        <p:spPr>
+          <a:xfrm>
+            <a:off x="3749039" y="2167128"/>
+            <a:ext cx="7955279" cy="731520"/>
+          </a:xfrm>
+          <a:prstGeom prst="rect">
+            <a:avLst/>
+          </a:prstGeom>
+          <a:noFill/>
+        </p:spPr>
+        <p:txBody>
+          <a:bodyPr wrap="square">
+            <a:spAutoFit/>
+          </a:bodyPr>
+          <a:lstStyle/>
+          <a:p>
+            <a:pPr algn="l"/>
+            <a:r>
+              <a:rPr sz="1400" b="0">
+                <a:solidFill>
+                  <a:srgbClr val="1A1A2E"/>
+                </a:solidFill>
+                <a:latin typeface="Segoe UI"/>
+              </a:rPr>
+              <a:t>Glue/Spark: dedup (najnowszy timestamp = SCD typ 1), anti-join deletes, typowanie, Parquet</a:t>
+            </a:r>
+          </a:p>
+        </p:txBody>
+      </p:sp>
+      <p:sp>
+        <p:nvSpPr>
+          <p:cNvPr id="10" name="TextBox 9"/>
+          <p:cNvSpPr txBox="1"/>
+          <p:nvPr/>
+        </p:nvSpPr>
+        <p:spPr>
+          <a:xfrm>
+            <a:off x="548640" y="2916936"/>
+            <a:ext cx="3108960" cy="731520"/>
+          </a:xfrm>
+          <a:prstGeom prst="rect">
+            <a:avLst/>
+          </a:prstGeom>
+          <a:noFill/>
+        </p:spPr>
+        <p:txBody>
+          <a:bodyPr wrap="square">
+            <a:spAutoFit/>
+          </a:bodyPr>
+          <a:lstStyle/>
+          <a:p>
+            <a:pPr algn="l"/>
+            <a:r>
+              <a:rPr sz="1600" b="1">
+                <a:solidFill>
+                  <a:srgbClr val="1F6F8B"/>
+                </a:solidFill>
+                <a:latin typeface="Segoe UI"/>
+              </a:rPr>
+              <a:t>T2: silver+bronze → gold</a:t>
+            </a:r>
+          </a:p>
+        </p:txBody>
+      </p:sp>
+      <p:sp>
+        <p:nvSpPr>
+          <p:cNvPr id="11" name="TextBox 10"/>
+          <p:cNvSpPr txBox="1"/>
+          <p:nvPr/>
+        </p:nvSpPr>
+        <p:spPr>
+          <a:xfrm>
+            <a:off x="3749039" y="2916936"/>
+            <a:ext cx="7955279" cy="731520"/>
+          </a:xfrm>
+          <a:prstGeom prst="rect">
+            <a:avLst/>
+          </a:prstGeom>
+          <a:noFill/>
+        </p:spPr>
+        <p:txBody>
+          <a:bodyPr wrap="square">
+            <a:spAutoFit/>
+          </a:bodyPr>
+          <a:lstStyle/>
+          <a:p>
+            <a:pPr algn="l"/>
+            <a:r>
+              <a:rPr sz="1400" b="0">
+                <a:solidFill>
+                  <a:srgbClr val="1A1A2E"/>
+                </a:solidFill>
+                <a:latin typeface="Segoe UI"/>
+              </a:rPr>
+              <a:t>Athena CTAS: integracja (interaction z bronze — bug casta w silverze), flaga cywilów, czyszczenie</a:t>
+            </a:r>
+          </a:p>
+        </p:txBody>
+      </p:sp>
+      <p:sp>
+        <p:nvSpPr>
+          <p:cNvPr id="12" name="TextBox 11"/>
+          <p:cNvSpPr txBox="1"/>
+          <p:nvPr/>
+        </p:nvSpPr>
+        <p:spPr>
+          <a:xfrm>
+            <a:off x="548640" y="3666744"/>
+            <a:ext cx="3108960" cy="731520"/>
+          </a:xfrm>
+          <a:prstGeom prst="rect">
+            <a:avLst/>
+          </a:prstGeom>
+          <a:noFill/>
+        </p:spPr>
+        <p:txBody>
+          <a:bodyPr wrap="square">
+            <a:spAutoFit/>
+          </a:bodyPr>
+          <a:lstStyle/>
+          <a:p>
+            <a:pPr algn="l"/>
+            <a:r>
+              <a:rPr sz="1600" b="1">
+                <a:solidFill>
+                  <a:srgbClr val="1F6F8B"/>
+                </a:solidFill>
+                <a:latin typeface="Segoe UI"/>
+              </a:rPr>
+              <a:t>L1: gold → wymiary</a:t>
+            </a:r>
+          </a:p>
+        </p:txBody>
+      </p:sp>
+      <p:sp>
+        <p:nvSpPr>
+          <p:cNvPr id="13" name="TextBox 12"/>
+          <p:cNvSpPr txBox="1"/>
+          <p:nvPr/>
+        </p:nvSpPr>
+        <p:spPr>
+          <a:xfrm>
+            <a:off x="3749039" y="3666744"/>
+            <a:ext cx="7955279" cy="731520"/>
+          </a:xfrm>
+          <a:prstGeom prst="rect">
+            <a:avLst/>
+          </a:prstGeom>
+          <a:noFill/>
+        </p:spPr>
+        <p:txBody>
+          <a:bodyPr wrap="square">
+            <a:spAutoFit/>
+          </a:bodyPr>
+          <a:lstStyle/>
+          <a:p>
+            <a:pPr algn="l"/>
+            <a:r>
+              <a:rPr sz="1400" b="0">
+                <a:solidFill>
+                  <a:srgbClr val="1A1A2E"/>
+                </a:solidFill>
+                <a:latin typeface="Segoe UI"/>
+              </a:rPr>
+              <a:t>7× CTAS: surogaty ROW_NUMBER + wiersz Unknown(−1); kalendarz z sequence()</a:t>
+            </a:r>
+          </a:p>
+        </p:txBody>
+      </p:sp>
+      <p:sp>
+        <p:nvSpPr>
+          <p:cNvPr id="14" name="TextBox 13"/>
+          <p:cNvSpPr txBox="1"/>
+          <p:nvPr/>
+        </p:nvSpPr>
+        <p:spPr>
+          <a:xfrm>
+            <a:off x="548640" y="4416552"/>
+            <a:ext cx="3108960" cy="731520"/>
+          </a:xfrm>
+          <a:prstGeom prst="rect">
+            <a:avLst/>
+          </a:prstGeom>
+          <a:noFill/>
+        </p:spPr>
+        <p:txBody>
+          <a:bodyPr wrap="square">
+            <a:spAutoFit/>
+          </a:bodyPr>
+          <a:lstStyle/>
+          <a:p>
+            <a:pPr algn="l"/>
+            <a:r>
+              <a:rPr sz="1600" b="1">
+                <a:solidFill>
+                  <a:srgbClr val="1F6F8B"/>
+                </a:solidFill>
+                <a:latin typeface="Segoe UI"/>
+              </a:rPr>
+              <a:t>L2: gold+wymiary → fakt</a:t>
+            </a:r>
+          </a:p>
+        </p:txBody>
+      </p:sp>
+      <p:sp>
+        <p:nvSpPr>
+          <p:cNvPr id="15" name="TextBox 14"/>
+          <p:cNvSpPr txBox="1"/>
+          <p:nvPr/>
+        </p:nvSpPr>
+        <p:spPr>
+          <a:xfrm>
+            <a:off x="3749039" y="4416552"/>
+            <a:ext cx="7955279" cy="731520"/>
+          </a:xfrm>
+          <a:prstGeom prst="rect">
+            <a:avLst/>
+          </a:prstGeom>
+          <a:noFill/>
+        </p:spPr>
+        <p:txBody>
+          <a:bodyPr wrap="square">
+            <a:spAutoFit/>
+          </a:bodyPr>
+          <a:lstStyle/>
+          <a:p>
+            <a:pPr algn="l"/>
+            <a:r>
+              <a:rPr sz="1400" b="0">
+                <a:solidFill>
+                  <a:srgbClr val="1A1A2E"/>
+                </a:solidFill>
+                <a:latin typeface="Segoe UI"/>
+              </a:rPr>
+              <a:t>lookup surogatów (LEFT JOIN + COALESCE −1); tylko klucze i miary</a:t>
+            </a:r>
+          </a:p>
+        </p:txBody>
+      </p:sp>
+      <p:sp>
+        <p:nvSpPr>
+          <p:cNvPr id="16" name="TextBox 15"/>
+          <p:cNvSpPr txBox="1"/>
+          <p:nvPr/>
+        </p:nvSpPr>
+        <p:spPr>
+          <a:xfrm>
+            <a:off x="548640" y="5166360"/>
+            <a:ext cx="3108960" cy="731520"/>
+          </a:xfrm>
+          <a:prstGeom prst="rect">
+            <a:avLst/>
+          </a:prstGeom>
+          <a:noFill/>
+        </p:spPr>
+        <p:txBody>
+          <a:bodyPr wrap="square">
+            <a:spAutoFit/>
+          </a:bodyPr>
+          <a:lstStyle/>
+          <a:p>
+            <a:pPr algn="l"/>
+            <a:r>
+              <a:rPr sz="1600" b="1">
+                <a:solidFill>
+                  <a:srgbClr val="1F6F8B"/>
+                </a:solidFill>
+                <a:latin typeface="Segoe UI"/>
+              </a:rPr>
+              <a:t>Walidacja</a:t>
+            </a:r>
+          </a:p>
+        </p:txBody>
+      </p:sp>
+      <p:sp>
+        <p:nvSpPr>
+          <p:cNvPr id="17" name="TextBox 16"/>
+          <p:cNvSpPr txBox="1"/>
+          <p:nvPr/>
+        </p:nvSpPr>
+        <p:spPr>
+          <a:xfrm>
+            <a:off x="3749039" y="5166360"/>
+            <a:ext cx="7955279" cy="731520"/>
+          </a:xfrm>
+          <a:prstGeom prst="rect">
+            <a:avLst/>
+          </a:prstGeom>
+          <a:noFill/>
+        </p:spPr>
+        <p:txBody>
+          <a:bodyPr wrap="square">
+            <a:spAutoFit/>
+          </a:bodyPr>
+          <a:lstStyle/>
+          <a:p>
+            <a:pPr algn="l"/>
+            <a:r>
+              <a:rPr sz="1400" b="0">
+                <a:solidFill>
+                  <a:srgbClr val="1A1A2E"/>
+                </a:solidFill>
+                <a:latin typeface="Segoe UI"/>
+              </a:rPr>
+              <a:t>rekoncyliacja: silver == gold == fakt (liczba zdarzeń ORAZ suma ofiar)</a:t>
+            </a:r>
+          </a:p>
+        </p:txBody>
+      </p:sp>
+      <p:sp>
+        <p:nvSpPr>
+          <p:cNvPr id="18" name="Rectangle 17"/>
+          <p:cNvSpPr/>
+          <p:nvPr/>
+        </p:nvSpPr>
+        <p:spPr>
+          <a:xfrm>
+            <a:off x="457200" y="5806440"/>
+            <a:ext cx="11277295" cy="777240"/>
+          </a:xfrm>
+          <a:prstGeom prst="rect">
+            <a:avLst/>
+          </a:prstGeom>
+          <a:solidFill>
+            <a:srgbClr val="FFFFFF"/>
+          </a:solidFill>
+          <a:ln w="19050">
+            <a:solidFill>
+              <a:srgbClr val="A50F15"/>
+            </a:solidFill>
+          </a:ln>
+        </p:spPr>
+        <p:style>
+          <a:lnRef idx="1">
+            <a:schemeClr val="accent1"/>
+          </a:lnRef>
+          <a:fillRef idx="3">
+            <a:schemeClr val="accent1"/>
+          </a:fillRef>
+          <a:effectRef idx="2">
+            <a:schemeClr val="accent1"/>
+          </a:effectRef>
+          <a:fontRef idx="minor">
+            <a:schemeClr val="lt1"/>
+          </a:fontRef>
+        </p:style>
+        <p:txBody>
+          <a:bodyPr rtlCol="0" anchor="ctr" wrap="square"/>
+          <a:lstStyle/>
+          <a:p>
+            <a:pPr algn="ctr"/>
+            <a:r>
+              <a:rPr sz="1500" b="1">
+                <a:solidFill>
+                  <a:srgbClr val="A50F15"/>
+                </a:solidFill>
+                <a:latin typeface="Segoe UI"/>
+              </a:rPr>
+              <a:t>PYTANIE DO PANI:  czy taka forma tabeli mapowań odpowiada wzorowi z Materiałów?</a:t>
+            </a:r>
+          </a:p>
+        </p:txBody>
+      </p:sp>
     </p:spTree>
   </p:cSld>
   <p:clrMapOvr>
@@ -5894,8 +7723,8 @@
         </p:nvSpPr>
         <p:spPr>
           <a:xfrm>
-            <a:off x="457200" y="320040"/>
-            <a:ext cx="11277295" cy="640080"/>
+            <a:off x="457200" y="292608"/>
+            <a:ext cx="8899855" cy="640080"/>
           </a:xfrm>
           <a:prstGeom prst="rect">
             <a:avLst/>
@@ -5910,151 +7739,72 @@
           <a:p>
             <a:pPr algn="l"/>
             <a:r>
-              <a:rPr sz="3000" b="1">
+              <a:rPr sz="2800" b="1">
                 <a:solidFill>
                   <a:srgbClr val="1F6F8B"/>
                 </a:solidFill>
                 <a:latin typeface="Segoe UI"/>
               </a:rPr>
-              <a:t>Walidacja: rekoncyliacja warstw po każdym runie</a:t>
-            </a:r>
-          </a:p>
-        </p:txBody>
-      </p:sp>
-      <p:sp>
-        <p:nvSpPr>
-          <p:cNvPr id="4" name="TextBox 3"/>
-          <p:cNvSpPr txBox="1"/>
-          <p:nvPr/>
-        </p:nvSpPr>
-        <p:spPr>
-          <a:xfrm>
-            <a:off x="548640" y="1371600"/>
-            <a:ext cx="5852160" cy="4572000"/>
-          </a:xfrm>
-          <a:prstGeom prst="rect">
-            <a:avLst/>
-          </a:prstGeom>
-          <a:noFill/>
-        </p:spPr>
-        <p:txBody>
-          <a:bodyPr wrap="square">
-            <a:spAutoFit/>
-          </a:bodyPr>
-          <a:lstStyle/>
-          <a:p>
-            <a:pPr/>
-            <a:r>
-              <a:rPr sz="1700" b="1">
-                <a:solidFill>
-                  <a:srgbClr val="1A1A2E"/>
-                </a:solidFill>
-                <a:latin typeface="Segoe UI"/>
-              </a:rPr>
-              <a:t>• Zadanie `validate` kończy każdy przebieg DAG-a</a:t>
-            </a:r>
-          </a:p>
-          <a:p>
-            <a:pPr/>
-            <a:r>
-              <a:rPr sz="1500" b="0">
-                <a:solidFill>
-                  <a:srgbClr val="6B6B7B"/>
-                </a:solidFill>
-                <a:latin typeface="Segoe UI"/>
-              </a:rPr>
-              <a:t>   – liczba zdarzeń: silver == gold == fakt</a:t>
-            </a:r>
-          </a:p>
-          <a:p>
-            <a:pPr/>
-            <a:r>
-              <a:rPr sz="1500" b="0">
-                <a:solidFill>
-                  <a:srgbClr val="6B6B7B"/>
-                </a:solidFill>
-                <a:latin typeface="Segoe UI"/>
-              </a:rPr>
-              <a:t>   – suma fatalities: silver == gold == fakt</a:t>
-            </a:r>
-          </a:p>
-          <a:p>
-            <a:pPr/>
-            <a:r>
-              <a:rPr sz="1700" b="1">
-                <a:solidFill>
-                  <a:srgbClr val="1A1A2E"/>
-                </a:solidFill>
-                <a:latin typeface="Segoe UI"/>
-              </a:rPr>
-              <a:t>• Dlaczego DWIE metryki, nie jedna?</a:t>
-            </a:r>
-          </a:p>
-          <a:p>
-            <a:pPr/>
-            <a:r>
-              <a:rPr sz="1500" b="0">
-                <a:solidFill>
-                  <a:srgbClr val="6B6B7B"/>
-                </a:solidFill>
-                <a:latin typeface="Segoe UI"/>
-              </a:rPr>
-              <a:t>   – liczba wierszy zgadzała się idealnie…</a:t>
-            </a:r>
-          </a:p>
-          <a:p>
-            <a:pPr/>
-            <a:r>
-              <a:rPr sz="1500" b="0">
-                <a:solidFill>
-                  <a:srgbClr val="6B6B7B"/>
-                </a:solidFill>
-                <a:latin typeface="Segoe UI"/>
-              </a:rPr>
-              <a:t>   – …a suma ofiar była 7× zaniżona (bug SerDe)</a:t>
-            </a:r>
-          </a:p>
-          <a:p>
-            <a:pPr/>
-            <a:r>
-              <a:rPr sz="1700" b="1">
-                <a:solidFill>
-                  <a:srgbClr val="1A1A2E"/>
-                </a:solidFill>
-                <a:latin typeface="Segoe UI"/>
-              </a:rPr>
-              <a:t>• Dlaczego rekoncyliacja, nie stałe liczby?</a:t>
-            </a:r>
-          </a:p>
-          <a:p>
-            <a:pPr/>
-            <a:r>
-              <a:rPr sz="1500" b="0">
-                <a:solidFill>
-                  <a:srgbClr val="6B6B7B"/>
-                </a:solidFill>
-                <a:latin typeface="Segoe UI"/>
-              </a:rPr>
-              <a:t>   – dane rosną przyrostowo — świeży ingest 2.07 dodał +198 zdarzeń</a:t>
-            </a:r>
-          </a:p>
-          <a:p>
-            <a:pPr/>
-            <a:r>
-              <a:rPr sz="1500" b="0">
-                <a:solidFill>
-                  <a:srgbClr val="6B6B7B"/>
-                </a:solidFill>
-                <a:latin typeface="Segoe UI"/>
-              </a:rPr>
-              <a:t>   – pipeline przetrawił je bez zmiany ani jednej linii kodu</a:t>
+              <a:t>ETL na żywo — Airflow (pełny przebieg, wszystkie kroki zielone)</a:t>
+            </a:r>
+          </a:p>
+        </p:txBody>
+      </p:sp>
+      <p:sp>
+        <p:nvSpPr>
+          <p:cNvPr id="4" name="Rectangle 3"/>
+          <p:cNvSpPr/>
+          <p:nvPr/>
+        </p:nvSpPr>
+        <p:spPr>
+          <a:xfrm>
+            <a:off x="9448495" y="292608"/>
+            <a:ext cx="2286000" cy="502920"/>
+          </a:xfrm>
+          <a:prstGeom prst="rect">
+            <a:avLst/>
+          </a:prstGeom>
+          <a:solidFill>
+            <a:srgbClr val="E08E45"/>
+          </a:solidFill>
+          <a:ln>
+            <a:noFill/>
+          </a:ln>
+        </p:spPr>
+        <p:style>
+          <a:lnRef idx="1">
+            <a:schemeClr val="accent1"/>
+          </a:lnRef>
+          <a:fillRef idx="3">
+            <a:schemeClr val="accent1"/>
+          </a:fillRef>
+          <a:effectRef idx="2">
+            <a:schemeClr val="accent1"/>
+          </a:effectRef>
+          <a:fontRef idx="minor">
+            <a:schemeClr val="lt1"/>
+          </a:fontRef>
+        </p:style>
+        <p:txBody>
+          <a:bodyPr rtlCol="0" anchor="ctr"/>
+          <a:lstStyle/>
+          <a:p>
+            <a:pPr algn="ctr"/>
+            <a:r>
+              <a:rPr sz="1500" b="1">
+                <a:solidFill>
+                  <a:srgbClr val="FFFFFF"/>
+                </a:solidFill>
+                <a:latin typeface="Segoe UI"/>
+              </a:rPr>
+              <a:t>pokażemy live</a:t>
             </a:r>
           </a:p>
         </p:txBody>
       </p:sp>
       <p:pic>
         <p:nvPicPr>
-          <p:cNvPr id="5" name="Picture 4" descr="13_validate.png"/>
+          <p:cNvPr id="5" name="Picture 4" descr="01_graf.png"/>
           <p:cNvPicPr>
             <a:picLocks noChangeAspect="1"/>
           </p:cNvPicPr>
@@ -6068,14 +7818,49 @@
         </p:blipFill>
         <p:spPr>
           <a:xfrm>
-            <a:off x="6583680" y="2120265"/>
-            <a:ext cx="5212080" cy="3257550"/>
+            <a:off x="2291944" y="1051560"/>
+            <a:ext cx="7607807" cy="4754880"/>
           </a:xfrm>
           <a:prstGeom prst="rect">
             <a:avLst/>
           </a:prstGeom>
         </p:spPr>
       </p:pic>
+      <p:sp>
+        <p:nvSpPr>
+          <p:cNvPr id="6" name="TextBox 5"/>
+          <p:cNvSpPr txBox="1"/>
+          <p:nvPr/>
+        </p:nvSpPr>
+        <p:spPr>
+          <a:xfrm>
+            <a:off x="457200" y="5852160"/>
+            <a:ext cx="11277295" cy="365760"/>
+          </a:xfrm>
+          <a:prstGeom prst="rect">
+            <a:avLst/>
+          </a:prstGeom>
+          <a:noFill/>
+        </p:spPr>
+        <p:txBody>
+          <a:bodyPr wrap="square">
+            <a:spAutoFit/>
+          </a:bodyPr>
+          <a:lstStyle/>
+          <a:p>
+            <a:pPr algn="l"/>
+            <a:r>
+              <a:rPr sz="1300" b="0">
+                <a:solidFill>
+                  <a:srgbClr val="6B6B7B"/>
+                </a:solidFill>
+                <a:latin typeface="Segoe UI"/>
+              </a:rPr>
+              <a:t>2 DAG-i: acled_manual_backfill (API→silver, parametr full/incremental) + acled_pipeline (gold→gwiazda→walidacja). Kroki idempotentne — można odpalić przy Pani.</a:t>
+            </a:r>
+          </a:p>
+        </p:txBody>
+      </p:sp>
     </p:spTree>
   </p:cSld>
   <p:clrMapOvr>
@@ -6153,8 +7938,8 @@
         </p:nvSpPr>
         <p:spPr>
           <a:xfrm>
-            <a:off x="457200" y="320040"/>
-            <a:ext cx="11277295" cy="640080"/>
+            <a:off x="457200" y="292608"/>
+            <a:ext cx="8899855" cy="640080"/>
           </a:xfrm>
           <a:prstGeom prst="rect">
             <a:avLst/>
@@ -6169,13 +7954,13 @@
           <a:p>
             <a:pPr algn="l"/>
             <a:r>
-              <a:rPr sz="3000" b="1">
+              <a:rPr sz="2800" b="1">
                 <a:solidFill>
                   <a:srgbClr val="1F6F8B"/>
                 </a:solidFill>
                 <a:latin typeface="Segoe UI"/>
               </a:rPr>
-              <a:t>Najciekawszy problem: cudzysłowy w CSV</a:t>
+              <a:t>Dowody ładowania — każdy wymiar + fakt + walidacja</a:t>
             </a:r>
           </a:p>
         </p:txBody>
@@ -6188,7 +7973,7 @@
         </p:nvSpPr>
         <p:spPr>
           <a:xfrm>
-            <a:off x="457200" y="914400"/>
+            <a:off x="457200" y="868680"/>
             <a:ext cx="11277295" cy="365760"/>
           </a:xfrm>
           <a:prstGeom prst="rect">
@@ -6210,21 +7995,121 @@
                 </a:solidFill>
                 <a:latin typeface="Segoe UI"/>
               </a:rPr>
-              <a:t>wykryty rekoncyliacją dwóch niezależnych ścieżek liczenia</a:t>
-            </a:r>
-          </a:p>
-        </p:txBody>
-      </p:sp>
-      <p:sp>
-        <p:nvSpPr>
-          <p:cNvPr id="5" name="TextBox 4"/>
+              <a:t>komplet 13 zrzutów w repo: screeny/</a:t>
+            </a:r>
+          </a:p>
+        </p:txBody>
+      </p:sp>
+      <p:sp>
+        <p:nvSpPr>
+          <p:cNvPr id="5" name="Rectangle 4"/>
+          <p:cNvSpPr/>
+          <p:nvPr/>
+        </p:nvSpPr>
+        <p:spPr>
+          <a:xfrm>
+            <a:off x="9448495" y="292608"/>
+            <a:ext cx="2286000" cy="502920"/>
+          </a:xfrm>
+          <a:prstGeom prst="rect">
+            <a:avLst/>
+          </a:prstGeom>
+          <a:solidFill>
+            <a:srgbClr val="E08E45"/>
+          </a:solidFill>
+          <a:ln>
+            <a:noFill/>
+          </a:ln>
+        </p:spPr>
+        <p:style>
+          <a:lnRef idx="1">
+            <a:schemeClr val="accent1"/>
+          </a:lnRef>
+          <a:fillRef idx="3">
+            <a:schemeClr val="accent1"/>
+          </a:fillRef>
+          <a:effectRef idx="2">
+            <a:schemeClr val="accent1"/>
+          </a:effectRef>
+          <a:fontRef idx="minor">
+            <a:schemeClr val="lt1"/>
+          </a:fontRef>
+        </p:style>
+        <p:txBody>
+          <a:bodyPr rtlCol="0" anchor="ctr"/>
+          <a:lstStyle/>
+          <a:p>
+            <a:pPr algn="ctr"/>
+            <a:r>
+              <a:rPr sz="1500" b="1">
+                <a:solidFill>
+                  <a:srgbClr val="FFFFFF"/>
+                </a:solidFill>
+                <a:latin typeface="Segoe UI"/>
+              </a:rPr>
+              <a:t>zadanie ✓</a:t>
+            </a:r>
+          </a:p>
+        </p:txBody>
+      </p:sp>
+      <p:pic>
+        <p:nvPicPr>
+          <p:cNvPr id="6" name="Picture 5" descr="12_fact_events.png"/>
+          <p:cNvPicPr>
+            <a:picLocks noChangeAspect="1"/>
+          </p:cNvPicPr>
+          <p:nvPr/>
+        </p:nvPicPr>
+        <p:blipFill>
+          <a:blip r:embed="rId2"/>
+          <a:stretch>
+            <a:fillRect/>
+          </a:stretch>
+        </p:blipFill>
+        <p:spPr>
+          <a:xfrm>
+            <a:off x="320040" y="1568767"/>
+            <a:ext cx="5806440" cy="3629025"/>
+          </a:xfrm>
+          <a:prstGeom prst="rect">
+            <a:avLst/>
+          </a:prstGeom>
+        </p:spPr>
+      </p:pic>
+      <p:pic>
+        <p:nvPicPr>
+          <p:cNvPr id="7" name="Picture 6" descr="13_validate.png"/>
+          <p:cNvPicPr>
+            <a:picLocks noChangeAspect="1"/>
+          </p:cNvPicPr>
+          <p:nvPr/>
+        </p:nvPicPr>
+        <p:blipFill>
+          <a:blip r:embed="rId3"/>
+          <a:stretch>
+            <a:fillRect/>
+          </a:stretch>
+        </p:blipFill>
+        <p:spPr>
+          <a:xfrm>
+            <a:off x="6263640" y="1568767"/>
+            <a:ext cx="5806440" cy="3629025"/>
+          </a:xfrm>
+          <a:prstGeom prst="rect">
+            <a:avLst/>
+          </a:prstGeom>
+        </p:spPr>
+      </p:pic>
+      <p:sp>
+        <p:nvSpPr>
+          <p:cNvPr id="8" name="TextBox 7"/>
           <p:cNvSpPr txBox="1"/>
           <p:nvPr/>
         </p:nvSpPr>
         <p:spPr>
           <a:xfrm>
-            <a:off x="548640" y="1371600"/>
-            <a:ext cx="11155680" cy="4937760"/>
+            <a:off x="548640" y="5532120"/>
+            <a:ext cx="5486400" cy="365760"/>
           </a:xfrm>
           <a:prstGeom prst="rect">
             <a:avLst/>
@@ -6237,75 +8122,104 @@
           </a:bodyPr>
           <a:lstStyle/>
           <a:p>
-            <a:pPr/>
-            <a:r>
-              <a:rPr sz="1700" b="1">
-                <a:solidFill>
-                  <a:srgbClr val="1A1A2E"/>
-                </a:solidFill>
-                <a:latin typeface="Segoe UI"/>
-              </a:rPr>
-              <a:t>• Objaw: suma ofiar 324 225 vs 2 346 465 — przy IDENTYCZNEJ liczbie wierszy</a:t>
-            </a:r>
-          </a:p>
-          <a:p>
-            <a:pPr/>
-            <a:r>
-              <a:rPr sz="1700" b="0">
-                <a:solidFill>
-                  <a:srgbClr val="1A1A2E"/>
-                </a:solidFill>
-                <a:latin typeface="Segoe UI"/>
-              </a:rPr>
-              <a:t>• Root cause: ACLED eksportuje CSV z wartościami w cudzysłowach — SerDe Atheny nie zdejmuje ich z liczb: BIGINT("12") → NULL w 93% wierszy</a:t>
-            </a:r>
-          </a:p>
-          <a:p>
-            <a:pPr/>
-            <a:r>
-              <a:rPr sz="1700" b="0">
-                <a:solidFill>
-                  <a:srgbClr val="1A1A2E"/>
-                </a:solidFill>
-                <a:latin typeface="Segoe UI"/>
-              </a:rPr>
-              <a:t>• Drugi bug: job Spark castował interaction (etykieta tekstowa) do INT → NULL w 100% wierszy silvera</a:t>
-            </a:r>
-          </a:p>
-          <a:p>
-            <a:pPr/>
-            <a:r>
-              <a:rPr sz="1700" b="1">
-                <a:solidFill>
-                  <a:srgbClr val="1A1A2E"/>
-                </a:solidFill>
-                <a:latin typeface="Segoe UI"/>
-              </a:rPr>
-              <a:t>• Fix: hybryda — liczby i teksty z silvera (Spark parsuje cudzysłowy poprawnie), interaction z bronze + czyszczenie</a:t>
-            </a:r>
-          </a:p>
-          <a:p>
-            <a:pPr/>
-            <a:r>
-              <a:rPr sz="1700" b="0">
-                <a:solidFill>
-                  <a:srgbClr val="1A1A2E"/>
-                </a:solidFill>
-                <a:latin typeface="Segoe UI"/>
-              </a:rPr>
-              <a:t>• Pseudo-nulle ("" po zdjęciu cudzysłowów) → wiersz Unknown(−1) w wymiarze — zgodnie z zasadami jakości danych</a:t>
-            </a:r>
-          </a:p>
-          <a:p>
-            <a:pPr/>
-            <a:r>
-              <a:rPr sz="1700" b="1">
-                <a:solidFill>
-                  <a:srgbClr val="1A1A2E"/>
-                </a:solidFill>
-                <a:latin typeface="Segoe UI"/>
-              </a:rPr>
-              <a:t>• Wniosek systemowy: walidujemy count ORAZ sumę miary, między warstwami — nie ze snapshotem</a:t>
+            <a:pPr algn="ctr"/>
+            <a:r>
+              <a:rPr sz="1400" b="0">
+                <a:solidFill>
+                  <a:srgbClr val="6B6B7B"/>
+                </a:solidFill>
+                <a:latin typeface="Segoe UI"/>
+              </a:rPr>
+              <a:t>ładowanie faktów — SUCCESS</a:t>
+            </a:r>
+          </a:p>
+        </p:txBody>
+      </p:sp>
+      <p:sp>
+        <p:nvSpPr>
+          <p:cNvPr id="9" name="TextBox 8"/>
+          <p:cNvSpPr txBox="1"/>
+          <p:nvPr/>
+        </p:nvSpPr>
+        <p:spPr>
+          <a:xfrm>
+            <a:off x="6400800" y="5532120"/>
+            <a:ext cx="5486400" cy="365760"/>
+          </a:xfrm>
+          <a:prstGeom prst="rect">
+            <a:avLst/>
+          </a:prstGeom>
+          <a:noFill/>
+        </p:spPr>
+        <p:txBody>
+          <a:bodyPr wrap="square">
+            <a:spAutoFit/>
+          </a:bodyPr>
+          <a:lstStyle/>
+          <a:p>
+            <a:pPr algn="ctr"/>
+            <a:r>
+              <a:rPr sz="1400" b="0">
+                <a:solidFill>
+                  <a:srgbClr val="6B6B7B"/>
+                </a:solidFill>
+                <a:latin typeface="Segoe UI"/>
+              </a:rPr>
+              <a:t>walidacja (asserty rekoncyliacji) — SUCCESS</a:t>
+            </a:r>
+          </a:p>
+        </p:txBody>
+      </p:sp>
+      <p:sp>
+        <p:nvSpPr>
+          <p:cNvPr id="10" name="Rectangle 9"/>
+          <p:cNvSpPr/>
+          <p:nvPr/>
+        </p:nvSpPr>
+        <p:spPr>
+          <a:xfrm>
+            <a:off x="457200" y="5806440"/>
+            <a:ext cx="11277295" cy="777240"/>
+          </a:xfrm>
+          <a:prstGeom prst="rect">
+            <a:avLst/>
+          </a:prstGeom>
+          <a:solidFill>
+            <a:srgbClr val="FFFFFF"/>
+          </a:solidFill>
+          <a:ln w="19050">
+            <a:solidFill>
+              <a:srgbClr val="A50F15"/>
+            </a:solidFill>
+          </a:ln>
+        </p:spPr>
+        <p:style>
+          <a:lnRef idx="1">
+            <a:schemeClr val="accent1"/>
+          </a:lnRef>
+          <a:fillRef idx="3">
+            <a:schemeClr val="accent1"/>
+          </a:fillRef>
+          <a:effectRef idx="2">
+            <a:schemeClr val="accent1"/>
+          </a:effectRef>
+          <a:fontRef idx="minor">
+            <a:schemeClr val="lt1"/>
+          </a:fontRef>
+        </p:style>
+        <p:txBody>
+          <a:bodyPr rtlCol="0" anchor="ctr" wrap="square"/>
+          <a:lstStyle/>
+          <a:p>
+            <a:pPr algn="ctr"/>
+            <a:r>
+              <a:rPr sz="1500" b="1">
+                <a:solidFill>
+                  <a:srgbClr val="A50F15"/>
+                </a:solidFill>
+                <a:latin typeface="Segoe UI"/>
+              </a:rPr>
+              <a:t>PYTANIE DO PANI:  czy zrzuty z zadań Airflow spełniają wymóg „momentu udanej operacji ładowania"?</a:t>
             </a:r>
           </a:p>
         </p:txBody>

--- a/docs/prezentacja_obrona.pptx
+++ b/docs/prezentacja_obrona.pptx
@@ -19,6 +19,8 @@
     <p:sldId id="267" r:id="rId18"/>
     <p:sldId id="268" r:id="rId19"/>
     <p:sldId id="269" r:id="rId20"/>
+    <p:sldId id="270" r:id="rId21"/>
+    <p:sldId id="271" r:id="rId22"/>
   </p:sldIdLst>
   <p:sldSz cx="12191695" cy="6858000" type="screen4x3"/>
   <p:notesSz cx="6858000" cy="9144000"/>
@@ -3176,13 +3178,13 @@
           <a:p>
             <a:pPr algn="l"/>
             <a:r>
-              <a:rPr sz="3800" b="1">
+              <a:rPr sz="3600" b="1">
                 <a:solidFill>
                   <a:srgbClr val="FFFFFF"/>
                 </a:solidFill>
                 <a:latin typeface="Segoe UI"/>
               </a:rPr>
-              <a:t>Hurtownia danych ACLED — przegląd realizacji</a:t>
+              <a:t>Hurtownia danych ACLED — realizacja wymagań</a:t>
             </a:r>
           </a:p>
         </p:txBody>
@@ -3217,7 +3219,7 @@
                 </a:solidFill>
                 <a:latin typeface="Segoe UI"/>
               </a:rPr>
-              <a:t>Pokazujemy wszystko, co mamy — prosimy o ocenę, czy taka realizacja</a:t>
+              <a:t>Wszystkie punkty wymagań zrealizowane — przedstawiamy dowody</a:t>
             </a:r>
           </a:p>
           <a:p>
@@ -3229,7 +3231,7 @@
                 </a:solidFill>
                 <a:latin typeface="Segoe UI"/>
               </a:rPr>
-              <a:t>spełnia wymagania projektu (i co poprawić, zanim będzie za późno).</a:t>
+              <a:t>i prosimy o weryfikację decyzji projektowych.</a:t>
             </a:r>
           </a:p>
         </p:txBody>
@@ -3403,7 +3405,7 @@
                 </a:solidFill>
                 <a:latin typeface="Segoe UI"/>
               </a:rPr>
-              <a:t>Warstwa semantyczna — model Power BI</a:t>
+              <a:t>Jakość danych — wykryte i naprawione (12 błędów)</a:t>
             </a:r>
           </a:p>
         </p:txBody>
@@ -3423,7 +3425,7 @@
             <a:avLst/>
           </a:prstGeom>
           <a:solidFill>
-            <a:srgbClr val="E08E45"/>
+            <a:srgbClr val="2E7D32"/>
           </a:solidFill>
           <a:ln>
             <a:noFill/>
@@ -3455,7 +3457,7 @@
                 </a:solidFill>
                 <a:latin typeface="Segoe UI"/>
               </a:rPr>
-              <a:t>wymóg 10 pkt</a:t>
+              <a:t>bonus</a:t>
             </a:r>
           </a:p>
         </p:txBody>
@@ -3468,8 +3470,8 @@
         </p:nvSpPr>
         <p:spPr>
           <a:xfrm>
-            <a:off x="548640" y="1234440"/>
-            <a:ext cx="6035040" cy="4754880"/>
+            <a:off x="548640" y="1280160"/>
+            <a:ext cx="11155680" cy="4572000"/>
           </a:xfrm>
           <a:prstGeom prst="rect">
             <a:avLst/>
@@ -3489,7 +3491,18 @@
                 </a:solidFill>
                 <a:latin typeface="Segoe UI"/>
               </a:rPr>
-              <a:t>• Import gwiazdy przez ODBC/Athena (tryb Import)</a:t>
+              <a:t>• Cudzysłowy w CSV psuły kolumny LICZBOWE przy odczycie z Athena — suma ofiar 7× zaniżona (324 tys. vs 2,35 mln)</a:t>
+            </a:r>
+          </a:p>
+          <a:p>
+            <a:r>
+              <a:rPr sz="1400" b="0">
+                <a:solidFill>
+                  <a:srgbClr val="6B6B7B"/>
+                </a:solidFill>
+                <a:latin typeface="Segoe UI"/>
+              </a:rPr>
+              <a:t>   – wykryte rekoncyliacją dwóch niezależnych ścieżek liczenia; liczba WIERSZY zgadzała się idealnie — dlatego walidujemy 2 metryki</a:t>
             </a:r>
           </a:p>
           <a:p>
@@ -3500,18 +3513,18 @@
                 </a:solidFill>
                 <a:latin typeface="Segoe UI"/>
               </a:rPr>
-              <a:t>• 7 relacji *:1 — wymiar filtruje fakt</a:t>
-            </a:r>
-          </a:p>
-          <a:p>
-            <a:r>
-              <a:rPr sz="1400" b="0">
-                <a:solidFill>
-                  <a:srgbClr val="6B6B7B"/>
-                </a:solidFill>
-                <a:latin typeface="Segoe UI"/>
-              </a:rPr>
-              <a:t>   – populacja: cross-filter Both (inaczej per capita liczy się źle)</a:t>
+              <a:t>• Cast interaction→INT kasował kolumnę tekstową w silverze — obejście hybrydą z bronze</a:t>
+            </a:r>
+          </a:p>
+          <a:p>
+            <a:r>
+              <a:rPr sz="1600" b="0">
+                <a:solidFill>
+                  <a:srgbClr val="1A1A2E"/>
+                </a:solidFill>
+                <a:latin typeface="Segoe UI"/>
+              </a:rPr>
+              <a:t>• Pseudo-nulle → Unknown(−1) · dziurawy kalendarz → sequence() · duplikat skryptu Glue po restrukturyzacji repo</a:t>
             </a:r>
           </a:p>
           <a:p>
@@ -3522,290 +3535,18 @@
                 </a:solidFill>
                 <a:latin typeface="Segoe UI"/>
               </a:rPr>
-              <a:t>• 15 miar DAX</a:t>
-            </a:r>
-          </a:p>
-          <a:p>
-            <a:r>
-              <a:rPr sz="1400" b="0">
-                <a:solidFill>
-                  <a:srgbClr val="6B6B7B"/>
-                </a:solidFill>
-                <a:latin typeface="Segoe UI"/>
-              </a:rPr>
-              <a:t>   – SUM/COUNTROWS/DIVIDE · CALCULATE (protesty vs przemoc)</a:t>
-            </a:r>
-          </a:p>
-          <a:p>
-            <a:r>
-              <a:rPr sz="1400" b="0">
-                <a:solidFill>
-                  <a:srgbClr val="6B6B7B"/>
-                </a:solidFill>
-                <a:latin typeface="Segoe UI"/>
-              </a:rPr>
-              <a:t>   – DATEADD → YoY · DISTINCTCOUNT · per-100k</a:t>
-            </a:r>
-          </a:p>
-          <a:p>
-            <a:r>
-              <a:rPr sz="1600" b="1">
+              <a:t>• Walidacja automatyczna po KAŻDYM runie: silver == gold == fakt (zdarzenia + ofiary)</a:t>
+            </a:r>
+          </a:p>
+          <a:p>
+            <a:r>
+              <a:rPr sz="1600" b="0">
                 <a:solidFill>
                   <a:srgbClr val="1A1A2E"/>
                 </a:solidFill>
                 <a:latin typeface="Segoe UI"/>
               </a:rPr>
-              <a:t>• 3 hierarchie z drill-down + sort miesięcy po numerze</a:t>
-            </a:r>
-          </a:p>
-          <a:p>
-            <a:r>
-              <a:rPr sz="1400" b="0">
-                <a:solidFill>
-                  <a:srgbClr val="6B6B7B"/>
-                </a:solidFill>
-                <a:latin typeface="Segoe UI"/>
-              </a:rPr>
-              <a:t>   – Rok→Kwartał→Miesiąc · Region→Kraj · Disorder→Event→Sub</a:t>
-            </a:r>
-          </a:p>
-          <a:p>
-            <a:r>
-              <a:rPr sz="1600" b="0">
-                <a:solidFill>
-                  <a:srgbClr val="1A1A2E"/>
-                </a:solidFill>
-                <a:latin typeface="Segoe UI"/>
-              </a:rPr>
-              <a:t>• dim_date oznaczona jako tabela dat</a:t>
-            </a:r>
-          </a:p>
-          <a:p>
-            <a:r>
-              <a:rPr sz="1600" b="1">
-                <a:solidFill>
-                  <a:srgbClr val="1A1A2E"/>
-                </a:solidFill>
-                <a:latin typeface="Segoe UI"/>
-              </a:rPr>
-              <a:t>• Jeden model odpowiada na WSZYSTKIE 12 pytań</a:t>
-            </a:r>
-          </a:p>
-        </p:txBody>
-      </p:sp>
-      <p:sp>
-        <p:nvSpPr>
-          <p:cNvPr id="6" name="Rectangle 5"/>
-          <p:cNvSpPr/>
-          <p:nvPr/>
-        </p:nvSpPr>
-        <p:spPr>
-          <a:xfrm>
-            <a:off x="6858000" y="1463040"/>
-            <a:ext cx="4754880" cy="3840480"/>
-          </a:xfrm>
-          <a:prstGeom prst="rect">
-            <a:avLst/>
-          </a:prstGeom>
-          <a:solidFill>
-            <a:srgbClr val="FFFFFF"/>
-          </a:solidFill>
-          <a:ln>
-            <a:solidFill>
-              <a:srgbClr val="1F6F8B"/>
-            </a:solidFill>
-          </a:ln>
-        </p:spPr>
-        <p:style>
-          <a:lnRef idx="1">
-            <a:schemeClr val="accent1"/>
-          </a:lnRef>
-          <a:fillRef idx="3">
-            <a:schemeClr val="accent1"/>
-          </a:fillRef>
-          <a:effectRef idx="2">
-            <a:schemeClr val="accent1"/>
-          </a:effectRef>
-          <a:fontRef idx="minor">
-            <a:schemeClr val="lt1"/>
-          </a:fontRef>
-        </p:style>
-        <p:txBody>
-          <a:bodyPr rtlCol="0" anchor="ctr"/>
-          <a:lstStyle/>
-          <a:p>
-            <a:pPr algn="ctr"/>
-          </a:p>
-        </p:txBody>
-      </p:sp>
-      <p:sp>
-        <p:nvSpPr>
-          <p:cNvPr id="7" name="TextBox 6"/>
-          <p:cNvSpPr txBox="1"/>
-          <p:nvPr/>
-        </p:nvSpPr>
-        <p:spPr>
-          <a:xfrm>
-            <a:off x="7132320" y="1691640"/>
-            <a:ext cx="4206240" cy="457200"/>
-          </a:xfrm>
-          <a:prstGeom prst="rect">
-            <a:avLst/>
-          </a:prstGeom>
-          <a:noFill/>
-        </p:spPr>
-        <p:txBody>
-          <a:bodyPr wrap="square">
-            <a:spAutoFit/>
-          </a:bodyPr>
-          <a:lstStyle/>
-          <a:p>
-            <a:pPr algn="l"/>
-            <a:r>
-              <a:rPr sz="1700" b="1">
-                <a:solidFill>
-                  <a:srgbClr val="1F6F8B"/>
-                </a:solidFill>
-                <a:latin typeface="Segoe UI"/>
-              </a:rPr>
-              <a:t>Rola SQL-i per-pytanie (gold_*)</a:t>
-            </a:r>
-          </a:p>
-        </p:txBody>
-      </p:sp>
-      <p:sp>
-        <p:nvSpPr>
-          <p:cNvPr id="8" name="TextBox 7"/>
-          <p:cNvSpPr txBox="1"/>
-          <p:nvPr/>
-        </p:nvSpPr>
-        <p:spPr>
-          <a:xfrm>
-            <a:off x="7132320" y="2194560"/>
-            <a:ext cx="4206240" cy="2926080"/>
-          </a:xfrm>
-          <a:prstGeom prst="rect">
-            <a:avLst/>
-          </a:prstGeom>
-          <a:noFill/>
-        </p:spPr>
-        <p:txBody>
-          <a:bodyPr wrap="square">
-            <a:spAutoFit/>
-          </a:bodyPr>
-          <a:lstStyle/>
-          <a:p>
-            <a:pPr algn="l"/>
-            <a:r>
-              <a:rPr sz="1500" b="0">
-                <a:solidFill>
-                  <a:srgbClr val="1A1A2E"/>
-                </a:solidFill>
-                <a:latin typeface="Segoe UI"/>
-              </a:rPr>
-              <a:t>To NIE jest warstwa semantyczna —</a:t>
-            </a:r>
-          </a:p>
-          <a:p>
-            <a:pPr algn="l"/>
-            <a:r>
-              <a:rPr sz="1500" b="0">
-                <a:solidFill>
-                  <a:srgbClr val="1A1A2E"/>
-                </a:solidFill>
-                <a:latin typeface="Segoe UI"/>
-              </a:rPr>
-              <a:t>to uzasadnienie doboru wymiarów</a:t>
-            </a:r>
-          </a:p>
-          <a:p>
-            <a:pPr algn="l"/>
-            <a:r>
-              <a:rPr sz="1500" b="0">
-                <a:solidFill>
-                  <a:srgbClr val="1A1A2E"/>
-                </a:solidFill>
-                <a:latin typeface="Segoe UI"/>
-              </a:rPr>
-              <a:t>i miar oraz niezależna ścieżka</a:t>
-            </a:r>
-          </a:p>
-          <a:p>
-            <a:pPr algn="l"/>
-            <a:r>
-              <a:rPr sz="1500" b="0">
-                <a:solidFill>
-                  <a:srgbClr val="1A1A2E"/>
-                </a:solidFill>
-                <a:latin typeface="Segoe UI"/>
-              </a:rPr>
-              <a:t>weryfikacji wyników (to ona wykryła</a:t>
-            </a:r>
-          </a:p>
-          <a:p>
-            <a:pPr algn="l"/>
-            <a:r>
-              <a:rPr sz="1500" b="0">
-                <a:solidFill>
-                  <a:srgbClr val="1A1A2E"/>
-                </a:solidFill>
-                <a:latin typeface="Segoe UI"/>
-              </a:rPr>
-              <a:t>błąd zaniżonych ofiar 7×).</a:t>
-            </a:r>
-          </a:p>
-        </p:txBody>
-      </p:sp>
-      <p:sp>
-        <p:nvSpPr>
-          <p:cNvPr id="9" name="Rectangle 8"/>
-          <p:cNvSpPr/>
-          <p:nvPr/>
-        </p:nvSpPr>
-        <p:spPr>
-          <a:xfrm>
-            <a:off x="457200" y="5806440"/>
-            <a:ext cx="11277295" cy="777240"/>
-          </a:xfrm>
-          <a:prstGeom prst="rect">
-            <a:avLst/>
-          </a:prstGeom>
-          <a:solidFill>
-            <a:srgbClr val="FFFFFF"/>
-          </a:solidFill>
-          <a:ln w="19050">
-            <a:solidFill>
-              <a:srgbClr val="A50F15"/>
-            </a:solidFill>
-          </a:ln>
-        </p:spPr>
-        <p:style>
-          <a:lnRef idx="1">
-            <a:schemeClr val="accent1"/>
-          </a:lnRef>
-          <a:fillRef idx="3">
-            <a:schemeClr val="accent1"/>
-          </a:fillRef>
-          <a:effectRef idx="2">
-            <a:schemeClr val="accent1"/>
-          </a:effectRef>
-          <a:fontRef idx="minor">
-            <a:schemeClr val="lt1"/>
-          </a:fontRef>
-        </p:style>
-        <p:txBody>
-          <a:bodyPr rtlCol="0" anchor="ctr" wrap="square"/>
-          <a:lstStyle/>
-          <a:p>
-            <a:pPr algn="ctr"/>
-            <a:r>
-              <a:rPr sz="1500" b="1">
-                <a:solidFill>
-                  <a:srgbClr val="A50F15"/>
-                </a:solidFill>
-                <a:latin typeface="Segoe UI"/>
-              </a:rPr>
-              <a:t>PYTANIE DO PANI:  czy model Power BI jest akceptowalny jako warstwa semantyczna (zamiast SSAS)?</a:t>
+              <a:t>• Test odporności: świeży ingest (2.07) dodał +198 zdarzeń — pipeline przetrawił bez zmiany linii kodu</a:t>
             </a:r>
           </a:p>
         </p:txBody>
@@ -3909,49 +3650,14 @@
                 </a:solidFill>
                 <a:latin typeface="Segoe UI"/>
               </a:rPr>
-              <a:t>Raporty — stan: W TRAKCIE</a:t>
-            </a:r>
-          </a:p>
-        </p:txBody>
-      </p:sp>
-      <p:sp>
-        <p:nvSpPr>
-          <p:cNvPr id="4" name="TextBox 3"/>
-          <p:cNvSpPr txBox="1"/>
-          <p:nvPr/>
-        </p:nvSpPr>
-        <p:spPr>
-          <a:xfrm>
-            <a:off x="457200" y="868680"/>
-            <a:ext cx="11277295" cy="365760"/>
-          </a:xfrm>
-          <a:prstGeom prst="rect">
-            <a:avLst/>
-          </a:prstGeom>
-          <a:noFill/>
-        </p:spPr>
-        <p:txBody>
-          <a:bodyPr wrap="square">
-            <a:spAutoFit/>
-          </a:bodyPr>
-          <a:lstStyle/>
-          <a:p>
-            <a:pPr algn="l"/>
-            <a:r>
-              <a:rPr sz="1400" b="0">
-                <a:solidFill>
-                  <a:srgbClr val="6B6B7B"/>
-                </a:solidFill>
-                <a:latin typeface="Segoe UI"/>
-              </a:rPr>
-              <a:t>model gotowy; strony klikamy według poniższego planu — do pokazania na zjeździe</a:t>
-            </a:r>
-          </a:p>
-        </p:txBody>
-      </p:sp>
-      <p:sp>
-        <p:nvSpPr>
-          <p:cNvPr id="5" name="Rectangle 4"/>
+              <a:t>Warstwa semantyczna — model Power BI</a:t>
+            </a:r>
+          </a:p>
+        </p:txBody>
+      </p:sp>
+      <p:sp>
+        <p:nvSpPr>
+          <p:cNvPr id="4" name="Rectangle 3"/>
           <p:cNvSpPr/>
           <p:nvPr/>
         </p:nvSpPr>
@@ -3964,7 +3670,7 @@
             <a:avLst/>
           </a:prstGeom>
           <a:solidFill>
-            <a:srgbClr val="E08E45"/>
+            <a:srgbClr val="2E7D32"/>
           </a:solidFill>
           <a:ln>
             <a:noFill/>
@@ -3996,21 +3702,21 @@
                 </a:solidFill>
                 <a:latin typeface="Segoe UI"/>
               </a:rPr>
-              <a:t>do dokończenia</a:t>
-            </a:r>
-          </a:p>
-        </p:txBody>
-      </p:sp>
-      <p:sp>
-        <p:nvSpPr>
-          <p:cNvPr id="6" name="TextBox 5"/>
+              <a:t>wymóg 10 pkt ✔</a:t>
+            </a:r>
+          </a:p>
+        </p:txBody>
+      </p:sp>
+      <p:sp>
+        <p:nvSpPr>
+          <p:cNvPr id="5" name="TextBox 4"/>
           <p:cNvSpPr txBox="1"/>
           <p:nvPr/>
         </p:nvSpPr>
         <p:spPr>
           <a:xfrm>
-            <a:off x="548640" y="1371600"/>
-            <a:ext cx="11155680" cy="4206240"/>
+            <a:off x="548640" y="1234440"/>
+            <a:ext cx="6035040" cy="4754880"/>
           </a:xfrm>
           <a:prstGeom prst="rect">
             <a:avLst/>
@@ -4030,7 +3736,7 @@
                 </a:solidFill>
                 <a:latin typeface="Segoe UI"/>
               </a:rPr>
-              <a:t>• Dashboard (pierwsza strona): 4 karty KPI + trend + struktura + slicery + przyciski nawigacji</a:t>
+              <a:t>• Import gwiazdy „na płasko" (ODBC/Athena)</a:t>
             </a:r>
           </a:p>
           <a:p>
@@ -4041,7 +3747,18 @@
                 </a:solidFill>
                 <a:latin typeface="Segoe UI"/>
               </a:rPr>
-              <a:t>• 7 stron = 12 pytań: mapa, słupkowe Top N, liniowe z legendą, macierz-heatmapa, punktowy, tabele rankingowe</a:t>
+              <a:t>• 7 relacji *:1 — wymiar filtruje fakt</a:t>
+            </a:r>
+          </a:p>
+          <a:p>
+            <a:r>
+              <a:rPr sz="1600" b="1">
+                <a:solidFill>
+                  <a:srgbClr val="1A1A2E"/>
+                </a:solidFill>
+                <a:latin typeface="Segoe UI"/>
+              </a:rPr>
+              <a:t>• 15+ miar DAX (SUM/COUNTROWS/DIVIDE/CALCULATE/DATEADD/DISTINCTCOUNT/RANKX)</a:t>
             </a:r>
           </a:p>
           <a:p>
@@ -4052,7 +3769,7 @@
                 </a:solidFill>
                 <a:latin typeface="Segoe UI"/>
               </a:rPr>
-              <a:t>• Mechaniki ze skryptu zajęć: slicery zsynchronizowane · drill-down · formatowanie warunkowe · interakcje</a:t>
+              <a:t>• 3 hierarchie z drill-down + chronologiczny sort miesięcy</a:t>
             </a:r>
           </a:p>
           <a:p>
@@ -4063,7 +3780,7 @@
                 </a:solidFill>
                 <a:latin typeface="Segoe UI"/>
               </a:rPr>
-              <a:t>• Zasady wizualizacji (wykład 8): słupki od zera, oś czasu chronologicznie, bez 3D</a:t>
+              <a:t>• dim_date oznaczona jako tabela dat; klucze techniczne ukryte</a:t>
             </a:r>
           </a:p>
           <a:p>
@@ -4074,14 +3791,200 @@
                 </a:solidFill>
                 <a:latin typeface="Segoe UI"/>
               </a:rPr>
-              <a:t>• Przykładowe odpowiedzi już z SQL: Ukraina 2022 +35 tys. (inwazja) · Palestyna #10→#1 per capita · Państwo–Rebelianci 612 tys. ofiar · Afryka Środkowa ~38% celowania w cywilów</a:t>
-            </a:r>
-          </a:p>
-        </p:txBody>
-      </p:sp>
-      <p:sp>
-        <p:nvSpPr>
-          <p:cNvPr id="7" name="Rectangle 6"/>
+              <a:t>• Jeden model odpowiada na WSZYSTKIE 12 pytań</a:t>
+            </a:r>
+          </a:p>
+          <a:p>
+            <a:r>
+              <a:rPr sz="1600" b="0">
+                <a:solidFill>
+                  <a:srgbClr val="1A1A2E"/>
+                </a:solidFill>
+                <a:latin typeface="Segoe UI"/>
+              </a:rPr>
+              <a:t>• SQL-e per-pytanie (gold_*) = uzasadnienie wymiarów i miar + niezależna weryfikacja wyników</a:t>
+            </a:r>
+          </a:p>
+        </p:txBody>
+      </p:sp>
+      <p:sp>
+        <p:nvSpPr>
+          <p:cNvPr id="6" name="Rectangle 5"/>
+          <p:cNvSpPr/>
+          <p:nvPr/>
+        </p:nvSpPr>
+        <p:spPr>
+          <a:xfrm>
+            <a:off x="6858000" y="1463040"/>
+            <a:ext cx="4754880" cy="3840480"/>
+          </a:xfrm>
+          <a:prstGeom prst="rect">
+            <a:avLst/>
+          </a:prstGeom>
+          <a:solidFill>
+            <a:srgbClr val="FFFFFF"/>
+          </a:solidFill>
+          <a:ln>
+            <a:solidFill>
+              <a:srgbClr val="1F6F8B"/>
+            </a:solidFill>
+          </a:ln>
+        </p:spPr>
+        <p:style>
+          <a:lnRef idx="1">
+            <a:schemeClr val="accent1"/>
+          </a:lnRef>
+          <a:fillRef idx="3">
+            <a:schemeClr val="accent1"/>
+          </a:fillRef>
+          <a:effectRef idx="2">
+            <a:schemeClr val="accent1"/>
+          </a:effectRef>
+          <a:fontRef idx="minor">
+            <a:schemeClr val="lt1"/>
+          </a:fontRef>
+        </p:style>
+        <p:txBody>
+          <a:bodyPr rtlCol="0" anchor="ctr"/>
+          <a:lstStyle/>
+          <a:p>
+            <a:pPr algn="ctr"/>
+          </a:p>
+        </p:txBody>
+      </p:sp>
+      <p:sp>
+        <p:nvSpPr>
+          <p:cNvPr id="7" name="TextBox 6"/>
+          <p:cNvSpPr txBox="1"/>
+          <p:nvPr/>
+        </p:nvSpPr>
+        <p:spPr>
+          <a:xfrm>
+            <a:off x="7132320" y="1691640"/>
+            <a:ext cx="4206240" cy="457200"/>
+          </a:xfrm>
+          <a:prstGeom prst="rect">
+            <a:avLst/>
+          </a:prstGeom>
+          <a:noFill/>
+        </p:spPr>
+        <p:txBody>
+          <a:bodyPr wrap="square">
+            <a:spAutoFit/>
+          </a:bodyPr>
+          <a:lstStyle/>
+          <a:p>
+            <a:pPr algn="l"/>
+            <a:r>
+              <a:rPr sz="1700" b="1">
+                <a:solidFill>
+                  <a:srgbClr val="1F6F8B"/>
+                </a:solidFill>
+                <a:latin typeface="Segoe UI"/>
+              </a:rPr>
+              <a:t>Zgodność ze skryptem zajęć</a:t>
+            </a:r>
+          </a:p>
+        </p:txBody>
+      </p:sp>
+      <p:sp>
+        <p:nvSpPr>
+          <p:cNvPr id="8" name="TextBox 7"/>
+          <p:cNvSpPr txBox="1"/>
+          <p:nvPr/>
+        </p:nvSpPr>
+        <p:spPr>
+          <a:xfrm>
+            <a:off x="7132320" y="2194560"/>
+            <a:ext cx="4206240" cy="3017520"/>
+          </a:xfrm>
+          <a:prstGeom prst="rect">
+            <a:avLst/>
+          </a:prstGeom>
+          <a:noFill/>
+        </p:spPr>
+        <p:txBody>
+          <a:bodyPr wrap="square">
+            <a:spAutoFit/>
+          </a:bodyPr>
+          <a:lstStyle/>
+          <a:p>
+            <a:pPr algn="l"/>
+            <a:r>
+              <a:rPr sz="1500" b="0">
+                <a:solidFill>
+                  <a:srgbClr val="1A1A2E"/>
+                </a:solidFill>
+                <a:latin typeface="Segoe UI"/>
+              </a:rPr>
+              <a:t>model przed wykresami ✔</a:t>
+            </a:r>
+          </a:p>
+          <a:p>
+            <a:pPr algn="l"/>
+            <a:r>
+              <a:rPr sz="1500" b="0">
+                <a:solidFill>
+                  <a:srgbClr val="1A1A2E"/>
+                </a:solidFill>
+                <a:latin typeface="Segoe UI"/>
+              </a:rPr>
+              <a:t>tryb Import ✔</a:t>
+            </a:r>
+          </a:p>
+          <a:p>
+            <a:pPr algn="l"/>
+            <a:r>
+              <a:rPr sz="1500" b="0">
+                <a:solidFill>
+                  <a:srgbClr val="1A1A2E"/>
+                </a:solidFill>
+                <a:latin typeface="Segoe UI"/>
+              </a:rPr>
+              <a:t>DIVIDE zamiast „/" ✔</a:t>
+            </a:r>
+          </a:p>
+          <a:p>
+            <a:pPr algn="l"/>
+            <a:r>
+              <a:rPr sz="1500" b="0">
+                <a:solidFill>
+                  <a:srgbClr val="1A1A2E"/>
+                </a:solidFill>
+                <a:latin typeface="Segoe UI"/>
+              </a:rPr>
+              <a:t>miary zamiast kolumn ✔</a:t>
+            </a:r>
+          </a:p>
+          <a:p>
+            <a:pPr algn="l"/>
+            <a:r>
+              <a:rPr sz="1500" b="0">
+                <a:solidFill>
+                  <a:srgbClr val="1A1A2E"/>
+                </a:solidFill>
+                <a:latin typeface="Segoe UI"/>
+              </a:rPr>
+              <a:t>foldery + formaty ✔</a:t>
+            </a:r>
+          </a:p>
+          <a:p>
+            <a:pPr algn="l"/>
+            <a:r>
+              <a:rPr sz="1500" b="0">
+                <a:solidFill>
+                  <a:srgbClr val="1A1A2E"/>
+                </a:solidFill>
+                <a:latin typeface="Segoe UI"/>
+              </a:rPr>
+              <a:t>ukryte klucze ✔</a:t>
+            </a:r>
+          </a:p>
+        </p:txBody>
+      </p:sp>
+      <p:sp>
+        <p:nvSpPr>
+          <p:cNvPr id="9" name="Rectangle 8"/>
           <p:cNvSpPr/>
           <p:nvPr/>
         </p:nvSpPr>
@@ -4128,7 +4031,7 @@
                 </a:solidFill>
                 <a:latin typeface="Segoe UI"/>
               </a:rPr>
-              <a:t>PYTANIE DO PANI:  czy taki układ raportu (dashboard + strona per pytanie) odpowiada oczekiwaniom?</a:t>
+              <a:t>PYTANIE DO PANI:  czy model Power BI jest akceptowalny jako warstwa semantyczna (zamiast SSAS)?</a:t>
             </a:r>
           </a:p>
         </p:txBody>
@@ -4232,7 +4135,7 @@
                 </a:solidFill>
                 <a:latin typeface="Segoe UI"/>
               </a:rPr>
-              <a:t>Jakość danych — co znaleźliśmy i naprawiliśmy</a:t>
+              <a:t>Raporty — Dashboard (strona startowa)</a:t>
             </a:r>
           </a:p>
         </p:txBody>
@@ -4252,7 +4155,7 @@
             <a:avLst/>
           </a:prstGeom>
           <a:solidFill>
-            <a:srgbClr val="E08E45"/>
+            <a:srgbClr val="2E7D32"/>
           </a:solidFill>
           <a:ln>
             <a:noFill/>
@@ -4284,21 +4187,85 @@
                 </a:solidFill>
                 <a:latin typeface="Segoe UI"/>
               </a:rPr>
-              <a:t>bonus</a:t>
-            </a:r>
-          </a:p>
-        </p:txBody>
-      </p:sp>
-      <p:sp>
-        <p:nvSpPr>
-          <p:cNvPr id="5" name="TextBox 4"/>
+              <a:t>wymóg 10 pkt ✔</a:t>
+            </a:r>
+          </a:p>
+        </p:txBody>
+      </p:sp>
+      <p:sp>
+        <p:nvSpPr>
+          <p:cNvPr id="5" name="Rectangle 4"/>
+          <p:cNvSpPr/>
+          <p:nvPr/>
+        </p:nvSpPr>
+        <p:spPr>
+          <a:xfrm>
+            <a:off x="457200" y="1234440"/>
+            <a:ext cx="8229600" cy="4846320"/>
+          </a:xfrm>
+          <a:prstGeom prst="rect">
+            <a:avLst/>
+          </a:prstGeom>
+          <a:solidFill>
+            <a:srgbClr val="ECECE8"/>
+          </a:solidFill>
+          <a:ln w="25400">
+            <a:solidFill>
+              <a:srgbClr val="E08E45"/>
+            </a:solidFill>
+          </a:ln>
+        </p:spPr>
+        <p:style>
+          <a:lnRef idx="1">
+            <a:schemeClr val="accent1"/>
+          </a:lnRef>
+          <a:fillRef idx="3">
+            <a:schemeClr val="accent1"/>
+          </a:fillRef>
+          <a:effectRef idx="2">
+            <a:schemeClr val="accent1"/>
+          </a:effectRef>
+          <a:fontRef idx="minor">
+            <a:schemeClr val="lt1"/>
+          </a:fontRef>
+        </p:style>
+        <p:txBody>
+          <a:bodyPr rtlCol="0" anchor="ctr" wrap="square"/>
+          <a:lstStyle/>
+          <a:p>
+            <a:pPr algn="ctr"/>
+            <a:r>
+              <a:rPr sz="1600" b="1">
+                <a:solidFill>
+                  <a:srgbClr val="E08E45"/>
+                </a:solidFill>
+                <a:latin typeface="Segoe UI"/>
+              </a:rPr>
+              <a:t>TU WKLEJ SCREEN DASHBOARDU</a:t>
+            </a:r>
+            <a:br/>
+            <a:r>
+              <a:rPr sz="1600" b="1">
+                <a:solidFill>
+                  <a:srgbClr val="E08E45"/>
+                </a:solidFill>
+                <a:latin typeface="Segoe UI"/>
+              </a:rPr>
+              <a:t>(otwórz .pbix → PrintScreen → Ctrl+V na tym slajdzie)</a:t>
+            </a:r>
+          </a:p>
+        </p:txBody>
+      </p:sp>
+      <p:sp>
+        <p:nvSpPr>
+          <p:cNvPr id="6" name="TextBox 5"/>
           <p:cNvSpPr txBox="1"/>
           <p:nvPr/>
         </p:nvSpPr>
         <p:spPr>
           <a:xfrm>
-            <a:off x="548640" y="1280160"/>
-            <a:ext cx="11155680" cy="4572000"/>
+            <a:off x="8915400" y="1371600"/>
+            <a:ext cx="3017520" cy="4754880"/>
           </a:xfrm>
           <a:prstGeom prst="rect">
             <a:avLst/>
@@ -4312,68 +4279,68 @@
           <a:lstStyle/>
           <a:p>
             <a:r>
-              <a:rPr sz="1600" b="1">
+              <a:rPr sz="1400" b="1">
                 <a:solidFill>
                   <a:srgbClr val="1A1A2E"/>
                 </a:solidFill>
                 <a:latin typeface="Segoe UI"/>
               </a:rPr>
-              <a:t>• Cudzysłowy w CSV psuły kolumny liczbowe przy odczycie przez Athenę — suma ofiar 7× zaniżona (324 tys. zamiast 2,35 mln)</a:t>
+              <a:t>• 4 karty KPI</a:t>
             </a:r>
           </a:p>
           <a:p>
             <a:r>
               <a:rPr sz="1400" b="0">
                 <a:solidFill>
+                  <a:srgbClr val="1A1A2E"/>
+                </a:solidFill>
+                <a:latin typeface="Segoe UI"/>
+              </a:rPr>
+              <a:t>• trend + struktura</a:t>
+            </a:r>
+          </a:p>
+          <a:p>
+            <a:r>
+              <a:rPr sz="1400" b="0">
+                <a:solidFill>
+                  <a:srgbClr val="1A1A2E"/>
+                </a:solidFill>
+                <a:latin typeface="Segoe UI"/>
+              </a:rPr>
+              <a:t>• TOP kraje / typy</a:t>
+            </a:r>
+          </a:p>
+          <a:p>
+            <a:r>
+              <a:rPr sz="1400" b="1">
+                <a:solidFill>
+                  <a:srgbClr val="1A1A2E"/>
+                </a:solidFill>
+                <a:latin typeface="Segoe UI"/>
+              </a:rPr>
+              <a:t>• slicery rok+region</a:t>
+            </a:r>
+          </a:p>
+          <a:p>
+            <a:r>
+              <a:rPr sz="1200" b="0">
+                <a:solidFill>
                   <a:srgbClr val="6B6B7B"/>
                 </a:solidFill>
                 <a:latin typeface="Segoe UI"/>
               </a:rPr>
-              <a:t>   – wykryte rekoncyliacją dwóch niezależnych ścieżek liczenia; fix: odczyt z Parquet silvera</a:t>
-            </a:r>
-          </a:p>
-          <a:p>
-            <a:r>
-              <a:rPr sz="1600" b="0">
+              <a:t>   – zsynchronizowane między stronami</a:t>
+            </a:r>
+          </a:p>
+          <a:p>
+            <a:r>
+              <a:rPr sz="1400" b="1">
                 <a:solidFill>
                   <a:srgbClr val="1A1A2E"/>
                 </a:solidFill>
                 <a:latin typeface="Segoe UI"/>
               </a:rPr>
-              <a:t>• Cast interaction→INT w jobie Spark kasował kolumnę (etykieta tekstowa) — obejście: hybryda z bronze</a:t>
-            </a:r>
-          </a:p>
-          <a:p>
-            <a:r>
-              <a:rPr sz="1600" b="0">
-                <a:solidFill>
-                  <a:srgbClr val="1A1A2E"/>
-                </a:solidFill>
-                <a:latin typeface="Segoe UI"/>
-              </a:rPr>
-              <a:t>• Pseudo-nulle („") → wiersz Unknown(−1); dziurawy kalendarz → ciągły sequence(); 12 błędów łącznie</a:t>
-            </a:r>
-          </a:p>
-          <a:p>
-            <a:r>
-              <a:rPr sz="1600" b="1">
-                <a:solidFill>
-                  <a:srgbClr val="1A1A2E"/>
-                </a:solidFill>
-                <a:latin typeface="Segoe UI"/>
-              </a:rPr>
-              <a:t>• Wniosek: walidacja automatyczna po każdym runie — liczba zdarzeń ORAZ suma miary, między warstwami</a:t>
-            </a:r>
-          </a:p>
-          <a:p>
-            <a:r>
-              <a:rPr sz="1600" b="0">
-                <a:solidFill>
-                  <a:srgbClr val="1A1A2E"/>
-                </a:solidFill>
-                <a:latin typeface="Segoe UI"/>
-              </a:rPr>
-              <a:t>• Dane żywe: świeży ingest (2.07) dodał +198 zdarzeń — pipeline przetrawił bez zmiany linii kodu</a:t>
+              <a:t>• nawigacja boczna do 8 stron</a:t>
             </a:r>
           </a:p>
         </p:txBody>
@@ -4477,7 +4444,7 @@
                 </a:solidFill>
                 <a:latin typeface="Segoe UI"/>
               </a:rPr>
-              <a:t>Pytania, na które potrzebujemy Pani decyzji</a:t>
+              <a:t>Raporty — 8 stron analitycznych = 12 pytań</a:t>
             </a:r>
           </a:p>
         </p:txBody>
@@ -4497,7 +4464,7 @@
             <a:avLst/>
           </a:prstGeom>
           <a:solidFill>
-            <a:srgbClr val="E08E45"/>
+            <a:srgbClr val="2E7D32"/>
           </a:solidFill>
           <a:ln>
             <a:noFill/>
@@ -4529,21 +4496,237 @@
                 </a:solidFill>
                 <a:latin typeface="Segoe UI"/>
               </a:rPr>
-              <a:t>PROSIMY O FEEDBACK</a:t>
-            </a:r>
-          </a:p>
-        </p:txBody>
-      </p:sp>
-      <p:sp>
-        <p:nvSpPr>
-          <p:cNvPr id="5" name="TextBox 4"/>
+              <a:t>wymóg ✔</a:t>
+            </a:r>
+          </a:p>
+        </p:txBody>
+      </p:sp>
+      <p:sp>
+        <p:nvSpPr>
+          <p:cNvPr id="5" name="Rectangle 4"/>
+          <p:cNvSpPr/>
+          <p:nvPr/>
+        </p:nvSpPr>
+        <p:spPr>
+          <a:xfrm>
+            <a:off x="457200" y="1234440"/>
+            <a:ext cx="5486400" cy="2377440"/>
+          </a:xfrm>
+          <a:prstGeom prst="rect">
+            <a:avLst/>
+          </a:prstGeom>
+          <a:solidFill>
+            <a:srgbClr val="ECECE8"/>
+          </a:solidFill>
+          <a:ln w="25400">
+            <a:solidFill>
+              <a:srgbClr val="E08E45"/>
+            </a:solidFill>
+          </a:ln>
+        </p:spPr>
+        <p:style>
+          <a:lnRef idx="1">
+            <a:schemeClr val="accent1"/>
+          </a:lnRef>
+          <a:fillRef idx="3">
+            <a:schemeClr val="accent1"/>
+          </a:fillRef>
+          <a:effectRef idx="2">
+            <a:schemeClr val="accent1"/>
+          </a:effectRef>
+          <a:fontRef idx="minor">
+            <a:schemeClr val="lt1"/>
+          </a:fontRef>
+        </p:style>
+        <p:txBody>
+          <a:bodyPr rtlCol="0" anchor="ctr" wrap="square"/>
+          <a:lstStyle/>
+          <a:p>
+            <a:pPr algn="ctr"/>
+            <a:r>
+              <a:rPr sz="1600" b="1">
+                <a:solidFill>
+                  <a:srgbClr val="E08E45"/>
+                </a:solidFill>
+                <a:latin typeface="Segoe UI"/>
+              </a:rPr>
+              <a:t>TU WKLEJ SCREEN: 01 Geografia (Q1–2)</a:t>
+            </a:r>
+          </a:p>
+        </p:txBody>
+      </p:sp>
+      <p:sp>
+        <p:nvSpPr>
+          <p:cNvPr id="6" name="Rectangle 5"/>
+          <p:cNvSpPr/>
+          <p:nvPr/>
+        </p:nvSpPr>
+        <p:spPr>
+          <a:xfrm>
+            <a:off x="6355080" y="1234440"/>
+            <a:ext cx="5486400" cy="2377440"/>
+          </a:xfrm>
+          <a:prstGeom prst="rect">
+            <a:avLst/>
+          </a:prstGeom>
+          <a:solidFill>
+            <a:srgbClr val="ECECE8"/>
+          </a:solidFill>
+          <a:ln w="25400">
+            <a:solidFill>
+              <a:srgbClr val="E08E45"/>
+            </a:solidFill>
+          </a:ln>
+        </p:spPr>
+        <p:style>
+          <a:lnRef idx="1">
+            <a:schemeClr val="accent1"/>
+          </a:lnRef>
+          <a:fillRef idx="3">
+            <a:schemeClr val="accent1"/>
+          </a:fillRef>
+          <a:effectRef idx="2">
+            <a:schemeClr val="accent1"/>
+          </a:effectRef>
+          <a:fontRef idx="minor">
+            <a:schemeClr val="lt1"/>
+          </a:fontRef>
+        </p:style>
+        <p:txBody>
+          <a:bodyPr rtlCol="0" anchor="ctr" wrap="square"/>
+          <a:lstStyle/>
+          <a:p>
+            <a:pPr algn="ctr"/>
+            <a:r>
+              <a:rPr sz="1600" b="1">
+                <a:solidFill>
+                  <a:srgbClr val="E08E45"/>
+                </a:solidFill>
+                <a:latin typeface="Segoe UI"/>
+              </a:rPr>
+              <a:t>TU WKLEJ SCREEN: 03 Sezonowość — heatmapa (Q4)</a:t>
+            </a:r>
+          </a:p>
+        </p:txBody>
+      </p:sp>
+      <p:sp>
+        <p:nvSpPr>
+          <p:cNvPr id="7" name="Rectangle 6"/>
+          <p:cNvSpPr/>
+          <p:nvPr/>
+        </p:nvSpPr>
+        <p:spPr>
+          <a:xfrm>
+            <a:off x="457200" y="3840480"/>
+            <a:ext cx="5486400" cy="2377440"/>
+          </a:xfrm>
+          <a:prstGeom prst="rect">
+            <a:avLst/>
+          </a:prstGeom>
+          <a:solidFill>
+            <a:srgbClr val="ECECE8"/>
+          </a:solidFill>
+          <a:ln w="25400">
+            <a:solidFill>
+              <a:srgbClr val="E08E45"/>
+            </a:solidFill>
+          </a:ln>
+        </p:spPr>
+        <p:style>
+          <a:lnRef idx="1">
+            <a:schemeClr val="accent1"/>
+          </a:lnRef>
+          <a:fillRef idx="3">
+            <a:schemeClr val="accent1"/>
+          </a:fillRef>
+          <a:effectRef idx="2">
+            <a:schemeClr val="accent1"/>
+          </a:effectRef>
+          <a:fontRef idx="minor">
+            <a:schemeClr val="lt1"/>
+          </a:fontRef>
+        </p:style>
+        <p:txBody>
+          <a:bodyPr rtlCol="0" anchor="ctr" wrap="square"/>
+          <a:lstStyle/>
+          <a:p>
+            <a:pPr algn="ctr"/>
+            <a:r>
+              <a:rPr sz="1600" b="1">
+                <a:solidFill>
+                  <a:srgbClr val="E08E45"/>
+                </a:solidFill>
+                <a:latin typeface="Segoe UI"/>
+              </a:rPr>
+              <a:t>TU WKLEJ SCREEN: 07 Eskalacja — YoY (Q11)</a:t>
+            </a:r>
+          </a:p>
+        </p:txBody>
+      </p:sp>
+      <p:sp>
+        <p:nvSpPr>
+          <p:cNvPr id="8" name="Rectangle 7"/>
+          <p:cNvSpPr/>
+          <p:nvPr/>
+        </p:nvSpPr>
+        <p:spPr>
+          <a:xfrm>
+            <a:off x="6355080" y="3840480"/>
+            <a:ext cx="5486400" cy="2377440"/>
+          </a:xfrm>
+          <a:prstGeom prst="rect">
+            <a:avLst/>
+          </a:prstGeom>
+          <a:solidFill>
+            <a:srgbClr val="ECECE8"/>
+          </a:solidFill>
+          <a:ln w="25400">
+            <a:solidFill>
+              <a:srgbClr val="E08E45"/>
+            </a:solidFill>
+          </a:ln>
+        </p:spPr>
+        <p:style>
+          <a:lnRef idx="1">
+            <a:schemeClr val="accent1"/>
+          </a:lnRef>
+          <a:fillRef idx="3">
+            <a:schemeClr val="accent1"/>
+          </a:fillRef>
+          <a:effectRef idx="2">
+            <a:schemeClr val="accent1"/>
+          </a:effectRef>
+          <a:fontRef idx="minor">
+            <a:schemeClr val="lt1"/>
+          </a:fontRef>
+        </p:style>
+        <p:txBody>
+          <a:bodyPr rtlCol="0" anchor="ctr" wrap="square"/>
+          <a:lstStyle/>
+          <a:p>
+            <a:pPr algn="ctr"/>
+            <a:r>
+              <a:rPr sz="1600" b="1">
+                <a:solidFill>
+                  <a:srgbClr val="E08E45"/>
+                </a:solidFill>
+                <a:latin typeface="Segoe UI"/>
+              </a:rPr>
+              <a:t>TU WKLEJ SCREEN: 08 Per capita — flip rankingu (Q12)</a:t>
+            </a:r>
+          </a:p>
+        </p:txBody>
+      </p:sp>
+      <p:sp>
+        <p:nvSpPr>
+          <p:cNvPr id="9" name="TextBox 8"/>
           <p:cNvSpPr txBox="1"/>
           <p:nvPr/>
         </p:nvSpPr>
         <p:spPr>
           <a:xfrm>
-            <a:off x="548640" y="1280160"/>
-            <a:ext cx="11155680" cy="4937760"/>
+            <a:off x="457200" y="6355080"/>
+            <a:ext cx="11247120" cy="365760"/>
           </a:xfrm>
           <a:prstGeom prst="rect">
             <a:avLst/>
@@ -4556,91 +4739,15 @@
           </a:bodyPr>
           <a:lstStyle/>
           <a:p>
-            <a:r>
-              <a:rPr sz="1700" b="1">
-                <a:solidFill>
-                  <a:srgbClr val="1A1A2E"/>
-                </a:solidFill>
-                <a:latin typeface="Segoe UI"/>
-              </a:rPr>
-              <a:t>• 1. Czy SCHEMAT GWIAZDY jest poprawny? (kluczowe — prosimy o formalne „sprawdzenie schematu")</a:t>
-            </a:r>
-          </a:p>
-          <a:p>
-            <a:r>
-              <a:rPr sz="1700" b="0">
-                <a:solidFill>
-                  <a:srgbClr val="1A1A2E"/>
-                </a:solidFill>
-                <a:latin typeface="Segoe UI"/>
-              </a:rPr>
-              <a:t>• 2. Stack: Airflow + Athena/S3 + model Power BI zamiast SSIS/SSAS/SSRS — akceptowalny?</a:t>
-            </a:r>
-          </a:p>
-          <a:p>
-            <a:r>
-              <a:rPr sz="1700" b="0">
-                <a:solidFill>
-                  <a:srgbClr val="1A1A2E"/>
-                </a:solidFill>
-                <a:latin typeface="Segoe UI"/>
-              </a:rPr>
-              <a:t>• 3. event_id_cnty jako wymiar zdegenerowany — dopuszczalny? (liczność = liczności faktu)</a:t>
-            </a:r>
-          </a:p>
-          <a:p>
-            <a:r>
-              <a:rPr sz="1700" b="0">
-                <a:solidFill>
-                  <a:srgbClr val="1A1A2E"/>
-                </a:solidFill>
-                <a:latin typeface="Segoe UI"/>
-              </a:rPr>
-              <a:t>• 4. Klucz iso_year (iso·10000+rok) dla populacji — czy woli Pani inne rozwiązanie klucza złożonego?</a:t>
-            </a:r>
-          </a:p>
-          <a:p>
-            <a:r>
-              <a:rPr sz="1700" b="0">
-                <a:solidFill>
-                  <a:srgbClr val="1A1A2E"/>
-                </a:solidFill>
-                <a:latin typeface="Segoe UI"/>
-              </a:rPr>
-              <a:t>• 5. Rejestrowanie historii: SCD typ 1 (nadpisanie) + rejestr usunięć — wystarczające uzasadnienie?</a:t>
-            </a:r>
-          </a:p>
-          <a:p>
-            <a:r>
-              <a:rPr sz="1700" b="0">
-                <a:solidFill>
-                  <a:srgbClr val="1A1A2E"/>
-                </a:solidFill>
-                <a:latin typeface="Segoe UI"/>
-              </a:rPr>
-              <a:t>• 6. Rok 2025 jest niepełny (dane do czerwca) — jak prezentować YoY?</a:t>
-            </a:r>
-          </a:p>
-          <a:p>
-            <a:r>
-              <a:rPr sz="1700" b="0">
-                <a:solidFill>
-                  <a:srgbClr val="1A1A2E"/>
-                </a:solidFill>
-                <a:latin typeface="Segoe UI"/>
-              </a:rPr>
-              <a:t>• 7. Per capita: brak populacji dla Kosowa (brak kodu ISO numeric, 0,4% zdarzeń) — akceptowalna luka?</a:t>
-            </a:r>
-          </a:p>
-          <a:p>
-            <a:r>
-              <a:rPr sz="1700" b="0">
-                <a:solidFill>
-                  <a:srgbClr val="1A1A2E"/>
-                </a:solidFill>
-                <a:latin typeface="Segoe UI"/>
-              </a:rPr>
-              <a:t>• 8. Czy forma dowodów (screeny z Airflow) i tabeli mapowań odpowiada wymaganiom zadań?</a:t>
+            <a:pPr algn="l"/>
+            <a:r>
+              <a:rPr sz="1300" b="0">
+                <a:solidFill>
+                  <a:srgbClr val="6B6B7B"/>
+                </a:solidFill>
+                <a:latin typeface="Segoe UI"/>
+              </a:rPr>
+              <a:t>pozostałe strony: 02 Trendy (Q3) · 04 Typy zdarzeń (Q5–6) · 05 Aktorzy (Q7–8) · 06 Cywile (Q9) · 07 Źródła (Q10) — pokaz na żywo</a:t>
             </a:r>
           </a:p>
         </p:txBody>
@@ -4744,21 +4851,124 @@
                 </a:solidFill>
                 <a:latin typeface="Segoe UI"/>
               </a:rPr>
-              <a:t>Podsumowanie stanu</a:t>
-            </a:r>
-          </a:p>
-        </p:txBody>
-      </p:sp>
-      <p:sp>
-        <p:nvSpPr>
-          <p:cNvPr id="4" name="TextBox 3"/>
+              <a:t>Raporty — mechaniki wymagane na zajęciach</a:t>
+            </a:r>
+          </a:p>
+        </p:txBody>
+      </p:sp>
+      <p:sp>
+        <p:nvSpPr>
+          <p:cNvPr id="4" name="Rectangle 3"/>
+          <p:cNvSpPr/>
+          <p:nvPr/>
+        </p:nvSpPr>
+        <p:spPr>
+          <a:xfrm>
+            <a:off x="9448495" y="292608"/>
+            <a:ext cx="2286000" cy="502920"/>
+          </a:xfrm>
+          <a:prstGeom prst="rect">
+            <a:avLst/>
+          </a:prstGeom>
+          <a:solidFill>
+            <a:srgbClr val="2E7D32"/>
+          </a:solidFill>
+          <a:ln>
+            <a:noFill/>
+          </a:ln>
+        </p:spPr>
+        <p:style>
+          <a:lnRef idx="1">
+            <a:schemeClr val="accent1"/>
+          </a:lnRef>
+          <a:fillRef idx="3">
+            <a:schemeClr val="accent1"/>
+          </a:fillRef>
+          <a:effectRef idx="2">
+            <a:schemeClr val="accent1"/>
+          </a:effectRef>
+          <a:fontRef idx="minor">
+            <a:schemeClr val="lt1"/>
+          </a:fontRef>
+        </p:style>
+        <p:txBody>
+          <a:bodyPr rtlCol="0" anchor="ctr"/>
+          <a:lstStyle/>
+          <a:p>
+            <a:pPr algn="ctr"/>
+            <a:r>
+              <a:rPr sz="1500" b="1">
+                <a:solidFill>
+                  <a:srgbClr val="FFFFFF"/>
+                </a:solidFill>
+                <a:latin typeface="Segoe UI"/>
+              </a:rPr>
+              <a:t>checklist ✔</a:t>
+            </a:r>
+          </a:p>
+        </p:txBody>
+      </p:sp>
+      <p:sp>
+        <p:nvSpPr>
+          <p:cNvPr id="5" name="Rectangle 4"/>
+          <p:cNvSpPr/>
+          <p:nvPr/>
+        </p:nvSpPr>
+        <p:spPr>
+          <a:xfrm>
+            <a:off x="548640" y="1344168"/>
+            <a:ext cx="329184" cy="329184"/>
+          </a:xfrm>
+          <a:prstGeom prst="rect">
+            <a:avLst/>
+          </a:prstGeom>
+          <a:solidFill>
+            <a:srgbClr val="2E7D32"/>
+          </a:solidFill>
+          <a:ln>
+            <a:noFill/>
+          </a:ln>
+        </p:spPr>
+        <p:style>
+          <a:lnRef idx="1">
+            <a:schemeClr val="accent1"/>
+          </a:lnRef>
+          <a:fillRef idx="3">
+            <a:schemeClr val="accent1"/>
+          </a:fillRef>
+          <a:effectRef idx="2">
+            <a:schemeClr val="accent1"/>
+          </a:effectRef>
+          <a:fontRef idx="minor">
+            <a:schemeClr val="lt1"/>
+          </a:fontRef>
+        </p:style>
+        <p:txBody>
+          <a:bodyPr rtlCol="0" anchor="ctr"/>
+          <a:lstStyle/>
+          <a:p>
+            <a:pPr algn="ctr"/>
+            <a:r>
+              <a:rPr sz="1500" b="1">
+                <a:solidFill>
+                  <a:srgbClr val="FFFFFF"/>
+                </a:solidFill>
+              </a:rPr>
+              <a:t>✔</a:t>
+            </a:r>
+          </a:p>
+        </p:txBody>
+      </p:sp>
+      <p:sp>
+        <p:nvSpPr>
+          <p:cNvPr id="6" name="TextBox 5"/>
           <p:cNvSpPr txBox="1"/>
           <p:nvPr/>
         </p:nvSpPr>
         <p:spPr>
           <a:xfrm>
-            <a:off x="548640" y="1371600"/>
-            <a:ext cx="11155680" cy="3291840"/>
+            <a:off x="1051560" y="1325880"/>
+            <a:ext cx="4480560" cy="457200"/>
           </a:xfrm>
           <a:prstGeom prst="rect">
             <a:avLst/>
@@ -4771,50 +4981,29 @@
           </a:bodyPr>
           <a:lstStyle/>
           <a:p>
-            <a:r>
-              <a:rPr sz="1800" b="1">
+            <a:pPr algn="l"/>
+            <a:r>
+              <a:rPr sz="1500" b="1">
                 <a:solidFill>
                   <a:srgbClr val="1A1A2E"/>
                 </a:solidFill>
                 <a:latin typeface="Segoe UI"/>
               </a:rPr>
-              <a:t>• GOTOWE: pipeline E2E (żywy, walidowany) · gwiazda · model semantyczny · mapowania · screeny · dokumentacja</a:t>
-            </a:r>
-          </a:p>
-          <a:p>
-            <a:r>
-              <a:rPr sz="1800" b="1">
-                <a:solidFill>
-                  <a:srgbClr val="1A1A2E"/>
-                </a:solidFill>
-                <a:latin typeface="Segoe UI"/>
-              </a:rPr>
-              <a:t>• W TRAKCIE: strony raportu w Power BI (model już stoi — zostało klikanie wykresów)</a:t>
-            </a:r>
-          </a:p>
-          <a:p>
-            <a:r>
-              <a:rPr sz="1800" b="0">
-                <a:solidFill>
-                  <a:srgbClr val="1A1A2E"/>
-                </a:solidFill>
-                <a:latin typeface="Segoe UI"/>
-              </a:rPr>
-              <a:t>• Wszystko w repozytorium — kod, SQL, DAG-i, diagramy, dowody</a:t>
-            </a:r>
-          </a:p>
-        </p:txBody>
-      </p:sp>
-      <p:sp>
-        <p:nvSpPr>
-          <p:cNvPr id="5" name="TextBox 4"/>
+              <a:t>Dashboard jako pierwsza strona + karty KPI</a:t>
+            </a:r>
+          </a:p>
+        </p:txBody>
+      </p:sp>
+      <p:sp>
+        <p:nvSpPr>
+          <p:cNvPr id="7" name="TextBox 6"/>
           <p:cNvSpPr txBox="1"/>
           <p:nvPr/>
         </p:nvSpPr>
         <p:spPr>
           <a:xfrm>
-            <a:off x="548640" y="4937760"/>
-            <a:ext cx="10972800" cy="914400"/>
+            <a:off x="5623560" y="1325880"/>
+            <a:ext cx="6309360" cy="457200"/>
           </a:xfrm>
           <a:prstGeom prst="rect">
             <a:avLst/>
@@ -4829,13 +5018,1322 @@
           <a:p>
             <a:pPr algn="l"/>
             <a:r>
+              <a:rPr sz="1300" b="0">
+                <a:solidFill>
+                  <a:srgbClr val="6B6B7B"/>
+                </a:solidFill>
+                <a:latin typeface="Segoe UI"/>
+              </a:rPr>
+              <a:t>szybkie zrozumienie sytuacji, potem szczegóły</a:t>
+            </a:r>
+          </a:p>
+        </p:txBody>
+      </p:sp>
+      <p:sp>
+        <p:nvSpPr>
+          <p:cNvPr id="8" name="Rectangle 7"/>
+          <p:cNvSpPr/>
+          <p:nvPr/>
+        </p:nvSpPr>
+        <p:spPr>
+          <a:xfrm>
+            <a:off x="548640" y="1947672"/>
+            <a:ext cx="329184" cy="329184"/>
+          </a:xfrm>
+          <a:prstGeom prst="rect">
+            <a:avLst/>
+          </a:prstGeom>
+          <a:solidFill>
+            <a:srgbClr val="2E7D32"/>
+          </a:solidFill>
+          <a:ln>
+            <a:noFill/>
+          </a:ln>
+        </p:spPr>
+        <p:style>
+          <a:lnRef idx="1">
+            <a:schemeClr val="accent1"/>
+          </a:lnRef>
+          <a:fillRef idx="3">
+            <a:schemeClr val="accent1"/>
+          </a:fillRef>
+          <a:effectRef idx="2">
+            <a:schemeClr val="accent1"/>
+          </a:effectRef>
+          <a:fontRef idx="minor">
+            <a:schemeClr val="lt1"/>
+          </a:fontRef>
+        </p:style>
+        <p:txBody>
+          <a:bodyPr rtlCol="0" anchor="ctr"/>
+          <a:lstStyle/>
+          <a:p>
+            <a:pPr algn="ctr"/>
+            <a:r>
+              <a:rPr sz="1500" b="1">
+                <a:solidFill>
+                  <a:srgbClr val="FFFFFF"/>
+                </a:solidFill>
+              </a:rPr>
+              <a:t>✔</a:t>
+            </a:r>
+          </a:p>
+        </p:txBody>
+      </p:sp>
+      <p:sp>
+        <p:nvSpPr>
+          <p:cNvPr id="9" name="TextBox 8"/>
+          <p:cNvSpPr txBox="1"/>
+          <p:nvPr/>
+        </p:nvSpPr>
+        <p:spPr>
+          <a:xfrm>
+            <a:off x="1051560" y="1929384"/>
+            <a:ext cx="4480560" cy="457200"/>
+          </a:xfrm>
+          <a:prstGeom prst="rect">
+            <a:avLst/>
+          </a:prstGeom>
+          <a:noFill/>
+        </p:spPr>
+        <p:txBody>
+          <a:bodyPr wrap="square">
+            <a:spAutoFit/>
+          </a:bodyPr>
+          <a:lstStyle/>
+          <a:p>
+            <a:pPr algn="l"/>
+            <a:r>
+              <a:rPr sz="1500" b="1">
+                <a:solidFill>
+                  <a:srgbClr val="1A1A2E"/>
+                </a:solidFill>
+                <a:latin typeface="Segoe UI"/>
+              </a:rPr>
+              <a:t>Slicery zsynchronizowane między stronami</a:t>
+            </a:r>
+          </a:p>
+        </p:txBody>
+      </p:sp>
+      <p:sp>
+        <p:nvSpPr>
+          <p:cNvPr id="10" name="TextBox 9"/>
+          <p:cNvSpPr txBox="1"/>
+          <p:nvPr/>
+        </p:nvSpPr>
+        <p:spPr>
+          <a:xfrm>
+            <a:off x="5623560" y="1929384"/>
+            <a:ext cx="6309360" cy="457200"/>
+          </a:xfrm>
+          <a:prstGeom prst="rect">
+            <a:avLst/>
+          </a:prstGeom>
+          <a:noFill/>
+        </p:spPr>
+        <p:txBody>
+          <a:bodyPr wrap="square">
+            <a:spAutoFit/>
+          </a:bodyPr>
+          <a:lstStyle/>
+          <a:p>
+            <a:pPr algn="l"/>
+            <a:r>
+              <a:rPr sz="1300" b="0">
+                <a:solidFill>
+                  <a:srgbClr val="6B6B7B"/>
+                </a:solidFill>
+                <a:latin typeface="Segoe UI"/>
+              </a:rPr>
+              <a:t>użytkownik wybiera rok raz — cały raport w tym samym kontekście</a:t>
+            </a:r>
+          </a:p>
+        </p:txBody>
+      </p:sp>
+      <p:sp>
+        <p:nvSpPr>
+          <p:cNvPr id="11" name="Rectangle 10"/>
+          <p:cNvSpPr/>
+          <p:nvPr/>
+        </p:nvSpPr>
+        <p:spPr>
+          <a:xfrm>
+            <a:off x="548640" y="2551176"/>
+            <a:ext cx="329184" cy="329184"/>
+          </a:xfrm>
+          <a:prstGeom prst="rect">
+            <a:avLst/>
+          </a:prstGeom>
+          <a:solidFill>
+            <a:srgbClr val="2E7D32"/>
+          </a:solidFill>
+          <a:ln>
+            <a:noFill/>
+          </a:ln>
+        </p:spPr>
+        <p:style>
+          <a:lnRef idx="1">
+            <a:schemeClr val="accent1"/>
+          </a:lnRef>
+          <a:fillRef idx="3">
+            <a:schemeClr val="accent1"/>
+          </a:fillRef>
+          <a:effectRef idx="2">
+            <a:schemeClr val="accent1"/>
+          </a:effectRef>
+          <a:fontRef idx="minor">
+            <a:schemeClr val="lt1"/>
+          </a:fontRef>
+        </p:style>
+        <p:txBody>
+          <a:bodyPr rtlCol="0" anchor="ctr"/>
+          <a:lstStyle/>
+          <a:p>
+            <a:pPr algn="ctr"/>
+            <a:r>
+              <a:rPr sz="1500" b="1">
+                <a:solidFill>
+                  <a:srgbClr val="FFFFFF"/>
+                </a:solidFill>
+              </a:rPr>
+              <a:t>✔</a:t>
+            </a:r>
+          </a:p>
+        </p:txBody>
+      </p:sp>
+      <p:sp>
+        <p:nvSpPr>
+          <p:cNvPr id="12" name="TextBox 11"/>
+          <p:cNvSpPr txBox="1"/>
+          <p:nvPr/>
+        </p:nvSpPr>
+        <p:spPr>
+          <a:xfrm>
+            <a:off x="1051560" y="2532888"/>
+            <a:ext cx="4480560" cy="457200"/>
+          </a:xfrm>
+          <a:prstGeom prst="rect">
+            <a:avLst/>
+          </a:prstGeom>
+          <a:noFill/>
+        </p:spPr>
+        <p:txBody>
+          <a:bodyPr wrap="square">
+            <a:spAutoFit/>
+          </a:bodyPr>
+          <a:lstStyle/>
+          <a:p>
+            <a:pPr algn="l"/>
+            <a:r>
+              <a:rPr sz="1500" b="1">
+                <a:solidFill>
+                  <a:srgbClr val="1A1A2E"/>
+                </a:solidFill>
+                <a:latin typeface="Segoe UI"/>
+              </a:rPr>
+              <a:t>Drill-down na hierarchiach</a:t>
+            </a:r>
+          </a:p>
+        </p:txBody>
+      </p:sp>
+      <p:sp>
+        <p:nvSpPr>
+          <p:cNvPr id="13" name="TextBox 12"/>
+          <p:cNvSpPr txBox="1"/>
+          <p:nvPr/>
+        </p:nvSpPr>
+        <p:spPr>
+          <a:xfrm>
+            <a:off x="5623560" y="2532888"/>
+            <a:ext cx="6309360" cy="457200"/>
+          </a:xfrm>
+          <a:prstGeom prst="rect">
+            <a:avLst/>
+          </a:prstGeom>
+          <a:noFill/>
+        </p:spPr>
+        <p:txBody>
+          <a:bodyPr wrap="square">
+            <a:spAutoFit/>
+          </a:bodyPr>
+          <a:lstStyle/>
+          <a:p>
+            <a:pPr algn="l"/>
+            <a:r>
+              <a:rPr sz="1300" b="0">
+                <a:solidFill>
+                  <a:srgbClr val="6B6B7B"/>
+                </a:solidFill>
+                <a:latin typeface="Segoe UI"/>
+              </a:rPr>
+              <a:t>macierz kraj→typ; struktura rok→kwartał→miesiąc</a:t>
+            </a:r>
+          </a:p>
+        </p:txBody>
+      </p:sp>
+      <p:sp>
+        <p:nvSpPr>
+          <p:cNvPr id="14" name="Rectangle 13"/>
+          <p:cNvSpPr/>
+          <p:nvPr/>
+        </p:nvSpPr>
+        <p:spPr>
+          <a:xfrm>
+            <a:off x="548640" y="3154680"/>
+            <a:ext cx="329184" cy="329184"/>
+          </a:xfrm>
+          <a:prstGeom prst="rect">
+            <a:avLst/>
+          </a:prstGeom>
+          <a:solidFill>
+            <a:srgbClr val="2E7D32"/>
+          </a:solidFill>
+          <a:ln>
+            <a:noFill/>
+          </a:ln>
+        </p:spPr>
+        <p:style>
+          <a:lnRef idx="1">
+            <a:schemeClr val="accent1"/>
+          </a:lnRef>
+          <a:fillRef idx="3">
+            <a:schemeClr val="accent1"/>
+          </a:fillRef>
+          <a:effectRef idx="2">
+            <a:schemeClr val="accent1"/>
+          </a:effectRef>
+          <a:fontRef idx="minor">
+            <a:schemeClr val="lt1"/>
+          </a:fontRef>
+        </p:style>
+        <p:txBody>
+          <a:bodyPr rtlCol="0" anchor="ctr"/>
+          <a:lstStyle/>
+          <a:p>
+            <a:pPr algn="ctr"/>
+            <a:r>
+              <a:rPr sz="1500" b="1">
+                <a:solidFill>
+                  <a:srgbClr val="FFFFFF"/>
+                </a:solidFill>
+              </a:rPr>
+              <a:t>✔</a:t>
+            </a:r>
+          </a:p>
+        </p:txBody>
+      </p:sp>
+      <p:sp>
+        <p:nvSpPr>
+          <p:cNvPr id="15" name="TextBox 14"/>
+          <p:cNvSpPr txBox="1"/>
+          <p:nvPr/>
+        </p:nvSpPr>
+        <p:spPr>
+          <a:xfrm>
+            <a:off x="1051560" y="3136392"/>
+            <a:ext cx="4480560" cy="457200"/>
+          </a:xfrm>
+          <a:prstGeom prst="rect">
+            <a:avLst/>
+          </a:prstGeom>
+          <a:noFill/>
+        </p:spPr>
+        <p:txBody>
+          <a:bodyPr wrap="square">
+            <a:spAutoFit/>
+          </a:bodyPr>
+          <a:lstStyle/>
+          <a:p>
+            <a:pPr algn="l"/>
+            <a:r>
+              <a:rPr sz="1500" b="1">
+                <a:solidFill>
+                  <a:srgbClr val="1A1A2E"/>
+                </a:solidFill>
+                <a:latin typeface="Segoe UI"/>
+              </a:rPr>
+              <a:t>Miesiące chronologicznie</a:t>
+            </a:r>
+          </a:p>
+        </p:txBody>
+      </p:sp>
+      <p:sp>
+        <p:nvSpPr>
+          <p:cNvPr id="16" name="TextBox 15"/>
+          <p:cNvSpPr txBox="1"/>
+          <p:nvPr/>
+        </p:nvSpPr>
+        <p:spPr>
+          <a:xfrm>
+            <a:off x="5623560" y="3136392"/>
+            <a:ext cx="6309360" cy="457200"/>
+          </a:xfrm>
+          <a:prstGeom prst="rect">
+            <a:avLst/>
+          </a:prstGeom>
+          <a:noFill/>
+        </p:spPr>
+        <p:txBody>
+          <a:bodyPr wrap="square">
+            <a:spAutoFit/>
+          </a:bodyPr>
+          <a:lstStyle/>
+          <a:p>
+            <a:pPr algn="l"/>
+            <a:r>
+              <a:rPr sz="1300" b="0">
+                <a:solidFill>
+                  <a:srgbClr val="6B6B7B"/>
+                </a:solidFill>
+                <a:latin typeface="Segoe UI"/>
+              </a:rPr>
+              <a:t>„sortowanie niechronologiczne to bardzo poważny błąd" (skrypt)</a:t>
+            </a:r>
+          </a:p>
+        </p:txBody>
+      </p:sp>
+      <p:sp>
+        <p:nvSpPr>
+          <p:cNvPr id="17" name="Rectangle 16"/>
+          <p:cNvSpPr/>
+          <p:nvPr/>
+        </p:nvSpPr>
+        <p:spPr>
+          <a:xfrm>
+            <a:off x="548640" y="3758184"/>
+            <a:ext cx="329184" cy="329184"/>
+          </a:xfrm>
+          <a:prstGeom prst="rect">
+            <a:avLst/>
+          </a:prstGeom>
+          <a:solidFill>
+            <a:srgbClr val="2E7D32"/>
+          </a:solidFill>
+          <a:ln>
+            <a:noFill/>
+          </a:ln>
+        </p:spPr>
+        <p:style>
+          <a:lnRef idx="1">
+            <a:schemeClr val="accent1"/>
+          </a:lnRef>
+          <a:fillRef idx="3">
+            <a:schemeClr val="accent1"/>
+          </a:fillRef>
+          <a:effectRef idx="2">
+            <a:schemeClr val="accent1"/>
+          </a:effectRef>
+          <a:fontRef idx="minor">
+            <a:schemeClr val="lt1"/>
+          </a:fontRef>
+        </p:style>
+        <p:txBody>
+          <a:bodyPr rtlCol="0" anchor="ctr"/>
+          <a:lstStyle/>
+          <a:p>
+            <a:pPr algn="ctr"/>
+            <a:r>
+              <a:rPr sz="1500" b="1">
+                <a:solidFill>
+                  <a:srgbClr val="FFFFFF"/>
+                </a:solidFill>
+              </a:rPr>
+              <a:t>✔</a:t>
+            </a:r>
+          </a:p>
+        </p:txBody>
+      </p:sp>
+      <p:sp>
+        <p:nvSpPr>
+          <p:cNvPr id="18" name="TextBox 17"/>
+          <p:cNvSpPr txBox="1"/>
+          <p:nvPr/>
+        </p:nvSpPr>
+        <p:spPr>
+          <a:xfrm>
+            <a:off x="1051560" y="3739896"/>
+            <a:ext cx="4480560" cy="457200"/>
+          </a:xfrm>
+          <a:prstGeom prst="rect">
+            <a:avLst/>
+          </a:prstGeom>
+          <a:noFill/>
+        </p:spPr>
+        <p:txBody>
+          <a:bodyPr wrap="square">
+            <a:spAutoFit/>
+          </a:bodyPr>
+          <a:lstStyle/>
+          <a:p>
+            <a:pPr algn="l"/>
+            <a:r>
+              <a:rPr sz="1500" b="1">
+                <a:solidFill>
+                  <a:srgbClr val="1A1A2E"/>
+                </a:solidFill>
+                <a:latin typeface="Segoe UI"/>
+              </a:rPr>
+              <a:t>Heatmapa = formatowanie warunkowe</a:t>
+            </a:r>
+          </a:p>
+        </p:txBody>
+      </p:sp>
+      <p:sp>
+        <p:nvSpPr>
+          <p:cNvPr id="19" name="TextBox 18"/>
+          <p:cNvSpPr txBox="1"/>
+          <p:nvPr/>
+        </p:nvSpPr>
+        <p:spPr>
+          <a:xfrm>
+            <a:off x="5623560" y="3739896"/>
+            <a:ext cx="6309360" cy="457200"/>
+          </a:xfrm>
+          <a:prstGeom prst="rect">
+            <a:avLst/>
+          </a:prstGeom>
+          <a:noFill/>
+        </p:spPr>
+        <p:txBody>
+          <a:bodyPr wrap="square">
+            <a:spAutoFit/>
+          </a:bodyPr>
+          <a:lstStyle/>
+          <a:p>
+            <a:pPr algn="l"/>
+            <a:r>
+              <a:rPr sz="1300" b="0">
+                <a:solidFill>
+                  <a:srgbClr val="6B6B7B"/>
+                </a:solidFill>
+                <a:latin typeface="Segoe UI"/>
+              </a:rPr>
+              <a:t>oko wychwytuje skalę z koloru, nie z liczb</a:t>
+            </a:r>
+          </a:p>
+        </p:txBody>
+      </p:sp>
+      <p:sp>
+        <p:nvSpPr>
+          <p:cNvPr id="20" name="Rectangle 19"/>
+          <p:cNvSpPr/>
+          <p:nvPr/>
+        </p:nvSpPr>
+        <p:spPr>
+          <a:xfrm>
+            <a:off x="548640" y="4361688"/>
+            <a:ext cx="329184" cy="329184"/>
+          </a:xfrm>
+          <a:prstGeom prst="rect">
+            <a:avLst/>
+          </a:prstGeom>
+          <a:solidFill>
+            <a:srgbClr val="2E7D32"/>
+          </a:solidFill>
+          <a:ln>
+            <a:noFill/>
+          </a:ln>
+        </p:spPr>
+        <p:style>
+          <a:lnRef idx="1">
+            <a:schemeClr val="accent1"/>
+          </a:lnRef>
+          <a:fillRef idx="3">
+            <a:schemeClr val="accent1"/>
+          </a:fillRef>
+          <a:effectRef idx="2">
+            <a:schemeClr val="accent1"/>
+          </a:effectRef>
+          <a:fontRef idx="minor">
+            <a:schemeClr val="lt1"/>
+          </a:fontRef>
+        </p:style>
+        <p:txBody>
+          <a:bodyPr rtlCol="0" anchor="ctr"/>
+          <a:lstStyle/>
+          <a:p>
+            <a:pPr algn="ctr"/>
+            <a:r>
+              <a:rPr sz="1500" b="1">
+                <a:solidFill>
+                  <a:srgbClr val="FFFFFF"/>
+                </a:solidFill>
+              </a:rPr>
+              <a:t>✔</a:t>
+            </a:r>
+          </a:p>
+        </p:txBody>
+      </p:sp>
+      <p:sp>
+        <p:nvSpPr>
+          <p:cNvPr id="21" name="TextBox 20"/>
+          <p:cNvSpPr txBox="1"/>
+          <p:nvPr/>
+        </p:nvSpPr>
+        <p:spPr>
+          <a:xfrm>
+            <a:off x="1051560" y="4343400"/>
+            <a:ext cx="4480560" cy="457200"/>
+          </a:xfrm>
+          <a:prstGeom prst="rect">
+            <a:avLst/>
+          </a:prstGeom>
+          <a:noFill/>
+        </p:spPr>
+        <p:txBody>
+          <a:bodyPr wrap="square">
+            <a:spAutoFit/>
+          </a:bodyPr>
+          <a:lstStyle/>
+          <a:p>
+            <a:pPr algn="l"/>
+            <a:r>
+              <a:rPr sz="1500" b="1">
+                <a:solidFill>
+                  <a:srgbClr val="1A1A2E"/>
+                </a:solidFill>
+                <a:latin typeface="Segoe UI"/>
+              </a:rPr>
+              <a:t>Interakcje między wizualizacjami</a:t>
+            </a:r>
+          </a:p>
+        </p:txBody>
+      </p:sp>
+      <p:sp>
+        <p:nvSpPr>
+          <p:cNvPr id="22" name="TextBox 21"/>
+          <p:cNvSpPr txBox="1"/>
+          <p:nvPr/>
+        </p:nvSpPr>
+        <p:spPr>
+          <a:xfrm>
+            <a:off x="5623560" y="4343400"/>
+            <a:ext cx="6309360" cy="457200"/>
+          </a:xfrm>
+          <a:prstGeom prst="rect">
+            <a:avLst/>
+          </a:prstGeom>
+          <a:noFill/>
+        </p:spPr>
+        <p:txBody>
+          <a:bodyPr wrap="square">
+            <a:spAutoFit/>
+          </a:bodyPr>
+          <a:lstStyle/>
+          <a:p>
+            <a:pPr algn="l"/>
+            <a:r>
+              <a:rPr sz="1300" b="0">
+                <a:solidFill>
+                  <a:srgbClr val="6B6B7B"/>
+                </a:solidFill>
+                <a:latin typeface="Segoe UI"/>
+              </a:rPr>
+              <a:t>klik słupka filtruje sąsiednie wykresy</a:t>
+            </a:r>
+          </a:p>
+        </p:txBody>
+      </p:sp>
+      <p:sp>
+        <p:nvSpPr>
+          <p:cNvPr id="23" name="Rectangle 22"/>
+          <p:cNvSpPr/>
+          <p:nvPr/>
+        </p:nvSpPr>
+        <p:spPr>
+          <a:xfrm>
+            <a:off x="548640" y="4965192"/>
+            <a:ext cx="329184" cy="329184"/>
+          </a:xfrm>
+          <a:prstGeom prst="rect">
+            <a:avLst/>
+          </a:prstGeom>
+          <a:solidFill>
+            <a:srgbClr val="2E7D32"/>
+          </a:solidFill>
+          <a:ln>
+            <a:noFill/>
+          </a:ln>
+        </p:spPr>
+        <p:style>
+          <a:lnRef idx="1">
+            <a:schemeClr val="accent1"/>
+          </a:lnRef>
+          <a:fillRef idx="3">
+            <a:schemeClr val="accent1"/>
+          </a:fillRef>
+          <a:effectRef idx="2">
+            <a:schemeClr val="accent1"/>
+          </a:effectRef>
+          <a:fontRef idx="minor">
+            <a:schemeClr val="lt1"/>
+          </a:fontRef>
+        </p:style>
+        <p:txBody>
+          <a:bodyPr rtlCol="0" anchor="ctr"/>
+          <a:lstStyle/>
+          <a:p>
+            <a:pPr algn="ctr"/>
+            <a:r>
+              <a:rPr sz="1500" b="1">
+                <a:solidFill>
+                  <a:srgbClr val="FFFFFF"/>
+                </a:solidFill>
+              </a:rPr>
+              <a:t>✔</a:t>
+            </a:r>
+          </a:p>
+        </p:txBody>
+      </p:sp>
+      <p:sp>
+        <p:nvSpPr>
+          <p:cNvPr id="24" name="TextBox 23"/>
+          <p:cNvSpPr txBox="1"/>
+          <p:nvPr/>
+        </p:nvSpPr>
+        <p:spPr>
+          <a:xfrm>
+            <a:off x="1051560" y="4946904"/>
+            <a:ext cx="4480560" cy="457200"/>
+          </a:xfrm>
+          <a:prstGeom prst="rect">
+            <a:avLst/>
+          </a:prstGeom>
+          <a:noFill/>
+        </p:spPr>
+        <p:txBody>
+          <a:bodyPr wrap="square">
+            <a:spAutoFit/>
+          </a:bodyPr>
+          <a:lstStyle/>
+          <a:p>
+            <a:pPr algn="l"/>
+            <a:r>
+              <a:rPr sz="1500" b="1">
+                <a:solidFill>
+                  <a:srgbClr val="1A1A2E"/>
+                </a:solidFill>
+                <a:latin typeface="Segoe UI"/>
+              </a:rPr>
+              <a:t>Filtry projektanckie</a:t>
+            </a:r>
+          </a:p>
+        </p:txBody>
+      </p:sp>
+      <p:sp>
+        <p:nvSpPr>
+          <p:cNvPr id="25" name="TextBox 24"/>
+          <p:cNvSpPr txBox="1"/>
+          <p:nvPr/>
+        </p:nvSpPr>
+        <p:spPr>
+          <a:xfrm>
+            <a:off x="5623560" y="4946904"/>
+            <a:ext cx="6309360" cy="457200"/>
+          </a:xfrm>
+          <a:prstGeom prst="rect">
+            <a:avLst/>
+          </a:prstGeom>
+          <a:noFill/>
+        </p:spPr>
+        <p:txBody>
+          <a:bodyPr wrap="square">
+            <a:spAutoFit/>
+          </a:bodyPr>
+          <a:lstStyle/>
+          <a:p>
+            <a:pPr algn="l"/>
+            <a:r>
+              <a:rPr sz="1300" b="0">
+                <a:solidFill>
+                  <a:srgbClr val="6B6B7B"/>
+                </a:solidFill>
+                <a:latin typeface="Segoe UI"/>
+              </a:rPr>
+              <a:t>rok ≤2024 (źródło niepełne za 2025), progi min. zdarzeń w rankingach</a:t>
+            </a:r>
+          </a:p>
+        </p:txBody>
+      </p:sp>
+      <p:sp>
+        <p:nvSpPr>
+          <p:cNvPr id="26" name="Rectangle 25"/>
+          <p:cNvSpPr/>
+          <p:nvPr/>
+        </p:nvSpPr>
+        <p:spPr>
+          <a:xfrm>
+            <a:off x="548640" y="5568696"/>
+            <a:ext cx="329184" cy="329184"/>
+          </a:xfrm>
+          <a:prstGeom prst="rect">
+            <a:avLst/>
+          </a:prstGeom>
+          <a:solidFill>
+            <a:srgbClr val="2E7D32"/>
+          </a:solidFill>
+          <a:ln>
+            <a:noFill/>
+          </a:ln>
+        </p:spPr>
+        <p:style>
+          <a:lnRef idx="1">
+            <a:schemeClr val="accent1"/>
+          </a:lnRef>
+          <a:fillRef idx="3">
+            <a:schemeClr val="accent1"/>
+          </a:fillRef>
+          <a:effectRef idx="2">
+            <a:schemeClr val="accent1"/>
+          </a:effectRef>
+          <a:fontRef idx="minor">
+            <a:schemeClr val="lt1"/>
+          </a:fontRef>
+        </p:style>
+        <p:txBody>
+          <a:bodyPr rtlCol="0" anchor="ctr"/>
+          <a:lstStyle/>
+          <a:p>
+            <a:pPr algn="ctr"/>
+            <a:r>
+              <a:rPr sz="1500" b="1">
+                <a:solidFill>
+                  <a:srgbClr val="FFFFFF"/>
+                </a:solidFill>
+              </a:rPr>
+              <a:t>✔</a:t>
+            </a:r>
+          </a:p>
+        </p:txBody>
+      </p:sp>
+      <p:sp>
+        <p:nvSpPr>
+          <p:cNvPr id="27" name="TextBox 26"/>
+          <p:cNvSpPr txBox="1"/>
+          <p:nvPr/>
+        </p:nvSpPr>
+        <p:spPr>
+          <a:xfrm>
+            <a:off x="1051560" y="5550408"/>
+            <a:ext cx="4480560" cy="457200"/>
+          </a:xfrm>
+          <a:prstGeom prst="rect">
+            <a:avLst/>
+          </a:prstGeom>
+          <a:noFill/>
+        </p:spPr>
+        <p:txBody>
+          <a:bodyPr wrap="square">
+            <a:spAutoFit/>
+          </a:bodyPr>
+          <a:lstStyle/>
+          <a:p>
+            <a:pPr algn="l"/>
+            <a:r>
+              <a:rPr sz="1500" b="1">
+                <a:solidFill>
+                  <a:srgbClr val="1A1A2E"/>
+                </a:solidFill>
+                <a:latin typeface="Segoe UI"/>
+              </a:rPr>
+              <a:t>Zasady wykresów (wykład 8)</a:t>
+            </a:r>
+          </a:p>
+        </p:txBody>
+      </p:sp>
+      <p:sp>
+        <p:nvSpPr>
+          <p:cNvPr id="28" name="TextBox 27"/>
+          <p:cNvSpPr txBox="1"/>
+          <p:nvPr/>
+        </p:nvSpPr>
+        <p:spPr>
+          <a:xfrm>
+            <a:off x="5623560" y="5550408"/>
+            <a:ext cx="6309360" cy="457200"/>
+          </a:xfrm>
+          <a:prstGeom prst="rect">
+            <a:avLst/>
+          </a:prstGeom>
+          <a:noFill/>
+        </p:spPr>
+        <p:txBody>
+          <a:bodyPr wrap="square">
+            <a:spAutoFit/>
+          </a:bodyPr>
+          <a:lstStyle/>
+          <a:p>
+            <a:pPr algn="l"/>
+            <a:r>
+              <a:rPr sz="1300" b="0">
+                <a:solidFill>
+                  <a:srgbClr val="6B6B7B"/>
+                </a:solidFill>
+                <a:latin typeface="Segoe UI"/>
+              </a:rPr>
+              <a:t>słupki od zera, bez 3D, tabela gdy czytamy wartości, tytuły z założeniami</a:t>
+            </a:r>
+          </a:p>
+        </p:txBody>
+      </p:sp>
+    </p:spTree>
+  </p:cSld>
+  <p:clrMapOvr>
+    <a:masterClrMapping/>
+  </p:clrMapOvr>
+</p:sld>
+</file>
+
+<file path=ppt/slides/slide15.xml><?xml version="1.0" encoding="utf-8"?>
+<p:sld xmlns:a="http://schemas.openxmlformats.org/drawingml/2006/main" xmlns:p="http://schemas.openxmlformats.org/presentationml/2006/main" xmlns:r="http://schemas.openxmlformats.org/officeDocument/2006/relationships">
+  <p:cSld>
+    <p:bg>
+      <p:bgPr>
+        <a:solidFill>
+          <a:srgbClr val="F7F7F5"/>
+        </a:solidFill>
+        <a:effectLst/>
+      </p:bgPr>
+    </p:bg>
+    <p:spTree>
+      <p:nvGrpSpPr>
+        <p:cNvPr id="1" name=""/>
+        <p:cNvGrpSpPr/>
+        <p:nvPr/>
+      </p:nvGrpSpPr>
+      <p:grpSpPr/>
+      <p:sp>
+        <p:nvSpPr>
+          <p:cNvPr id="2" name="Rectangle 1"/>
+          <p:cNvSpPr/>
+          <p:nvPr/>
+        </p:nvSpPr>
+        <p:spPr>
+          <a:xfrm>
+            <a:off x="0" y="0"/>
+            <a:ext cx="12191695" cy="164592"/>
+          </a:xfrm>
+          <a:prstGeom prst="rect">
+            <a:avLst/>
+          </a:prstGeom>
+          <a:solidFill>
+            <a:srgbClr val="1F6F8B"/>
+          </a:solidFill>
+          <a:ln>
+            <a:noFill/>
+          </a:ln>
+        </p:spPr>
+        <p:style>
+          <a:lnRef idx="1">
+            <a:schemeClr val="accent1"/>
+          </a:lnRef>
+          <a:fillRef idx="3">
+            <a:schemeClr val="accent1"/>
+          </a:fillRef>
+          <a:effectRef idx="2">
+            <a:schemeClr val="accent1"/>
+          </a:effectRef>
+          <a:fontRef idx="minor">
+            <a:schemeClr val="lt1"/>
+          </a:fontRef>
+        </p:style>
+        <p:txBody>
+          <a:bodyPr rtlCol="0" anchor="ctr"/>
+          <a:lstStyle/>
+          <a:p>
+            <a:pPr algn="ctr"/>
+          </a:p>
+        </p:txBody>
+      </p:sp>
+      <p:sp>
+        <p:nvSpPr>
+          <p:cNvPr id="3" name="TextBox 2"/>
+          <p:cNvSpPr txBox="1"/>
+          <p:nvPr/>
+        </p:nvSpPr>
+        <p:spPr>
+          <a:xfrm>
+            <a:off x="457200" y="292608"/>
+            <a:ext cx="8899855" cy="640080"/>
+          </a:xfrm>
+          <a:prstGeom prst="rect">
+            <a:avLst/>
+          </a:prstGeom>
+          <a:noFill/>
+        </p:spPr>
+        <p:txBody>
+          <a:bodyPr wrap="square">
+            <a:spAutoFit/>
+          </a:bodyPr>
+          <a:lstStyle/>
+          <a:p>
+            <a:pPr algn="l"/>
+            <a:r>
+              <a:rPr sz="2800" b="1">
+                <a:solidFill>
+                  <a:srgbClr val="1F6F8B"/>
+                </a:solidFill>
+                <a:latin typeface="Segoe UI"/>
+              </a:rPr>
+              <a:t>Pytania, na które prosimy o Pani decyzję</a:t>
+            </a:r>
+          </a:p>
+        </p:txBody>
+      </p:sp>
+      <p:sp>
+        <p:nvSpPr>
+          <p:cNvPr id="4" name="Rectangle 3"/>
+          <p:cNvSpPr/>
+          <p:nvPr/>
+        </p:nvSpPr>
+        <p:spPr>
+          <a:xfrm>
+            <a:off x="9448495" y="292608"/>
+            <a:ext cx="2286000" cy="502920"/>
+          </a:xfrm>
+          <a:prstGeom prst="rect">
+            <a:avLst/>
+          </a:prstGeom>
+          <a:solidFill>
+            <a:srgbClr val="A50F15"/>
+          </a:solidFill>
+          <a:ln>
+            <a:noFill/>
+          </a:ln>
+        </p:spPr>
+        <p:style>
+          <a:lnRef idx="1">
+            <a:schemeClr val="accent1"/>
+          </a:lnRef>
+          <a:fillRef idx="3">
+            <a:schemeClr val="accent1"/>
+          </a:fillRef>
+          <a:effectRef idx="2">
+            <a:schemeClr val="accent1"/>
+          </a:effectRef>
+          <a:fontRef idx="minor">
+            <a:schemeClr val="lt1"/>
+          </a:fontRef>
+        </p:style>
+        <p:txBody>
+          <a:bodyPr rtlCol="0" anchor="ctr"/>
+          <a:lstStyle/>
+          <a:p>
+            <a:pPr algn="ctr"/>
+            <a:r>
+              <a:rPr sz="1500" b="1">
+                <a:solidFill>
+                  <a:srgbClr val="FFFFFF"/>
+                </a:solidFill>
+                <a:latin typeface="Segoe UI"/>
+              </a:rPr>
+              <a:t>FEEDBACK</a:t>
+            </a:r>
+          </a:p>
+        </p:txBody>
+      </p:sp>
+      <p:sp>
+        <p:nvSpPr>
+          <p:cNvPr id="5" name="TextBox 4"/>
+          <p:cNvSpPr txBox="1"/>
+          <p:nvPr/>
+        </p:nvSpPr>
+        <p:spPr>
+          <a:xfrm>
+            <a:off x="548640" y="1280160"/>
+            <a:ext cx="11155680" cy="4937760"/>
+          </a:xfrm>
+          <a:prstGeom prst="rect">
+            <a:avLst/>
+          </a:prstGeom>
+          <a:noFill/>
+        </p:spPr>
+        <p:txBody>
+          <a:bodyPr wrap="square">
+            <a:spAutoFit/>
+          </a:bodyPr>
+          <a:lstStyle/>
+          <a:p>
+            <a:r>
+              <a:rPr sz="1600" b="1">
+                <a:solidFill>
+                  <a:srgbClr val="1A1A2E"/>
+                </a:solidFill>
+                <a:latin typeface="Segoe UI"/>
+              </a:rPr>
+              <a:t>• 1. Czy SCHEMAT GWIAZDY jest poprawny? (prosimy o formalne sprawdzenie)</a:t>
+            </a:r>
+          </a:p>
+          <a:p>
+            <a:r>
+              <a:rPr sz="1600" b="0">
+                <a:solidFill>
+                  <a:srgbClr val="1A1A2E"/>
+                </a:solidFill>
+                <a:latin typeface="Segoe UI"/>
+              </a:rPr>
+              <a:t>• 2. Stack: Airflow + Athena/S3 + Power BI zamiast SSIS/SSAS/SSRS — akceptowalny?</a:t>
+            </a:r>
+          </a:p>
+          <a:p>
+            <a:r>
+              <a:rPr sz="1600" b="0">
+                <a:solidFill>
+                  <a:srgbClr val="1A1A2E"/>
+                </a:solidFill>
+                <a:latin typeface="Segoe UI"/>
+              </a:rPr>
+              <a:t>• 3. event_id_cnty jako wymiar zdegenerowany — dopuszczalny?</a:t>
+            </a:r>
+          </a:p>
+          <a:p>
+            <a:r>
+              <a:rPr sz="1600" b="0">
+                <a:solidFill>
+                  <a:srgbClr val="1A1A2E"/>
+                </a:solidFill>
+                <a:latin typeface="Segoe UI"/>
+              </a:rPr>
+              <a:t>• 4. Klucz iso_year + relacja dwukierunkowa do populacji — czy woli Pani inne rozwiązanie?</a:t>
+            </a:r>
+          </a:p>
+          <a:p>
+            <a:r>
+              <a:rPr sz="1600" b="0">
+                <a:solidFill>
+                  <a:srgbClr val="1A1A2E"/>
+                </a:solidFill>
+                <a:latin typeface="Segoe UI"/>
+              </a:rPr>
+              <a:t>• 5. Historia: SCD typ 1 (nadpisanie) + rejestr usunięć — wystarczające dla tego tematu?</a:t>
+            </a:r>
+          </a:p>
+          <a:p>
+            <a:r>
+              <a:rPr sz="1600" b="0">
+                <a:solidFill>
+                  <a:srgbClr val="1A1A2E"/>
+                </a:solidFill>
+                <a:latin typeface="Segoe UI"/>
+              </a:rPr>
+              <a:t>• 6. Rok 2025 niepełny (embargo źródła 12 mies.) — odcinamy w trendach; słuszne podejście?</a:t>
+            </a:r>
+          </a:p>
+          <a:p>
+            <a:r>
+              <a:rPr sz="1600" b="0">
+                <a:solidFill>
+                  <a:srgbClr val="1A1A2E"/>
+                </a:solidFill>
+                <a:latin typeface="Segoe UI"/>
+              </a:rPr>
+              <a:t>• 7. Per capita: Kosowo bez kodu ISO numeric (0,4% zdarzeń bez populacji) — akceptowalna luka?</a:t>
+            </a:r>
+          </a:p>
+          <a:p>
+            <a:r>
+              <a:rPr sz="1600" b="0">
+                <a:solidFill>
+                  <a:srgbClr val="1A1A2E"/>
+                </a:solidFill>
+                <a:latin typeface="Segoe UI"/>
+              </a:rPr>
+              <a:t>• 8. Q10: „czy więcej źródeł ⇒ więcej zdarzeń" wymaga liczności źródeł per zdarzenie — świadomie poza zakresem; OK?</a:t>
+            </a:r>
+          </a:p>
+        </p:txBody>
+      </p:sp>
+    </p:spTree>
+  </p:cSld>
+  <p:clrMapOvr>
+    <a:masterClrMapping/>
+  </p:clrMapOvr>
+</p:sld>
+</file>
+
+<file path=ppt/slides/slide16.xml><?xml version="1.0" encoding="utf-8"?>
+<p:sld xmlns:a="http://schemas.openxmlformats.org/drawingml/2006/main" xmlns:p="http://schemas.openxmlformats.org/presentationml/2006/main" xmlns:r="http://schemas.openxmlformats.org/officeDocument/2006/relationships">
+  <p:cSld>
+    <p:bg>
+      <p:bgPr>
+        <a:solidFill>
+          <a:srgbClr val="F7F7F5"/>
+        </a:solidFill>
+        <a:effectLst/>
+      </p:bgPr>
+    </p:bg>
+    <p:spTree>
+      <p:nvGrpSpPr>
+        <p:cNvPr id="1" name=""/>
+        <p:cNvGrpSpPr/>
+        <p:nvPr/>
+      </p:nvGrpSpPr>
+      <p:grpSpPr/>
+      <p:sp>
+        <p:nvSpPr>
+          <p:cNvPr id="2" name="Rectangle 1"/>
+          <p:cNvSpPr/>
+          <p:nvPr/>
+        </p:nvSpPr>
+        <p:spPr>
+          <a:xfrm>
+            <a:off x="0" y="0"/>
+            <a:ext cx="12191695" cy="164592"/>
+          </a:xfrm>
+          <a:prstGeom prst="rect">
+            <a:avLst/>
+          </a:prstGeom>
+          <a:solidFill>
+            <a:srgbClr val="1F6F8B"/>
+          </a:solidFill>
+          <a:ln>
+            <a:noFill/>
+          </a:ln>
+        </p:spPr>
+        <p:style>
+          <a:lnRef idx="1">
+            <a:schemeClr val="accent1"/>
+          </a:lnRef>
+          <a:fillRef idx="3">
+            <a:schemeClr val="accent1"/>
+          </a:fillRef>
+          <a:effectRef idx="2">
+            <a:schemeClr val="accent1"/>
+          </a:effectRef>
+          <a:fontRef idx="minor">
+            <a:schemeClr val="lt1"/>
+          </a:fontRef>
+        </p:style>
+        <p:txBody>
+          <a:bodyPr rtlCol="0" anchor="ctr"/>
+          <a:lstStyle/>
+          <a:p>
+            <a:pPr algn="ctr"/>
+          </a:p>
+        </p:txBody>
+      </p:sp>
+      <p:sp>
+        <p:nvSpPr>
+          <p:cNvPr id="3" name="TextBox 2"/>
+          <p:cNvSpPr txBox="1"/>
+          <p:nvPr/>
+        </p:nvSpPr>
+        <p:spPr>
+          <a:xfrm>
+            <a:off x="457200" y="292608"/>
+            <a:ext cx="8899855" cy="640080"/>
+          </a:xfrm>
+          <a:prstGeom prst="rect">
+            <a:avLst/>
+          </a:prstGeom>
+          <a:noFill/>
+        </p:spPr>
+        <p:txBody>
+          <a:bodyPr wrap="square">
+            <a:spAutoFit/>
+          </a:bodyPr>
+          <a:lstStyle/>
+          <a:p>
+            <a:pPr algn="l"/>
+            <a:r>
+              <a:rPr sz="2800" b="1">
+                <a:solidFill>
+                  <a:srgbClr val="1F6F8B"/>
+                </a:solidFill>
+                <a:latin typeface="Segoe UI"/>
+              </a:rPr>
+              <a:t>Podsumowanie</a:t>
+            </a:r>
+          </a:p>
+        </p:txBody>
+      </p:sp>
+      <p:sp>
+        <p:nvSpPr>
+          <p:cNvPr id="4" name="TextBox 3"/>
+          <p:cNvSpPr txBox="1"/>
+          <p:nvPr/>
+        </p:nvSpPr>
+        <p:spPr>
+          <a:xfrm>
+            <a:off x="548640" y="1371600"/>
+            <a:ext cx="11155680" cy="3108960"/>
+          </a:xfrm>
+          <a:prstGeom prst="rect">
+            <a:avLst/>
+          </a:prstGeom>
+          <a:noFill/>
+        </p:spPr>
+        <p:txBody>
+          <a:bodyPr wrap="square">
+            <a:spAutoFit/>
+          </a:bodyPr>
+          <a:lstStyle/>
+          <a:p>
+            <a:r>
+              <a:rPr sz="1800" b="1">
+                <a:solidFill>
+                  <a:srgbClr val="1A1A2E"/>
+                </a:solidFill>
+                <a:latin typeface="Segoe UI"/>
+              </a:rPr>
+              <a:t>• Wszystkie punktowane wymagania zrealizowane: pytania · gwiazda · ETL live · semantyka · raporty</a:t>
+            </a:r>
+          </a:p>
+          <a:p>
+            <a:r>
+              <a:rPr sz="1800" b="0">
+                <a:solidFill>
+                  <a:srgbClr val="1A1A2E"/>
+                </a:solidFill>
+                <a:latin typeface="Segoe UI"/>
+              </a:rPr>
+              <a:t>• Dodatkowo: tabela mapowań, screeny ładowań, dokumentacja, 12 naprawionych błędów jakości danych</a:t>
+            </a:r>
+          </a:p>
+          <a:p>
+            <a:r>
+              <a:rPr sz="1800" b="0">
+                <a:solidFill>
+                  <a:srgbClr val="1A1A2E"/>
+                </a:solidFill>
+                <a:latin typeface="Segoe UI"/>
+              </a:rPr>
+              <a:t>• Całość w repozytorium: kod, SQL, DAG-i, model PBI jako kod (TMDL), diagramy, dowody</a:t>
+            </a:r>
+          </a:p>
+        </p:txBody>
+      </p:sp>
+      <p:sp>
+        <p:nvSpPr>
+          <p:cNvPr id="5" name="TextBox 4"/>
+          <p:cNvSpPr txBox="1"/>
+          <p:nvPr/>
+        </p:nvSpPr>
+        <p:spPr>
+          <a:xfrm>
+            <a:off x="548640" y="4754880"/>
+            <a:ext cx="10972800" cy="914400"/>
+          </a:xfrm>
+          <a:prstGeom prst="rect">
+            <a:avLst/>
+          </a:prstGeom>
+          <a:noFill/>
+        </p:spPr>
+        <p:txBody>
+          <a:bodyPr wrap="square">
+            <a:spAutoFit/>
+          </a:bodyPr>
+          <a:lstStyle/>
+          <a:p>
+            <a:pPr algn="l"/>
+            <a:r>
               <a:rPr sz="2000" b="1">
                 <a:solidFill>
                   <a:srgbClr val="1F6F8B"/>
                 </a:solidFill>
                 <a:latin typeface="Segoe UI"/>
               </a:rPr>
-              <a:t>Chętnie pokażemy wszystko na żywo (Airflow / Athena / Power BI)</a:t>
+              <a:t>Chętnie pokażemy wszystko na żywo (Airflow / Athena / Power BI).</a:t>
             </a:r>
           </a:p>
           <a:p>
@@ -4847,7 +6345,7 @@
                 </a:solidFill>
                 <a:latin typeface="Segoe UI"/>
               </a:rPr>
-              <a:t>i prosimy o wskazanie, co poprawić przed oddaniem.</a:t>
+              <a:t>Prosimy o wskazanie poprawek — chcemy je nanieść przed oceną końcową.</a:t>
             </a:r>
           </a:p>
         </p:txBody>
@@ -4951,21 +6449,124 @@
                 </a:solidFill>
                 <a:latin typeface="Segoe UI"/>
               </a:rPr>
-              <a:t>Mapa wymagań — co pokażemy po kolei</a:t>
-            </a:r>
-          </a:p>
-        </p:txBody>
-      </p:sp>
-      <p:sp>
-        <p:nvSpPr>
-          <p:cNvPr id="4" name="TextBox 3"/>
+              <a:t>Status wymagań — komplet zrealizowany</a:t>
+            </a:r>
+          </a:p>
+        </p:txBody>
+      </p:sp>
+      <p:sp>
+        <p:nvSpPr>
+          <p:cNvPr id="4" name="Rectangle 3"/>
+          <p:cNvSpPr/>
+          <p:nvPr/>
+        </p:nvSpPr>
+        <p:spPr>
+          <a:xfrm>
+            <a:off x="9448495" y="292608"/>
+            <a:ext cx="2286000" cy="502920"/>
+          </a:xfrm>
+          <a:prstGeom prst="rect">
+            <a:avLst/>
+          </a:prstGeom>
+          <a:solidFill>
+            <a:srgbClr val="2E7D32"/>
+          </a:solidFill>
+          <a:ln>
+            <a:noFill/>
+          </a:ln>
+        </p:spPr>
+        <p:style>
+          <a:lnRef idx="1">
+            <a:schemeClr val="accent1"/>
+          </a:lnRef>
+          <a:fillRef idx="3">
+            <a:schemeClr val="accent1"/>
+          </a:fillRef>
+          <a:effectRef idx="2">
+            <a:schemeClr val="accent1"/>
+          </a:effectRef>
+          <a:fontRef idx="minor">
+            <a:schemeClr val="lt1"/>
+          </a:fontRef>
+        </p:style>
+        <p:txBody>
+          <a:bodyPr rtlCol="0" anchor="ctr"/>
+          <a:lstStyle/>
+          <a:p>
+            <a:pPr algn="ctr"/>
+            <a:r>
+              <a:rPr sz="1500" b="1">
+                <a:solidFill>
+                  <a:srgbClr val="FFFFFF"/>
+                </a:solidFill>
+                <a:latin typeface="Segoe UI"/>
+              </a:rPr>
+              <a:t>5+5+20+10+10</a:t>
+            </a:r>
+          </a:p>
+        </p:txBody>
+      </p:sp>
+      <p:sp>
+        <p:nvSpPr>
+          <p:cNvPr id="5" name="Rectangle 4"/>
+          <p:cNvSpPr/>
+          <p:nvPr/>
+        </p:nvSpPr>
+        <p:spPr>
+          <a:xfrm>
+            <a:off x="548640" y="1353312"/>
+            <a:ext cx="384048" cy="384048"/>
+          </a:xfrm>
+          <a:prstGeom prst="rect">
+            <a:avLst/>
+          </a:prstGeom>
+          <a:solidFill>
+            <a:srgbClr val="2E7D32"/>
+          </a:solidFill>
+          <a:ln>
+            <a:noFill/>
+          </a:ln>
+        </p:spPr>
+        <p:style>
+          <a:lnRef idx="1">
+            <a:schemeClr val="accent1"/>
+          </a:lnRef>
+          <a:fillRef idx="3">
+            <a:schemeClr val="accent1"/>
+          </a:fillRef>
+          <a:effectRef idx="2">
+            <a:schemeClr val="accent1"/>
+          </a:effectRef>
+          <a:fontRef idx="minor">
+            <a:schemeClr val="lt1"/>
+          </a:fontRef>
+        </p:style>
+        <p:txBody>
+          <a:bodyPr rtlCol="0" anchor="ctr"/>
+          <a:lstStyle/>
+          <a:p>
+            <a:pPr algn="ctr"/>
+            <a:r>
+              <a:rPr sz="1800" b="1">
+                <a:solidFill>
+                  <a:srgbClr val="FFFFFF"/>
+                </a:solidFill>
+              </a:rPr>
+              <a:t>✔</a:t>
+            </a:r>
+          </a:p>
+        </p:txBody>
+      </p:sp>
+      <p:sp>
+        <p:nvSpPr>
+          <p:cNvPr id="6" name="TextBox 5"/>
           <p:cNvSpPr txBox="1"/>
           <p:nvPr/>
         </p:nvSpPr>
         <p:spPr>
           <a:xfrm>
-            <a:off x="548640" y="1371600"/>
-            <a:ext cx="4206240" cy="457200"/>
+            <a:off x="1143000" y="1325880"/>
+            <a:ext cx="4297680" cy="457200"/>
           </a:xfrm>
           <a:prstGeom prst="rect">
             <a:avLst/>
@@ -4986,21 +6587,21 @@
                 </a:solidFill>
                 <a:latin typeface="Segoe UI"/>
               </a:rPr>
-              <a:t>1. Pytania biznesowe (7–12)</a:t>
-            </a:r>
-          </a:p>
-        </p:txBody>
-      </p:sp>
-      <p:sp>
-        <p:nvSpPr>
-          <p:cNvPr id="5" name="TextBox 4"/>
+              <a:t>Pytania biznesowe (5 pkt)</a:t>
+            </a:r>
+          </a:p>
+        </p:txBody>
+      </p:sp>
+      <p:sp>
+        <p:nvSpPr>
+          <p:cNvPr id="7" name="TextBox 6"/>
           <p:cNvSpPr txBox="1"/>
           <p:nvPr/>
         </p:nvSpPr>
         <p:spPr>
           <a:xfrm>
-            <a:off x="4846320" y="1371600"/>
-            <a:ext cx="5486400" cy="457200"/>
+            <a:off x="5532120" y="1325880"/>
+            <a:ext cx="6400800" cy="457200"/>
           </a:xfrm>
           <a:prstGeom prst="rect">
             <a:avLst/>
@@ -5015,27 +6616,78 @@
           <a:p>
             <a:pPr algn="l"/>
             <a:r>
-              <a:rPr sz="1500" b="0">
+              <a:rPr sz="1400" b="0">
                 <a:solidFill>
                   <a:srgbClr val="6B6B7B"/>
                 </a:solidFill>
                 <a:latin typeface="Segoe UI"/>
               </a:rPr>
-              <a:t>12 pytań, wszystkie z odpowiedzią w danych</a:t>
-            </a:r>
-          </a:p>
-        </p:txBody>
-      </p:sp>
-      <p:sp>
-        <p:nvSpPr>
-          <p:cNvPr id="6" name="TextBox 5"/>
+              <a:t>12 pytań, każde z odpowiedzią w raporcie</a:t>
+            </a:r>
+          </a:p>
+        </p:txBody>
+      </p:sp>
+      <p:sp>
+        <p:nvSpPr>
+          <p:cNvPr id="8" name="Rectangle 7"/>
+          <p:cNvSpPr/>
+          <p:nvPr/>
+        </p:nvSpPr>
+        <p:spPr>
+          <a:xfrm>
+            <a:off x="548640" y="2020824"/>
+            <a:ext cx="384048" cy="384048"/>
+          </a:xfrm>
+          <a:prstGeom prst="rect">
+            <a:avLst/>
+          </a:prstGeom>
+          <a:solidFill>
+            <a:srgbClr val="2E7D32"/>
+          </a:solidFill>
+          <a:ln>
+            <a:noFill/>
+          </a:ln>
+        </p:spPr>
+        <p:style>
+          <a:lnRef idx="1">
+            <a:schemeClr val="accent1"/>
+          </a:lnRef>
+          <a:fillRef idx="3">
+            <a:schemeClr val="accent1"/>
+          </a:fillRef>
+          <a:effectRef idx="2">
+            <a:schemeClr val="accent1"/>
+          </a:effectRef>
+          <a:fontRef idx="minor">
+            <a:schemeClr val="lt1"/>
+          </a:fontRef>
+        </p:style>
+        <p:txBody>
+          <a:bodyPr rtlCol="0" anchor="ctr"/>
+          <a:lstStyle/>
+          <a:p>
+            <a:pPr algn="ctr"/>
+            <a:r>
+              <a:rPr sz="1800" b="1">
+                <a:solidFill>
+                  <a:srgbClr val="FFFFFF"/>
+                </a:solidFill>
+              </a:rPr>
+              <a:t>✔</a:t>
+            </a:r>
+          </a:p>
+        </p:txBody>
+      </p:sp>
+      <p:sp>
+        <p:nvSpPr>
+          <p:cNvPr id="9" name="TextBox 8"/>
           <p:cNvSpPr txBox="1"/>
           <p:nvPr/>
         </p:nvSpPr>
         <p:spPr>
           <a:xfrm>
-            <a:off x="10424160" y="1371600"/>
-            <a:ext cx="1463040" cy="457200"/>
+            <a:off x="1143000" y="1993392"/>
+            <a:ext cx="4297680" cy="457200"/>
           </a:xfrm>
           <a:prstGeom prst="rect">
             <a:avLst/>
@@ -5050,27 +6702,27 @@
           <a:p>
             <a:pPr algn="l"/>
             <a:r>
-              <a:rPr sz="1400" b="0">
-                <a:solidFill>
-                  <a:srgbClr val="1F6F8B"/>
-                </a:solidFill>
-                <a:latin typeface="Segoe UI"/>
-              </a:rPr>
-              <a:t>slajd 3</a:t>
-            </a:r>
-          </a:p>
-        </p:txBody>
-      </p:sp>
-      <p:sp>
-        <p:nvSpPr>
-          <p:cNvPr id="7" name="TextBox 6"/>
+              <a:rPr sz="1700" b="1">
+                <a:solidFill>
+                  <a:srgbClr val="1A1A2E"/>
+                </a:solidFill>
+                <a:latin typeface="Segoe UI"/>
+              </a:rPr>
+              <a:t>Schemat gwiazdy (5 pkt)</a:t>
+            </a:r>
+          </a:p>
+        </p:txBody>
+      </p:sp>
+      <p:sp>
+        <p:nvSpPr>
+          <p:cNvPr id="10" name="TextBox 9"/>
           <p:cNvSpPr txBox="1"/>
           <p:nvPr/>
         </p:nvSpPr>
         <p:spPr>
           <a:xfrm>
-            <a:off x="548640" y="2029968"/>
-            <a:ext cx="4206240" cy="457200"/>
+            <a:off x="5532120" y="1993392"/>
+            <a:ext cx="6400800" cy="457200"/>
           </a:xfrm>
           <a:prstGeom prst="rect">
             <a:avLst/>
@@ -5085,27 +6737,78 @@
           <a:p>
             <a:pPr algn="l"/>
             <a:r>
-              <a:rPr sz="1700" b="1">
-                <a:solidFill>
-                  <a:srgbClr val="1A1A2E"/>
-                </a:solidFill>
-                <a:latin typeface="Segoe UI"/>
-              </a:rPr>
-              <a:t>2. Schemat gwiazdy</a:t>
-            </a:r>
-          </a:p>
-        </p:txBody>
-      </p:sp>
-      <p:sp>
-        <p:nvSpPr>
-          <p:cNvPr id="8" name="TextBox 7"/>
+              <a:rPr sz="1400" b="0">
+                <a:solidFill>
+                  <a:srgbClr val="6B6B7B"/>
+                </a:solidFill>
+                <a:latin typeface="Segoe UI"/>
+              </a:rPr>
+              <a:t>czysta gwiazda: fakt + 7 wymiarów, klucze sztuczne, 0 sierot</a:t>
+            </a:r>
+          </a:p>
+        </p:txBody>
+      </p:sp>
+      <p:sp>
+        <p:nvSpPr>
+          <p:cNvPr id="11" name="Rectangle 10"/>
+          <p:cNvSpPr/>
+          <p:nvPr/>
+        </p:nvSpPr>
+        <p:spPr>
+          <a:xfrm>
+            <a:off x="548640" y="2688336"/>
+            <a:ext cx="384048" cy="384048"/>
+          </a:xfrm>
+          <a:prstGeom prst="rect">
+            <a:avLst/>
+          </a:prstGeom>
+          <a:solidFill>
+            <a:srgbClr val="2E7D32"/>
+          </a:solidFill>
+          <a:ln>
+            <a:noFill/>
+          </a:ln>
+        </p:spPr>
+        <p:style>
+          <a:lnRef idx="1">
+            <a:schemeClr val="accent1"/>
+          </a:lnRef>
+          <a:fillRef idx="3">
+            <a:schemeClr val="accent1"/>
+          </a:fillRef>
+          <a:effectRef idx="2">
+            <a:schemeClr val="accent1"/>
+          </a:effectRef>
+          <a:fontRef idx="minor">
+            <a:schemeClr val="lt1"/>
+          </a:fontRef>
+        </p:style>
+        <p:txBody>
+          <a:bodyPr rtlCol="0" anchor="ctr"/>
+          <a:lstStyle/>
+          <a:p>
+            <a:pPr algn="ctr"/>
+            <a:r>
+              <a:rPr sz="1800" b="1">
+                <a:solidFill>
+                  <a:srgbClr val="FFFFFF"/>
+                </a:solidFill>
+              </a:rPr>
+              <a:t>✔</a:t>
+            </a:r>
+          </a:p>
+        </p:txBody>
+      </p:sp>
+      <p:sp>
+        <p:nvSpPr>
+          <p:cNvPr id="12" name="TextBox 11"/>
           <p:cNvSpPr txBox="1"/>
           <p:nvPr/>
         </p:nvSpPr>
         <p:spPr>
           <a:xfrm>
-            <a:off x="4846320" y="2029968"/>
-            <a:ext cx="5486400" cy="457200"/>
+            <a:off x="1143000" y="2660904"/>
+            <a:ext cx="4297680" cy="457200"/>
           </a:xfrm>
           <a:prstGeom prst="rect">
             <a:avLst/>
@@ -5120,27 +6823,27 @@
           <a:p>
             <a:pPr algn="l"/>
             <a:r>
-              <a:rPr sz="1500" b="0">
-                <a:solidFill>
-                  <a:srgbClr val="6B6B7B"/>
-                </a:solidFill>
-                <a:latin typeface="Segoe UI"/>
-              </a:rPr>
-              <a:t>czysta gwiazda, klucze sztuczne, 7 wymiarów</a:t>
-            </a:r>
-          </a:p>
-        </p:txBody>
-      </p:sp>
-      <p:sp>
-        <p:nvSpPr>
-          <p:cNvPr id="9" name="TextBox 8"/>
+              <a:rPr sz="1700" b="1">
+                <a:solidFill>
+                  <a:srgbClr val="1A1A2E"/>
+                </a:solidFill>
+                <a:latin typeface="Segoe UI"/>
+              </a:rPr>
+              <a:t>ETL na żywo (20 pkt)</a:t>
+            </a:r>
+          </a:p>
+        </p:txBody>
+      </p:sp>
+      <p:sp>
+        <p:nvSpPr>
+          <p:cNvPr id="13" name="TextBox 12"/>
           <p:cNvSpPr txBox="1"/>
           <p:nvPr/>
         </p:nvSpPr>
         <p:spPr>
           <a:xfrm>
-            <a:off x="10424160" y="2029968"/>
-            <a:ext cx="1463040" cy="457200"/>
+            <a:off x="5532120" y="2660904"/>
+            <a:ext cx="6400800" cy="457200"/>
           </a:xfrm>
           <a:prstGeom prst="rect">
             <a:avLst/>
@@ -5157,25 +6860,76 @@
             <a:r>
               <a:rPr sz="1400" b="0">
                 <a:solidFill>
-                  <a:srgbClr val="1F6F8B"/>
-                </a:solidFill>
-                <a:latin typeface="Segoe UI"/>
-              </a:rPr>
-              <a:t>slajdy 4–5</a:t>
-            </a:r>
-          </a:p>
-        </p:txBody>
-      </p:sp>
-      <p:sp>
-        <p:nvSpPr>
-          <p:cNvPr id="10" name="TextBox 9"/>
+                  <a:srgbClr val="6B6B7B"/>
+                </a:solidFill>
+                <a:latin typeface="Segoe UI"/>
+              </a:rPr>
+              <a:t>Airflow: 2 DAG-i, idempotentne, walidacja automatyczna — demo live</a:t>
+            </a:r>
+          </a:p>
+        </p:txBody>
+      </p:sp>
+      <p:sp>
+        <p:nvSpPr>
+          <p:cNvPr id="14" name="Rectangle 13"/>
+          <p:cNvSpPr/>
+          <p:nvPr/>
+        </p:nvSpPr>
+        <p:spPr>
+          <a:xfrm>
+            <a:off x="548640" y="3355848"/>
+            <a:ext cx="384048" cy="384048"/>
+          </a:xfrm>
+          <a:prstGeom prst="rect">
+            <a:avLst/>
+          </a:prstGeom>
+          <a:solidFill>
+            <a:srgbClr val="2E7D32"/>
+          </a:solidFill>
+          <a:ln>
+            <a:noFill/>
+          </a:ln>
+        </p:spPr>
+        <p:style>
+          <a:lnRef idx="1">
+            <a:schemeClr val="accent1"/>
+          </a:lnRef>
+          <a:fillRef idx="3">
+            <a:schemeClr val="accent1"/>
+          </a:fillRef>
+          <a:effectRef idx="2">
+            <a:schemeClr val="accent1"/>
+          </a:effectRef>
+          <a:fontRef idx="minor">
+            <a:schemeClr val="lt1"/>
+          </a:fontRef>
+        </p:style>
+        <p:txBody>
+          <a:bodyPr rtlCol="0" anchor="ctr"/>
+          <a:lstStyle/>
+          <a:p>
+            <a:pPr algn="ctr"/>
+            <a:r>
+              <a:rPr sz="1800" b="1">
+                <a:solidFill>
+                  <a:srgbClr val="FFFFFF"/>
+                </a:solidFill>
+              </a:rPr>
+              <a:t>✔</a:t>
+            </a:r>
+          </a:p>
+        </p:txBody>
+      </p:sp>
+      <p:sp>
+        <p:nvSpPr>
+          <p:cNvPr id="15" name="TextBox 14"/>
           <p:cNvSpPr txBox="1"/>
           <p:nvPr/>
         </p:nvSpPr>
         <p:spPr>
           <a:xfrm>
-            <a:off x="548640" y="2688336"/>
-            <a:ext cx="4206240" cy="457200"/>
+            <a:off x="1143000" y="3328416"/>
+            <a:ext cx="4297680" cy="457200"/>
           </a:xfrm>
           <a:prstGeom prst="rect">
             <a:avLst/>
@@ -5196,21 +6950,21 @@
                 </a:solidFill>
                 <a:latin typeface="Segoe UI"/>
               </a:rPr>
-              <a:t>3. ETL uruchomiony na żywo</a:t>
-            </a:r>
-          </a:p>
-        </p:txBody>
-      </p:sp>
-      <p:sp>
-        <p:nvSpPr>
-          <p:cNvPr id="11" name="TextBox 10"/>
+              <a:t>Warstwa semantyczna (10 pkt)</a:t>
+            </a:r>
+          </a:p>
+        </p:txBody>
+      </p:sp>
+      <p:sp>
+        <p:nvSpPr>
+          <p:cNvPr id="16" name="TextBox 15"/>
           <p:cNvSpPr txBox="1"/>
           <p:nvPr/>
         </p:nvSpPr>
         <p:spPr>
           <a:xfrm>
-            <a:off x="4846320" y="2688336"/>
-            <a:ext cx="5486400" cy="457200"/>
+            <a:off x="5532120" y="3328416"/>
+            <a:ext cx="6400800" cy="457200"/>
           </a:xfrm>
           <a:prstGeom prst="rect">
             <a:avLst/>
@@ -5225,27 +6979,78 @@
           <a:p>
             <a:pPr algn="l"/>
             <a:r>
-              <a:rPr sz="1500" b="0">
+              <a:rPr sz="1400" b="0">
                 <a:solidFill>
                   <a:srgbClr val="6B6B7B"/>
                 </a:solidFill>
                 <a:latin typeface="Segoe UI"/>
               </a:rPr>
-              <a:t>Airflow + Glue + Athena, idempotentny, walidowany</a:t>
-            </a:r>
-          </a:p>
-        </p:txBody>
-      </p:sp>
-      <p:sp>
-        <p:nvSpPr>
-          <p:cNvPr id="12" name="TextBox 11"/>
+              <a:t>model Power BI: 7 relacji, 15+ miar DAX, hierarchie, tabela dat</a:t>
+            </a:r>
+          </a:p>
+        </p:txBody>
+      </p:sp>
+      <p:sp>
+        <p:nvSpPr>
+          <p:cNvPr id="17" name="Rectangle 16"/>
+          <p:cNvSpPr/>
+          <p:nvPr/>
+        </p:nvSpPr>
+        <p:spPr>
+          <a:xfrm>
+            <a:off x="548640" y="4023360"/>
+            <a:ext cx="384048" cy="384048"/>
+          </a:xfrm>
+          <a:prstGeom prst="rect">
+            <a:avLst/>
+          </a:prstGeom>
+          <a:solidFill>
+            <a:srgbClr val="2E7D32"/>
+          </a:solidFill>
+          <a:ln>
+            <a:noFill/>
+          </a:ln>
+        </p:spPr>
+        <p:style>
+          <a:lnRef idx="1">
+            <a:schemeClr val="accent1"/>
+          </a:lnRef>
+          <a:fillRef idx="3">
+            <a:schemeClr val="accent1"/>
+          </a:fillRef>
+          <a:effectRef idx="2">
+            <a:schemeClr val="accent1"/>
+          </a:effectRef>
+          <a:fontRef idx="minor">
+            <a:schemeClr val="lt1"/>
+          </a:fontRef>
+        </p:style>
+        <p:txBody>
+          <a:bodyPr rtlCol="0" anchor="ctr"/>
+          <a:lstStyle/>
+          <a:p>
+            <a:pPr algn="ctr"/>
+            <a:r>
+              <a:rPr sz="1800" b="1">
+                <a:solidFill>
+                  <a:srgbClr val="FFFFFF"/>
+                </a:solidFill>
+              </a:rPr>
+              <a:t>✔</a:t>
+            </a:r>
+          </a:p>
+        </p:txBody>
+      </p:sp>
+      <p:sp>
+        <p:nvSpPr>
+          <p:cNvPr id="18" name="TextBox 17"/>
           <p:cNvSpPr txBox="1"/>
           <p:nvPr/>
         </p:nvSpPr>
         <p:spPr>
           <a:xfrm>
-            <a:off x="10424160" y="2688336"/>
-            <a:ext cx="1463040" cy="457200"/>
+            <a:off x="1143000" y="3995928"/>
+            <a:ext cx="4297680" cy="457200"/>
           </a:xfrm>
           <a:prstGeom prst="rect">
             <a:avLst/>
@@ -5260,27 +7065,27 @@
           <a:p>
             <a:pPr algn="l"/>
             <a:r>
-              <a:rPr sz="1400" b="0">
-                <a:solidFill>
-                  <a:srgbClr val="1F6F8B"/>
-                </a:solidFill>
-                <a:latin typeface="Segoe UI"/>
-              </a:rPr>
-              <a:t>slajdy 6–9</a:t>
-            </a:r>
-          </a:p>
-        </p:txBody>
-      </p:sp>
-      <p:sp>
-        <p:nvSpPr>
-          <p:cNvPr id="13" name="TextBox 12"/>
+              <a:rPr sz="1700" b="1">
+                <a:solidFill>
+                  <a:srgbClr val="1A1A2E"/>
+                </a:solidFill>
+                <a:latin typeface="Segoe UI"/>
+              </a:rPr>
+              <a:t>Raporty z wykresami (10 pkt)</a:t>
+            </a:r>
+          </a:p>
+        </p:txBody>
+      </p:sp>
+      <p:sp>
+        <p:nvSpPr>
+          <p:cNvPr id="19" name="TextBox 18"/>
           <p:cNvSpPr txBox="1"/>
           <p:nvPr/>
         </p:nvSpPr>
         <p:spPr>
           <a:xfrm>
-            <a:off x="548640" y="3346704"/>
-            <a:ext cx="4206240" cy="457200"/>
+            <a:off x="5532120" y="3995928"/>
+            <a:ext cx="6400800" cy="457200"/>
           </a:xfrm>
           <a:prstGeom prst="rect">
             <a:avLst/>
@@ -5295,27 +7100,78 @@
           <a:p>
             <a:pPr algn="l"/>
             <a:r>
-              <a:rPr sz="1700" b="1">
-                <a:solidFill>
-                  <a:srgbClr val="1A1A2E"/>
-                </a:solidFill>
-                <a:latin typeface="Segoe UI"/>
-              </a:rPr>
-              <a:t>4. Warstwa semantyczna</a:t>
-            </a:r>
-          </a:p>
-        </p:txBody>
-      </p:sp>
-      <p:sp>
-        <p:nvSpPr>
-          <p:cNvPr id="14" name="TextBox 13"/>
+              <a:rPr sz="1400" b="0">
+                <a:solidFill>
+                  <a:srgbClr val="6B6B7B"/>
+                </a:solidFill>
+                <a:latin typeface="Segoe UI"/>
+              </a:rPr>
+              <a:t>9 stron: dashboard + strona per pytanie, slicery, drill-down</a:t>
+            </a:r>
+          </a:p>
+        </p:txBody>
+      </p:sp>
+      <p:sp>
+        <p:nvSpPr>
+          <p:cNvPr id="20" name="Rectangle 19"/>
+          <p:cNvSpPr/>
+          <p:nvPr/>
+        </p:nvSpPr>
+        <p:spPr>
+          <a:xfrm>
+            <a:off x="548640" y="4690872"/>
+            <a:ext cx="384048" cy="384048"/>
+          </a:xfrm>
+          <a:prstGeom prst="rect">
+            <a:avLst/>
+          </a:prstGeom>
+          <a:solidFill>
+            <a:srgbClr val="2E7D32"/>
+          </a:solidFill>
+          <a:ln>
+            <a:noFill/>
+          </a:ln>
+        </p:spPr>
+        <p:style>
+          <a:lnRef idx="1">
+            <a:schemeClr val="accent1"/>
+          </a:lnRef>
+          <a:fillRef idx="3">
+            <a:schemeClr val="accent1"/>
+          </a:fillRef>
+          <a:effectRef idx="2">
+            <a:schemeClr val="accent1"/>
+          </a:effectRef>
+          <a:fontRef idx="minor">
+            <a:schemeClr val="lt1"/>
+          </a:fontRef>
+        </p:style>
+        <p:txBody>
+          <a:bodyPr rtlCol="0" anchor="ctr"/>
+          <a:lstStyle/>
+          <a:p>
+            <a:pPr algn="ctr"/>
+            <a:r>
+              <a:rPr sz="1800" b="1">
+                <a:solidFill>
+                  <a:srgbClr val="FFFFFF"/>
+                </a:solidFill>
+              </a:rPr>
+              <a:t>✔</a:t>
+            </a:r>
+          </a:p>
+        </p:txBody>
+      </p:sp>
+      <p:sp>
+        <p:nvSpPr>
+          <p:cNvPr id="21" name="TextBox 20"/>
           <p:cNvSpPr txBox="1"/>
           <p:nvPr/>
         </p:nvSpPr>
         <p:spPr>
           <a:xfrm>
-            <a:off x="4846320" y="3346704"/>
-            <a:ext cx="5486400" cy="457200"/>
+            <a:off x="1143000" y="4663440"/>
+            <a:ext cx="4297680" cy="457200"/>
           </a:xfrm>
           <a:prstGeom prst="rect">
             <a:avLst/>
@@ -5330,27 +7186,27 @@
           <a:p>
             <a:pPr algn="l"/>
             <a:r>
-              <a:rPr sz="1500" b="0">
-                <a:solidFill>
-                  <a:srgbClr val="6B6B7B"/>
-                </a:solidFill>
-                <a:latin typeface="Segoe UI"/>
-              </a:rPr>
-              <a:t>model Power BI: relacje, 15 miar DAX, hierarchie</a:t>
-            </a:r>
-          </a:p>
-        </p:txBody>
-      </p:sp>
-      <p:sp>
-        <p:nvSpPr>
-          <p:cNvPr id="15" name="TextBox 14"/>
+              <a:rPr sz="1700" b="1">
+                <a:solidFill>
+                  <a:srgbClr val="1A1A2E"/>
+                </a:solidFill>
+                <a:latin typeface="Segoe UI"/>
+              </a:rPr>
+              <a:t>Zadanie: tabela mapowań</a:t>
+            </a:r>
+          </a:p>
+        </p:txBody>
+      </p:sp>
+      <p:sp>
+        <p:nvSpPr>
+          <p:cNvPr id="22" name="TextBox 21"/>
           <p:cNvSpPr txBox="1"/>
           <p:nvPr/>
         </p:nvSpPr>
         <p:spPr>
           <a:xfrm>
-            <a:off x="10424160" y="3346704"/>
-            <a:ext cx="1463040" cy="457200"/>
+            <a:off x="5532120" y="4663440"/>
+            <a:ext cx="6400800" cy="457200"/>
           </a:xfrm>
           <a:prstGeom prst="rect">
             <a:avLst/>
@@ -5367,25 +7223,76 @@
             <a:r>
               <a:rPr sz="1400" b="0">
                 <a:solidFill>
-                  <a:srgbClr val="1F6F8B"/>
-                </a:solidFill>
-                <a:latin typeface="Segoe UI"/>
-              </a:rPr>
-              <a:t>slajd 10</a:t>
-            </a:r>
-          </a:p>
-        </p:txBody>
-      </p:sp>
-      <p:sp>
-        <p:nvSpPr>
-          <p:cNvPr id="16" name="TextBox 15"/>
+                  <a:srgbClr val="6B6B7B"/>
+                </a:solidFill>
+                <a:latin typeface="Segoe UI"/>
+              </a:rPr>
+              <a:t>docs/etl_mapowania.md — źródło→transformacja→cel</a:t>
+            </a:r>
+          </a:p>
+        </p:txBody>
+      </p:sp>
+      <p:sp>
+        <p:nvSpPr>
+          <p:cNvPr id="23" name="Rectangle 22"/>
+          <p:cNvSpPr/>
+          <p:nvPr/>
+        </p:nvSpPr>
+        <p:spPr>
+          <a:xfrm>
+            <a:off x="548640" y="5358384"/>
+            <a:ext cx="384048" cy="384048"/>
+          </a:xfrm>
+          <a:prstGeom prst="rect">
+            <a:avLst/>
+          </a:prstGeom>
+          <a:solidFill>
+            <a:srgbClr val="2E7D32"/>
+          </a:solidFill>
+          <a:ln>
+            <a:noFill/>
+          </a:ln>
+        </p:spPr>
+        <p:style>
+          <a:lnRef idx="1">
+            <a:schemeClr val="accent1"/>
+          </a:lnRef>
+          <a:fillRef idx="3">
+            <a:schemeClr val="accent1"/>
+          </a:fillRef>
+          <a:effectRef idx="2">
+            <a:schemeClr val="accent1"/>
+          </a:effectRef>
+          <a:fontRef idx="minor">
+            <a:schemeClr val="lt1"/>
+          </a:fontRef>
+        </p:style>
+        <p:txBody>
+          <a:bodyPr rtlCol="0" anchor="ctr"/>
+          <a:lstStyle/>
+          <a:p>
+            <a:pPr algn="ctr"/>
+            <a:r>
+              <a:rPr sz="1800" b="1">
+                <a:solidFill>
+                  <a:srgbClr val="FFFFFF"/>
+                </a:solidFill>
+              </a:rPr>
+              <a:t>✔</a:t>
+            </a:r>
+          </a:p>
+        </p:txBody>
+      </p:sp>
+      <p:sp>
+        <p:nvSpPr>
+          <p:cNvPr id="24" name="TextBox 23"/>
           <p:cNvSpPr txBox="1"/>
           <p:nvPr/>
         </p:nvSpPr>
         <p:spPr>
           <a:xfrm>
-            <a:off x="548640" y="4005072"/>
-            <a:ext cx="4206240" cy="457200"/>
+            <a:off x="1143000" y="5330952"/>
+            <a:ext cx="4297680" cy="457200"/>
           </a:xfrm>
           <a:prstGeom prst="rect">
             <a:avLst/>
@@ -5406,21 +7313,21 @@
                 </a:solidFill>
                 <a:latin typeface="Segoe UI"/>
               </a:rPr>
-              <a:t>5. Raporty z wykresami</a:t>
-            </a:r>
-          </a:p>
-        </p:txBody>
-      </p:sp>
-      <p:sp>
-        <p:nvSpPr>
-          <p:cNvPr id="17" name="TextBox 16"/>
+              <a:t>Zadanie: screeny ładowań</a:t>
+            </a:r>
+          </a:p>
+        </p:txBody>
+      </p:sp>
+      <p:sp>
+        <p:nvSpPr>
+          <p:cNvPr id="25" name="TextBox 24"/>
           <p:cNvSpPr txBox="1"/>
           <p:nvPr/>
         </p:nvSpPr>
         <p:spPr>
           <a:xfrm>
-            <a:off x="4846320" y="4005072"/>
-            <a:ext cx="5486400" cy="457200"/>
+            <a:off x="5532120" y="5330952"/>
+            <a:ext cx="6400800" cy="457200"/>
           </a:xfrm>
           <a:prstGeom prst="rect">
             <a:avLst/>
@@ -5435,27 +7342,27 @@
           <a:p>
             <a:pPr algn="l"/>
             <a:r>
-              <a:rPr sz="1500" b="0">
+              <a:rPr sz="1400" b="0">
                 <a:solidFill>
                   <a:srgbClr val="6B6B7B"/>
                 </a:solidFill>
                 <a:latin typeface="Segoe UI"/>
               </a:rPr>
-              <a:t>dashboard + strona per pytanie — W TRAKCIE</a:t>
-            </a:r>
-          </a:p>
-        </p:txBody>
-      </p:sp>
-      <p:sp>
-        <p:nvSpPr>
-          <p:cNvPr id="18" name="TextBox 17"/>
+              <a:t>13 zrzutów: każdy wymiar + fakt + walidacja</a:t>
+            </a:r>
+          </a:p>
+        </p:txBody>
+      </p:sp>
+      <p:sp>
+        <p:nvSpPr>
+          <p:cNvPr id="26" name="TextBox 25"/>
           <p:cNvSpPr txBox="1"/>
           <p:nvPr/>
         </p:nvSpPr>
         <p:spPr>
           <a:xfrm>
-            <a:off x="10424160" y="4005072"/>
-            <a:ext cx="1463040" cy="457200"/>
+            <a:off x="548640" y="6108192"/>
+            <a:ext cx="11155680" cy="457200"/>
           </a:xfrm>
           <a:prstGeom prst="rect">
             <a:avLst/>
@@ -5470,258 +7377,13 @@
           <a:p>
             <a:pPr algn="l"/>
             <a:r>
-              <a:rPr sz="1400" b="0">
-                <a:solidFill>
-                  <a:srgbClr val="1F6F8B"/>
-                </a:solidFill>
-                <a:latin typeface="Segoe UI"/>
-              </a:rPr>
-              <a:t>slajd 11</a:t>
-            </a:r>
-          </a:p>
-        </p:txBody>
-      </p:sp>
-      <p:sp>
-        <p:nvSpPr>
-          <p:cNvPr id="19" name="TextBox 18"/>
-          <p:cNvSpPr txBox="1"/>
-          <p:nvPr/>
-        </p:nvSpPr>
-        <p:spPr>
-          <a:xfrm>
-            <a:off x="548640" y="4663440"/>
-            <a:ext cx="4206240" cy="457200"/>
-          </a:xfrm>
-          <a:prstGeom prst="rect">
-            <a:avLst/>
-          </a:prstGeom>
-          <a:noFill/>
-        </p:spPr>
-        <p:txBody>
-          <a:bodyPr wrap="square">
-            <a:spAutoFit/>
-          </a:bodyPr>
-          <a:lstStyle/>
-          <a:p>
-            <a:pPr algn="l"/>
-            <a:r>
-              <a:rPr sz="1700" b="1">
-                <a:solidFill>
-                  <a:srgbClr val="1A1A2E"/>
-                </a:solidFill>
-                <a:latin typeface="Segoe UI"/>
-              </a:rPr>
-              <a:t>Zadanie: tabela mapowań</a:t>
-            </a:r>
-          </a:p>
-        </p:txBody>
-      </p:sp>
-      <p:sp>
-        <p:nvSpPr>
-          <p:cNvPr id="20" name="TextBox 19"/>
-          <p:cNvSpPr txBox="1"/>
-          <p:nvPr/>
-        </p:nvSpPr>
-        <p:spPr>
-          <a:xfrm>
-            <a:off x="4846320" y="4663440"/>
-            <a:ext cx="5486400" cy="457200"/>
-          </a:xfrm>
-          <a:prstGeom prst="rect">
-            <a:avLst/>
-          </a:prstGeom>
-          <a:noFill/>
-        </p:spPr>
-        <p:txBody>
-          <a:bodyPr wrap="square">
-            <a:spAutoFit/>
-          </a:bodyPr>
-          <a:lstStyle/>
-          <a:p>
-            <a:pPr algn="l"/>
-            <a:r>
-              <a:rPr sz="1500" b="0">
-                <a:solidFill>
-                  <a:srgbClr val="6B6B7B"/>
-                </a:solidFill>
-                <a:latin typeface="Segoe UI"/>
-              </a:rPr>
-              <a:t>docs/etl_mapowania.md — etap po etapie</a:t>
-            </a:r>
-          </a:p>
-        </p:txBody>
-      </p:sp>
-      <p:sp>
-        <p:nvSpPr>
-          <p:cNvPr id="21" name="TextBox 20"/>
-          <p:cNvSpPr txBox="1"/>
-          <p:nvPr/>
-        </p:nvSpPr>
-        <p:spPr>
-          <a:xfrm>
-            <a:off x="10424160" y="4663440"/>
-            <a:ext cx="1463040" cy="457200"/>
-          </a:xfrm>
-          <a:prstGeom prst="rect">
-            <a:avLst/>
-          </a:prstGeom>
-          <a:noFill/>
-        </p:spPr>
-        <p:txBody>
-          <a:bodyPr wrap="square">
-            <a:spAutoFit/>
-          </a:bodyPr>
-          <a:lstStyle/>
-          <a:p>
-            <a:pPr algn="l"/>
-            <a:r>
-              <a:rPr sz="1400" b="0">
-                <a:solidFill>
-                  <a:srgbClr val="1F6F8B"/>
-                </a:solidFill>
-                <a:latin typeface="Segoe UI"/>
-              </a:rPr>
-              <a:t>slajd 7</a:t>
-            </a:r>
-          </a:p>
-        </p:txBody>
-      </p:sp>
-      <p:sp>
-        <p:nvSpPr>
-          <p:cNvPr id="22" name="TextBox 21"/>
-          <p:cNvSpPr txBox="1"/>
-          <p:nvPr/>
-        </p:nvSpPr>
-        <p:spPr>
-          <a:xfrm>
-            <a:off x="548640" y="5321808"/>
-            <a:ext cx="4206240" cy="457200"/>
-          </a:xfrm>
-          <a:prstGeom prst="rect">
-            <a:avLst/>
-          </a:prstGeom>
-          <a:noFill/>
-        </p:spPr>
-        <p:txBody>
-          <a:bodyPr wrap="square">
-            <a:spAutoFit/>
-          </a:bodyPr>
-          <a:lstStyle/>
-          <a:p>
-            <a:pPr algn="l"/>
-            <a:r>
-              <a:rPr sz="1700" b="1">
-                <a:solidFill>
-                  <a:srgbClr val="1A1A2E"/>
-                </a:solidFill>
-                <a:latin typeface="Segoe UI"/>
-              </a:rPr>
-              <a:t>Zadanie: screeny ładowań</a:t>
-            </a:r>
-          </a:p>
-        </p:txBody>
-      </p:sp>
-      <p:sp>
-        <p:nvSpPr>
-          <p:cNvPr id="23" name="TextBox 22"/>
-          <p:cNvSpPr txBox="1"/>
-          <p:nvPr/>
-        </p:nvSpPr>
-        <p:spPr>
-          <a:xfrm>
-            <a:off x="4846320" y="5321808"/>
-            <a:ext cx="5486400" cy="457200"/>
-          </a:xfrm>
-          <a:prstGeom prst="rect">
-            <a:avLst/>
-          </a:prstGeom>
-          <a:noFill/>
-        </p:spPr>
-        <p:txBody>
-          <a:bodyPr wrap="square">
-            <a:spAutoFit/>
-          </a:bodyPr>
-          <a:lstStyle/>
-          <a:p>
-            <a:pPr algn="l"/>
-            <a:r>
-              <a:rPr sz="1500" b="0">
-                <a:solidFill>
-                  <a:srgbClr val="6B6B7B"/>
-                </a:solidFill>
-                <a:latin typeface="Segoe UI"/>
-              </a:rPr>
-              <a:t>13 zrzutów: każdy wymiar + fakt + walidacja</a:t>
-            </a:r>
-          </a:p>
-        </p:txBody>
-      </p:sp>
-      <p:sp>
-        <p:nvSpPr>
-          <p:cNvPr id="24" name="TextBox 23"/>
-          <p:cNvSpPr txBox="1"/>
-          <p:nvPr/>
-        </p:nvSpPr>
-        <p:spPr>
-          <a:xfrm>
-            <a:off x="10424160" y="5321808"/>
-            <a:ext cx="1463040" cy="457200"/>
-          </a:xfrm>
-          <a:prstGeom prst="rect">
-            <a:avLst/>
-          </a:prstGeom>
-          <a:noFill/>
-        </p:spPr>
-        <p:txBody>
-          <a:bodyPr wrap="square">
-            <a:spAutoFit/>
-          </a:bodyPr>
-          <a:lstStyle/>
-          <a:p>
-            <a:pPr algn="l"/>
-            <a:r>
-              <a:rPr sz="1400" b="0">
-                <a:solidFill>
-                  <a:srgbClr val="1F6F8B"/>
-                </a:solidFill>
-                <a:latin typeface="Segoe UI"/>
-              </a:rPr>
-              <a:t>slajd 9</a:t>
-            </a:r>
-          </a:p>
-        </p:txBody>
-      </p:sp>
-      <p:sp>
-        <p:nvSpPr>
-          <p:cNvPr id="25" name="TextBox 24"/>
-          <p:cNvSpPr txBox="1"/>
-          <p:nvPr/>
-        </p:nvSpPr>
-        <p:spPr>
-          <a:xfrm>
-            <a:off x="548640" y="6117336"/>
-            <a:ext cx="10972800" cy="457200"/>
-          </a:xfrm>
-          <a:prstGeom prst="rect">
-            <a:avLst/>
-          </a:prstGeom>
-          <a:noFill/>
-        </p:spPr>
-        <p:txBody>
-          <a:bodyPr wrap="square">
-            <a:spAutoFit/>
-          </a:bodyPr>
-          <a:lstStyle/>
-          <a:p>
-            <a:pPr algn="l"/>
-            <a:r>
               <a:rPr sz="1600" b="1">
                 <a:solidFill>
                   <a:srgbClr val="A50F15"/>
                 </a:solidFill>
                 <a:latin typeface="Segoe UI"/>
               </a:rPr>
-              <a:t>Na końcu: lista otwartych pytań, na które potrzebujemy Pani decyzji.</a:t>
+              <a:t>Prosimy o ocenę i wskazanie, co ewentualnie poprawić — lista pytań na końcu.</a:t>
             </a:r>
           </a:p>
         </p:txBody>
@@ -5845,7 +7507,7 @@
             <a:avLst/>
           </a:prstGeom>
           <a:solidFill>
-            <a:srgbClr val="E08E45"/>
+            <a:srgbClr val="2E7D32"/>
           </a:solidFill>
           <a:ln>
             <a:noFill/>
@@ -5877,7 +7539,7 @@
                 </a:solidFill>
                 <a:latin typeface="Segoe UI"/>
               </a:rPr>
-              <a:t>wymóg 1–3</a:t>
+              <a:t>wymóg 1–3 ✔</a:t>
             </a:r>
           </a:p>
         </p:txBody>
@@ -5891,7 +7553,7 @@
         <p:spPr>
           <a:xfrm>
             <a:off x="548640" y="1280160"/>
-            <a:ext cx="5394960" cy="2286000"/>
+            <a:ext cx="5394960" cy="2194560"/>
           </a:xfrm>
           <a:prstGeom prst="rect">
             <a:avLst/>
@@ -5922,7 +7584,18 @@
                 </a:solidFill>
                 <a:latin typeface="Segoe UI"/>
               </a:rPr>
-              <a:t>   – 2 669 294 zdarzeń · 1997–2025 · cały świat</a:t>
+              <a:t>   – 2 669 294 zdarzeń · 1997–2025 · 242 kraje</a:t>
+            </a:r>
+          </a:p>
+          <a:p>
+            <a:r>
+              <a:rPr sz="1300" b="0">
+                <a:solidFill>
+                  <a:srgbClr val="6B6B7B"/>
+                </a:solidFill>
+                <a:latin typeface="Segoe UI"/>
+              </a:rPr>
+              <a:t>   – źródło publikuje z 12-mies. embargiem (znanym z góry)</a:t>
             </a:r>
           </a:p>
           <a:p>
@@ -5933,7 +7606,7 @@
                 </a:solidFill>
                 <a:latin typeface="Segoe UI"/>
               </a:rPr>
-              <a:t>• World Bank SP.POP.TOTL — populacja do per capita</a:t>
+              <a:t>• World Bank SP.POP.TOTL — populacja (per capita)</a:t>
             </a:r>
           </a:p>
           <a:p>
@@ -5957,8 +7630,8 @@
         </p:nvSpPr>
         <p:spPr>
           <a:xfrm>
-            <a:off x="548640" y="3291840"/>
-            <a:ext cx="5577840" cy="3017520"/>
+            <a:off x="548640" y="3383280"/>
+            <a:ext cx="5577840" cy="2926080"/>
           </a:xfrm>
           <a:prstGeom prst="rect">
             <a:avLst/>
@@ -5978,7 +7651,7 @@
                 </a:solidFill>
                 <a:latin typeface="Segoe UI"/>
               </a:rPr>
-              <a:t>• 1. Kraje/regiony z największą liczbą zdarzeń + typy</a:t>
+              <a:t>• 1. Kraje/regiony + dominujące typy</a:t>
             </a:r>
           </a:p>
           <a:p>
@@ -6000,7 +7673,7 @@
                 </a:solidFill>
                 <a:latin typeface="Segoe UI"/>
               </a:rPr>
-              <a:t>• 3. Trend zdarzeń w czasie per typ niepokoju</a:t>
+              <a:t>• 3. Trend per typ niepokoju (rok+miesiąc)</a:t>
             </a:r>
           </a:p>
           <a:p>
@@ -6011,7 +7684,7 @@
                 </a:solidFill>
                 <a:latin typeface="Segoe UI"/>
               </a:rPr>
-              <a:t>• 4. Sezonowość (miesiące)</a:t>
+              <a:t>• 4. Sezonowość (zdarzenia i ofiary)</a:t>
             </a:r>
           </a:p>
           <a:p>
@@ -6022,7 +7695,7 @@
                 </a:solidFill>
                 <a:latin typeface="Segoe UI"/>
               </a:rPr>
-              <a:t>• 5. Najbardziej śmiertelne typy zdarzeń</a:t>
+              <a:t>• 5. Najbardziej śmiertelne typy + średnia</a:t>
             </a:r>
           </a:p>
           <a:p>
@@ -6046,8 +7719,8 @@
         </p:nvSpPr>
         <p:spPr>
           <a:xfrm>
-            <a:off x="6309360" y="3291840"/>
-            <a:ext cx="5577840" cy="3017520"/>
+            <a:off x="6309360" y="3383280"/>
+            <a:ext cx="5577840" cy="2926080"/>
           </a:xfrm>
           <a:prstGeom prst="rect">
             <a:avLst/>
@@ -6078,7 +7751,7 @@
                 </a:solidFill>
                 <a:latin typeface="Segoe UI"/>
               </a:rPr>
-              <a:t>• 8. Interakcje (państwo–rebelianci itd.)</a:t>
+              <a:t>• 8. Interakcje — najczęstsze i najkrwawsze</a:t>
             </a:r>
           </a:p>
           <a:p>
@@ -6089,7 +7762,7 @@
                 </a:solidFill>
                 <a:latin typeface="Segoe UI"/>
               </a:rPr>
-              <a:t>• 9. % celowania w cywilów po regionach/aktorach</a:t>
+              <a:t>• 9. % celowania w cywilów: regiony i aktorzy</a:t>
             </a:r>
           </a:p>
           <a:p>
@@ -6100,7 +7773,7 @@
                 </a:solidFill>
                 <a:latin typeface="Segoe UI"/>
               </a:rPr>
-              <a:t>• 10. Źródła lokalne vs międzynarodowe per region</a:t>
+              <a:t>• 10. Źródła lokalne vs międzynarodowe</a:t>
             </a:r>
           </a:p>
           <a:p>
@@ -6122,7 +7795,7 @@
                 </a:solidFill>
                 <a:latin typeface="Segoe UI"/>
               </a:rPr>
-              <a:t>• 12. Per capita — zmiana rankingu</a:t>
+              <a:t>• 12. Per capita — odwrócenie rankingu</a:t>
             </a:r>
           </a:p>
         </p:txBody>
@@ -6135,7 +7808,7 @@
         </p:nvSpPr>
         <p:spPr>
           <a:xfrm>
-            <a:off x="457200" y="1234440"/>
+            <a:off x="457200" y="1207008"/>
             <a:ext cx="11277295" cy="777240"/>
           </a:xfrm>
           <a:prstGeom prst="rect">
@@ -6176,7 +7849,7 @@
                 </a:solidFill>
                 <a:latin typeface="Segoe UI"/>
               </a:rPr>
-              <a:t>PYTANIE DO PANI:  czy zakres i liczba pytań są wystarczające?</a:t>
+              <a:t>PYTANIE DO PANI:  czy zakres pytań jest wystarczający?</a:t>
             </a:r>
           </a:p>
         </p:txBody>
@@ -6280,7 +7953,7 @@
                 </a:solidFill>
                 <a:latin typeface="Segoe UI"/>
               </a:rPr>
-              <a:t>Schemat gwiazdy — model</a:t>
+              <a:t>Schemat gwiazdy</a:t>
             </a:r>
           </a:p>
         </p:txBody>
@@ -6300,7 +7973,7 @@
             <a:avLst/>
           </a:prstGeom>
           <a:solidFill>
-            <a:srgbClr val="E08E45"/>
+            <a:srgbClr val="2E7D32"/>
           </a:solidFill>
           <a:ln>
             <a:noFill/>
@@ -6332,7 +8005,7 @@
                 </a:solidFill>
                 <a:latin typeface="Segoe UI"/>
               </a:rPr>
-              <a:t>wymóg: gwiazda</a:t>
+              <a:t>wymóg ✔</a:t>
             </a:r>
           </a:p>
         </p:txBody>
@@ -6410,7 +8083,7 @@
                 </a:solidFill>
                 <a:latin typeface="Segoe UI"/>
               </a:rPr>
-              <a:t>PYTANIE DO PANI:  prosimy o weryfikację schematu (wiemy, że błędny schemat = odrzucenie projektu)</a:t>
+              <a:t>PYTANIE DO PANI:  prosimy o formalną weryfikację schematu</a:t>
             </a:r>
           </a:p>
         </p:txBody>
@@ -6594,7 +8267,7 @@
           <a:lstStyle/>
           <a:p>
             <a:r>
-              <a:rPr sz="1600" b="1">
+              <a:rPr sz="1500" b="1">
                 <a:solidFill>
                   <a:srgbClr val="1A1A2E"/>
                 </a:solidFill>
@@ -6605,7 +8278,7 @@
           </a:p>
           <a:p>
             <a:r>
-              <a:rPr sz="1600" b="0">
+              <a:rPr sz="1500" b="0">
                 <a:solidFill>
                   <a:srgbClr val="1A1A2E"/>
                 </a:solidFill>
@@ -6616,51 +8289,51 @@
           </a:p>
           <a:p>
             <a:r>
-              <a:rPr sz="1400" b="0">
+              <a:rPr sz="1300" b="0">
                 <a:solidFill>
                   <a:srgbClr val="6B6B7B"/>
                 </a:solidFill>
                 <a:latin typeface="Segoe UI"/>
               </a:rPr>
-              <a:t>   – wyjątek: event_id_cnty jako wymiar zdegenerowany (unikalny per wiersz — jak NrZamówienia z wykładu)</a:t>
-            </a:r>
-          </a:p>
-          <a:p>
-            <a:r>
-              <a:rPr sz="1600" b="0">
+              <a:t>   – wyjątek: event_id_cnty jako wymiar zdegenerowany (liczność = liczność faktu — jak NrZamówienia z wykładu)</a:t>
+            </a:r>
+          </a:p>
+          <a:p>
+            <a:r>
+              <a:rPr sz="1500" b="0">
                 <a:solidFill>
                   <a:srgbClr val="1A1A2E"/>
                 </a:solidFill>
                 <a:latin typeface="Segoe UI"/>
               </a:rPr>
-              <a:t>• Klucze sztuczne we wszystkich wymiarach (ROW_NUMBER; data = yyyymmdd)</a:t>
-            </a:r>
-          </a:p>
-          <a:p>
-            <a:r>
-              <a:rPr sz="1600" b="0">
+              <a:t>• Klucze sztuczne we wszystkich wymiarach (ROW_NUMBER; klucz daty = yyyymmdd)</a:t>
+            </a:r>
+          </a:p>
+          <a:p>
+            <a:r>
+              <a:rPr sz="1500" b="0">
                 <a:solidFill>
                   <a:srgbClr val="1A1A2E"/>
                 </a:solidFill>
                 <a:latin typeface="Segoe UI"/>
               </a:rPr>
-              <a:t>• interaction = NORMALNY wymiar (134 wartości — za mała liczność na zdegenerowany)</a:t>
-            </a:r>
-          </a:p>
-          <a:p>
-            <a:r>
-              <a:rPr sz="1600" b="0">
+              <a:t>• interaction = normalny wymiar (134 wartości — za mała liczność na zdegenerowany)</a:t>
+            </a:r>
+          </a:p>
+          <a:p>
+            <a:r>
+              <a:rPr sz="1500" b="0">
                 <a:solidFill>
                   <a:srgbClr val="1A1A2E"/>
                 </a:solidFill>
                 <a:latin typeface="Segoe UI"/>
               </a:rPr>
-              <a:t>• Pseudo-nulle → wiersz „Unknown" (id = −1) w każdym wymiarze (wykład 12)</a:t>
-            </a:r>
-          </a:p>
-          <a:p>
-            <a:r>
-              <a:rPr sz="1600" b="0">
+              <a:t>• Pseudo-nulle → wiersz „Unknown" (id = −1) w każdym wymiarze</a:t>
+            </a:r>
+          </a:p>
+          <a:p>
+            <a:r>
+              <a:rPr sz="1500" b="0">
                 <a:solidFill>
                   <a:srgbClr val="1A1A2E"/>
                 </a:solidFill>
@@ -6671,24 +8344,24 @@
           </a:p>
           <a:p>
             <a:r>
-              <a:rPr sz="1600" b="0">
+              <a:rPr sz="1500" b="0">
                 <a:solidFill>
                   <a:srgbClr val="1A1A2E"/>
                 </a:solidFill>
                 <a:latin typeface="Segoe UI"/>
               </a:rPr>
-              <a:t>• populacja: klucz złożony (iso, rok) spłaszczony do iso_year — relacje Power BI są 1-kolumnowe</a:t>
-            </a:r>
-          </a:p>
-          <a:p>
-            <a:r>
-              <a:rPr sz="1600" b="1">
+              <a:t>• populacja: klucz złożony (iso, rok) spłaszczony do iso_year (relacje PBI 1-kolumnowe); relacja Both — inaczej filtr kraju nie dociera do populacji</a:t>
+            </a:r>
+          </a:p>
+          <a:p>
+            <a:r>
+              <a:rPr sz="1500" b="1">
                 <a:solidFill>
                   <a:srgbClr val="1A1A2E"/>
                 </a:solidFill>
                 <a:latin typeface="Segoe UI"/>
               </a:rPr>
-              <a:t>• Zasady z wykładu 3: ≤25 wymiarów ✓ (7) · fakt ~160× większy od największego wymiaru ✓</a:t>
+              <a:t>• Zasady z wykładu: ≤25 wymiarów ✔ (7) · fakt ~160× większy od największego wymiaru ✔ · miary sumowalne ✔</a:t>
             </a:r>
           </a:p>
         </p:txBody>
@@ -6742,7 +8415,7 @@
                 </a:solidFill>
                 <a:latin typeface="Segoe UI"/>
               </a:rPr>
-              <a:t>PYTANIE DO PANI:  czy akceptuje Pani: degenerate event_id_cnty · klucz iso_year · lat/long poza gwiazdą (zostały w tabeli gold)?</a:t>
+              <a:t>PYTANIE DO PANI:  czy akceptuje Pani: degenerate event_id_cnty · klucz iso_year + relacja Both · lat/long poza gwiazdą (zostały w gold)?</a:t>
             </a:r>
           </a:p>
         </p:txBody>
@@ -6866,7 +8539,7 @@
             <a:avLst/>
           </a:prstGeom>
           <a:solidFill>
-            <a:srgbClr val="E08E45"/>
+            <a:srgbClr val="2E7D32"/>
           </a:solidFill>
           <a:ln>
             <a:noFill/>
@@ -6898,7 +8571,7 @@
                 </a:solidFill>
                 <a:latin typeface="Segoe UI"/>
               </a:rPr>
-              <a:t>wymóg: ETL 20 pkt</a:t>
+              <a:t>wymóg 20 pkt ✔</a:t>
             </a:r>
           </a:p>
         </p:txBody>
@@ -6976,7 +8649,7 @@
                 </a:solidFill>
                 <a:latin typeface="Segoe UI"/>
               </a:rPr>
-              <a:t>PYTANIE DO PANI:  czy stack AWS+Airflow+Power BI jest OK jako zamiennik SSIS/SSAS/SSRS? (wg dokumentu ARCHITEKTURA — tak)</a:t>
+              <a:t>PYTANIE DO PANI:  stack AWS + Airflow + Power BI jako zamiennik SSIS/SSAS/SSRS — zgodny z dokumentem ARCHITEKTURA?</a:t>
             </a:r>
           </a:p>
         </p:txBody>
@@ -7115,7 +8788,7 @@
                 </a:solidFill>
                 <a:latin typeface="Segoe UI"/>
               </a:rPr>
-              <a:t>pełna wersja: docs/etl_mapowania.md — źródło → transformacja → cel dla każdej kolumny</a:t>
+              <a:t>pełna wersja: docs/etl_mapowania.md — każda kolumna: źródło → transformacja → cel</a:t>
             </a:r>
           </a:p>
         </p:txBody>
@@ -7135,7 +8808,7 @@
             <a:avLst/>
           </a:prstGeom>
           <a:solidFill>
-            <a:srgbClr val="E08E45"/>
+            <a:srgbClr val="2E7D32"/>
           </a:solidFill>
           <a:ln>
             <a:noFill/>
@@ -7167,7 +8840,7 @@
                 </a:solidFill>
                 <a:latin typeface="Segoe UI"/>
               </a:rPr>
-              <a:t>zadanie ✓</a:t>
+              <a:t>zadanie ✔</a:t>
             </a:r>
           </a:p>
         </p:txBody>
@@ -7237,7 +8910,7 @@
                 </a:solidFill>
                 <a:latin typeface="Segoe UI"/>
               </a:rPr>
-              <a:t>Python, OAuth, paginacja, przyrostowo po timestamp; surowe CSV append-only</a:t>
+              <a:t>Python, OAuth, paginacja, przyrostowo po timestamp; CSV append-only</a:t>
             </a:r>
           </a:p>
         </p:txBody>
@@ -7250,7 +8923,7 @@
         </p:nvSpPr>
         <p:spPr>
           <a:xfrm>
-            <a:off x="548640" y="2167128"/>
+            <a:off x="548640" y="2148840"/>
             <a:ext cx="3108960" cy="731520"/>
           </a:xfrm>
           <a:prstGeom prst="rect">
@@ -7285,7 +8958,7 @@
         </p:nvSpPr>
         <p:spPr>
           <a:xfrm>
-            <a:off x="3749039" y="2167128"/>
+            <a:off x="3749039" y="2148840"/>
             <a:ext cx="7955279" cy="731520"/>
           </a:xfrm>
           <a:prstGeom prst="rect">
@@ -7320,7 +8993,7 @@
         </p:nvSpPr>
         <p:spPr>
           <a:xfrm>
-            <a:off x="548640" y="2916936"/>
+            <a:off x="548640" y="2880360"/>
             <a:ext cx="3108960" cy="731520"/>
           </a:xfrm>
           <a:prstGeom prst="rect">
@@ -7355,7 +9028,7 @@
         </p:nvSpPr>
         <p:spPr>
           <a:xfrm>
-            <a:off x="3749039" y="2916936"/>
+            <a:off x="3749039" y="2880360"/>
             <a:ext cx="7955279" cy="731520"/>
           </a:xfrm>
           <a:prstGeom prst="rect">
@@ -7377,7 +9050,7 @@
                 </a:solidFill>
                 <a:latin typeface="Segoe UI"/>
               </a:rPr>
-              <a:t>Athena CTAS: integracja (interaction z bronze — bug casta w silverze), flaga cywilów, czyszczenie</a:t>
+              <a:t>Athena CTAS: integracja, flaga cywilów, czyszczenie pseudo-nulli</a:t>
             </a:r>
           </a:p>
         </p:txBody>
@@ -7390,7 +9063,7 @@
         </p:nvSpPr>
         <p:spPr>
           <a:xfrm>
-            <a:off x="548640" y="3666744"/>
+            <a:off x="548640" y="3611880"/>
             <a:ext cx="3108960" cy="731520"/>
           </a:xfrm>
           <a:prstGeom prst="rect">
@@ -7425,7 +9098,7 @@
         </p:nvSpPr>
         <p:spPr>
           <a:xfrm>
-            <a:off x="3749039" y="3666744"/>
+            <a:off x="3749039" y="3611880"/>
             <a:ext cx="7955279" cy="731520"/>
           </a:xfrm>
           <a:prstGeom prst="rect">
@@ -7460,7 +9133,7 @@
         </p:nvSpPr>
         <p:spPr>
           <a:xfrm>
-            <a:off x="548640" y="4416552"/>
+            <a:off x="548640" y="4343400"/>
             <a:ext cx="3108960" cy="731520"/>
           </a:xfrm>
           <a:prstGeom prst="rect">
@@ -7482,7 +9155,7 @@
                 </a:solidFill>
                 <a:latin typeface="Segoe UI"/>
               </a:rPr>
-              <a:t>L2: gold+wymiary → fakt</a:t>
+              <a:t>L2: → fakt</a:t>
             </a:r>
           </a:p>
         </p:txBody>
@@ -7495,7 +9168,7 @@
         </p:nvSpPr>
         <p:spPr>
           <a:xfrm>
-            <a:off x="3749039" y="4416552"/>
+            <a:off x="3749039" y="4343400"/>
             <a:ext cx="7955279" cy="731520"/>
           </a:xfrm>
           <a:prstGeom prst="rect">
@@ -7530,7 +9203,7 @@
         </p:nvSpPr>
         <p:spPr>
           <a:xfrm>
-            <a:off x="548640" y="5166360"/>
+            <a:off x="548640" y="5074920"/>
             <a:ext cx="3108960" cy="731520"/>
           </a:xfrm>
           <a:prstGeom prst="rect">
@@ -7565,7 +9238,7 @@
         </p:nvSpPr>
         <p:spPr>
           <a:xfrm>
-            <a:off x="3749039" y="5166360"/>
+            <a:off x="3749039" y="5074920"/>
             <a:ext cx="7955279" cy="731520"/>
           </a:xfrm>
           <a:prstGeom prst="rect">
@@ -7641,7 +9314,7 @@
                 </a:solidFill>
                 <a:latin typeface="Segoe UI"/>
               </a:rPr>
-              <a:t>PYTANIE DO PANI:  czy taka forma tabeli mapowań odpowiada wzorowi z Materiałów?</a:t>
+              <a:t>PYTANIE DO PANI:  czy forma tabeli mapowań odpowiada wzorowi z Materiałów?</a:t>
             </a:r>
           </a:p>
         </p:txBody>
@@ -7745,14 +9418,49 @@
                 </a:solidFill>
                 <a:latin typeface="Segoe UI"/>
               </a:rPr>
-              <a:t>ETL na żywo — Airflow (pełny przebieg, wszystkie kroki zielone)</a:t>
-            </a:r>
-          </a:p>
-        </p:txBody>
-      </p:sp>
-      <p:sp>
-        <p:nvSpPr>
-          <p:cNvPr id="4" name="Rectangle 3"/>
+              <a:t>ETL na żywo — pełny przebieg w Airflow</a:t>
+            </a:r>
+          </a:p>
+        </p:txBody>
+      </p:sp>
+      <p:sp>
+        <p:nvSpPr>
+          <p:cNvPr id="4" name="TextBox 3"/>
+          <p:cNvSpPr txBox="1"/>
+          <p:nvPr/>
+        </p:nvSpPr>
+        <p:spPr>
+          <a:xfrm>
+            <a:off x="457200" y="868680"/>
+            <a:ext cx="11277295" cy="365760"/>
+          </a:xfrm>
+          <a:prstGeom prst="rect">
+            <a:avLst/>
+          </a:prstGeom>
+          <a:noFill/>
+        </p:spPr>
+        <p:txBody>
+          <a:bodyPr wrap="square">
+            <a:spAutoFit/>
+          </a:bodyPr>
+          <a:lstStyle/>
+          <a:p>
+            <a:pPr algn="l"/>
+            <a:r>
+              <a:rPr sz="1400" b="0">
+                <a:solidFill>
+                  <a:srgbClr val="6B6B7B"/>
+                </a:solidFill>
+                <a:latin typeface="Segoe UI"/>
+              </a:rPr>
+              <a:t>crawler → Spark → gold → gwiazda → walidacja; kroki idempotentne — możemy odpalić przy Pani</a:t>
+            </a:r>
+          </a:p>
+        </p:txBody>
+      </p:sp>
+      <p:sp>
+        <p:nvSpPr>
+          <p:cNvPr id="5" name="Rectangle 4"/>
           <p:cNvSpPr/>
           <p:nvPr/>
         </p:nvSpPr>
@@ -7765,7 +9473,7 @@
             <a:avLst/>
           </a:prstGeom>
           <a:solidFill>
-            <a:srgbClr val="E08E45"/>
+            <a:srgbClr val="2E7D32"/>
           </a:solidFill>
           <a:ln>
             <a:noFill/>
@@ -7797,14 +9505,14 @@
                 </a:solidFill>
                 <a:latin typeface="Segoe UI"/>
               </a:rPr>
-              <a:t>pokażemy live</a:t>
+              <a:t>demo live</a:t>
             </a:r>
           </a:p>
         </p:txBody>
       </p:sp>
       <p:pic>
         <p:nvPicPr>
-          <p:cNvPr id="5" name="Picture 4" descr="01_graf.png"/>
+          <p:cNvPr id="6" name="Picture 5" descr="01_graf.png"/>
           <p:cNvPicPr>
             <a:picLocks noChangeAspect="1"/>
           </p:cNvPicPr>
@@ -7818,49 +9526,14 @@
         </p:blipFill>
         <p:spPr>
           <a:xfrm>
-            <a:off x="2291944" y="1051560"/>
-            <a:ext cx="7607807" cy="4754880"/>
+            <a:off x="2218791" y="1234440"/>
+            <a:ext cx="7754112" cy="4846320"/>
           </a:xfrm>
           <a:prstGeom prst="rect">
             <a:avLst/>
           </a:prstGeom>
         </p:spPr>
       </p:pic>
-      <p:sp>
-        <p:nvSpPr>
-          <p:cNvPr id="6" name="TextBox 5"/>
-          <p:cNvSpPr txBox="1"/>
-          <p:nvPr/>
-        </p:nvSpPr>
-        <p:spPr>
-          <a:xfrm>
-            <a:off x="457200" y="5852160"/>
-            <a:ext cx="11277295" cy="365760"/>
-          </a:xfrm>
-          <a:prstGeom prst="rect">
-            <a:avLst/>
-          </a:prstGeom>
-          <a:noFill/>
-        </p:spPr>
-        <p:txBody>
-          <a:bodyPr wrap="square">
-            <a:spAutoFit/>
-          </a:bodyPr>
-          <a:lstStyle/>
-          <a:p>
-            <a:pPr algn="l"/>
-            <a:r>
-              <a:rPr sz="1300" b="0">
-                <a:solidFill>
-                  <a:srgbClr val="6B6B7B"/>
-                </a:solidFill>
-                <a:latin typeface="Segoe UI"/>
-              </a:rPr>
-              <a:t>2 DAG-i: acled_manual_backfill (API→silver, parametr full/incremental) + acled_pipeline (gold→gwiazda→walidacja). Kroki idempotentne — można odpalić przy Pani.</a:t>
-            </a:r>
-          </a:p>
-        </p:txBody>
-      </p:sp>
     </p:spTree>
   </p:cSld>
   <p:clrMapOvr>
@@ -8015,7 +9688,7 @@
             <a:avLst/>
           </a:prstGeom>
           <a:solidFill>
-            <a:srgbClr val="E08E45"/>
+            <a:srgbClr val="2E7D32"/>
           </a:solidFill>
           <a:ln>
             <a:noFill/>
@@ -8047,7 +9720,7 @@
                 </a:solidFill>
                 <a:latin typeface="Segoe UI"/>
               </a:rPr>
-              <a:t>zadanie ✓</a:t>
+              <a:t>zadanie ✔</a:t>
             </a:r>
           </a:p>
         </p:txBody>
@@ -8108,7 +9781,7 @@
         </p:nvSpPr>
         <p:spPr>
           <a:xfrm>
-            <a:off x="548640" y="5532120"/>
+            <a:off x="548640" y="5486400"/>
             <a:ext cx="5486400" cy="365760"/>
           </a:xfrm>
           <a:prstGeom prst="rect">
@@ -8143,7 +9816,7 @@
         </p:nvSpPr>
         <p:spPr>
           <a:xfrm>
-            <a:off x="6400800" y="5532120"/>
+            <a:off x="6400800" y="5486400"/>
             <a:ext cx="5486400" cy="365760"/>
           </a:xfrm>
           <a:prstGeom prst="rect">
@@ -8165,61 +9838,7 @@
                 </a:solidFill>
                 <a:latin typeface="Segoe UI"/>
               </a:rPr>
-              <a:t>walidacja (asserty rekoncyliacji) — SUCCESS</a:t>
-            </a:r>
-          </a:p>
-        </p:txBody>
-      </p:sp>
-      <p:sp>
-        <p:nvSpPr>
-          <p:cNvPr id="10" name="Rectangle 9"/>
-          <p:cNvSpPr/>
-          <p:nvPr/>
-        </p:nvSpPr>
-        <p:spPr>
-          <a:xfrm>
-            <a:off x="457200" y="5806440"/>
-            <a:ext cx="11277295" cy="777240"/>
-          </a:xfrm>
-          <a:prstGeom prst="rect">
-            <a:avLst/>
-          </a:prstGeom>
-          <a:solidFill>
-            <a:srgbClr val="FFFFFF"/>
-          </a:solidFill>
-          <a:ln w="19050">
-            <a:solidFill>
-              <a:srgbClr val="A50F15"/>
-            </a:solidFill>
-          </a:ln>
-        </p:spPr>
-        <p:style>
-          <a:lnRef idx="1">
-            <a:schemeClr val="accent1"/>
-          </a:lnRef>
-          <a:fillRef idx="3">
-            <a:schemeClr val="accent1"/>
-          </a:fillRef>
-          <a:effectRef idx="2">
-            <a:schemeClr val="accent1"/>
-          </a:effectRef>
-          <a:fontRef idx="minor">
-            <a:schemeClr val="lt1"/>
-          </a:fontRef>
-        </p:style>
-        <p:txBody>
-          <a:bodyPr rtlCol="0" anchor="ctr" wrap="square"/>
-          <a:lstStyle/>
-          <a:p>
-            <a:pPr algn="ctr"/>
-            <a:r>
-              <a:rPr sz="1500" b="1">
-                <a:solidFill>
-                  <a:srgbClr val="A50F15"/>
-                </a:solidFill>
-                <a:latin typeface="Segoe UI"/>
-              </a:rPr>
-              <a:t>PYTANIE DO PANI:  czy zrzuty z zadań Airflow spełniają wymóg „momentu udanej operacji ładowania"?</a:t>
+              <a:t>walidacja (rekoncyliacja warstw) — SUCCESS</a:t>
             </a:r>
           </a:p>
         </p:txBody>

--- a/docs/prezentacja_obrona.pptx
+++ b/docs/prezentacja_obrona.pptx
@@ -19,6 +19,7 @@
     <p:sldId id="267" r:id="rId18"/>
     <p:sldId id="268" r:id="rId19"/>
     <p:sldId id="269" r:id="rId20"/>
+    <p:sldId id="270" r:id="rId21"/>
   </p:sldIdLst>
   <p:sldSz cx="12191695" cy="6858000" type="screen4x3"/>
   <p:notesSz cx="6858000" cy="9144000"/>
@@ -3403,7 +3404,7 @@
                 </a:solidFill>
                 <a:latin typeface="Segoe UI"/>
               </a:rPr>
-              <a:t>Jakość danych — wykryte i naprawione problemy</a:t>
+              <a:t>Dowody ładowania wymiarów i faktów</a:t>
             </a:r>
           </a:p>
         </p:txBody>
@@ -3416,103 +3417,81 @@
         </p:nvSpPr>
         <p:spPr>
           <a:xfrm>
-            <a:off x="548640" y="1371600"/>
-            <a:ext cx="11155680" cy="649224"/>
-          </a:xfrm>
-          <a:prstGeom prst="rect">
-            <a:avLst/>
-          </a:prstGeom>
-          <a:noFill/>
-        </p:spPr>
-        <p:txBody>
-          <a:bodyPr wrap="square">
-            <a:spAutoFit/>
-          </a:bodyPr>
-          <a:lstStyle/>
-          <a:p>
-            <a:pPr algn="l"/>
-            <a:r>
-              <a:rPr sz="1500" b="1">
-                <a:solidFill>
-                  <a:srgbClr val="1F6F8B"/>
-                </a:solidFill>
-                <a:latin typeface="Segoe UI"/>
-              </a:rPr>
-              <a:t>•  Cudzysłowy w CSV niszczyły kolumny liczbowe przy odczycie — suma ofiar 7× zaniżona; wykryte rekoncyliacją dwóch ścieżek liczenia</a:t>
-            </a:r>
-          </a:p>
-        </p:txBody>
-      </p:sp>
-      <p:sp>
-        <p:nvSpPr>
-          <p:cNvPr id="5" name="TextBox 4"/>
-          <p:cNvSpPr txBox="1"/>
-          <p:nvPr/>
-        </p:nvSpPr>
-        <p:spPr>
-          <a:xfrm>
-            <a:off x="548640" y="2267712"/>
-            <a:ext cx="11155680" cy="649224"/>
-          </a:xfrm>
-          <a:prstGeom prst="rect">
-            <a:avLst/>
-          </a:prstGeom>
-          <a:noFill/>
-        </p:spPr>
-        <p:txBody>
-          <a:bodyPr wrap="square">
-            <a:spAutoFit/>
-          </a:bodyPr>
-          <a:lstStyle/>
-          <a:p>
-            <a:pPr algn="l"/>
-            <a:r>
-              <a:rPr sz="1500" b="0">
-                <a:solidFill>
-                  <a:srgbClr val="1A1A2E"/>
-                </a:solidFill>
-                <a:latin typeface="Segoe UI"/>
-              </a:rPr>
-              <a:t>•  Cast tekstowej kolumny interaction do INT kasował ją w silverze — obejście z warstwy bronze</a:t>
-            </a:r>
-          </a:p>
-        </p:txBody>
-      </p:sp>
-      <p:sp>
-        <p:nvSpPr>
-          <p:cNvPr id="6" name="TextBox 5"/>
-          <p:cNvSpPr txBox="1"/>
-          <p:nvPr/>
-        </p:nvSpPr>
-        <p:spPr>
-          <a:xfrm>
-            <a:off x="548640" y="2743200"/>
-            <a:ext cx="11155680" cy="649224"/>
-          </a:xfrm>
-          <a:prstGeom prst="rect">
-            <a:avLst/>
-          </a:prstGeom>
-          <a:noFill/>
-        </p:spPr>
-        <p:txBody>
-          <a:bodyPr wrap="square">
-            <a:spAutoFit/>
-          </a:bodyPr>
-          <a:lstStyle/>
-          <a:p>
-            <a:pPr algn="l"/>
-            <a:r>
-              <a:rPr sz="1500" b="0">
-                <a:solidFill>
-                  <a:srgbClr val="1A1A2E"/>
-                </a:solidFill>
-                <a:latin typeface="Segoe UI"/>
-              </a:rPr>
-              <a:t>•  Pseudo-nulle → Unknown(-1); dziurawy kalendarz → ciągły sequence()</a:t>
-            </a:r>
-          </a:p>
-        </p:txBody>
-      </p:sp>
+            <a:off x="457200" y="841248"/>
+            <a:ext cx="11277295" cy="365760"/>
+          </a:xfrm>
+          <a:prstGeom prst="rect">
+            <a:avLst/>
+          </a:prstGeom>
+          <a:noFill/>
+        </p:spPr>
+        <p:txBody>
+          <a:bodyPr wrap="square">
+            <a:spAutoFit/>
+          </a:bodyPr>
+          <a:lstStyle/>
+          <a:p>
+            <a:pPr algn="l"/>
+            <a:r>
+              <a:rPr sz="1300" b="0">
+                <a:solidFill>
+                  <a:srgbClr val="6B6B7B"/>
+                </a:solidFill>
+                <a:latin typeface="Segoe UI"/>
+              </a:rPr>
+              <a:t>komplet 13 zrzutów w repozytorium (katalog screeny/)</a:t>
+            </a:r>
+          </a:p>
+        </p:txBody>
+      </p:sp>
+      <p:pic>
+        <p:nvPicPr>
+          <p:cNvPr id="5" name="Picture 4" descr="12_fact_events.png"/>
+          <p:cNvPicPr>
+            <a:picLocks noChangeAspect="1"/>
+          </p:cNvPicPr>
+          <p:nvPr/>
+        </p:nvPicPr>
+        <p:blipFill>
+          <a:blip r:embed="rId2"/>
+          <a:stretch>
+            <a:fillRect/>
+          </a:stretch>
+        </p:blipFill>
+        <p:spPr>
+          <a:xfrm>
+            <a:off x="365760" y="1611630"/>
+            <a:ext cx="5669280" cy="3543300"/>
+          </a:xfrm>
+          <a:prstGeom prst="rect">
+            <a:avLst/>
+          </a:prstGeom>
+        </p:spPr>
+      </p:pic>
+      <p:pic>
+        <p:nvPicPr>
+          <p:cNvPr id="6" name="Picture 5" descr="13_validate.png"/>
+          <p:cNvPicPr>
+            <a:picLocks noChangeAspect="1"/>
+          </p:cNvPicPr>
+          <p:nvPr/>
+        </p:nvPicPr>
+        <p:blipFill>
+          <a:blip r:embed="rId3"/>
+          <a:stretch>
+            <a:fillRect/>
+          </a:stretch>
+        </p:blipFill>
+        <p:spPr>
+          <a:xfrm>
+            <a:off x="6172200" y="1611630"/>
+            <a:ext cx="5669280" cy="3543300"/>
+          </a:xfrm>
+          <a:prstGeom prst="rect">
+            <a:avLst/>
+          </a:prstGeom>
+        </p:spPr>
+      </p:pic>
       <p:sp>
         <p:nvSpPr>
           <p:cNvPr id="7" name="TextBox 6"/>
@@ -3521,29 +3500,29 @@
         </p:nvSpPr>
         <p:spPr>
           <a:xfrm>
-            <a:off x="548640" y="3218688"/>
-            <a:ext cx="11155680" cy="649224"/>
-          </a:xfrm>
-          <a:prstGeom prst="rect">
-            <a:avLst/>
-          </a:prstGeom>
-          <a:noFill/>
-        </p:spPr>
-        <p:txBody>
-          <a:bodyPr wrap="square">
-            <a:spAutoFit/>
-          </a:bodyPr>
-          <a:lstStyle/>
-          <a:p>
-            <a:pPr algn="l"/>
-            <a:r>
-              <a:rPr sz="1500" b="1">
-                <a:solidFill>
-                  <a:srgbClr val="1F6F8B"/>
-                </a:solidFill>
-                <a:latin typeface="Segoe UI"/>
-              </a:rPr>
-              <a:t>•  Wniosek: walidacja automatyczna po każdym uruchomieniu — liczba zdarzeń ORAZ suma ofiar, między warstwami</a:t>
+            <a:off x="365760" y="5486400"/>
+            <a:ext cx="5669280" cy="365760"/>
+          </a:xfrm>
+          <a:prstGeom prst="rect">
+            <a:avLst/>
+          </a:prstGeom>
+          <a:noFill/>
+        </p:spPr>
+        <p:txBody>
+          <a:bodyPr wrap="square">
+            <a:spAutoFit/>
+          </a:bodyPr>
+          <a:lstStyle/>
+          <a:p>
+            <a:pPr algn="ctr"/>
+            <a:r>
+              <a:rPr sz="1300" b="0">
+                <a:solidFill>
+                  <a:srgbClr val="6B6B7B"/>
+                </a:solidFill>
+                <a:latin typeface="Segoe UI"/>
+              </a:rPr>
+              <a:t>ładowanie faktów — SUCCESS</a:t>
             </a:r>
           </a:p>
         </p:txBody>
@@ -3556,29 +3535,83 @@
         </p:nvSpPr>
         <p:spPr>
           <a:xfrm>
-            <a:off x="548640" y="4114800"/>
-            <a:ext cx="11155680" cy="649224"/>
-          </a:xfrm>
-          <a:prstGeom prst="rect">
-            <a:avLst/>
-          </a:prstGeom>
-          <a:noFill/>
-        </p:spPr>
-        <p:txBody>
-          <a:bodyPr wrap="square">
-            <a:spAutoFit/>
-          </a:bodyPr>
-          <a:lstStyle/>
-          <a:p>
-            <a:pPr algn="l"/>
-            <a:r>
-              <a:rPr sz="1500" b="0">
-                <a:solidFill>
-                  <a:srgbClr val="1A1A2E"/>
-                </a:solidFill>
-                <a:latin typeface="Segoe UI"/>
-              </a:rPr>
-              <a:t>•  Test odporności: świeży przyrost danych (+198 zdarzeń) przetworzony bez zmian w kodzie</a:t>
+            <a:off x="6172200" y="5486400"/>
+            <a:ext cx="5669280" cy="365760"/>
+          </a:xfrm>
+          <a:prstGeom prst="rect">
+            <a:avLst/>
+          </a:prstGeom>
+          <a:noFill/>
+        </p:spPr>
+        <p:txBody>
+          <a:bodyPr wrap="square">
+            <a:spAutoFit/>
+          </a:bodyPr>
+          <a:lstStyle/>
+          <a:p>
+            <a:pPr algn="ctr"/>
+            <a:r>
+              <a:rPr sz="1300" b="0">
+                <a:solidFill>
+                  <a:srgbClr val="6B6B7B"/>
+                </a:solidFill>
+                <a:latin typeface="Segoe UI"/>
+              </a:rPr>
+              <a:t>walidacja rekoncyliacji — SUCCESS</a:t>
+            </a:r>
+          </a:p>
+        </p:txBody>
+      </p:sp>
+      <p:sp>
+        <p:nvSpPr>
+          <p:cNvPr id="9" name="Rectangle 8"/>
+          <p:cNvSpPr/>
+          <p:nvPr/>
+        </p:nvSpPr>
+        <p:spPr>
+          <a:xfrm>
+            <a:off x="457200" y="5897880"/>
+            <a:ext cx="11277295" cy="685800"/>
+          </a:xfrm>
+          <a:prstGeom prst="rect">
+            <a:avLst/>
+          </a:prstGeom>
+          <a:solidFill>
+            <a:srgbClr val="FFFFFF"/>
+          </a:solidFill>
+          <a:ln w="15875">
+            <a:solidFill>
+              <a:srgbClr val="A50F15"/>
+            </a:solidFill>
+          </a:ln>
+        </p:spPr>
+        <p:style>
+          <a:lnRef idx="1">
+            <a:schemeClr val="accent1"/>
+          </a:lnRef>
+          <a:fillRef idx="3">
+            <a:schemeClr val="accent1"/>
+          </a:fillRef>
+          <a:effectRef idx="2">
+            <a:schemeClr val="accent1"/>
+          </a:effectRef>
+          <a:fontRef idx="minor">
+            <a:schemeClr val="lt1"/>
+          </a:fontRef>
+        </p:style>
+        <p:txBody>
+          <a:bodyPr rtlCol="0" anchor="ctr" wrap="square"/>
+          <a:lstStyle/>
+          <a:p>
+            <a:pPr algn="ctr"/>
+            <a:r>
+              <a:rPr sz="1400" b="1">
+                <a:solidFill>
+                  <a:srgbClr val="A50F15"/>
+                </a:solidFill>
+                <a:latin typeface="Segoe UI"/>
+              </a:rPr>
+              <a:t>PYTANIE:  czy zrzuty z zadań Airflow spełniają wymóg „momentu udanej operacji ładowania”?</a:t>
             </a:r>
           </a:p>
         </p:txBody>
@@ -3682,7 +3715,7 @@
                 </a:solidFill>
                 <a:latin typeface="Segoe UI"/>
               </a:rPr>
-              <a:t>Warstwa semantyczna — model Power BI</a:t>
+              <a:t>Jakość danych — wykryte i naprawione problemy</a:t>
             </a:r>
           </a:p>
         </p:txBody>
@@ -3695,8 +3728,8 @@
         </p:nvSpPr>
         <p:spPr>
           <a:xfrm>
-            <a:off x="548640" y="1325880"/>
-            <a:ext cx="6126480" cy="649224"/>
+            <a:off x="548640" y="1371600"/>
+            <a:ext cx="11155680" cy="649224"/>
           </a:xfrm>
           <a:prstGeom prst="rect">
             <a:avLst/>
@@ -3717,7 +3750,7 @@
                 </a:solidFill>
                 <a:latin typeface="Segoe UI"/>
               </a:rPr>
-              <a:t>•  Import gwiazdy „na płasko” przez ODBC/Athena</a:t>
+              <a:t>•  Cudzysłowy w CSV niszczyły kolumny liczbowe przy odczycie — suma ofiar 7× zaniżona; wykryte rekoncyliacją dwóch ścieżek liczenia</a:t>
             </a:r>
           </a:p>
         </p:txBody>
@@ -3730,8 +3763,8 @@
         </p:nvSpPr>
         <p:spPr>
           <a:xfrm>
-            <a:off x="548640" y="1801368"/>
-            <a:ext cx="6126480" cy="649224"/>
+            <a:off x="548640" y="2267712"/>
+            <a:ext cx="11155680" cy="649224"/>
           </a:xfrm>
           <a:prstGeom prst="rect">
             <a:avLst/>
@@ -3752,7 +3785,7 @@
                 </a:solidFill>
                 <a:latin typeface="Segoe UI"/>
               </a:rPr>
-              <a:t>•  7 relacji wiele-do-jednego; wymiar filtruje fakt</a:t>
+              <a:t>•  Cast tekstowej kolumny interaction do INT kasował ją w silverze — obejście z warstwy bronze</a:t>
             </a:r>
           </a:p>
         </p:txBody>
@@ -3765,8 +3798,8 @@
         </p:nvSpPr>
         <p:spPr>
           <a:xfrm>
-            <a:off x="548640" y="2276856"/>
-            <a:ext cx="6126480" cy="649224"/>
+            <a:off x="548640" y="2743200"/>
+            <a:ext cx="11155680" cy="649224"/>
           </a:xfrm>
           <a:prstGeom prst="rect">
             <a:avLst/>
@@ -3787,7 +3820,7 @@
                 </a:solidFill>
                 <a:latin typeface="Segoe UI"/>
               </a:rPr>
-              <a:t>•  Miary DAX: SUM, DIVIDE, CALCULATE, DATEADD, DISTINCTCOUNT, RANKX</a:t>
+              <a:t>•  Pseudo-nulle → Unknown(-1); dziurawy kalendarz → ciągły sequence()</a:t>
             </a:r>
           </a:p>
         </p:txBody>
@@ -3800,8 +3833,43 @@
         </p:nvSpPr>
         <p:spPr>
           <a:xfrm>
-            <a:off x="548640" y="2752344"/>
-            <a:ext cx="6126480" cy="649224"/>
+            <a:off x="548640" y="3218688"/>
+            <a:ext cx="11155680" cy="649224"/>
+          </a:xfrm>
+          <a:prstGeom prst="rect">
+            <a:avLst/>
+          </a:prstGeom>
+          <a:noFill/>
+        </p:spPr>
+        <p:txBody>
+          <a:bodyPr wrap="square">
+            <a:spAutoFit/>
+          </a:bodyPr>
+          <a:lstStyle/>
+          <a:p>
+            <a:pPr algn="l"/>
+            <a:r>
+              <a:rPr sz="1500" b="1">
+                <a:solidFill>
+                  <a:srgbClr val="1F6F8B"/>
+                </a:solidFill>
+                <a:latin typeface="Segoe UI"/>
+              </a:rPr>
+              <a:t>•  Wniosek: walidacja automatyczna po każdym uruchomieniu — liczba zdarzeń ORAZ suma ofiar, między warstwami</a:t>
+            </a:r>
+          </a:p>
+        </p:txBody>
+      </p:sp>
+      <p:sp>
+        <p:nvSpPr>
+          <p:cNvPr id="8" name="TextBox 7"/>
+          <p:cNvSpPr txBox="1"/>
+          <p:nvPr/>
+        </p:nvSpPr>
+        <p:spPr>
+          <a:xfrm>
+            <a:off x="548640" y="4114800"/>
+            <a:ext cx="11155680" cy="649224"/>
           </a:xfrm>
           <a:prstGeom prst="rect">
             <a:avLst/>
@@ -3822,306 +3890,7 @@
                 </a:solidFill>
                 <a:latin typeface="Segoe UI"/>
               </a:rPr>
-              <a:t>•  3 hierarchie z drążeniem; miesiące chronologicznie</a:t>
-            </a:r>
-          </a:p>
-        </p:txBody>
-      </p:sp>
-      <p:sp>
-        <p:nvSpPr>
-          <p:cNvPr id="8" name="TextBox 7"/>
-          <p:cNvSpPr txBox="1"/>
-          <p:nvPr/>
-        </p:nvSpPr>
-        <p:spPr>
-          <a:xfrm>
-            <a:off x="548640" y="3227832"/>
-            <a:ext cx="6126480" cy="649224"/>
-          </a:xfrm>
-          <a:prstGeom prst="rect">
-            <a:avLst/>
-          </a:prstGeom>
-          <a:noFill/>
-        </p:spPr>
-        <p:txBody>
-          <a:bodyPr wrap="square">
-            <a:spAutoFit/>
-          </a:bodyPr>
-          <a:lstStyle/>
-          <a:p>
-            <a:pPr algn="l"/>
-            <a:r>
-              <a:rPr sz="1500" b="0">
-                <a:solidFill>
-                  <a:srgbClr val="1A1A2E"/>
-                </a:solidFill>
-                <a:latin typeface="Segoe UI"/>
-              </a:rPr>
-              <a:t>•  dim_date jako tabela dat; klucze ukryte</a:t>
-            </a:r>
-          </a:p>
-        </p:txBody>
-      </p:sp>
-      <p:sp>
-        <p:nvSpPr>
-          <p:cNvPr id="9" name="TextBox 8"/>
-          <p:cNvSpPr txBox="1"/>
-          <p:nvPr/>
-        </p:nvSpPr>
-        <p:spPr>
-          <a:xfrm>
-            <a:off x="548640" y="3703320"/>
-            <a:ext cx="6126480" cy="649224"/>
-          </a:xfrm>
-          <a:prstGeom prst="rect">
-            <a:avLst/>
-          </a:prstGeom>
-          <a:noFill/>
-        </p:spPr>
-        <p:txBody>
-          <a:bodyPr wrap="square">
-            <a:spAutoFit/>
-          </a:bodyPr>
-          <a:lstStyle/>
-          <a:p>
-            <a:pPr algn="l"/>
-            <a:r>
-              <a:rPr sz="1500" b="1">
-                <a:solidFill>
-                  <a:srgbClr val="1F6F8B"/>
-                </a:solidFill>
-                <a:latin typeface="Segoe UI"/>
-              </a:rPr>
-              <a:t>•  Jeden model odpowiada na wszystkie 12 pytań</a:t>
-            </a:r>
-          </a:p>
-        </p:txBody>
-      </p:sp>
-      <p:sp>
-        <p:nvSpPr>
-          <p:cNvPr id="10" name="Rectangle 9"/>
-          <p:cNvSpPr/>
-          <p:nvPr/>
-        </p:nvSpPr>
-        <p:spPr>
-          <a:xfrm>
-            <a:off x="7040880" y="1417320"/>
-            <a:ext cx="4663440" cy="3931920"/>
-          </a:xfrm>
-          <a:prstGeom prst="rect">
-            <a:avLst/>
-          </a:prstGeom>
-          <a:solidFill>
-            <a:srgbClr val="FFFFFF"/>
-          </a:solidFill>
-          <a:ln>
-            <a:solidFill>
-              <a:srgbClr val="1F6F8B"/>
-            </a:solidFill>
-          </a:ln>
-        </p:spPr>
-        <p:style>
-          <a:lnRef idx="1">
-            <a:schemeClr val="accent1"/>
-          </a:lnRef>
-          <a:fillRef idx="3">
-            <a:schemeClr val="accent1"/>
-          </a:fillRef>
-          <a:effectRef idx="2">
-            <a:schemeClr val="accent1"/>
-          </a:effectRef>
-          <a:fontRef idx="minor">
-            <a:schemeClr val="lt1"/>
-          </a:fontRef>
-        </p:style>
-        <p:txBody>
-          <a:bodyPr rtlCol="0" anchor="ctr"/>
-          <a:lstStyle/>
-          <a:p>
-            <a:pPr algn="ctr"/>
-          </a:p>
-        </p:txBody>
-      </p:sp>
-      <p:sp>
-        <p:nvSpPr>
-          <p:cNvPr id="11" name="TextBox 10"/>
-          <p:cNvSpPr txBox="1"/>
-          <p:nvPr/>
-        </p:nvSpPr>
-        <p:spPr>
-          <a:xfrm>
-            <a:off x="7315200" y="1645920"/>
-            <a:ext cx="4114800" cy="457200"/>
-          </a:xfrm>
-          <a:prstGeom prst="rect">
-            <a:avLst/>
-          </a:prstGeom>
-          <a:noFill/>
-        </p:spPr>
-        <p:txBody>
-          <a:bodyPr wrap="square">
-            <a:spAutoFit/>
-          </a:bodyPr>
-          <a:lstStyle/>
-          <a:p>
-            <a:pPr algn="l"/>
-            <a:r>
-              <a:rPr sz="1600" b="1">
-                <a:solidFill>
-                  <a:srgbClr val="1F6F8B"/>
-                </a:solidFill>
-                <a:latin typeface="Segoe UI"/>
-              </a:rPr>
-              <a:t>Zgodność ze skryptem zajęć</a:t>
-            </a:r>
-          </a:p>
-        </p:txBody>
-      </p:sp>
-      <p:sp>
-        <p:nvSpPr>
-          <p:cNvPr id="12" name="TextBox 11"/>
-          <p:cNvSpPr txBox="1"/>
-          <p:nvPr/>
-        </p:nvSpPr>
-        <p:spPr>
-          <a:xfrm>
-            <a:off x="7315200" y="2148840"/>
-            <a:ext cx="4114800" cy="3017520"/>
-          </a:xfrm>
-          <a:prstGeom prst="rect">
-            <a:avLst/>
-          </a:prstGeom>
-          <a:noFill/>
-        </p:spPr>
-        <p:txBody>
-          <a:bodyPr wrap="square">
-            <a:spAutoFit/>
-          </a:bodyPr>
-          <a:lstStyle/>
-          <a:p>
-            <a:pPr algn="l"/>
-            <a:r>
-              <a:rPr sz="1400" b="0">
-                <a:solidFill>
-                  <a:srgbClr val="1A1A2E"/>
-                </a:solidFill>
-                <a:latin typeface="Segoe UI"/>
-              </a:rPr>
-              <a:t>najpierw model, potem wykresy</a:t>
-            </a:r>
-          </a:p>
-          <a:p>
-            <a:pPr algn="l"/>
-            <a:r>
-              <a:rPr sz="1400" b="0">
-                <a:solidFill>
-                  <a:srgbClr val="1A1A2E"/>
-                </a:solidFill>
-                <a:latin typeface="Segoe UI"/>
-              </a:rPr>
-              <a:t>tryb Import</a:t>
-            </a:r>
-          </a:p>
-          <a:p>
-            <a:pPr algn="l"/>
-            <a:r>
-              <a:rPr sz="1400" b="0">
-                <a:solidFill>
-                  <a:srgbClr val="1A1A2E"/>
-                </a:solidFill>
-                <a:latin typeface="Segoe UI"/>
-              </a:rPr>
-              <a:t>DIVIDE zamiast dzielenia</a:t>
-            </a:r>
-          </a:p>
-          <a:p>
-            <a:pPr algn="l"/>
-            <a:r>
-              <a:rPr sz="1400" b="0">
-                <a:solidFill>
-                  <a:srgbClr val="1A1A2E"/>
-                </a:solidFill>
-                <a:latin typeface="Segoe UI"/>
-              </a:rPr>
-              <a:t>miary zamiast kolumn</a:t>
-            </a:r>
-          </a:p>
-          <a:p>
-            <a:pPr algn="l"/>
-            <a:r>
-              <a:rPr sz="1400" b="0">
-                <a:solidFill>
-                  <a:srgbClr val="1A1A2E"/>
-                </a:solidFill>
-                <a:latin typeface="Segoe UI"/>
-              </a:rPr>
-              <a:t>formaty i foldery miar</a:t>
-            </a:r>
-          </a:p>
-          <a:p>
-            <a:pPr algn="l"/>
-            <a:r>
-              <a:rPr sz="1400" b="0">
-                <a:solidFill>
-                  <a:srgbClr val="1A1A2E"/>
-                </a:solidFill>
-                <a:latin typeface="Segoe UI"/>
-              </a:rPr>
-              <a:t>ukryte pola techniczne</a:t>
-            </a:r>
-          </a:p>
-        </p:txBody>
-      </p:sp>
-      <p:sp>
-        <p:nvSpPr>
-          <p:cNvPr id="13" name="Rectangle 12"/>
-          <p:cNvSpPr/>
-          <p:nvPr/>
-        </p:nvSpPr>
-        <p:spPr>
-          <a:xfrm>
-            <a:off x="457200" y="5897880"/>
-            <a:ext cx="11277295" cy="685800"/>
-          </a:xfrm>
-          <a:prstGeom prst="rect">
-            <a:avLst/>
-          </a:prstGeom>
-          <a:solidFill>
-            <a:srgbClr val="FFFFFF"/>
-          </a:solidFill>
-          <a:ln w="15875">
-            <a:solidFill>
-              <a:srgbClr val="A50F15"/>
-            </a:solidFill>
-          </a:ln>
-        </p:spPr>
-        <p:style>
-          <a:lnRef idx="1">
-            <a:schemeClr val="accent1"/>
-          </a:lnRef>
-          <a:fillRef idx="3">
-            <a:schemeClr val="accent1"/>
-          </a:fillRef>
-          <a:effectRef idx="2">
-            <a:schemeClr val="accent1"/>
-          </a:effectRef>
-          <a:fontRef idx="minor">
-            <a:schemeClr val="lt1"/>
-          </a:fontRef>
-        </p:style>
-        <p:txBody>
-          <a:bodyPr rtlCol="0" anchor="ctr" wrap="square"/>
-          <a:lstStyle/>
-          <a:p>
-            <a:pPr algn="ctr"/>
-            <a:r>
-              <a:rPr sz="1400" b="1">
-                <a:solidFill>
-                  <a:srgbClr val="A50F15"/>
-                </a:solidFill>
-                <a:latin typeface="Segoe UI"/>
-              </a:rPr>
-              <a:t>PYTANIE:  czy model Power BI jest akceptowalny jako warstwa semantyczna (zamiast SSAS)?</a:t>
+              <a:t>•  Test odporności: świeży przyrost danych (+198 zdarzeń) przetworzony bez zmian w kodzie</a:t>
             </a:r>
           </a:p>
         </p:txBody>
@@ -4225,7 +3994,7 @@
                 </a:solidFill>
                 <a:latin typeface="Segoe UI"/>
               </a:rPr>
-              <a:t>Raporty — pokaz na żywo w Power BI</a:t>
+              <a:t>Warstwa semantyczna — model Power BI</a:t>
             </a:r>
           </a:p>
         </p:txBody>
@@ -4238,29 +4007,29 @@
         </p:nvSpPr>
         <p:spPr>
           <a:xfrm>
-            <a:off x="457200" y="841248"/>
-            <a:ext cx="11277295" cy="365760"/>
-          </a:xfrm>
-          <a:prstGeom prst="rect">
-            <a:avLst/>
-          </a:prstGeom>
-          <a:noFill/>
-        </p:spPr>
-        <p:txBody>
-          <a:bodyPr wrap="square">
-            <a:spAutoFit/>
-          </a:bodyPr>
-          <a:lstStyle/>
-          <a:p>
-            <a:pPr algn="l"/>
-            <a:r>
-              <a:rPr sz="1300" b="0">
-                <a:solidFill>
-                  <a:srgbClr val="6B6B7B"/>
-                </a:solidFill>
-                <a:latin typeface="Segoe UI"/>
-              </a:rPr>
-              <a:t>9 stron: Dashboard + strony analityczne pokrywające wszystkie 12 pytań</a:t>
+            <a:off x="548640" y="1325880"/>
+            <a:ext cx="6126480" cy="649224"/>
+          </a:xfrm>
+          <a:prstGeom prst="rect">
+            <a:avLst/>
+          </a:prstGeom>
+          <a:noFill/>
+        </p:spPr>
+        <p:txBody>
+          <a:bodyPr wrap="square">
+            <a:spAutoFit/>
+          </a:bodyPr>
+          <a:lstStyle/>
+          <a:p>
+            <a:pPr algn="l"/>
+            <a:r>
+              <a:rPr sz="1500" b="1">
+                <a:solidFill>
+                  <a:srgbClr val="1F6F8B"/>
+                </a:solidFill>
+                <a:latin typeface="Segoe UI"/>
+              </a:rPr>
+              <a:t>•  Import gwiazdy „na płasko” przez ODBC/Athena</a:t>
             </a:r>
           </a:p>
         </p:txBody>
@@ -4273,29 +4042,29 @@
         </p:nvSpPr>
         <p:spPr>
           <a:xfrm>
-            <a:off x="548640" y="1371600"/>
-            <a:ext cx="3840480" cy="548640"/>
-          </a:xfrm>
-          <a:prstGeom prst="rect">
-            <a:avLst/>
-          </a:prstGeom>
-          <a:noFill/>
-        </p:spPr>
-        <p:txBody>
-          <a:bodyPr wrap="square">
-            <a:spAutoFit/>
-          </a:bodyPr>
-          <a:lstStyle/>
-          <a:p>
-            <a:pPr algn="l"/>
-            <a:r>
-              <a:rPr sz="1600" b="1">
+            <a:off x="548640" y="1801368"/>
+            <a:ext cx="6126480" cy="649224"/>
+          </a:xfrm>
+          <a:prstGeom prst="rect">
+            <a:avLst/>
+          </a:prstGeom>
+          <a:noFill/>
+        </p:spPr>
+        <p:txBody>
+          <a:bodyPr wrap="square">
+            <a:spAutoFit/>
+          </a:bodyPr>
+          <a:lstStyle/>
+          <a:p>
+            <a:pPr algn="l"/>
+            <a:r>
+              <a:rPr sz="1500" b="0">
                 <a:solidFill>
                   <a:srgbClr val="1A1A2E"/>
                 </a:solidFill>
                 <a:latin typeface="Segoe UI"/>
               </a:rPr>
-              <a:t>00 Dashboard</a:t>
+              <a:t>•  7 relacji wiele-do-jednego; wymiar filtruje fakt</a:t>
             </a:r>
           </a:p>
         </p:txBody>
@@ -4308,29 +4077,29 @@
         </p:nvSpPr>
         <p:spPr>
           <a:xfrm>
-            <a:off x="4480560" y="1371600"/>
-            <a:ext cx="7589520" cy="548640"/>
-          </a:xfrm>
-          <a:prstGeom prst="rect">
-            <a:avLst/>
-          </a:prstGeom>
-          <a:noFill/>
-        </p:spPr>
-        <p:txBody>
-          <a:bodyPr wrap="square">
-            <a:spAutoFit/>
-          </a:bodyPr>
-          <a:lstStyle/>
-          <a:p>
-            <a:pPr algn="l"/>
-            <a:r>
-              <a:rPr sz="1300" b="0">
-                <a:solidFill>
-                  <a:srgbClr val="6B6B7B"/>
-                </a:solidFill>
-                <a:latin typeface="Segoe UI"/>
-              </a:rPr>
-              <a:t>karty KPI, trend, struktura, TOP-y; nawigacja i slicery</a:t>
+            <a:off x="548640" y="2276856"/>
+            <a:ext cx="6126480" cy="649224"/>
+          </a:xfrm>
+          <a:prstGeom prst="rect">
+            <a:avLst/>
+          </a:prstGeom>
+          <a:noFill/>
+        </p:spPr>
+        <p:txBody>
+          <a:bodyPr wrap="square">
+            <a:spAutoFit/>
+          </a:bodyPr>
+          <a:lstStyle/>
+          <a:p>
+            <a:pPr algn="l"/>
+            <a:r>
+              <a:rPr sz="1500" b="0">
+                <a:solidFill>
+                  <a:srgbClr val="1A1A2E"/>
+                </a:solidFill>
+                <a:latin typeface="Segoe UI"/>
+              </a:rPr>
+              <a:t>•  Miary DAX: SUM, DIVIDE, CALCULATE, DATEADD, DISTINCTCOUNT, RANKX</a:t>
             </a:r>
           </a:p>
         </p:txBody>
@@ -4343,29 +4112,29 @@
         </p:nvSpPr>
         <p:spPr>
           <a:xfrm>
-            <a:off x="548640" y="1975104"/>
-            <a:ext cx="3840480" cy="548640"/>
-          </a:xfrm>
-          <a:prstGeom prst="rect">
-            <a:avLst/>
-          </a:prstGeom>
-          <a:noFill/>
-        </p:spPr>
-        <p:txBody>
-          <a:bodyPr wrap="square">
-            <a:spAutoFit/>
-          </a:bodyPr>
-          <a:lstStyle/>
-          <a:p>
-            <a:pPr algn="l"/>
-            <a:r>
-              <a:rPr sz="1600" b="1">
+            <a:off x="548640" y="2752344"/>
+            <a:ext cx="6126480" cy="649224"/>
+          </a:xfrm>
+          <a:prstGeom prst="rect">
+            <a:avLst/>
+          </a:prstGeom>
+          <a:noFill/>
+        </p:spPr>
+        <p:txBody>
+          <a:bodyPr wrap="square">
+            <a:spAutoFit/>
+          </a:bodyPr>
+          <a:lstStyle/>
+          <a:p>
+            <a:pPr algn="l"/>
+            <a:r>
+              <a:rPr sz="1500" b="0">
                 <a:solidFill>
                   <a:srgbClr val="1A1A2E"/>
                 </a:solidFill>
                 <a:latin typeface="Segoe UI"/>
               </a:rPr>
-              <a:t>01–02 Geografia, Trendy</a:t>
+              <a:t>•  3 hierarchie z drążeniem; miesiące chronologicznie</a:t>
             </a:r>
           </a:p>
         </p:txBody>
@@ -4378,29 +4147,29 @@
         </p:nvSpPr>
         <p:spPr>
           <a:xfrm>
-            <a:off x="4480560" y="1975104"/>
-            <a:ext cx="7589520" cy="548640"/>
-          </a:xfrm>
-          <a:prstGeom prst="rect">
-            <a:avLst/>
-          </a:prstGeom>
-          <a:noFill/>
-        </p:spPr>
-        <p:txBody>
-          <a:bodyPr wrap="square">
-            <a:spAutoFit/>
-          </a:bodyPr>
-          <a:lstStyle/>
-          <a:p>
-            <a:pPr algn="l"/>
-            <a:r>
-              <a:rPr sz="1300" b="0">
-                <a:solidFill>
-                  <a:srgbClr val="6B6B7B"/>
-                </a:solidFill>
-                <a:latin typeface="Segoe UI"/>
-              </a:rPr>
-              <a:t>mapa ofiar, drążenie kraj→typ, trendy per typ niepokoju</a:t>
+            <a:off x="548640" y="3227832"/>
+            <a:ext cx="6126480" cy="649224"/>
+          </a:xfrm>
+          <a:prstGeom prst="rect">
+            <a:avLst/>
+          </a:prstGeom>
+          <a:noFill/>
+        </p:spPr>
+        <p:txBody>
+          <a:bodyPr wrap="square">
+            <a:spAutoFit/>
+          </a:bodyPr>
+          <a:lstStyle/>
+          <a:p>
+            <a:pPr algn="l"/>
+            <a:r>
+              <a:rPr sz="1500" b="0">
+                <a:solidFill>
+                  <a:srgbClr val="1A1A2E"/>
+                </a:solidFill>
+                <a:latin typeface="Segoe UI"/>
+              </a:rPr>
+              <a:t>•  dim_date jako tabela dat; klucze ukryte</a:t>
             </a:r>
           </a:p>
         </p:txBody>
@@ -4413,253 +4182,43 @@
         </p:nvSpPr>
         <p:spPr>
           <a:xfrm>
-            <a:off x="548640" y="2578608"/>
-            <a:ext cx="3840480" cy="548640"/>
-          </a:xfrm>
-          <a:prstGeom prst="rect">
-            <a:avLst/>
-          </a:prstGeom>
-          <a:noFill/>
-        </p:spPr>
-        <p:txBody>
-          <a:bodyPr wrap="square">
-            <a:spAutoFit/>
-          </a:bodyPr>
-          <a:lstStyle/>
-          <a:p>
-            <a:pPr algn="l"/>
-            <a:r>
-              <a:rPr sz="1600" b="1">
-                <a:solidFill>
-                  <a:srgbClr val="1A1A2E"/>
-                </a:solidFill>
-                <a:latin typeface="Segoe UI"/>
-              </a:rPr>
-              <a:t>03–04 Sezonowość, Typy</a:t>
-            </a:r>
-          </a:p>
-        </p:txBody>
-      </p:sp>
-      <p:sp>
-        <p:nvSpPr>
-          <p:cNvPr id="10" name="TextBox 9"/>
-          <p:cNvSpPr txBox="1"/>
-          <p:nvPr/>
-        </p:nvSpPr>
-        <p:spPr>
-          <a:xfrm>
-            <a:off x="4480560" y="2578608"/>
-            <a:ext cx="7589520" cy="548640"/>
-          </a:xfrm>
-          <a:prstGeom prst="rect">
-            <a:avLst/>
-          </a:prstGeom>
-          <a:noFill/>
-        </p:spPr>
-        <p:txBody>
-          <a:bodyPr wrap="square">
-            <a:spAutoFit/>
-          </a:bodyPr>
-          <a:lstStyle/>
-          <a:p>
-            <a:pPr algn="l"/>
-            <a:r>
-              <a:rPr sz="1300" b="0">
-                <a:solidFill>
-                  <a:srgbClr val="6B6B7B"/>
-                </a:solidFill>
-                <a:latin typeface="Segoe UI"/>
-              </a:rPr>
-              <a:t>mapa ciepła miesiąc×rok, średnie ofiar na zdarzenie</a:t>
-            </a:r>
-          </a:p>
-        </p:txBody>
-      </p:sp>
-      <p:sp>
-        <p:nvSpPr>
-          <p:cNvPr id="11" name="TextBox 10"/>
-          <p:cNvSpPr txBox="1"/>
-          <p:nvPr/>
-        </p:nvSpPr>
-        <p:spPr>
-          <a:xfrm>
-            <a:off x="548640" y="3182112"/>
-            <a:ext cx="3840480" cy="548640"/>
-          </a:xfrm>
-          <a:prstGeom prst="rect">
-            <a:avLst/>
-          </a:prstGeom>
-          <a:noFill/>
-        </p:spPr>
-        <p:txBody>
-          <a:bodyPr wrap="square">
-            <a:spAutoFit/>
-          </a:bodyPr>
-          <a:lstStyle/>
-          <a:p>
-            <a:pPr algn="l"/>
-            <a:r>
-              <a:rPr sz="1600" b="1">
-                <a:solidFill>
-                  <a:srgbClr val="1A1A2E"/>
-                </a:solidFill>
-                <a:latin typeface="Segoe UI"/>
-              </a:rPr>
-              <a:t>05–06 Aktorzy, Cywile</a:t>
-            </a:r>
-          </a:p>
-        </p:txBody>
-      </p:sp>
-      <p:sp>
-        <p:nvSpPr>
-          <p:cNvPr id="12" name="TextBox 11"/>
-          <p:cNvSpPr txBox="1"/>
-          <p:nvPr/>
-        </p:nvSpPr>
-        <p:spPr>
-          <a:xfrm>
-            <a:off x="4480560" y="3182112"/>
-            <a:ext cx="7589520" cy="548640"/>
-          </a:xfrm>
-          <a:prstGeom prst="rect">
-            <a:avLst/>
-          </a:prstGeom>
-          <a:noFill/>
-        </p:spPr>
-        <p:txBody>
-          <a:bodyPr wrap="square">
-            <a:spAutoFit/>
-          </a:bodyPr>
-          <a:lstStyle/>
-          <a:p>
-            <a:pPr algn="l"/>
-            <a:r>
-              <a:rPr sz="1300" b="0">
-                <a:solidFill>
-                  <a:srgbClr val="6B6B7B"/>
-                </a:solidFill>
-                <a:latin typeface="Segoe UI"/>
-              </a:rPr>
-              <a:t>TOP aktorów w czasie, % celowania w cywilów</a:t>
-            </a:r>
-          </a:p>
-        </p:txBody>
-      </p:sp>
-      <p:sp>
-        <p:nvSpPr>
-          <p:cNvPr id="13" name="TextBox 12"/>
-          <p:cNvSpPr txBox="1"/>
-          <p:nvPr/>
-        </p:nvSpPr>
-        <p:spPr>
-          <a:xfrm>
-            <a:off x="548640" y="3785616"/>
-            <a:ext cx="3840480" cy="548640"/>
-          </a:xfrm>
-          <a:prstGeom prst="rect">
-            <a:avLst/>
-          </a:prstGeom>
-          <a:noFill/>
-        </p:spPr>
-        <p:txBody>
-          <a:bodyPr wrap="square">
-            <a:spAutoFit/>
-          </a:bodyPr>
-          <a:lstStyle/>
-          <a:p>
-            <a:pPr algn="l"/>
-            <a:r>
-              <a:rPr sz="1600" b="1">
-                <a:solidFill>
-                  <a:srgbClr val="1A1A2E"/>
-                </a:solidFill>
-                <a:latin typeface="Segoe UI"/>
-              </a:rPr>
-              <a:t>07–08 Eskalacja, Per capita</a:t>
-            </a:r>
-          </a:p>
-        </p:txBody>
-      </p:sp>
-      <p:sp>
-        <p:nvSpPr>
-          <p:cNvPr id="14" name="TextBox 13"/>
-          <p:cNvSpPr txBox="1"/>
-          <p:nvPr/>
-        </p:nvSpPr>
-        <p:spPr>
-          <a:xfrm>
-            <a:off x="4480560" y="3785616"/>
-            <a:ext cx="7589520" cy="548640"/>
-          </a:xfrm>
-          <a:prstGeom prst="rect">
-            <a:avLst/>
-          </a:prstGeom>
-          <a:noFill/>
-        </p:spPr>
-        <p:txBody>
-          <a:bodyPr wrap="square">
-            <a:spAutoFit/>
-          </a:bodyPr>
-          <a:lstStyle/>
-          <a:p>
-            <a:pPr algn="l"/>
-            <a:r>
-              <a:rPr sz="1300" b="0">
-                <a:solidFill>
-                  <a:srgbClr val="6B6B7B"/>
-                </a:solidFill>
-                <a:latin typeface="Segoe UI"/>
-              </a:rPr>
-              <a:t>skoki rok-do-roku, odwrócenie rankingu per capita</a:t>
-            </a:r>
-          </a:p>
-        </p:txBody>
-      </p:sp>
-      <p:sp>
-        <p:nvSpPr>
-          <p:cNvPr id="15" name="TextBox 14"/>
-          <p:cNvSpPr txBox="1"/>
-          <p:nvPr/>
-        </p:nvSpPr>
-        <p:spPr>
-          <a:xfrm>
-            <a:off x="548640" y="4663440"/>
-            <a:ext cx="11155680" cy="594360"/>
-          </a:xfrm>
-          <a:prstGeom prst="rect">
-            <a:avLst/>
-          </a:prstGeom>
-          <a:noFill/>
-        </p:spPr>
-        <p:txBody>
-          <a:bodyPr wrap="square">
-            <a:spAutoFit/>
-          </a:bodyPr>
-          <a:lstStyle/>
-          <a:p>
-            <a:pPr algn="l"/>
-            <a:r>
-              <a:rPr sz="1400" b="1">
+            <a:off x="548640" y="3703320"/>
+            <a:ext cx="6126480" cy="649224"/>
+          </a:xfrm>
+          <a:prstGeom prst="rect">
+            <a:avLst/>
+          </a:prstGeom>
+          <a:noFill/>
+        </p:spPr>
+        <p:txBody>
+          <a:bodyPr wrap="square">
+            <a:spAutoFit/>
+          </a:bodyPr>
+          <a:lstStyle/>
+          <a:p>
+            <a:pPr algn="l"/>
+            <a:r>
+              <a:rPr sz="1500" b="1">
                 <a:solidFill>
                   <a:srgbClr val="1F6F8B"/>
                 </a:solidFill>
                 <a:latin typeface="Segoe UI"/>
               </a:rPr>
-              <a:t>•  Mechaniki z zajęć: slicery zsynchronizowane · drążenie · formatowanie warunkowe · interakcje · sortowanie chronologiczne</a:t>
-            </a:r>
-          </a:p>
-        </p:txBody>
-      </p:sp>
-      <p:sp>
-        <p:nvSpPr>
-          <p:cNvPr id="16" name="Rectangle 15"/>
+              <a:t>•  Jeden model odpowiada na wszystkie 12 pytań</a:t>
+            </a:r>
+          </a:p>
+        </p:txBody>
+      </p:sp>
+      <p:sp>
+        <p:nvSpPr>
+          <p:cNvPr id="10" name="Rectangle 9"/>
           <p:cNvSpPr/>
           <p:nvPr/>
         </p:nvSpPr>
         <p:spPr>
           <a:xfrm>
-            <a:off x="457200" y="5897880"/>
-            <a:ext cx="11277295" cy="685800"/>
+            <a:off x="7040880" y="1417320"/>
+            <a:ext cx="4663440" cy="3931920"/>
           </a:xfrm>
           <a:prstGeom prst="rect">
             <a:avLst/>
@@ -4667,9 +4226,9 @@
           <a:solidFill>
             <a:srgbClr val="FFFFFF"/>
           </a:solidFill>
-          <a:ln w="15875">
+          <a:ln>
             <a:solidFill>
-              <a:srgbClr val="A50F15"/>
+              <a:srgbClr val="1F6F8B"/>
             </a:solidFill>
           </a:ln>
         </p:spPr>
@@ -4688,6 +4247,181 @@
           </a:fontRef>
         </p:style>
         <p:txBody>
+          <a:bodyPr rtlCol="0" anchor="ctr"/>
+          <a:lstStyle/>
+          <a:p>
+            <a:pPr algn="ctr"/>
+          </a:p>
+        </p:txBody>
+      </p:sp>
+      <p:sp>
+        <p:nvSpPr>
+          <p:cNvPr id="11" name="TextBox 10"/>
+          <p:cNvSpPr txBox="1"/>
+          <p:nvPr/>
+        </p:nvSpPr>
+        <p:spPr>
+          <a:xfrm>
+            <a:off x="7315200" y="1645920"/>
+            <a:ext cx="4114800" cy="457200"/>
+          </a:xfrm>
+          <a:prstGeom prst="rect">
+            <a:avLst/>
+          </a:prstGeom>
+          <a:noFill/>
+        </p:spPr>
+        <p:txBody>
+          <a:bodyPr wrap="square">
+            <a:spAutoFit/>
+          </a:bodyPr>
+          <a:lstStyle/>
+          <a:p>
+            <a:pPr algn="l"/>
+            <a:r>
+              <a:rPr sz="1600" b="1">
+                <a:solidFill>
+                  <a:srgbClr val="1F6F8B"/>
+                </a:solidFill>
+                <a:latin typeface="Segoe UI"/>
+              </a:rPr>
+              <a:t>Zgodność ze skryptem zajęć</a:t>
+            </a:r>
+          </a:p>
+        </p:txBody>
+      </p:sp>
+      <p:sp>
+        <p:nvSpPr>
+          <p:cNvPr id="12" name="TextBox 11"/>
+          <p:cNvSpPr txBox="1"/>
+          <p:nvPr/>
+        </p:nvSpPr>
+        <p:spPr>
+          <a:xfrm>
+            <a:off x="7315200" y="2148840"/>
+            <a:ext cx="4114800" cy="3017520"/>
+          </a:xfrm>
+          <a:prstGeom prst="rect">
+            <a:avLst/>
+          </a:prstGeom>
+          <a:noFill/>
+        </p:spPr>
+        <p:txBody>
+          <a:bodyPr wrap="square">
+            <a:spAutoFit/>
+          </a:bodyPr>
+          <a:lstStyle/>
+          <a:p>
+            <a:pPr algn="l"/>
+            <a:r>
+              <a:rPr sz="1400" b="0">
+                <a:solidFill>
+                  <a:srgbClr val="1A1A2E"/>
+                </a:solidFill>
+                <a:latin typeface="Segoe UI"/>
+              </a:rPr>
+              <a:t>najpierw model, potem wykresy</a:t>
+            </a:r>
+          </a:p>
+          <a:p>
+            <a:pPr algn="l"/>
+            <a:r>
+              <a:rPr sz="1400" b="0">
+                <a:solidFill>
+                  <a:srgbClr val="1A1A2E"/>
+                </a:solidFill>
+                <a:latin typeface="Segoe UI"/>
+              </a:rPr>
+              <a:t>tryb Import</a:t>
+            </a:r>
+          </a:p>
+          <a:p>
+            <a:pPr algn="l"/>
+            <a:r>
+              <a:rPr sz="1400" b="0">
+                <a:solidFill>
+                  <a:srgbClr val="1A1A2E"/>
+                </a:solidFill>
+                <a:latin typeface="Segoe UI"/>
+              </a:rPr>
+              <a:t>DIVIDE zamiast dzielenia</a:t>
+            </a:r>
+          </a:p>
+          <a:p>
+            <a:pPr algn="l"/>
+            <a:r>
+              <a:rPr sz="1400" b="0">
+                <a:solidFill>
+                  <a:srgbClr val="1A1A2E"/>
+                </a:solidFill>
+                <a:latin typeface="Segoe UI"/>
+              </a:rPr>
+              <a:t>miary zamiast kolumn</a:t>
+            </a:r>
+          </a:p>
+          <a:p>
+            <a:pPr algn="l"/>
+            <a:r>
+              <a:rPr sz="1400" b="0">
+                <a:solidFill>
+                  <a:srgbClr val="1A1A2E"/>
+                </a:solidFill>
+                <a:latin typeface="Segoe UI"/>
+              </a:rPr>
+              <a:t>formaty i foldery miar</a:t>
+            </a:r>
+          </a:p>
+          <a:p>
+            <a:pPr algn="l"/>
+            <a:r>
+              <a:rPr sz="1400" b="0">
+                <a:solidFill>
+                  <a:srgbClr val="1A1A2E"/>
+                </a:solidFill>
+                <a:latin typeface="Segoe UI"/>
+              </a:rPr>
+              <a:t>ukryte pola techniczne</a:t>
+            </a:r>
+          </a:p>
+        </p:txBody>
+      </p:sp>
+      <p:sp>
+        <p:nvSpPr>
+          <p:cNvPr id="13" name="Rectangle 12"/>
+          <p:cNvSpPr/>
+          <p:nvPr/>
+        </p:nvSpPr>
+        <p:spPr>
+          <a:xfrm>
+            <a:off x="457200" y="5897880"/>
+            <a:ext cx="11277295" cy="685800"/>
+          </a:xfrm>
+          <a:prstGeom prst="rect">
+            <a:avLst/>
+          </a:prstGeom>
+          <a:solidFill>
+            <a:srgbClr val="FFFFFF"/>
+          </a:solidFill>
+          <a:ln w="15875">
+            <a:solidFill>
+              <a:srgbClr val="A50F15"/>
+            </a:solidFill>
+          </a:ln>
+        </p:spPr>
+        <p:style>
+          <a:lnRef idx="1">
+            <a:schemeClr val="accent1"/>
+          </a:lnRef>
+          <a:fillRef idx="3">
+            <a:schemeClr val="accent1"/>
+          </a:fillRef>
+          <a:effectRef idx="2">
+            <a:schemeClr val="accent1"/>
+          </a:effectRef>
+          <a:fontRef idx="minor">
+            <a:schemeClr val="lt1"/>
+          </a:fontRef>
+        </p:style>
+        <p:txBody>
           <a:bodyPr rtlCol="0" anchor="ctr" wrap="square"/>
           <a:lstStyle/>
           <a:p>
@@ -4699,7 +4433,7 @@
                 </a:solidFill>
                 <a:latin typeface="Segoe UI"/>
               </a:rPr>
-              <a:t>PYTANIE:  czy układ raportu (dashboard + strona na pytanie) odpowiada oczekiwaniom?</a:t>
+              <a:t>PYTANIE:  czy model Power BI jest akceptowalny jako warstwa semantyczna (zamiast SSAS)?</a:t>
             </a:r>
           </a:p>
         </p:txBody>
@@ -4803,7 +4537,7 @@
                 </a:solidFill>
                 <a:latin typeface="Segoe UI"/>
               </a:rPr>
-              <a:t>Decyzje, o których weryfikację prosimy</a:t>
+              <a:t>Raporty — pokaz na żywo w Power BI</a:t>
             </a:r>
           </a:p>
         </p:txBody>
@@ -4816,274 +4550,468 @@
         </p:nvSpPr>
         <p:spPr>
           <a:xfrm>
-            <a:off x="548640" y="1280160"/>
-            <a:ext cx="11155680" cy="740664"/>
-          </a:xfrm>
-          <a:prstGeom prst="rect">
-            <a:avLst/>
-          </a:prstGeom>
-          <a:noFill/>
-        </p:spPr>
-        <p:txBody>
-          <a:bodyPr wrap="square">
-            <a:spAutoFit/>
-          </a:bodyPr>
-          <a:lstStyle/>
-          <a:p>
-            <a:pPr algn="l"/>
-            <a:r>
-              <a:rPr sz="1500" b="1">
+            <a:off x="457200" y="841248"/>
+            <a:ext cx="11277295" cy="365760"/>
+          </a:xfrm>
+          <a:prstGeom prst="rect">
+            <a:avLst/>
+          </a:prstGeom>
+          <a:noFill/>
+        </p:spPr>
+        <p:txBody>
+          <a:bodyPr wrap="square">
+            <a:spAutoFit/>
+          </a:bodyPr>
+          <a:lstStyle/>
+          <a:p>
+            <a:pPr algn="l"/>
+            <a:r>
+              <a:rPr sz="1300" b="0">
+                <a:solidFill>
+                  <a:srgbClr val="6B6B7B"/>
+                </a:solidFill>
+                <a:latin typeface="Segoe UI"/>
+              </a:rPr>
+              <a:t>9 stron: Dashboard + strony analityczne pokrywające wszystkie 12 pytań</a:t>
+            </a:r>
+          </a:p>
+        </p:txBody>
+      </p:sp>
+      <p:sp>
+        <p:nvSpPr>
+          <p:cNvPr id="5" name="TextBox 4"/>
+          <p:cNvSpPr txBox="1"/>
+          <p:nvPr/>
+        </p:nvSpPr>
+        <p:spPr>
+          <a:xfrm>
+            <a:off x="548640" y="1371600"/>
+            <a:ext cx="3840480" cy="548640"/>
+          </a:xfrm>
+          <a:prstGeom prst="rect">
+            <a:avLst/>
+          </a:prstGeom>
+          <a:noFill/>
+        </p:spPr>
+        <p:txBody>
+          <a:bodyPr wrap="square">
+            <a:spAutoFit/>
+          </a:bodyPr>
+          <a:lstStyle/>
+          <a:p>
+            <a:pPr algn="l"/>
+            <a:r>
+              <a:rPr sz="1600" b="1">
+                <a:solidFill>
+                  <a:srgbClr val="1A1A2E"/>
+                </a:solidFill>
+                <a:latin typeface="Segoe UI"/>
+              </a:rPr>
+              <a:t>00 Dashboard</a:t>
+            </a:r>
+          </a:p>
+        </p:txBody>
+      </p:sp>
+      <p:sp>
+        <p:nvSpPr>
+          <p:cNvPr id="6" name="TextBox 5"/>
+          <p:cNvSpPr txBox="1"/>
+          <p:nvPr/>
+        </p:nvSpPr>
+        <p:spPr>
+          <a:xfrm>
+            <a:off x="4480560" y="1371600"/>
+            <a:ext cx="7589520" cy="548640"/>
+          </a:xfrm>
+          <a:prstGeom prst="rect">
+            <a:avLst/>
+          </a:prstGeom>
+          <a:noFill/>
+        </p:spPr>
+        <p:txBody>
+          <a:bodyPr wrap="square">
+            <a:spAutoFit/>
+          </a:bodyPr>
+          <a:lstStyle/>
+          <a:p>
+            <a:pPr algn="l"/>
+            <a:r>
+              <a:rPr sz="1300" b="0">
+                <a:solidFill>
+                  <a:srgbClr val="6B6B7B"/>
+                </a:solidFill>
+                <a:latin typeface="Segoe UI"/>
+              </a:rPr>
+              <a:t>karty KPI, trend, struktura, TOP-y; nawigacja i slicery</a:t>
+            </a:r>
+          </a:p>
+        </p:txBody>
+      </p:sp>
+      <p:sp>
+        <p:nvSpPr>
+          <p:cNvPr id="7" name="TextBox 6"/>
+          <p:cNvSpPr txBox="1"/>
+          <p:nvPr/>
+        </p:nvSpPr>
+        <p:spPr>
+          <a:xfrm>
+            <a:off x="548640" y="1975104"/>
+            <a:ext cx="3840480" cy="548640"/>
+          </a:xfrm>
+          <a:prstGeom prst="rect">
+            <a:avLst/>
+          </a:prstGeom>
+          <a:noFill/>
+        </p:spPr>
+        <p:txBody>
+          <a:bodyPr wrap="square">
+            <a:spAutoFit/>
+          </a:bodyPr>
+          <a:lstStyle/>
+          <a:p>
+            <a:pPr algn="l"/>
+            <a:r>
+              <a:rPr sz="1600" b="1">
+                <a:solidFill>
+                  <a:srgbClr val="1A1A2E"/>
+                </a:solidFill>
+                <a:latin typeface="Segoe UI"/>
+              </a:rPr>
+              <a:t>01–02 Geografia, Trendy</a:t>
+            </a:r>
+          </a:p>
+        </p:txBody>
+      </p:sp>
+      <p:sp>
+        <p:nvSpPr>
+          <p:cNvPr id="8" name="TextBox 7"/>
+          <p:cNvSpPr txBox="1"/>
+          <p:nvPr/>
+        </p:nvSpPr>
+        <p:spPr>
+          <a:xfrm>
+            <a:off x="4480560" y="1975104"/>
+            <a:ext cx="7589520" cy="548640"/>
+          </a:xfrm>
+          <a:prstGeom prst="rect">
+            <a:avLst/>
+          </a:prstGeom>
+          <a:noFill/>
+        </p:spPr>
+        <p:txBody>
+          <a:bodyPr wrap="square">
+            <a:spAutoFit/>
+          </a:bodyPr>
+          <a:lstStyle/>
+          <a:p>
+            <a:pPr algn="l"/>
+            <a:r>
+              <a:rPr sz="1300" b="0">
+                <a:solidFill>
+                  <a:srgbClr val="6B6B7B"/>
+                </a:solidFill>
+                <a:latin typeface="Segoe UI"/>
+              </a:rPr>
+              <a:t>mapa ofiar, drążenie kraj→typ, trendy per typ niepokoju</a:t>
+            </a:r>
+          </a:p>
+        </p:txBody>
+      </p:sp>
+      <p:sp>
+        <p:nvSpPr>
+          <p:cNvPr id="9" name="TextBox 8"/>
+          <p:cNvSpPr txBox="1"/>
+          <p:nvPr/>
+        </p:nvSpPr>
+        <p:spPr>
+          <a:xfrm>
+            <a:off x="548640" y="2578608"/>
+            <a:ext cx="3840480" cy="548640"/>
+          </a:xfrm>
+          <a:prstGeom prst="rect">
+            <a:avLst/>
+          </a:prstGeom>
+          <a:noFill/>
+        </p:spPr>
+        <p:txBody>
+          <a:bodyPr wrap="square">
+            <a:spAutoFit/>
+          </a:bodyPr>
+          <a:lstStyle/>
+          <a:p>
+            <a:pPr algn="l"/>
+            <a:r>
+              <a:rPr sz="1600" b="1">
+                <a:solidFill>
+                  <a:srgbClr val="1A1A2E"/>
+                </a:solidFill>
+                <a:latin typeface="Segoe UI"/>
+              </a:rPr>
+              <a:t>03–04 Sezonowość, Typy</a:t>
+            </a:r>
+          </a:p>
+        </p:txBody>
+      </p:sp>
+      <p:sp>
+        <p:nvSpPr>
+          <p:cNvPr id="10" name="TextBox 9"/>
+          <p:cNvSpPr txBox="1"/>
+          <p:nvPr/>
+        </p:nvSpPr>
+        <p:spPr>
+          <a:xfrm>
+            <a:off x="4480560" y="2578608"/>
+            <a:ext cx="7589520" cy="548640"/>
+          </a:xfrm>
+          <a:prstGeom prst="rect">
+            <a:avLst/>
+          </a:prstGeom>
+          <a:noFill/>
+        </p:spPr>
+        <p:txBody>
+          <a:bodyPr wrap="square">
+            <a:spAutoFit/>
+          </a:bodyPr>
+          <a:lstStyle/>
+          <a:p>
+            <a:pPr algn="l"/>
+            <a:r>
+              <a:rPr sz="1300" b="0">
+                <a:solidFill>
+                  <a:srgbClr val="6B6B7B"/>
+                </a:solidFill>
+                <a:latin typeface="Segoe UI"/>
+              </a:rPr>
+              <a:t>mapa ciepła miesiąc×rok, średnie ofiar na zdarzenie</a:t>
+            </a:r>
+          </a:p>
+        </p:txBody>
+      </p:sp>
+      <p:sp>
+        <p:nvSpPr>
+          <p:cNvPr id="11" name="TextBox 10"/>
+          <p:cNvSpPr txBox="1"/>
+          <p:nvPr/>
+        </p:nvSpPr>
+        <p:spPr>
+          <a:xfrm>
+            <a:off x="548640" y="3182112"/>
+            <a:ext cx="3840480" cy="548640"/>
+          </a:xfrm>
+          <a:prstGeom prst="rect">
+            <a:avLst/>
+          </a:prstGeom>
+          <a:noFill/>
+        </p:spPr>
+        <p:txBody>
+          <a:bodyPr wrap="square">
+            <a:spAutoFit/>
+          </a:bodyPr>
+          <a:lstStyle/>
+          <a:p>
+            <a:pPr algn="l"/>
+            <a:r>
+              <a:rPr sz="1600" b="1">
+                <a:solidFill>
+                  <a:srgbClr val="1A1A2E"/>
+                </a:solidFill>
+                <a:latin typeface="Segoe UI"/>
+              </a:rPr>
+              <a:t>05–06 Aktorzy, Cywile</a:t>
+            </a:r>
+          </a:p>
+        </p:txBody>
+      </p:sp>
+      <p:sp>
+        <p:nvSpPr>
+          <p:cNvPr id="12" name="TextBox 11"/>
+          <p:cNvSpPr txBox="1"/>
+          <p:nvPr/>
+        </p:nvSpPr>
+        <p:spPr>
+          <a:xfrm>
+            <a:off x="4480560" y="3182112"/>
+            <a:ext cx="7589520" cy="548640"/>
+          </a:xfrm>
+          <a:prstGeom prst="rect">
+            <a:avLst/>
+          </a:prstGeom>
+          <a:noFill/>
+        </p:spPr>
+        <p:txBody>
+          <a:bodyPr wrap="square">
+            <a:spAutoFit/>
+          </a:bodyPr>
+          <a:lstStyle/>
+          <a:p>
+            <a:pPr algn="l"/>
+            <a:r>
+              <a:rPr sz="1300" b="0">
+                <a:solidFill>
+                  <a:srgbClr val="6B6B7B"/>
+                </a:solidFill>
+                <a:latin typeface="Segoe UI"/>
+              </a:rPr>
+              <a:t>TOP aktorów w czasie, % celowania w cywilów</a:t>
+            </a:r>
+          </a:p>
+        </p:txBody>
+      </p:sp>
+      <p:sp>
+        <p:nvSpPr>
+          <p:cNvPr id="13" name="TextBox 12"/>
+          <p:cNvSpPr txBox="1"/>
+          <p:nvPr/>
+        </p:nvSpPr>
+        <p:spPr>
+          <a:xfrm>
+            <a:off x="548640" y="3785616"/>
+            <a:ext cx="3840480" cy="548640"/>
+          </a:xfrm>
+          <a:prstGeom prst="rect">
+            <a:avLst/>
+          </a:prstGeom>
+          <a:noFill/>
+        </p:spPr>
+        <p:txBody>
+          <a:bodyPr wrap="square">
+            <a:spAutoFit/>
+          </a:bodyPr>
+          <a:lstStyle/>
+          <a:p>
+            <a:pPr algn="l"/>
+            <a:r>
+              <a:rPr sz="1600" b="1">
+                <a:solidFill>
+                  <a:srgbClr val="1A1A2E"/>
+                </a:solidFill>
+                <a:latin typeface="Segoe UI"/>
+              </a:rPr>
+              <a:t>07–08 Eskalacja, Per capita</a:t>
+            </a:r>
+          </a:p>
+        </p:txBody>
+      </p:sp>
+      <p:sp>
+        <p:nvSpPr>
+          <p:cNvPr id="14" name="TextBox 13"/>
+          <p:cNvSpPr txBox="1"/>
+          <p:nvPr/>
+        </p:nvSpPr>
+        <p:spPr>
+          <a:xfrm>
+            <a:off x="4480560" y="3785616"/>
+            <a:ext cx="7589520" cy="548640"/>
+          </a:xfrm>
+          <a:prstGeom prst="rect">
+            <a:avLst/>
+          </a:prstGeom>
+          <a:noFill/>
+        </p:spPr>
+        <p:txBody>
+          <a:bodyPr wrap="square">
+            <a:spAutoFit/>
+          </a:bodyPr>
+          <a:lstStyle/>
+          <a:p>
+            <a:pPr algn="l"/>
+            <a:r>
+              <a:rPr sz="1300" b="0">
+                <a:solidFill>
+                  <a:srgbClr val="6B6B7B"/>
+                </a:solidFill>
+                <a:latin typeface="Segoe UI"/>
+              </a:rPr>
+              <a:t>skoki rok-do-roku, odwrócenie rankingu per capita</a:t>
+            </a:r>
+          </a:p>
+        </p:txBody>
+      </p:sp>
+      <p:sp>
+        <p:nvSpPr>
+          <p:cNvPr id="15" name="TextBox 14"/>
+          <p:cNvSpPr txBox="1"/>
+          <p:nvPr/>
+        </p:nvSpPr>
+        <p:spPr>
+          <a:xfrm>
+            <a:off x="548640" y="4663440"/>
+            <a:ext cx="11155680" cy="594360"/>
+          </a:xfrm>
+          <a:prstGeom prst="rect">
+            <a:avLst/>
+          </a:prstGeom>
+          <a:noFill/>
+        </p:spPr>
+        <p:txBody>
+          <a:bodyPr wrap="square">
+            <a:spAutoFit/>
+          </a:bodyPr>
+          <a:lstStyle/>
+          <a:p>
+            <a:pPr algn="l"/>
+            <a:r>
+              <a:rPr sz="1400" b="1">
                 <a:solidFill>
                   <a:srgbClr val="1F6F8B"/>
                 </a:solidFill>
                 <a:latin typeface="Segoe UI"/>
               </a:rPr>
-              <a:t>•  1. Poprawność schematu gwiazdy (prosimy o formalne sprawdzenie)</a:t>
-            </a:r>
-          </a:p>
-        </p:txBody>
-      </p:sp>
-      <p:sp>
-        <p:nvSpPr>
-          <p:cNvPr id="5" name="TextBox 4"/>
-          <p:cNvSpPr txBox="1"/>
-          <p:nvPr/>
-        </p:nvSpPr>
-        <p:spPr>
-          <a:xfrm>
-            <a:off x="548640" y="1847088"/>
-            <a:ext cx="11155680" cy="740664"/>
-          </a:xfrm>
-          <a:prstGeom prst="rect">
-            <a:avLst/>
-          </a:prstGeom>
-          <a:noFill/>
-        </p:spPr>
-        <p:txBody>
-          <a:bodyPr wrap="square">
-            <a:spAutoFit/>
-          </a:bodyPr>
-          <a:lstStyle/>
-          <a:p>
-            <a:pPr algn="l"/>
-            <a:r>
-              <a:rPr sz="1500" b="0">
-                <a:solidFill>
-                  <a:srgbClr val="1A1A2E"/>
-                </a:solidFill>
-                <a:latin typeface="Segoe UI"/>
-              </a:rPr>
-              <a:t>•  2. Stack: Airflow + Athena/S3 + Power BI zamiast SSIS/SSAS/SSRS</a:t>
-            </a:r>
-          </a:p>
-        </p:txBody>
-      </p:sp>
-      <p:sp>
-        <p:nvSpPr>
-          <p:cNvPr id="6" name="TextBox 5"/>
-          <p:cNvSpPr txBox="1"/>
-          <p:nvPr/>
-        </p:nvSpPr>
-        <p:spPr>
-          <a:xfrm>
-            <a:off x="548640" y="2414016"/>
-            <a:ext cx="11155680" cy="740664"/>
-          </a:xfrm>
-          <a:prstGeom prst="rect">
-            <a:avLst/>
-          </a:prstGeom>
-          <a:noFill/>
-        </p:spPr>
-        <p:txBody>
-          <a:bodyPr wrap="square">
-            <a:spAutoFit/>
-          </a:bodyPr>
-          <a:lstStyle/>
-          <a:p>
-            <a:pPr algn="l"/>
-            <a:r>
-              <a:rPr sz="1500" b="0">
-                <a:solidFill>
-                  <a:srgbClr val="1A1A2E"/>
-                </a:solidFill>
-                <a:latin typeface="Segoe UI"/>
-              </a:rPr>
-              <a:t>•  3. event_id_cnty jako wymiar zdegenerowany</a:t>
-            </a:r>
-          </a:p>
-        </p:txBody>
-      </p:sp>
-      <p:sp>
-        <p:nvSpPr>
-          <p:cNvPr id="7" name="TextBox 6"/>
-          <p:cNvSpPr txBox="1"/>
-          <p:nvPr/>
-        </p:nvSpPr>
-        <p:spPr>
-          <a:xfrm>
-            <a:off x="548640" y="2980944"/>
-            <a:ext cx="11155680" cy="740664"/>
-          </a:xfrm>
-          <a:prstGeom prst="rect">
-            <a:avLst/>
-          </a:prstGeom>
-          <a:noFill/>
-        </p:spPr>
-        <p:txBody>
-          <a:bodyPr wrap="square">
-            <a:spAutoFit/>
-          </a:bodyPr>
-          <a:lstStyle/>
-          <a:p>
-            <a:pPr algn="l"/>
-            <a:r>
-              <a:rPr sz="1500" b="0">
-                <a:solidFill>
-                  <a:srgbClr val="1A1A2E"/>
-                </a:solidFill>
-                <a:latin typeface="Segoe UI"/>
-              </a:rPr>
-              <a:t>•  4. Klucz iso_year i relacja dwukierunkowa do populacji</a:t>
-            </a:r>
-          </a:p>
-        </p:txBody>
-      </p:sp>
-      <p:sp>
-        <p:nvSpPr>
-          <p:cNvPr id="8" name="TextBox 7"/>
-          <p:cNvSpPr txBox="1"/>
-          <p:nvPr/>
-        </p:nvSpPr>
-        <p:spPr>
-          <a:xfrm>
-            <a:off x="548640" y="3547872"/>
-            <a:ext cx="11155680" cy="740664"/>
-          </a:xfrm>
-          <a:prstGeom prst="rect">
-            <a:avLst/>
-          </a:prstGeom>
-          <a:noFill/>
-        </p:spPr>
-        <p:txBody>
-          <a:bodyPr wrap="square">
-            <a:spAutoFit/>
-          </a:bodyPr>
-          <a:lstStyle/>
-          <a:p>
-            <a:pPr algn="l"/>
-            <a:r>
-              <a:rPr sz="1500" b="0">
-                <a:solidFill>
-                  <a:srgbClr val="1A1A2E"/>
-                </a:solidFill>
-                <a:latin typeface="Segoe UI"/>
-              </a:rPr>
-              <a:t>•  5. Rejestrowanie historii: SCD typ 1 + rejestr usunięć</a:t>
-            </a:r>
-          </a:p>
-        </p:txBody>
-      </p:sp>
-      <p:sp>
-        <p:nvSpPr>
-          <p:cNvPr id="9" name="TextBox 8"/>
-          <p:cNvSpPr txBox="1"/>
-          <p:nvPr/>
-        </p:nvSpPr>
-        <p:spPr>
-          <a:xfrm>
-            <a:off x="548640" y="4114800"/>
-            <a:ext cx="11155680" cy="740664"/>
-          </a:xfrm>
-          <a:prstGeom prst="rect">
-            <a:avLst/>
-          </a:prstGeom>
-          <a:noFill/>
-        </p:spPr>
-        <p:txBody>
-          <a:bodyPr wrap="square">
-            <a:spAutoFit/>
-          </a:bodyPr>
-          <a:lstStyle/>
-          <a:p>
-            <a:pPr algn="l"/>
-            <a:r>
-              <a:rPr sz="1500" b="0">
-                <a:solidFill>
-                  <a:srgbClr val="1A1A2E"/>
-                </a:solidFill>
-                <a:latin typeface="Segoe UI"/>
-              </a:rPr>
-              <a:t>•  6. Rok 2025 niepełny (embargo źródła) — odcinamy w trendach</a:t>
-            </a:r>
-          </a:p>
-        </p:txBody>
-      </p:sp>
-      <p:sp>
-        <p:nvSpPr>
-          <p:cNvPr id="10" name="TextBox 9"/>
-          <p:cNvSpPr txBox="1"/>
-          <p:nvPr/>
-        </p:nvSpPr>
-        <p:spPr>
-          <a:xfrm>
-            <a:off x="548640" y="4681728"/>
-            <a:ext cx="11155680" cy="740664"/>
-          </a:xfrm>
-          <a:prstGeom prst="rect">
-            <a:avLst/>
-          </a:prstGeom>
-          <a:noFill/>
-        </p:spPr>
-        <p:txBody>
-          <a:bodyPr wrap="square">
-            <a:spAutoFit/>
-          </a:bodyPr>
-          <a:lstStyle/>
-          <a:p>
-            <a:pPr algn="l"/>
-            <a:r>
-              <a:rPr sz="1500" b="0">
-                <a:solidFill>
-                  <a:srgbClr val="1A1A2E"/>
-                </a:solidFill>
-                <a:latin typeface="Segoe UI"/>
-              </a:rPr>
-              <a:t>•  7. Kosowo bez kodu ISO numeric — 0,4% zdarzeń bez per capita</a:t>
-            </a:r>
-          </a:p>
-        </p:txBody>
-      </p:sp>
-      <p:sp>
-        <p:nvSpPr>
-          <p:cNvPr id="11" name="TextBox 10"/>
-          <p:cNvSpPr txBox="1"/>
-          <p:nvPr/>
-        </p:nvSpPr>
-        <p:spPr>
-          <a:xfrm>
-            <a:off x="548640" y="5248656"/>
-            <a:ext cx="11155680" cy="740664"/>
-          </a:xfrm>
-          <a:prstGeom prst="rect">
-            <a:avLst/>
-          </a:prstGeom>
-          <a:noFill/>
-        </p:spPr>
-        <p:txBody>
-          <a:bodyPr wrap="square">
-            <a:spAutoFit/>
-          </a:bodyPr>
-          <a:lstStyle/>
-          <a:p>
-            <a:pPr algn="l"/>
-            <a:r>
-              <a:rPr sz="1500" b="0">
-                <a:solidFill>
-                  <a:srgbClr val="1A1A2E"/>
-                </a:solidFill>
-                <a:latin typeface="Segoe UI"/>
-              </a:rPr>
-              <a:t>•  8. Pod-pytanie Q10 (liczność źródeł per zdarzenie) — poza zakresem</a:t>
+              <a:t>•  Mechaniki z zajęć: slicery zsynchronizowane · drążenie · formatowanie warunkowe · interakcje · sortowanie chronologiczne</a:t>
+            </a:r>
+          </a:p>
+        </p:txBody>
+      </p:sp>
+      <p:sp>
+        <p:nvSpPr>
+          <p:cNvPr id="16" name="Rectangle 15"/>
+          <p:cNvSpPr/>
+          <p:nvPr/>
+        </p:nvSpPr>
+        <p:spPr>
+          <a:xfrm>
+            <a:off x="457200" y="5897880"/>
+            <a:ext cx="11277295" cy="685800"/>
+          </a:xfrm>
+          <a:prstGeom prst="rect">
+            <a:avLst/>
+          </a:prstGeom>
+          <a:solidFill>
+            <a:srgbClr val="FFFFFF"/>
+          </a:solidFill>
+          <a:ln w="15875">
+            <a:solidFill>
+              <a:srgbClr val="A50F15"/>
+            </a:solidFill>
+          </a:ln>
+        </p:spPr>
+        <p:style>
+          <a:lnRef idx="1">
+            <a:schemeClr val="accent1"/>
+          </a:lnRef>
+          <a:fillRef idx="3">
+            <a:schemeClr val="accent1"/>
+          </a:fillRef>
+          <a:effectRef idx="2">
+            <a:schemeClr val="accent1"/>
+          </a:effectRef>
+          <a:fontRef idx="minor">
+            <a:schemeClr val="lt1"/>
+          </a:fontRef>
+        </p:style>
+        <p:txBody>
+          <a:bodyPr rtlCol="0" anchor="ctr" wrap="square"/>
+          <a:lstStyle/>
+          <a:p>
+            <a:pPr algn="ctr"/>
+            <a:r>
+              <a:rPr sz="1400" b="1">
+                <a:solidFill>
+                  <a:srgbClr val="A50F15"/>
+                </a:solidFill>
+                <a:latin typeface="Segoe UI"/>
+              </a:rPr>
+              <a:t>PYTANIE:  czy układ raportu (dashboard + strona na pytanie) odpowiada oczekiwaniom?</a:t>
             </a:r>
           </a:p>
         </p:txBody>
@@ -5187,6 +5115,390 @@
                 </a:solidFill>
                 <a:latin typeface="Segoe UI"/>
               </a:rPr>
+              <a:t>Decyzje, o których weryfikację prosimy</a:t>
+            </a:r>
+          </a:p>
+        </p:txBody>
+      </p:sp>
+      <p:sp>
+        <p:nvSpPr>
+          <p:cNvPr id="4" name="TextBox 3"/>
+          <p:cNvSpPr txBox="1"/>
+          <p:nvPr/>
+        </p:nvSpPr>
+        <p:spPr>
+          <a:xfrm>
+            <a:off x="548640" y="1280160"/>
+            <a:ext cx="11155680" cy="740664"/>
+          </a:xfrm>
+          <a:prstGeom prst="rect">
+            <a:avLst/>
+          </a:prstGeom>
+          <a:noFill/>
+        </p:spPr>
+        <p:txBody>
+          <a:bodyPr wrap="square">
+            <a:spAutoFit/>
+          </a:bodyPr>
+          <a:lstStyle/>
+          <a:p>
+            <a:pPr algn="l"/>
+            <a:r>
+              <a:rPr sz="1500" b="1">
+                <a:solidFill>
+                  <a:srgbClr val="1F6F8B"/>
+                </a:solidFill>
+                <a:latin typeface="Segoe UI"/>
+              </a:rPr>
+              <a:t>•  1. Poprawność schematu gwiazdy (prosimy o formalne sprawdzenie)</a:t>
+            </a:r>
+          </a:p>
+        </p:txBody>
+      </p:sp>
+      <p:sp>
+        <p:nvSpPr>
+          <p:cNvPr id="5" name="TextBox 4"/>
+          <p:cNvSpPr txBox="1"/>
+          <p:nvPr/>
+        </p:nvSpPr>
+        <p:spPr>
+          <a:xfrm>
+            <a:off x="548640" y="1847088"/>
+            <a:ext cx="11155680" cy="740664"/>
+          </a:xfrm>
+          <a:prstGeom prst="rect">
+            <a:avLst/>
+          </a:prstGeom>
+          <a:noFill/>
+        </p:spPr>
+        <p:txBody>
+          <a:bodyPr wrap="square">
+            <a:spAutoFit/>
+          </a:bodyPr>
+          <a:lstStyle/>
+          <a:p>
+            <a:pPr algn="l"/>
+            <a:r>
+              <a:rPr sz="1500" b="0">
+                <a:solidFill>
+                  <a:srgbClr val="1A1A2E"/>
+                </a:solidFill>
+                <a:latin typeface="Segoe UI"/>
+              </a:rPr>
+              <a:t>•  2. Stack: Airflow + Athena/S3 + Power BI zamiast SSIS/SSAS/SSRS</a:t>
+            </a:r>
+          </a:p>
+        </p:txBody>
+      </p:sp>
+      <p:sp>
+        <p:nvSpPr>
+          <p:cNvPr id="6" name="TextBox 5"/>
+          <p:cNvSpPr txBox="1"/>
+          <p:nvPr/>
+        </p:nvSpPr>
+        <p:spPr>
+          <a:xfrm>
+            <a:off x="548640" y="2414016"/>
+            <a:ext cx="11155680" cy="740664"/>
+          </a:xfrm>
+          <a:prstGeom prst="rect">
+            <a:avLst/>
+          </a:prstGeom>
+          <a:noFill/>
+        </p:spPr>
+        <p:txBody>
+          <a:bodyPr wrap="square">
+            <a:spAutoFit/>
+          </a:bodyPr>
+          <a:lstStyle/>
+          <a:p>
+            <a:pPr algn="l"/>
+            <a:r>
+              <a:rPr sz="1500" b="0">
+                <a:solidFill>
+                  <a:srgbClr val="1A1A2E"/>
+                </a:solidFill>
+                <a:latin typeface="Segoe UI"/>
+              </a:rPr>
+              <a:t>•  3. event_id_cnty jako wymiar zdegenerowany</a:t>
+            </a:r>
+          </a:p>
+        </p:txBody>
+      </p:sp>
+      <p:sp>
+        <p:nvSpPr>
+          <p:cNvPr id="7" name="TextBox 6"/>
+          <p:cNvSpPr txBox="1"/>
+          <p:nvPr/>
+        </p:nvSpPr>
+        <p:spPr>
+          <a:xfrm>
+            <a:off x="548640" y="2980944"/>
+            <a:ext cx="11155680" cy="740664"/>
+          </a:xfrm>
+          <a:prstGeom prst="rect">
+            <a:avLst/>
+          </a:prstGeom>
+          <a:noFill/>
+        </p:spPr>
+        <p:txBody>
+          <a:bodyPr wrap="square">
+            <a:spAutoFit/>
+          </a:bodyPr>
+          <a:lstStyle/>
+          <a:p>
+            <a:pPr algn="l"/>
+            <a:r>
+              <a:rPr sz="1500" b="0">
+                <a:solidFill>
+                  <a:srgbClr val="1A1A2E"/>
+                </a:solidFill>
+                <a:latin typeface="Segoe UI"/>
+              </a:rPr>
+              <a:t>•  4. Klucz iso_year i relacja dwukierunkowa do populacji</a:t>
+            </a:r>
+          </a:p>
+        </p:txBody>
+      </p:sp>
+      <p:sp>
+        <p:nvSpPr>
+          <p:cNvPr id="8" name="TextBox 7"/>
+          <p:cNvSpPr txBox="1"/>
+          <p:nvPr/>
+        </p:nvSpPr>
+        <p:spPr>
+          <a:xfrm>
+            <a:off x="548640" y="3547872"/>
+            <a:ext cx="11155680" cy="740664"/>
+          </a:xfrm>
+          <a:prstGeom prst="rect">
+            <a:avLst/>
+          </a:prstGeom>
+          <a:noFill/>
+        </p:spPr>
+        <p:txBody>
+          <a:bodyPr wrap="square">
+            <a:spAutoFit/>
+          </a:bodyPr>
+          <a:lstStyle/>
+          <a:p>
+            <a:pPr algn="l"/>
+            <a:r>
+              <a:rPr sz="1500" b="0">
+                <a:solidFill>
+                  <a:srgbClr val="1A1A2E"/>
+                </a:solidFill>
+                <a:latin typeface="Segoe UI"/>
+              </a:rPr>
+              <a:t>•  5. Rejestrowanie historii: SCD typ 1 + rejestr usunięć</a:t>
+            </a:r>
+          </a:p>
+        </p:txBody>
+      </p:sp>
+      <p:sp>
+        <p:nvSpPr>
+          <p:cNvPr id="9" name="TextBox 8"/>
+          <p:cNvSpPr txBox="1"/>
+          <p:nvPr/>
+        </p:nvSpPr>
+        <p:spPr>
+          <a:xfrm>
+            <a:off x="548640" y="4114800"/>
+            <a:ext cx="11155680" cy="740664"/>
+          </a:xfrm>
+          <a:prstGeom prst="rect">
+            <a:avLst/>
+          </a:prstGeom>
+          <a:noFill/>
+        </p:spPr>
+        <p:txBody>
+          <a:bodyPr wrap="square">
+            <a:spAutoFit/>
+          </a:bodyPr>
+          <a:lstStyle/>
+          <a:p>
+            <a:pPr algn="l"/>
+            <a:r>
+              <a:rPr sz="1500" b="0">
+                <a:solidFill>
+                  <a:srgbClr val="1A1A2E"/>
+                </a:solidFill>
+                <a:latin typeface="Segoe UI"/>
+              </a:rPr>
+              <a:t>•  6. Rok 2025 niepełny (embargo źródła) — odcinamy w trendach</a:t>
+            </a:r>
+          </a:p>
+        </p:txBody>
+      </p:sp>
+      <p:sp>
+        <p:nvSpPr>
+          <p:cNvPr id="10" name="TextBox 9"/>
+          <p:cNvSpPr txBox="1"/>
+          <p:nvPr/>
+        </p:nvSpPr>
+        <p:spPr>
+          <a:xfrm>
+            <a:off x="548640" y="4681728"/>
+            <a:ext cx="11155680" cy="740664"/>
+          </a:xfrm>
+          <a:prstGeom prst="rect">
+            <a:avLst/>
+          </a:prstGeom>
+          <a:noFill/>
+        </p:spPr>
+        <p:txBody>
+          <a:bodyPr wrap="square">
+            <a:spAutoFit/>
+          </a:bodyPr>
+          <a:lstStyle/>
+          <a:p>
+            <a:pPr algn="l"/>
+            <a:r>
+              <a:rPr sz="1500" b="0">
+                <a:solidFill>
+                  <a:srgbClr val="1A1A2E"/>
+                </a:solidFill>
+                <a:latin typeface="Segoe UI"/>
+              </a:rPr>
+              <a:t>•  7. Kosowo bez kodu ISO numeric — 0,4% zdarzeń bez per capita</a:t>
+            </a:r>
+          </a:p>
+        </p:txBody>
+      </p:sp>
+      <p:sp>
+        <p:nvSpPr>
+          <p:cNvPr id="11" name="TextBox 10"/>
+          <p:cNvSpPr txBox="1"/>
+          <p:nvPr/>
+        </p:nvSpPr>
+        <p:spPr>
+          <a:xfrm>
+            <a:off x="548640" y="5248656"/>
+            <a:ext cx="11155680" cy="740664"/>
+          </a:xfrm>
+          <a:prstGeom prst="rect">
+            <a:avLst/>
+          </a:prstGeom>
+          <a:noFill/>
+        </p:spPr>
+        <p:txBody>
+          <a:bodyPr wrap="square">
+            <a:spAutoFit/>
+          </a:bodyPr>
+          <a:lstStyle/>
+          <a:p>
+            <a:pPr algn="l"/>
+            <a:r>
+              <a:rPr sz="1500" b="0">
+                <a:solidFill>
+                  <a:srgbClr val="1A1A2E"/>
+                </a:solidFill>
+                <a:latin typeface="Segoe UI"/>
+              </a:rPr>
+              <a:t>•  8. Pod-pytanie Q10 (liczność źródeł per zdarzenie) — poza zakresem</a:t>
+            </a:r>
+          </a:p>
+        </p:txBody>
+      </p:sp>
+    </p:spTree>
+  </p:cSld>
+  <p:clrMapOvr>
+    <a:masterClrMapping/>
+  </p:clrMapOvr>
+</p:sld>
+</file>
+
+<file path=ppt/slides/slide15.xml><?xml version="1.0" encoding="utf-8"?>
+<p:sld xmlns:a="http://schemas.openxmlformats.org/drawingml/2006/main" xmlns:p="http://schemas.openxmlformats.org/presentationml/2006/main" xmlns:r="http://schemas.openxmlformats.org/officeDocument/2006/relationships">
+  <p:cSld>
+    <p:bg>
+      <p:bgPr>
+        <a:solidFill>
+          <a:srgbClr val="F7F7F5"/>
+        </a:solidFill>
+        <a:effectLst/>
+      </p:bgPr>
+    </p:bg>
+    <p:spTree>
+      <p:nvGrpSpPr>
+        <p:cNvPr id="1" name=""/>
+        <p:cNvGrpSpPr/>
+        <p:nvPr/>
+      </p:nvGrpSpPr>
+      <p:grpSpPr/>
+      <p:sp>
+        <p:nvSpPr>
+          <p:cNvPr id="2" name="Rectangle 1"/>
+          <p:cNvSpPr/>
+          <p:nvPr/>
+        </p:nvSpPr>
+        <p:spPr>
+          <a:xfrm>
+            <a:off x="0" y="0"/>
+            <a:ext cx="12191695" cy="146304"/>
+          </a:xfrm>
+          <a:prstGeom prst="rect">
+            <a:avLst/>
+          </a:prstGeom>
+          <a:solidFill>
+            <a:srgbClr val="1F6F8B"/>
+          </a:solidFill>
+          <a:ln>
+            <a:noFill/>
+          </a:ln>
+        </p:spPr>
+        <p:style>
+          <a:lnRef idx="1">
+            <a:schemeClr val="accent1"/>
+          </a:lnRef>
+          <a:fillRef idx="3">
+            <a:schemeClr val="accent1"/>
+          </a:fillRef>
+          <a:effectRef idx="2">
+            <a:schemeClr val="accent1"/>
+          </a:effectRef>
+          <a:fontRef idx="minor">
+            <a:schemeClr val="lt1"/>
+          </a:fontRef>
+        </p:style>
+        <p:txBody>
+          <a:bodyPr rtlCol="0" anchor="ctr"/>
+          <a:lstStyle/>
+          <a:p>
+            <a:pPr algn="ctr"/>
+          </a:p>
+        </p:txBody>
+      </p:sp>
+      <p:sp>
+        <p:nvSpPr>
+          <p:cNvPr id="3" name="TextBox 2"/>
+          <p:cNvSpPr txBox="1"/>
+          <p:nvPr/>
+        </p:nvSpPr>
+        <p:spPr>
+          <a:xfrm>
+            <a:off x="457200" y="274320"/>
+            <a:ext cx="11277295" cy="594360"/>
+          </a:xfrm>
+          <a:prstGeom prst="rect">
+            <a:avLst/>
+          </a:prstGeom>
+          <a:noFill/>
+        </p:spPr>
+        <p:txBody>
+          <a:bodyPr wrap="square">
+            <a:spAutoFit/>
+          </a:bodyPr>
+          <a:lstStyle/>
+          <a:p>
+            <a:pPr algn="l"/>
+            <a:r>
+              <a:rPr sz="2700" b="1">
+                <a:solidFill>
+                  <a:srgbClr val="1F6F8B"/>
+                </a:solidFill>
+                <a:latin typeface="Segoe UI"/>
+              </a:rPr>
               <a:t>Podsumowanie</a:t>
             </a:r>
           </a:p>
@@ -6060,7 +6372,7 @@
                 </a:solidFill>
                 <a:latin typeface="Segoe UI"/>
               </a:rPr>
-              <a:t>Dane źródłowe i pytania biznesowe</a:t>
+              <a:t>Dane źródłowe</a:t>
             </a:r>
           </a:p>
         </p:txBody>
@@ -6073,29 +6385,29 @@
         </p:nvSpPr>
         <p:spPr>
           <a:xfrm>
-            <a:off x="548640" y="1280160"/>
-            <a:ext cx="5760720" cy="594360"/>
-          </a:xfrm>
-          <a:prstGeom prst="rect">
-            <a:avLst/>
-          </a:prstGeom>
-          <a:noFill/>
-        </p:spPr>
-        <p:txBody>
-          <a:bodyPr wrap="square">
-            <a:spAutoFit/>
-          </a:bodyPr>
-          <a:lstStyle/>
-          <a:p>
-            <a:pPr algn="l"/>
-            <a:r>
-              <a:rPr sz="1400" b="1">
+            <a:off x="548640" y="1463040"/>
+            <a:ext cx="6400800" cy="685800"/>
+          </a:xfrm>
+          <a:prstGeom prst="rect">
+            <a:avLst/>
+          </a:prstGeom>
+          <a:noFill/>
+        </p:spPr>
+        <p:txBody>
+          <a:bodyPr wrap="square">
+            <a:spAutoFit/>
+          </a:bodyPr>
+          <a:lstStyle/>
+          <a:p>
+            <a:pPr algn="l"/>
+            <a:r>
+              <a:rPr sz="1600" b="1">
                 <a:solidFill>
                   <a:srgbClr val="1F6F8B"/>
                 </a:solidFill>
                 <a:latin typeface="Segoe UI"/>
               </a:rPr>
-              <a:t>•  ACLED (API): 2 669 294 zdarzeń, 1997–2025, 242 kraje</a:t>
+              <a:t>•  ACLED — Armed Conflict Location &amp; Event Data</a:t>
             </a:r>
           </a:p>
         </p:txBody>
@@ -6108,29 +6420,29 @@
         </p:nvSpPr>
         <p:spPr>
           <a:xfrm>
-            <a:off x="548640" y="1700784"/>
-            <a:ext cx="5760720" cy="594360"/>
-          </a:xfrm>
-          <a:prstGeom prst="rect">
-            <a:avLst/>
-          </a:prstGeom>
-          <a:noFill/>
-        </p:spPr>
-        <p:txBody>
-          <a:bodyPr wrap="square">
-            <a:spAutoFit/>
-          </a:bodyPr>
-          <a:lstStyle/>
-          <a:p>
-            <a:pPr algn="l"/>
-            <a:r>
-              <a:rPr sz="1400" b="0">
+            <a:off x="548640" y="1975104"/>
+            <a:ext cx="6400800" cy="685800"/>
+          </a:xfrm>
+          <a:prstGeom prst="rect">
+            <a:avLst/>
+          </a:prstGeom>
+          <a:noFill/>
+        </p:spPr>
+        <p:txBody>
+          <a:bodyPr wrap="square">
+            <a:spAutoFit/>
+          </a:bodyPr>
+          <a:lstStyle/>
+          <a:p>
+            <a:pPr algn="l"/>
+            <a:r>
+              <a:rPr sz="1600" b="0">
                 <a:solidFill>
                   <a:srgbClr val="1A1A2E"/>
                 </a:solidFill>
                 <a:latin typeface="Segoe UI"/>
               </a:rPr>
-              <a:t>•  dane realne, niegenerowane; embargo źródła 12 mies.</a:t>
+              <a:t>•  oficjalne API (OAuth), dane realne, niegenerowane</a:t>
             </a:r>
           </a:p>
         </p:txBody>
@@ -6143,498 +6455,148 @@
         </p:nvSpPr>
         <p:spPr>
           <a:xfrm>
-            <a:off x="548640" y="2121408"/>
-            <a:ext cx="5760720" cy="594360"/>
-          </a:xfrm>
-          <a:prstGeom prst="rect">
-            <a:avLst/>
-          </a:prstGeom>
-          <a:noFill/>
-        </p:spPr>
-        <p:txBody>
-          <a:bodyPr wrap="square">
-            <a:spAutoFit/>
-          </a:bodyPr>
-          <a:lstStyle/>
-          <a:p>
-            <a:pPr algn="l"/>
-            <a:r>
-              <a:rPr sz="1400" b="1">
+            <a:off x="548640" y="2487168"/>
+            <a:ext cx="6400800" cy="685800"/>
+          </a:xfrm>
+          <a:prstGeom prst="rect">
+            <a:avLst/>
+          </a:prstGeom>
+          <a:noFill/>
+        </p:spPr>
+        <p:txBody>
+          <a:bodyPr wrap="square">
+            <a:spAutoFit/>
+          </a:bodyPr>
+          <a:lstStyle/>
+          <a:p>
+            <a:pPr algn="l"/>
+            <a:r>
+              <a:rPr sz="1600" b="0">
+                <a:solidFill>
+                  <a:srgbClr val="1A1A2E"/>
+                </a:solidFill>
+                <a:latin typeface="Segoe UI"/>
+              </a:rPr>
+              <a:t>•  2 669 294 zdarzeń · 1997–2025 · 242 kraje</a:t>
+            </a:r>
+          </a:p>
+        </p:txBody>
+      </p:sp>
+      <p:sp>
+        <p:nvSpPr>
+          <p:cNvPr id="7" name="TextBox 6"/>
+          <p:cNvSpPr txBox="1"/>
+          <p:nvPr/>
+        </p:nvSpPr>
+        <p:spPr>
+          <a:xfrm>
+            <a:off x="548640" y="2999232"/>
+            <a:ext cx="6400800" cy="685800"/>
+          </a:xfrm>
+          <a:prstGeom prst="rect">
+            <a:avLst/>
+          </a:prstGeom>
+          <a:noFill/>
+        </p:spPr>
+        <p:txBody>
+          <a:bodyPr wrap="square">
+            <a:spAutoFit/>
+          </a:bodyPr>
+          <a:lstStyle/>
+          <a:p>
+            <a:pPr algn="l"/>
+            <a:r>
+              <a:rPr sz="1600" b="0">
+                <a:solidFill>
+                  <a:srgbClr val="1A1A2E"/>
+                </a:solidFill>
+                <a:latin typeface="Segoe UI"/>
+              </a:rPr>
+              <a:t>•  źródło publikuje z 12-miesięcznym embargiem (znanym z góry)</a:t>
+            </a:r>
+          </a:p>
+        </p:txBody>
+      </p:sp>
+      <p:sp>
+        <p:nvSpPr>
+          <p:cNvPr id="8" name="TextBox 7"/>
+          <p:cNvSpPr txBox="1"/>
+          <p:nvPr/>
+        </p:nvSpPr>
+        <p:spPr>
+          <a:xfrm>
+            <a:off x="548640" y="3511296"/>
+            <a:ext cx="6400800" cy="685800"/>
+          </a:xfrm>
+          <a:prstGeom prst="rect">
+            <a:avLst/>
+          </a:prstGeom>
+          <a:noFill/>
+        </p:spPr>
+        <p:txBody>
+          <a:bodyPr wrap="square">
+            <a:spAutoFit/>
+          </a:bodyPr>
+          <a:lstStyle/>
+          <a:p>
+            <a:pPr algn="l"/>
+            <a:r>
+              <a:rPr sz="1600" b="1">
                 <a:solidFill>
                   <a:srgbClr val="1F6F8B"/>
                 </a:solidFill>
                 <a:latin typeface="Segoe UI"/>
               </a:rPr>
-              <a:t>•  World Bank: populacja kraj×rok (per capita)</a:t>
-            </a:r>
-          </a:p>
-        </p:txBody>
-      </p:sp>
-      <p:sp>
-        <p:nvSpPr>
-          <p:cNvPr id="7" name="TextBox 6"/>
-          <p:cNvSpPr txBox="1"/>
-          <p:nvPr/>
-        </p:nvSpPr>
-        <p:spPr>
-          <a:xfrm>
-            <a:off x="548640" y="2542032"/>
-            <a:ext cx="5760720" cy="594360"/>
-          </a:xfrm>
-          <a:prstGeom prst="rect">
-            <a:avLst/>
-          </a:prstGeom>
-          <a:noFill/>
-        </p:spPr>
-        <p:txBody>
-          <a:bodyPr wrap="square">
-            <a:spAutoFit/>
-          </a:bodyPr>
-          <a:lstStyle/>
-          <a:p>
-            <a:pPr algn="l"/>
-            <a:r>
-              <a:rPr sz="1400" b="0">
+              <a:t>•  World Bank — populacja kraj×rok (SP.POP.TOTL)</a:t>
+            </a:r>
+          </a:p>
+        </p:txBody>
+      </p:sp>
+      <p:sp>
+        <p:nvSpPr>
+          <p:cNvPr id="9" name="TextBox 8"/>
+          <p:cNvSpPr txBox="1"/>
+          <p:nvPr/>
+        </p:nvSpPr>
+        <p:spPr>
+          <a:xfrm>
+            <a:off x="548640" y="4023360"/>
+            <a:ext cx="6400800" cy="685800"/>
+          </a:xfrm>
+          <a:prstGeom prst="rect">
+            <a:avLst/>
+          </a:prstGeom>
+          <a:noFill/>
+        </p:spPr>
+        <p:txBody>
+          <a:bodyPr wrap="square">
+            <a:spAutoFit/>
+          </a:bodyPr>
+          <a:lstStyle/>
+          <a:p>
+            <a:pPr algn="l"/>
+            <a:r>
+              <a:rPr sz="1600" b="0">
                 <a:solidFill>
                   <a:srgbClr val="1A1A2E"/>
                 </a:solidFill>
                 <a:latin typeface="Segoe UI"/>
               </a:rPr>
-              <a:t>•  wspólny klucz: ISO 3166-1 numeric</a:t>
-            </a:r>
-          </a:p>
-        </p:txBody>
-      </p:sp>
-      <p:sp>
-        <p:nvSpPr>
-          <p:cNvPr id="8" name="TextBox 7"/>
-          <p:cNvSpPr txBox="1"/>
-          <p:nvPr/>
-        </p:nvSpPr>
-        <p:spPr>
-          <a:xfrm>
-            <a:off x="548640" y="3246120"/>
-            <a:ext cx="5394960" cy="557784"/>
-          </a:xfrm>
-          <a:prstGeom prst="rect">
-            <a:avLst/>
-          </a:prstGeom>
-          <a:noFill/>
-        </p:spPr>
-        <p:txBody>
-          <a:bodyPr wrap="square">
-            <a:spAutoFit/>
-          </a:bodyPr>
-          <a:lstStyle/>
-          <a:p>
-            <a:pPr algn="l"/>
-            <a:r>
-              <a:rPr sz="1300" b="0">
-                <a:solidFill>
-                  <a:srgbClr val="1A1A2E"/>
-                </a:solidFill>
-                <a:latin typeface="Segoe UI"/>
-              </a:rPr>
-              <a:t>•  1. Kraje/regiony i dominujące typy</a:t>
-            </a:r>
-          </a:p>
-        </p:txBody>
-      </p:sp>
-      <p:sp>
-        <p:nvSpPr>
-          <p:cNvPr id="9" name="TextBox 8"/>
-          <p:cNvSpPr txBox="1"/>
-          <p:nvPr/>
-        </p:nvSpPr>
-        <p:spPr>
-          <a:xfrm>
-            <a:off x="548640" y="3630168"/>
-            <a:ext cx="5394960" cy="557784"/>
-          </a:xfrm>
-          <a:prstGeom prst="rect">
-            <a:avLst/>
-          </a:prstGeom>
-          <a:noFill/>
-        </p:spPr>
-        <p:txBody>
-          <a:bodyPr wrap="square">
-            <a:spAutoFit/>
-          </a:bodyPr>
-          <a:lstStyle/>
-          <a:p>
-            <a:pPr algn="l"/>
-            <a:r>
-              <a:rPr sz="1300" b="0">
-                <a:solidFill>
-                  <a:srgbClr val="1A1A2E"/>
-                </a:solidFill>
-                <a:latin typeface="Segoe UI"/>
-              </a:rPr>
-              <a:t>•  2. Ofiary na mapie; ofiary na zdarzenie</a:t>
-            </a:r>
-          </a:p>
-        </p:txBody>
-      </p:sp>
-      <p:sp>
-        <p:nvSpPr>
-          <p:cNvPr id="10" name="TextBox 9"/>
-          <p:cNvSpPr txBox="1"/>
-          <p:nvPr/>
-        </p:nvSpPr>
-        <p:spPr>
-          <a:xfrm>
-            <a:off x="548640" y="4014216"/>
-            <a:ext cx="5394960" cy="557784"/>
-          </a:xfrm>
-          <a:prstGeom prst="rect">
-            <a:avLst/>
-          </a:prstGeom>
-          <a:noFill/>
-        </p:spPr>
-        <p:txBody>
-          <a:bodyPr wrap="square">
-            <a:spAutoFit/>
-          </a:bodyPr>
-          <a:lstStyle/>
-          <a:p>
-            <a:pPr algn="l"/>
-            <a:r>
-              <a:rPr sz="1300" b="0">
-                <a:solidFill>
-                  <a:srgbClr val="1A1A2E"/>
-                </a:solidFill>
-                <a:latin typeface="Segoe UI"/>
-              </a:rPr>
-              <a:t>•  3. Trendy per typ niepokoju</a:t>
-            </a:r>
-          </a:p>
-        </p:txBody>
-      </p:sp>
-      <p:sp>
-        <p:nvSpPr>
-          <p:cNvPr id="11" name="TextBox 10"/>
-          <p:cNvSpPr txBox="1"/>
-          <p:nvPr/>
-        </p:nvSpPr>
-        <p:spPr>
-          <a:xfrm>
-            <a:off x="548640" y="4398264"/>
-            <a:ext cx="5394960" cy="557784"/>
-          </a:xfrm>
-          <a:prstGeom prst="rect">
-            <a:avLst/>
-          </a:prstGeom>
-          <a:noFill/>
-        </p:spPr>
-        <p:txBody>
-          <a:bodyPr wrap="square">
-            <a:spAutoFit/>
-          </a:bodyPr>
-          <a:lstStyle/>
-          <a:p>
-            <a:pPr algn="l"/>
-            <a:r>
-              <a:rPr sz="1300" b="0">
-                <a:solidFill>
-                  <a:srgbClr val="1A1A2E"/>
-                </a:solidFill>
-                <a:latin typeface="Segoe UI"/>
-              </a:rPr>
-              <a:t>•  4. Sezonowość (zdarzenia i ofiary)</a:t>
-            </a:r>
-          </a:p>
-        </p:txBody>
-      </p:sp>
-      <p:sp>
-        <p:nvSpPr>
-          <p:cNvPr id="12" name="TextBox 11"/>
-          <p:cNvSpPr txBox="1"/>
-          <p:nvPr/>
-        </p:nvSpPr>
-        <p:spPr>
-          <a:xfrm>
-            <a:off x="548640" y="4782312"/>
-            <a:ext cx="5394960" cy="557784"/>
-          </a:xfrm>
-          <a:prstGeom prst="rect">
-            <a:avLst/>
-          </a:prstGeom>
-          <a:noFill/>
-        </p:spPr>
-        <p:txBody>
-          <a:bodyPr wrap="square">
-            <a:spAutoFit/>
-          </a:bodyPr>
-          <a:lstStyle/>
-          <a:p>
-            <a:pPr algn="l"/>
-            <a:r>
-              <a:rPr sz="1300" b="0">
-                <a:solidFill>
-                  <a:srgbClr val="1A1A2E"/>
-                </a:solidFill>
-                <a:latin typeface="Segoe UI"/>
-              </a:rPr>
-              <a:t>•  5. Najbardziej śmiertelne typy + średnia</a:t>
-            </a:r>
-          </a:p>
-        </p:txBody>
-      </p:sp>
-      <p:sp>
-        <p:nvSpPr>
-          <p:cNvPr id="13" name="TextBox 12"/>
-          <p:cNvSpPr txBox="1"/>
-          <p:nvPr/>
-        </p:nvSpPr>
-        <p:spPr>
-          <a:xfrm>
-            <a:off x="548640" y="5166360"/>
-            <a:ext cx="5394960" cy="557784"/>
-          </a:xfrm>
-          <a:prstGeom prst="rect">
-            <a:avLst/>
-          </a:prstGeom>
-          <a:noFill/>
-        </p:spPr>
-        <p:txBody>
-          <a:bodyPr wrap="square">
-            <a:spAutoFit/>
-          </a:bodyPr>
-          <a:lstStyle/>
-          <a:p>
-            <a:pPr algn="l"/>
-            <a:r>
-              <a:rPr sz="1300" b="0">
-                <a:solidFill>
-                  <a:srgbClr val="1A1A2E"/>
-                </a:solidFill>
-                <a:latin typeface="Segoe UI"/>
-              </a:rPr>
-              <a:t>•  6. Protesty pokojowe vs przemoc</a:t>
-            </a:r>
-          </a:p>
-        </p:txBody>
-      </p:sp>
-      <p:sp>
-        <p:nvSpPr>
-          <p:cNvPr id="14" name="TextBox 13"/>
-          <p:cNvSpPr txBox="1"/>
-          <p:nvPr/>
-        </p:nvSpPr>
-        <p:spPr>
-          <a:xfrm>
-            <a:off x="6217920" y="3246120"/>
-            <a:ext cx="5394960" cy="557784"/>
-          </a:xfrm>
-          <a:prstGeom prst="rect">
-            <a:avLst/>
-          </a:prstGeom>
-          <a:noFill/>
-        </p:spPr>
-        <p:txBody>
-          <a:bodyPr wrap="square">
-            <a:spAutoFit/>
-          </a:bodyPr>
-          <a:lstStyle/>
-          <a:p>
-            <a:pPr algn="l"/>
-            <a:r>
-              <a:rPr sz="1300" b="0">
-                <a:solidFill>
-                  <a:srgbClr val="1A1A2E"/>
-                </a:solidFill>
-                <a:latin typeface="Segoe UI"/>
-              </a:rPr>
-              <a:t>•  7. Aktorzy w czasie</a:t>
-            </a:r>
-          </a:p>
-        </p:txBody>
-      </p:sp>
-      <p:sp>
-        <p:nvSpPr>
-          <p:cNvPr id="15" name="TextBox 14"/>
-          <p:cNvSpPr txBox="1"/>
-          <p:nvPr/>
-        </p:nvSpPr>
-        <p:spPr>
-          <a:xfrm>
-            <a:off x="6217920" y="3630168"/>
-            <a:ext cx="5394960" cy="557784"/>
-          </a:xfrm>
-          <a:prstGeom prst="rect">
-            <a:avLst/>
-          </a:prstGeom>
-          <a:noFill/>
-        </p:spPr>
-        <p:txBody>
-          <a:bodyPr wrap="square">
-            <a:spAutoFit/>
-          </a:bodyPr>
-          <a:lstStyle/>
-          <a:p>
-            <a:pPr algn="l"/>
-            <a:r>
-              <a:rPr sz="1300" b="0">
-                <a:solidFill>
-                  <a:srgbClr val="1A1A2E"/>
-                </a:solidFill>
-                <a:latin typeface="Segoe UI"/>
-              </a:rPr>
-              <a:t>•  8. Interakcje: częstość i ofiary</a:t>
-            </a:r>
-          </a:p>
-        </p:txBody>
-      </p:sp>
-      <p:sp>
-        <p:nvSpPr>
-          <p:cNvPr id="16" name="TextBox 15"/>
-          <p:cNvSpPr txBox="1"/>
-          <p:nvPr/>
-        </p:nvSpPr>
-        <p:spPr>
-          <a:xfrm>
-            <a:off x="6217920" y="4014216"/>
-            <a:ext cx="5394960" cy="557784"/>
-          </a:xfrm>
-          <a:prstGeom prst="rect">
-            <a:avLst/>
-          </a:prstGeom>
-          <a:noFill/>
-        </p:spPr>
-        <p:txBody>
-          <a:bodyPr wrap="square">
-            <a:spAutoFit/>
-          </a:bodyPr>
-          <a:lstStyle/>
-          <a:p>
-            <a:pPr algn="l"/>
-            <a:r>
-              <a:rPr sz="1300" b="0">
-                <a:solidFill>
-                  <a:srgbClr val="1A1A2E"/>
-                </a:solidFill>
-                <a:latin typeface="Segoe UI"/>
-              </a:rPr>
-              <a:t>•  9. % celowania w cywilów</a:t>
-            </a:r>
-          </a:p>
-        </p:txBody>
-      </p:sp>
-      <p:sp>
-        <p:nvSpPr>
-          <p:cNvPr id="17" name="TextBox 16"/>
-          <p:cNvSpPr txBox="1"/>
-          <p:nvPr/>
-        </p:nvSpPr>
-        <p:spPr>
-          <a:xfrm>
-            <a:off x="6217920" y="4398264"/>
-            <a:ext cx="5394960" cy="557784"/>
-          </a:xfrm>
-          <a:prstGeom prst="rect">
-            <a:avLst/>
-          </a:prstGeom>
-          <a:noFill/>
-        </p:spPr>
-        <p:txBody>
-          <a:bodyPr wrap="square">
-            <a:spAutoFit/>
-          </a:bodyPr>
-          <a:lstStyle/>
-          <a:p>
-            <a:pPr algn="l"/>
-            <a:r>
-              <a:rPr sz="1300" b="0">
-                <a:solidFill>
-                  <a:srgbClr val="1A1A2E"/>
-                </a:solidFill>
-                <a:latin typeface="Segoe UI"/>
-              </a:rPr>
-              <a:t>•  10. Źródła: lokalne vs międzynarodowe</a:t>
-            </a:r>
-          </a:p>
-        </p:txBody>
-      </p:sp>
-      <p:sp>
-        <p:nvSpPr>
-          <p:cNvPr id="18" name="TextBox 17"/>
-          <p:cNvSpPr txBox="1"/>
-          <p:nvPr/>
-        </p:nvSpPr>
-        <p:spPr>
-          <a:xfrm>
-            <a:off x="6217920" y="4782312"/>
-            <a:ext cx="5394960" cy="557784"/>
-          </a:xfrm>
-          <a:prstGeom prst="rect">
-            <a:avLst/>
-          </a:prstGeom>
-          <a:noFill/>
-        </p:spPr>
-        <p:txBody>
-          <a:bodyPr wrap="square">
-            <a:spAutoFit/>
-          </a:bodyPr>
-          <a:lstStyle/>
-          <a:p>
-            <a:pPr algn="l"/>
-            <a:r>
-              <a:rPr sz="1300" b="0">
-                <a:solidFill>
-                  <a:srgbClr val="1A1A2E"/>
-                </a:solidFill>
-                <a:latin typeface="Segoe UI"/>
-              </a:rPr>
-              <a:t>•  11. Wzrosty rok-do-roku</a:t>
-            </a:r>
-          </a:p>
-        </p:txBody>
-      </p:sp>
-      <p:sp>
-        <p:nvSpPr>
-          <p:cNvPr id="19" name="TextBox 18"/>
-          <p:cNvSpPr txBox="1"/>
-          <p:nvPr/>
-        </p:nvSpPr>
-        <p:spPr>
-          <a:xfrm>
-            <a:off x="6217920" y="5166360"/>
-            <a:ext cx="5394960" cy="557784"/>
-          </a:xfrm>
-          <a:prstGeom prst="rect">
-            <a:avLst/>
-          </a:prstGeom>
-          <a:noFill/>
-        </p:spPr>
-        <p:txBody>
-          <a:bodyPr wrap="square">
-            <a:spAutoFit/>
-          </a:bodyPr>
-          <a:lstStyle/>
-          <a:p>
-            <a:pPr algn="l"/>
-            <a:r>
-              <a:rPr sz="1300" b="0">
-                <a:solidFill>
-                  <a:srgbClr val="1A1A2E"/>
-                </a:solidFill>
-                <a:latin typeface="Segoe UI"/>
-              </a:rPr>
-              <a:t>•  12. Per capita i zmiana rankingu</a:t>
-            </a:r>
-          </a:p>
-        </p:txBody>
-      </p:sp>
-      <p:sp>
-        <p:nvSpPr>
-          <p:cNvPr id="20" name="Rectangle 19"/>
+              <a:t>•  do analiz per capita; wspólny klucz ISO 3166-1 numeric</a:t>
+            </a:r>
+          </a:p>
+        </p:txBody>
+      </p:sp>
+      <p:sp>
+        <p:nvSpPr>
+          <p:cNvPr id="10" name="Rectangle 9"/>
           <p:cNvSpPr/>
           <p:nvPr/>
         </p:nvSpPr>
         <p:spPr>
           <a:xfrm>
-            <a:off x="457200" y="5897880"/>
-            <a:ext cx="11277295" cy="685800"/>
+            <a:off x="7406640" y="1554480"/>
+            <a:ext cx="4297680" cy="3566160"/>
           </a:xfrm>
           <a:prstGeom prst="rect">
             <a:avLst/>
@@ -6642,9 +6604,9 @@
           <a:solidFill>
             <a:srgbClr val="FFFFFF"/>
           </a:solidFill>
-          <a:ln w="15875">
+          <a:ln>
             <a:solidFill>
-              <a:srgbClr val="A50F15"/>
+              <a:srgbClr val="1F6F8B"/>
             </a:solidFill>
           </a:ln>
         </p:spPr>
@@ -6663,18 +6625,127 @@
           </a:fontRef>
         </p:style>
         <p:txBody>
-          <a:bodyPr rtlCol="0" anchor="ctr" wrap="square"/>
+          <a:bodyPr rtlCol="0" anchor="ctr"/>
           <a:lstStyle/>
           <a:p>
             <a:pPr algn="ctr"/>
-            <a:r>
-              <a:rPr sz="1400" b="1">
-                <a:solidFill>
-                  <a:srgbClr val="A50F15"/>
-                </a:solidFill>
-                <a:latin typeface="Segoe UI"/>
-              </a:rPr>
-              <a:t>PYTANIE:  czy zakres i liczba pytań są odpowiednie?</a:t>
+          </a:p>
+        </p:txBody>
+      </p:sp>
+      <p:sp>
+        <p:nvSpPr>
+          <p:cNvPr id="11" name="TextBox 10"/>
+          <p:cNvSpPr txBox="1"/>
+          <p:nvPr/>
+        </p:nvSpPr>
+        <p:spPr>
+          <a:xfrm>
+            <a:off x="7680960" y="1783080"/>
+            <a:ext cx="3749039" cy="457200"/>
+          </a:xfrm>
+          <a:prstGeom prst="rect">
+            <a:avLst/>
+          </a:prstGeom>
+          <a:noFill/>
+        </p:spPr>
+        <p:txBody>
+          <a:bodyPr wrap="square">
+            <a:spAutoFit/>
+          </a:bodyPr>
+          <a:lstStyle/>
+          <a:p>
+            <a:pPr algn="l"/>
+            <a:r>
+              <a:rPr sz="1600" b="1">
+                <a:solidFill>
+                  <a:srgbClr val="1F6F8B"/>
+                </a:solidFill>
+                <a:latin typeface="Segoe UI"/>
+              </a:rPr>
+              <a:t>Skala danych</a:t>
+            </a:r>
+          </a:p>
+        </p:txBody>
+      </p:sp>
+      <p:sp>
+        <p:nvSpPr>
+          <p:cNvPr id="12" name="TextBox 11"/>
+          <p:cNvSpPr txBox="1"/>
+          <p:nvPr/>
+        </p:nvSpPr>
+        <p:spPr>
+          <a:xfrm>
+            <a:off x="7680960" y="2286000"/>
+            <a:ext cx="3749039" cy="2651760"/>
+          </a:xfrm>
+          <a:prstGeom prst="rect">
+            <a:avLst/>
+          </a:prstGeom>
+          <a:noFill/>
+        </p:spPr>
+        <p:txBody>
+          <a:bodyPr wrap="square">
+            <a:spAutoFit/>
+          </a:bodyPr>
+          <a:lstStyle/>
+          <a:p>
+            <a:pPr algn="l"/>
+            <a:r>
+              <a:rPr sz="1600" b="0">
+                <a:solidFill>
+                  <a:srgbClr val="1A1A2E"/>
+                </a:solidFill>
+                <a:latin typeface="Segoe UI"/>
+              </a:rPr>
+              <a:t>2 669 294  zdarzeń</a:t>
+            </a:r>
+          </a:p>
+          <a:p>
+            <a:pPr algn="l"/>
+            <a:r>
+              <a:rPr sz="1600" b="0">
+                <a:solidFill>
+                  <a:srgbClr val="1A1A2E"/>
+                </a:solidFill>
+                <a:latin typeface="Segoe UI"/>
+              </a:rPr>
+              <a:t>2 346 567  ofiar</a:t>
+            </a:r>
+          </a:p>
+          <a:p>
+            <a:pPr algn="l"/>
+            <a:r>
+              <a:rPr sz="1600" b="0">
+                <a:solidFill>
+                  <a:srgbClr val="1A1A2E"/>
+                </a:solidFill>
+                <a:latin typeface="Segoe UI"/>
+              </a:rPr>
+              <a:t>16 494  aktorów</a:t>
+            </a:r>
+          </a:p>
+          <a:p>
+            <a:pPr algn="l"/>
+            <a:r>
+              <a:rPr sz="1600" b="0">
+                <a:solidFill>
+                  <a:srgbClr val="1A1A2E"/>
+                </a:solidFill>
+                <a:latin typeface="Segoe UI"/>
+              </a:rPr>
+              <a:t>134  typy interakcji</a:t>
+            </a:r>
+          </a:p>
+          <a:p>
+            <a:pPr algn="l"/>
+            <a:r>
+              <a:rPr sz="1600" b="0">
+                <a:solidFill>
+                  <a:srgbClr val="1A1A2E"/>
+                </a:solidFill>
+                <a:latin typeface="Segoe UI"/>
+              </a:rPr>
+              <a:t>10 592  dni kalendarza</a:t>
             </a:r>
           </a:p>
         </p:txBody>
@@ -6778,38 +6849,434 @@
                 </a:solidFill>
                 <a:latin typeface="Segoe UI"/>
               </a:rPr>
-              <a:t>Schemat gwiazdy</a:t>
-            </a:r>
-          </a:p>
-        </p:txBody>
-      </p:sp>
-      <p:pic>
-        <p:nvPicPr>
-          <p:cNvPr id="4" name="Picture 3" descr="star_schema.png"/>
-          <p:cNvPicPr>
-            <a:picLocks noChangeAspect="1"/>
-          </p:cNvPicPr>
-          <p:nvPr/>
-        </p:nvPicPr>
-        <p:blipFill>
-          <a:blip r:embed="rId2"/>
-          <a:stretch>
-            <a:fillRect/>
-          </a:stretch>
-        </p:blipFill>
-        <p:spPr>
-          <a:xfrm>
-            <a:off x="2700218" y="1005840"/>
-            <a:ext cx="6791259" cy="4754880"/>
-          </a:xfrm>
-          <a:prstGeom prst="rect">
-            <a:avLst/>
-          </a:prstGeom>
-        </p:spPr>
-      </p:pic>
-      <p:sp>
-        <p:nvSpPr>
-          <p:cNvPr id="5" name="Rectangle 4"/>
+              <a:t>12 pytań biznesowych — pełna treść</a:t>
+            </a:r>
+          </a:p>
+        </p:txBody>
+      </p:sp>
+      <p:sp>
+        <p:nvSpPr>
+          <p:cNvPr id="4" name="TextBox 3"/>
+          <p:cNvSpPr txBox="1"/>
+          <p:nvPr/>
+        </p:nvSpPr>
+        <p:spPr>
+          <a:xfrm>
+            <a:off x="548640" y="1234440"/>
+            <a:ext cx="11155680" cy="384048"/>
+          </a:xfrm>
+          <a:prstGeom prst="rect">
+            <a:avLst/>
+          </a:prstGeom>
+          <a:noFill/>
+        </p:spPr>
+        <p:txBody>
+          <a:bodyPr wrap="square">
+            <a:spAutoFit/>
+          </a:bodyPr>
+          <a:lstStyle/>
+          <a:p>
+            <a:pPr algn="l"/>
+            <a:r>
+              <a:rPr sz="1400" b="0">
+                <a:solidFill>
+                  <a:srgbClr val="1A1A2E"/>
+                </a:solidFill>
+                <a:latin typeface="Segoe UI"/>
+              </a:rPr>
+              <a:t>1. Które kraje i regiony mają najwięcej zdarzeń i jakie typy zdarzeń tam dominują?</a:t>
+            </a:r>
+          </a:p>
+        </p:txBody>
+      </p:sp>
+      <p:sp>
+        <p:nvSpPr>
+          <p:cNvPr id="5" name="TextBox 4"/>
+          <p:cNvSpPr txBox="1"/>
+          <p:nvPr/>
+        </p:nvSpPr>
+        <p:spPr>
+          <a:xfrm>
+            <a:off x="548640" y="1609344"/>
+            <a:ext cx="11155680" cy="384048"/>
+          </a:xfrm>
+          <a:prstGeom prst="rect">
+            <a:avLst/>
+          </a:prstGeom>
+          <a:noFill/>
+        </p:spPr>
+        <p:txBody>
+          <a:bodyPr wrap="square">
+            <a:spAutoFit/>
+          </a:bodyPr>
+          <a:lstStyle/>
+          <a:p>
+            <a:pPr algn="l"/>
+            <a:r>
+              <a:rPr sz="1400" b="0">
+                <a:solidFill>
+                  <a:srgbClr val="1A1A2E"/>
+                </a:solidFill>
+                <a:latin typeface="Segoe UI"/>
+              </a:rPr>
+              <a:t>2. Gdzie na mapie jest najwięcej ofiar i które miejsca mają najwyższą liczbę ofiar na zdarzenie?</a:t>
+            </a:r>
+          </a:p>
+        </p:txBody>
+      </p:sp>
+      <p:sp>
+        <p:nvSpPr>
+          <p:cNvPr id="6" name="TextBox 5"/>
+          <p:cNvSpPr txBox="1"/>
+          <p:nvPr/>
+        </p:nvSpPr>
+        <p:spPr>
+          <a:xfrm>
+            <a:off x="548640" y="1984248"/>
+            <a:ext cx="11155680" cy="384048"/>
+          </a:xfrm>
+          <a:prstGeom prst="rect">
+            <a:avLst/>
+          </a:prstGeom>
+          <a:noFill/>
+        </p:spPr>
+        <p:txBody>
+          <a:bodyPr wrap="square">
+            <a:spAutoFit/>
+          </a:bodyPr>
+          <a:lstStyle/>
+          <a:p>
+            <a:pPr algn="l"/>
+            <a:r>
+              <a:rPr sz="1400" b="0">
+                <a:solidFill>
+                  <a:srgbClr val="1A1A2E"/>
+                </a:solidFill>
+                <a:latin typeface="Segoe UI"/>
+              </a:rPr>
+              <a:t>3. Jak liczba zdarzeń zmieniała się w czasie (rok, miesiąc) dla każdego typu niepokoju?</a:t>
+            </a:r>
+          </a:p>
+        </p:txBody>
+      </p:sp>
+      <p:sp>
+        <p:nvSpPr>
+          <p:cNvPr id="7" name="TextBox 6"/>
+          <p:cNvSpPr txBox="1"/>
+          <p:nvPr/>
+        </p:nvSpPr>
+        <p:spPr>
+          <a:xfrm>
+            <a:off x="548640" y="2359152"/>
+            <a:ext cx="11155680" cy="384048"/>
+          </a:xfrm>
+          <a:prstGeom prst="rect">
+            <a:avLst/>
+          </a:prstGeom>
+          <a:noFill/>
+        </p:spPr>
+        <p:txBody>
+          <a:bodyPr wrap="square">
+            <a:spAutoFit/>
+          </a:bodyPr>
+          <a:lstStyle/>
+          <a:p>
+            <a:pPr algn="l"/>
+            <a:r>
+              <a:rPr sz="1400" b="0">
+                <a:solidFill>
+                  <a:srgbClr val="1A1A2E"/>
+                </a:solidFill>
+                <a:latin typeface="Segoe UI"/>
+              </a:rPr>
+              <a:t>4. Czy występują wzorce sezonowe? Które miesiące mają najwięcej zdarzeń i ofiar?</a:t>
+            </a:r>
+          </a:p>
+        </p:txBody>
+      </p:sp>
+      <p:sp>
+        <p:nvSpPr>
+          <p:cNvPr id="8" name="TextBox 7"/>
+          <p:cNvSpPr txBox="1"/>
+          <p:nvPr/>
+        </p:nvSpPr>
+        <p:spPr>
+          <a:xfrm>
+            <a:off x="548640" y="2734056"/>
+            <a:ext cx="11155680" cy="384048"/>
+          </a:xfrm>
+          <a:prstGeom prst="rect">
+            <a:avLst/>
+          </a:prstGeom>
+          <a:noFill/>
+        </p:spPr>
+        <p:txBody>
+          <a:bodyPr wrap="square">
+            <a:spAutoFit/>
+          </a:bodyPr>
+          <a:lstStyle/>
+          <a:p>
+            <a:pPr algn="l"/>
+            <a:r>
+              <a:rPr sz="1400" b="0">
+                <a:solidFill>
+                  <a:srgbClr val="1A1A2E"/>
+                </a:solidFill>
+                <a:latin typeface="Segoe UI"/>
+              </a:rPr>
+              <a:t>5. Które typy i podtypy zdarzeń powodują najwięcej ofiar i jaka jest średnia ofiar na zdarzenie?</a:t>
+            </a:r>
+          </a:p>
+        </p:txBody>
+      </p:sp>
+      <p:sp>
+        <p:nvSpPr>
+          <p:cNvPr id="9" name="TextBox 8"/>
+          <p:cNvSpPr txBox="1"/>
+          <p:nvPr/>
+        </p:nvSpPr>
+        <p:spPr>
+          <a:xfrm>
+            <a:off x="548640" y="3108960"/>
+            <a:ext cx="11155680" cy="384048"/>
+          </a:xfrm>
+          <a:prstGeom prst="rect">
+            <a:avLst/>
+          </a:prstGeom>
+          <a:noFill/>
+        </p:spPr>
+        <p:txBody>
+          <a:bodyPr wrap="square">
+            <a:spAutoFit/>
+          </a:bodyPr>
+          <a:lstStyle/>
+          <a:p>
+            <a:pPr algn="l"/>
+            <a:r>
+              <a:rPr sz="1400" b="0">
+                <a:solidFill>
+                  <a:srgbClr val="1A1A2E"/>
+                </a:solidFill>
+                <a:latin typeface="Segoe UI"/>
+              </a:rPr>
+              <a:t>6. Jaki jest stosunek protestów pokojowych do gwałtownych demonstracji i jak zmienia się w czasie?</a:t>
+            </a:r>
+          </a:p>
+        </p:txBody>
+      </p:sp>
+      <p:sp>
+        <p:nvSpPr>
+          <p:cNvPr id="10" name="TextBox 9"/>
+          <p:cNvSpPr txBox="1"/>
+          <p:nvPr/>
+        </p:nvSpPr>
+        <p:spPr>
+          <a:xfrm>
+            <a:off x="548640" y="3483864"/>
+            <a:ext cx="11155680" cy="384048"/>
+          </a:xfrm>
+          <a:prstGeom prst="rect">
+            <a:avLst/>
+          </a:prstGeom>
+          <a:noFill/>
+        </p:spPr>
+        <p:txBody>
+          <a:bodyPr wrap="square">
+            <a:spAutoFit/>
+          </a:bodyPr>
+          <a:lstStyle/>
+          <a:p>
+            <a:pPr algn="l"/>
+            <a:r>
+              <a:rPr sz="1400" b="0">
+                <a:solidFill>
+                  <a:srgbClr val="1A1A2E"/>
+                </a:solidFill>
+                <a:latin typeface="Segoe UI"/>
+              </a:rPr>
+              <a:t>7. Którzy aktorzy generują najwięcej zdarzeń i ofiar oraz jak zmieniała się ich aktywność w czasie?</a:t>
+            </a:r>
+          </a:p>
+        </p:txBody>
+      </p:sp>
+      <p:sp>
+        <p:nvSpPr>
+          <p:cNvPr id="11" name="TextBox 10"/>
+          <p:cNvSpPr txBox="1"/>
+          <p:nvPr/>
+        </p:nvSpPr>
+        <p:spPr>
+          <a:xfrm>
+            <a:off x="548640" y="3858768"/>
+            <a:ext cx="11155680" cy="384048"/>
+          </a:xfrm>
+          <a:prstGeom prst="rect">
+            <a:avLst/>
+          </a:prstGeom>
+          <a:noFill/>
+        </p:spPr>
+        <p:txBody>
+          <a:bodyPr wrap="square">
+            <a:spAutoFit/>
+          </a:bodyPr>
+          <a:lstStyle/>
+          <a:p>
+            <a:pPr algn="l"/>
+            <a:r>
+              <a:rPr sz="1400" b="0">
+                <a:solidFill>
+                  <a:srgbClr val="1A1A2E"/>
+                </a:solidFill>
+                <a:latin typeface="Segoe UI"/>
+              </a:rPr>
+              <a:t>8. Które typy interakcji (np. siły państwowe vs rebelianci) są najczęstsze i najkrwawsze?</a:t>
+            </a:r>
+          </a:p>
+        </p:txBody>
+      </p:sp>
+      <p:sp>
+        <p:nvSpPr>
+          <p:cNvPr id="12" name="TextBox 11"/>
+          <p:cNvSpPr txBox="1"/>
+          <p:nvPr/>
+        </p:nvSpPr>
+        <p:spPr>
+          <a:xfrm>
+            <a:off x="548640" y="4233672"/>
+            <a:ext cx="11155680" cy="384048"/>
+          </a:xfrm>
+          <a:prstGeom prst="rect">
+            <a:avLst/>
+          </a:prstGeom>
+          <a:noFill/>
+        </p:spPr>
+        <p:txBody>
+          <a:bodyPr wrap="square">
+            <a:spAutoFit/>
+          </a:bodyPr>
+          <a:lstStyle/>
+          <a:p>
+            <a:pPr algn="l"/>
+            <a:r>
+              <a:rPr sz="1400" b="0">
+                <a:solidFill>
+                  <a:srgbClr val="1A1A2E"/>
+                </a:solidFill>
+                <a:latin typeface="Segoe UI"/>
+              </a:rPr>
+              <a:t>9. Jaki procent zdarzeń obejmuje celowanie w cywilów i jak zmienia się to wg regionu i aktora?</a:t>
+            </a:r>
+          </a:p>
+        </p:txBody>
+      </p:sp>
+      <p:sp>
+        <p:nvSpPr>
+          <p:cNvPr id="13" name="TextBox 12"/>
+          <p:cNvSpPr txBox="1"/>
+          <p:nvPr/>
+        </p:nvSpPr>
+        <p:spPr>
+          <a:xfrm>
+            <a:off x="548640" y="4608576"/>
+            <a:ext cx="11155680" cy="384048"/>
+          </a:xfrm>
+          <a:prstGeom prst="rect">
+            <a:avLst/>
+          </a:prstGeom>
+          <a:noFill/>
+        </p:spPr>
+        <p:txBody>
+          <a:bodyPr wrap="square">
+            <a:spAutoFit/>
+          </a:bodyPr>
+          <a:lstStyle/>
+          <a:p>
+            <a:pPr algn="l"/>
+            <a:r>
+              <a:rPr sz="1400" b="0">
+                <a:solidFill>
+                  <a:srgbClr val="1A1A2E"/>
+                </a:solidFill>
+                <a:latin typeface="Segoe UI"/>
+              </a:rPr>
+              <a:t>10. Skąd pochodzą źródła (lokalne vs międzynarodowe) w regionach; czy więcej źródeł to więcej zdarzeń?</a:t>
+            </a:r>
+          </a:p>
+        </p:txBody>
+      </p:sp>
+      <p:sp>
+        <p:nvSpPr>
+          <p:cNvPr id="14" name="TextBox 13"/>
+          <p:cNvSpPr txBox="1"/>
+          <p:nvPr/>
+        </p:nvSpPr>
+        <p:spPr>
+          <a:xfrm>
+            <a:off x="548640" y="4983480"/>
+            <a:ext cx="11155680" cy="384048"/>
+          </a:xfrm>
+          <a:prstGeom prst="rect">
+            <a:avLst/>
+          </a:prstGeom>
+          <a:noFill/>
+        </p:spPr>
+        <p:txBody>
+          <a:bodyPr wrap="square">
+            <a:spAutoFit/>
+          </a:bodyPr>
+          <a:lstStyle/>
+          <a:p>
+            <a:pPr algn="l"/>
+            <a:r>
+              <a:rPr sz="1400" b="0">
+                <a:solidFill>
+                  <a:srgbClr val="1A1A2E"/>
+                </a:solidFill>
+                <a:latin typeface="Segoe UI"/>
+              </a:rPr>
+              <a:t>11. Które kraje miały największy wzrost rok do roku i czy więcej zdarzeń zawsze oznacza więcej ofiar?</a:t>
+            </a:r>
+          </a:p>
+        </p:txBody>
+      </p:sp>
+      <p:sp>
+        <p:nvSpPr>
+          <p:cNvPr id="15" name="TextBox 14"/>
+          <p:cNvSpPr txBox="1"/>
+          <p:nvPr/>
+        </p:nvSpPr>
+        <p:spPr>
+          <a:xfrm>
+            <a:off x="548640" y="5358384"/>
+            <a:ext cx="11155680" cy="384048"/>
+          </a:xfrm>
+          <a:prstGeom prst="rect">
+            <a:avLst/>
+          </a:prstGeom>
+          <a:noFill/>
+        </p:spPr>
+        <p:txBody>
+          <a:bodyPr wrap="square">
+            <a:spAutoFit/>
+          </a:bodyPr>
+          <a:lstStyle/>
+          <a:p>
+            <a:pPr algn="l"/>
+            <a:r>
+              <a:rPr sz="1400" b="0">
+                <a:solidFill>
+                  <a:srgbClr val="1A1A2E"/>
+                </a:solidFill>
+                <a:latin typeface="Segoe UI"/>
+              </a:rPr>
+              <a:t>12. Które kraje mają najwięcej zdarzeń i ofiar na 100 tys. mieszkańców i jak zmienia to ranking?</a:t>
+            </a:r>
+          </a:p>
+        </p:txBody>
+      </p:sp>
+      <p:sp>
+        <p:nvSpPr>
+          <p:cNvPr id="16" name="Rectangle 15"/>
           <p:cNvSpPr/>
           <p:nvPr/>
         </p:nvSpPr>
@@ -6856,7 +7323,7 @@
                 </a:solidFill>
                 <a:latin typeface="Segoe UI"/>
               </a:rPr>
-              <a:t>PYTANIE:  prosimy o weryfikację schematu</a:t>
+              <a:t>PYTANIE:  czy zakres i liczba pytań są odpowiednie?</a:t>
             </a:r>
           </a:p>
         </p:txBody>
@@ -6960,224 +7427,38 @@
                 </a:solidFill>
                 <a:latin typeface="Segoe UI"/>
               </a:rPr>
-              <a:t>Schemat gwiazdy — decyzje projektowe</a:t>
-            </a:r>
-          </a:p>
-        </p:txBody>
-      </p:sp>
-      <p:sp>
-        <p:nvSpPr>
-          <p:cNvPr id="4" name="TextBox 3"/>
-          <p:cNvSpPr txBox="1"/>
-          <p:nvPr/>
-        </p:nvSpPr>
-        <p:spPr>
-          <a:xfrm>
-            <a:off x="548640" y="1325880"/>
-            <a:ext cx="11155680" cy="630936"/>
-          </a:xfrm>
-          <a:prstGeom prst="rect">
-            <a:avLst/>
-          </a:prstGeom>
-          <a:noFill/>
-        </p:spPr>
-        <p:txBody>
-          <a:bodyPr wrap="square">
-            <a:spAutoFit/>
-          </a:bodyPr>
-          <a:lstStyle/>
-          <a:p>
-            <a:pPr algn="l"/>
-            <a:r>
-              <a:rPr sz="1500" b="1">
-                <a:solidFill>
-                  <a:srgbClr val="1F6F8B"/>
-                </a:solidFill>
-                <a:latin typeface="Segoe UI"/>
-              </a:rPr>
-              <a:t>•  Hurtownia jednotematyczna → czysta gwiazda (bez bus matrix)</a:t>
-            </a:r>
-          </a:p>
-        </p:txBody>
-      </p:sp>
-      <p:sp>
-        <p:nvSpPr>
-          <p:cNvPr id="5" name="TextBox 4"/>
-          <p:cNvSpPr txBox="1"/>
-          <p:nvPr/>
-        </p:nvSpPr>
-        <p:spPr>
-          <a:xfrm>
-            <a:off x="548640" y="1783080"/>
-            <a:ext cx="11155680" cy="630936"/>
-          </a:xfrm>
-          <a:prstGeom prst="rect">
-            <a:avLst/>
-          </a:prstGeom>
-          <a:noFill/>
-        </p:spPr>
-        <p:txBody>
-          <a:bodyPr wrap="square">
-            <a:spAutoFit/>
-          </a:bodyPr>
-          <a:lstStyle/>
-          <a:p>
-            <a:pPr algn="l"/>
-            <a:r>
-              <a:rPr sz="1500" b="0">
-                <a:solidFill>
-                  <a:srgbClr val="1A1A2E"/>
-                </a:solidFill>
-                <a:latin typeface="Segoe UI"/>
-              </a:rPr>
-              <a:t>•  Fakt: tylko klucze wymiarów + miary addytywne; wyjątek: event_id_cnty jako wymiar zdegenerowany</a:t>
-            </a:r>
-          </a:p>
-        </p:txBody>
-      </p:sp>
-      <p:sp>
-        <p:nvSpPr>
-          <p:cNvPr id="6" name="TextBox 5"/>
-          <p:cNvSpPr txBox="1"/>
-          <p:nvPr/>
-        </p:nvSpPr>
-        <p:spPr>
-          <a:xfrm>
-            <a:off x="548640" y="2240280"/>
-            <a:ext cx="11155680" cy="630936"/>
-          </a:xfrm>
-          <a:prstGeom prst="rect">
-            <a:avLst/>
-          </a:prstGeom>
-          <a:noFill/>
-        </p:spPr>
-        <p:txBody>
-          <a:bodyPr wrap="square">
-            <a:spAutoFit/>
-          </a:bodyPr>
-          <a:lstStyle/>
-          <a:p>
-            <a:pPr algn="l"/>
-            <a:r>
-              <a:rPr sz="1500" b="0">
-                <a:solidFill>
-                  <a:srgbClr val="1A1A2E"/>
-                </a:solidFill>
-                <a:latin typeface="Segoe UI"/>
-              </a:rPr>
-              <a:t>•  Klucze sztuczne (ROW_NUMBER; data = yyyymmdd); interaction jako pełny wymiar (134 wartości)</a:t>
-            </a:r>
-          </a:p>
-        </p:txBody>
-      </p:sp>
-      <p:sp>
-        <p:nvSpPr>
-          <p:cNvPr id="7" name="TextBox 6"/>
-          <p:cNvSpPr txBox="1"/>
-          <p:nvPr/>
-        </p:nvSpPr>
-        <p:spPr>
-          <a:xfrm>
-            <a:off x="548640" y="2697480"/>
-            <a:ext cx="11155680" cy="630936"/>
-          </a:xfrm>
-          <a:prstGeom prst="rect">
-            <a:avLst/>
-          </a:prstGeom>
-          <a:noFill/>
-        </p:spPr>
-        <p:txBody>
-          <a:bodyPr wrap="square">
-            <a:spAutoFit/>
-          </a:bodyPr>
-          <a:lstStyle/>
-          <a:p>
-            <a:pPr algn="l"/>
-            <a:r>
-              <a:rPr sz="1500" b="0">
-                <a:solidFill>
-                  <a:srgbClr val="1A1A2E"/>
-                </a:solidFill>
-                <a:latin typeface="Segoe UI"/>
-              </a:rPr>
-              <a:t>•  Pseudo-nulle → wiersz „Unknown” (id = -1) w każdym wymiarze</a:t>
-            </a:r>
-          </a:p>
-        </p:txBody>
-      </p:sp>
-      <p:sp>
-        <p:nvSpPr>
-          <p:cNvPr id="8" name="TextBox 7"/>
-          <p:cNvSpPr txBox="1"/>
-          <p:nvPr/>
-        </p:nvSpPr>
-        <p:spPr>
-          <a:xfrm>
-            <a:off x="548640" y="3154680"/>
-            <a:ext cx="11155680" cy="630936"/>
-          </a:xfrm>
-          <a:prstGeom prst="rect">
-            <a:avLst/>
-          </a:prstGeom>
-          <a:noFill/>
-        </p:spPr>
-        <p:txBody>
-          <a:bodyPr wrap="square">
-            <a:spAutoFit/>
-          </a:bodyPr>
-          <a:lstStyle/>
-          <a:p>
-            <a:pPr algn="l"/>
-            <a:r>
-              <a:rPr sz="1500" b="0">
-                <a:solidFill>
-                  <a:srgbClr val="1A1A2E"/>
-                </a:solidFill>
-                <a:latin typeface="Segoe UI"/>
-              </a:rPr>
-              <a:t>•  dim_date: ciągły kalendarz 1997–2025 (funkcje czasowe Power BI)</a:t>
-            </a:r>
-          </a:p>
-        </p:txBody>
-      </p:sp>
-      <p:sp>
-        <p:nvSpPr>
-          <p:cNvPr id="9" name="TextBox 8"/>
-          <p:cNvSpPr txBox="1"/>
-          <p:nvPr/>
-        </p:nvSpPr>
-        <p:spPr>
-          <a:xfrm>
-            <a:off x="548640" y="3611880"/>
-            <a:ext cx="11155680" cy="630936"/>
-          </a:xfrm>
-          <a:prstGeom prst="rect">
-            <a:avLst/>
-          </a:prstGeom>
-          <a:noFill/>
-        </p:spPr>
-        <p:txBody>
-          <a:bodyPr wrap="square">
-            <a:spAutoFit/>
-          </a:bodyPr>
-          <a:lstStyle/>
-          <a:p>
-            <a:pPr algn="l"/>
-            <a:r>
-              <a:rPr sz="1500" b="0">
-                <a:solidFill>
-                  <a:srgbClr val="1A1A2E"/>
-                </a:solidFill>
-                <a:latin typeface="Segoe UI"/>
-              </a:rPr>
-              <a:t>•  Populacja: klucz złożony (iso, rok) spłaszczony do iso_year; relacja dwukierunkowa — filtr kraju musi docierać do populacji</a:t>
-            </a:r>
-          </a:p>
-        </p:txBody>
-      </p:sp>
-      <p:sp>
-        <p:nvSpPr>
-          <p:cNvPr id="10" name="Rectangle 9"/>
+              <a:t>Schemat gwiazdy</a:t>
+            </a:r>
+          </a:p>
+        </p:txBody>
+      </p:sp>
+      <p:pic>
+        <p:nvPicPr>
+          <p:cNvPr id="4" name="Picture 3" descr="star_schema.png"/>
+          <p:cNvPicPr>
+            <a:picLocks noChangeAspect="1"/>
+          </p:cNvPicPr>
+          <p:nvPr/>
+        </p:nvPicPr>
+        <p:blipFill>
+          <a:blip r:embed="rId2"/>
+          <a:stretch>
+            <a:fillRect/>
+          </a:stretch>
+        </p:blipFill>
+        <p:spPr>
+          <a:xfrm>
+            <a:off x="2700218" y="1005840"/>
+            <a:ext cx="6791259" cy="4754880"/>
+          </a:xfrm>
+          <a:prstGeom prst="rect">
+            <a:avLst/>
+          </a:prstGeom>
+        </p:spPr>
+      </p:pic>
+      <p:sp>
+        <p:nvSpPr>
+          <p:cNvPr id="5" name="Rectangle 4"/>
           <p:cNvSpPr/>
           <p:nvPr/>
         </p:nvSpPr>
@@ -7224,7 +7505,7 @@
                 </a:solidFill>
                 <a:latin typeface="Segoe UI"/>
               </a:rPr>
-              <a:t>PYTANIE:  czy akceptuje Pani: wymiar zdegenerowany, klucz iso_year z relacją dwukierunkową, współrzędne geo poza gwiazdą?</a:t>
+              <a:t>PYTANIE:  prosimy o weryfikację schematu</a:t>
             </a:r>
           </a:p>
         </p:txBody>
@@ -7328,38 +7609,224 @@
                 </a:solidFill>
                 <a:latin typeface="Segoe UI"/>
               </a:rPr>
-              <a:t>Procesy ETL — architektura</a:t>
-            </a:r>
-          </a:p>
-        </p:txBody>
-      </p:sp>
-      <p:pic>
-        <p:nvPicPr>
-          <p:cNvPr id="4" name="Picture 3" descr="architecture.png"/>
-          <p:cNvPicPr>
-            <a:picLocks noChangeAspect="1"/>
-          </p:cNvPicPr>
-          <p:nvPr/>
-        </p:nvPicPr>
-        <p:blipFill>
-          <a:blip r:embed="rId2"/>
-          <a:stretch>
-            <a:fillRect/>
-          </a:stretch>
-        </p:blipFill>
-        <p:spPr>
-          <a:xfrm>
-            <a:off x="365760" y="2168415"/>
-            <a:ext cx="11460175" cy="2429730"/>
-          </a:xfrm>
-          <a:prstGeom prst="rect">
-            <a:avLst/>
-          </a:prstGeom>
-        </p:spPr>
-      </p:pic>
-      <p:sp>
-        <p:nvSpPr>
-          <p:cNvPr id="5" name="Rectangle 4"/>
+              <a:t>Schemat gwiazdy — decyzje projektowe</a:t>
+            </a:r>
+          </a:p>
+        </p:txBody>
+      </p:sp>
+      <p:sp>
+        <p:nvSpPr>
+          <p:cNvPr id="4" name="TextBox 3"/>
+          <p:cNvSpPr txBox="1"/>
+          <p:nvPr/>
+        </p:nvSpPr>
+        <p:spPr>
+          <a:xfrm>
+            <a:off x="548640" y="1325880"/>
+            <a:ext cx="11155680" cy="630936"/>
+          </a:xfrm>
+          <a:prstGeom prst="rect">
+            <a:avLst/>
+          </a:prstGeom>
+          <a:noFill/>
+        </p:spPr>
+        <p:txBody>
+          <a:bodyPr wrap="square">
+            <a:spAutoFit/>
+          </a:bodyPr>
+          <a:lstStyle/>
+          <a:p>
+            <a:pPr algn="l"/>
+            <a:r>
+              <a:rPr sz="1500" b="1">
+                <a:solidFill>
+                  <a:srgbClr val="1F6F8B"/>
+                </a:solidFill>
+                <a:latin typeface="Segoe UI"/>
+              </a:rPr>
+              <a:t>•  Hurtownia jednotematyczna → czysta gwiazda (bez bus matrix)</a:t>
+            </a:r>
+          </a:p>
+        </p:txBody>
+      </p:sp>
+      <p:sp>
+        <p:nvSpPr>
+          <p:cNvPr id="5" name="TextBox 4"/>
+          <p:cNvSpPr txBox="1"/>
+          <p:nvPr/>
+        </p:nvSpPr>
+        <p:spPr>
+          <a:xfrm>
+            <a:off x="548640" y="1783080"/>
+            <a:ext cx="11155680" cy="630936"/>
+          </a:xfrm>
+          <a:prstGeom prst="rect">
+            <a:avLst/>
+          </a:prstGeom>
+          <a:noFill/>
+        </p:spPr>
+        <p:txBody>
+          <a:bodyPr wrap="square">
+            <a:spAutoFit/>
+          </a:bodyPr>
+          <a:lstStyle/>
+          <a:p>
+            <a:pPr algn="l"/>
+            <a:r>
+              <a:rPr sz="1500" b="0">
+                <a:solidFill>
+                  <a:srgbClr val="1A1A2E"/>
+                </a:solidFill>
+                <a:latin typeface="Segoe UI"/>
+              </a:rPr>
+              <a:t>•  Fakt: tylko klucze wymiarów + miary addytywne; wyjątek: event_id_cnty jako wymiar zdegenerowany</a:t>
+            </a:r>
+          </a:p>
+        </p:txBody>
+      </p:sp>
+      <p:sp>
+        <p:nvSpPr>
+          <p:cNvPr id="6" name="TextBox 5"/>
+          <p:cNvSpPr txBox="1"/>
+          <p:nvPr/>
+        </p:nvSpPr>
+        <p:spPr>
+          <a:xfrm>
+            <a:off x="548640" y="2240280"/>
+            <a:ext cx="11155680" cy="630936"/>
+          </a:xfrm>
+          <a:prstGeom prst="rect">
+            <a:avLst/>
+          </a:prstGeom>
+          <a:noFill/>
+        </p:spPr>
+        <p:txBody>
+          <a:bodyPr wrap="square">
+            <a:spAutoFit/>
+          </a:bodyPr>
+          <a:lstStyle/>
+          <a:p>
+            <a:pPr algn="l"/>
+            <a:r>
+              <a:rPr sz="1500" b="0">
+                <a:solidFill>
+                  <a:srgbClr val="1A1A2E"/>
+                </a:solidFill>
+                <a:latin typeface="Segoe UI"/>
+              </a:rPr>
+              <a:t>•  Klucze sztuczne (ROW_NUMBER; data = yyyymmdd); interaction jako pełny wymiar (134 wartości)</a:t>
+            </a:r>
+          </a:p>
+        </p:txBody>
+      </p:sp>
+      <p:sp>
+        <p:nvSpPr>
+          <p:cNvPr id="7" name="TextBox 6"/>
+          <p:cNvSpPr txBox="1"/>
+          <p:nvPr/>
+        </p:nvSpPr>
+        <p:spPr>
+          <a:xfrm>
+            <a:off x="548640" y="2697480"/>
+            <a:ext cx="11155680" cy="630936"/>
+          </a:xfrm>
+          <a:prstGeom prst="rect">
+            <a:avLst/>
+          </a:prstGeom>
+          <a:noFill/>
+        </p:spPr>
+        <p:txBody>
+          <a:bodyPr wrap="square">
+            <a:spAutoFit/>
+          </a:bodyPr>
+          <a:lstStyle/>
+          <a:p>
+            <a:pPr algn="l"/>
+            <a:r>
+              <a:rPr sz="1500" b="0">
+                <a:solidFill>
+                  <a:srgbClr val="1A1A2E"/>
+                </a:solidFill>
+                <a:latin typeface="Segoe UI"/>
+              </a:rPr>
+              <a:t>•  Pseudo-nulle → wiersz „Unknown” (id = -1) w każdym wymiarze</a:t>
+            </a:r>
+          </a:p>
+        </p:txBody>
+      </p:sp>
+      <p:sp>
+        <p:nvSpPr>
+          <p:cNvPr id="8" name="TextBox 7"/>
+          <p:cNvSpPr txBox="1"/>
+          <p:nvPr/>
+        </p:nvSpPr>
+        <p:spPr>
+          <a:xfrm>
+            <a:off x="548640" y="3154680"/>
+            <a:ext cx="11155680" cy="630936"/>
+          </a:xfrm>
+          <a:prstGeom prst="rect">
+            <a:avLst/>
+          </a:prstGeom>
+          <a:noFill/>
+        </p:spPr>
+        <p:txBody>
+          <a:bodyPr wrap="square">
+            <a:spAutoFit/>
+          </a:bodyPr>
+          <a:lstStyle/>
+          <a:p>
+            <a:pPr algn="l"/>
+            <a:r>
+              <a:rPr sz="1500" b="0">
+                <a:solidFill>
+                  <a:srgbClr val="1A1A2E"/>
+                </a:solidFill>
+                <a:latin typeface="Segoe UI"/>
+              </a:rPr>
+              <a:t>•  dim_date: ciągły kalendarz 1997–2025 (funkcje czasowe Power BI)</a:t>
+            </a:r>
+          </a:p>
+        </p:txBody>
+      </p:sp>
+      <p:sp>
+        <p:nvSpPr>
+          <p:cNvPr id="9" name="TextBox 8"/>
+          <p:cNvSpPr txBox="1"/>
+          <p:nvPr/>
+        </p:nvSpPr>
+        <p:spPr>
+          <a:xfrm>
+            <a:off x="548640" y="3611880"/>
+            <a:ext cx="11155680" cy="630936"/>
+          </a:xfrm>
+          <a:prstGeom prst="rect">
+            <a:avLst/>
+          </a:prstGeom>
+          <a:noFill/>
+        </p:spPr>
+        <p:txBody>
+          <a:bodyPr wrap="square">
+            <a:spAutoFit/>
+          </a:bodyPr>
+          <a:lstStyle/>
+          <a:p>
+            <a:pPr algn="l"/>
+            <a:r>
+              <a:rPr sz="1500" b="0">
+                <a:solidFill>
+                  <a:srgbClr val="1A1A2E"/>
+                </a:solidFill>
+                <a:latin typeface="Segoe UI"/>
+              </a:rPr>
+              <a:t>•  Populacja: klucz złożony (iso, rok) spłaszczony do iso_year; relacja dwukierunkowa — filtr kraju musi docierać do populacji</a:t>
+            </a:r>
+          </a:p>
+        </p:txBody>
+      </p:sp>
+      <p:sp>
+        <p:nvSpPr>
+          <p:cNvPr id="10" name="Rectangle 9"/>
           <p:cNvSpPr/>
           <p:nvPr/>
         </p:nvSpPr>
@@ -7406,7 +7873,7 @@
                 </a:solidFill>
                 <a:latin typeface="Segoe UI"/>
               </a:rPr>
-              <a:t>PYTANIE:  czy stack AWS + Airflow + Power BI jest właściwym zamiennikiem SSIS/SSAS/SSRS?</a:t>
+              <a:t>PYTANIE:  czy akceptuje Pani: wymiar zdegenerowany, klucz iso_year z relacją dwukierunkową, współrzędne geo poza gwiazdą?</a:t>
             </a:r>
           </a:p>
         </p:txBody>
@@ -7510,469 +7977,38 @@
                 </a:solidFill>
                 <a:latin typeface="Segoe UI"/>
               </a:rPr>
-              <a:t>Tabela mapowań (skrót)</a:t>
-            </a:r>
-          </a:p>
-        </p:txBody>
-      </p:sp>
-      <p:sp>
-        <p:nvSpPr>
-          <p:cNvPr id="4" name="TextBox 3"/>
-          <p:cNvSpPr txBox="1"/>
-          <p:nvPr/>
-        </p:nvSpPr>
-        <p:spPr>
-          <a:xfrm>
-            <a:off x="457200" y="841248"/>
-            <a:ext cx="11277295" cy="365760"/>
-          </a:xfrm>
-          <a:prstGeom prst="rect">
-            <a:avLst/>
-          </a:prstGeom>
-          <a:noFill/>
-        </p:spPr>
-        <p:txBody>
-          <a:bodyPr wrap="square">
-            <a:spAutoFit/>
-          </a:bodyPr>
-          <a:lstStyle/>
-          <a:p>
-            <a:pPr algn="l"/>
-            <a:r>
-              <a:rPr sz="1300" b="0">
-                <a:solidFill>
-                  <a:srgbClr val="6B6B7B"/>
-                </a:solidFill>
-                <a:latin typeface="Segoe UI"/>
-              </a:rPr>
-              <a:t>pełna wersja: docs/etl_mapowania.md — każda kolumna: źródło → transformacja → cel</a:t>
-            </a:r>
-          </a:p>
-        </p:txBody>
-      </p:sp>
-      <p:sp>
-        <p:nvSpPr>
-          <p:cNvPr id="5" name="TextBox 4"/>
-          <p:cNvSpPr txBox="1"/>
-          <p:nvPr/>
-        </p:nvSpPr>
-        <p:spPr>
-          <a:xfrm>
-            <a:off x="548640" y="1417320"/>
-            <a:ext cx="3108960" cy="603503"/>
-          </a:xfrm>
-          <a:prstGeom prst="rect">
-            <a:avLst/>
-          </a:prstGeom>
-          <a:noFill/>
-        </p:spPr>
-        <p:txBody>
-          <a:bodyPr wrap="square">
-            <a:spAutoFit/>
-          </a:bodyPr>
-          <a:lstStyle/>
-          <a:p>
-            <a:pPr algn="l"/>
-            <a:r>
-              <a:rPr sz="1600" b="1">
-                <a:solidFill>
-                  <a:srgbClr val="1A1A2E"/>
-                </a:solidFill>
-                <a:latin typeface="Segoe UI"/>
-              </a:rPr>
-              <a:t>E: API → bronze</a:t>
-            </a:r>
-          </a:p>
-        </p:txBody>
-      </p:sp>
-      <p:sp>
-        <p:nvSpPr>
-          <p:cNvPr id="6" name="TextBox 5"/>
-          <p:cNvSpPr txBox="1"/>
-          <p:nvPr/>
-        </p:nvSpPr>
-        <p:spPr>
-          <a:xfrm>
-            <a:off x="3749039" y="1417320"/>
-            <a:ext cx="8321040" cy="603503"/>
-          </a:xfrm>
-          <a:prstGeom prst="rect">
-            <a:avLst/>
-          </a:prstGeom>
-          <a:noFill/>
-        </p:spPr>
-        <p:txBody>
-          <a:bodyPr wrap="square">
-            <a:spAutoFit/>
-          </a:bodyPr>
-          <a:lstStyle/>
-          <a:p>
-            <a:pPr algn="l"/>
-            <a:r>
-              <a:rPr sz="1300" b="0">
-                <a:solidFill>
-                  <a:srgbClr val="6B6B7B"/>
-                </a:solidFill>
-                <a:latin typeface="Segoe UI"/>
-              </a:rPr>
-              <a:t>Python, OAuth, przyrostowo po znaczniku czasu; surowe CSV, append-only</a:t>
-            </a:r>
-          </a:p>
-        </p:txBody>
-      </p:sp>
-      <p:sp>
-        <p:nvSpPr>
-          <p:cNvPr id="7" name="TextBox 6"/>
-          <p:cNvSpPr txBox="1"/>
-          <p:nvPr/>
-        </p:nvSpPr>
-        <p:spPr>
-          <a:xfrm>
-            <a:off x="548640" y="2075688"/>
-            <a:ext cx="3108960" cy="603503"/>
-          </a:xfrm>
-          <a:prstGeom prst="rect">
-            <a:avLst/>
-          </a:prstGeom>
-          <a:noFill/>
-        </p:spPr>
-        <p:txBody>
-          <a:bodyPr wrap="square">
-            <a:spAutoFit/>
-          </a:bodyPr>
-          <a:lstStyle/>
-          <a:p>
-            <a:pPr algn="l"/>
-            <a:r>
-              <a:rPr sz="1600" b="1">
-                <a:solidFill>
-                  <a:srgbClr val="1A1A2E"/>
-                </a:solidFill>
-                <a:latin typeface="Segoe UI"/>
-              </a:rPr>
-              <a:t>T: bronze → silver</a:t>
-            </a:r>
-          </a:p>
-        </p:txBody>
-      </p:sp>
-      <p:sp>
-        <p:nvSpPr>
-          <p:cNvPr id="8" name="TextBox 7"/>
-          <p:cNvSpPr txBox="1"/>
-          <p:nvPr/>
-        </p:nvSpPr>
-        <p:spPr>
-          <a:xfrm>
-            <a:off x="3749039" y="2075688"/>
-            <a:ext cx="8321040" cy="603503"/>
-          </a:xfrm>
-          <a:prstGeom prst="rect">
-            <a:avLst/>
-          </a:prstGeom>
-          <a:noFill/>
-        </p:spPr>
-        <p:txBody>
-          <a:bodyPr wrap="square">
-            <a:spAutoFit/>
-          </a:bodyPr>
-          <a:lstStyle/>
-          <a:p>
-            <a:pPr algn="l"/>
-            <a:r>
-              <a:rPr sz="1300" b="0">
-                <a:solidFill>
-                  <a:srgbClr val="6B6B7B"/>
-                </a:solidFill>
-                <a:latin typeface="Segoe UI"/>
-              </a:rPr>
-              <a:t>Glue/Spark: deduplikacja (SCD typ 1), rejestr usunięć, typowanie, Parquet</a:t>
-            </a:r>
-          </a:p>
-        </p:txBody>
-      </p:sp>
-      <p:sp>
-        <p:nvSpPr>
-          <p:cNvPr id="9" name="TextBox 8"/>
-          <p:cNvSpPr txBox="1"/>
-          <p:nvPr/>
-        </p:nvSpPr>
-        <p:spPr>
-          <a:xfrm>
-            <a:off x="548640" y="2734056"/>
-            <a:ext cx="3108960" cy="603503"/>
-          </a:xfrm>
-          <a:prstGeom prst="rect">
-            <a:avLst/>
-          </a:prstGeom>
-          <a:noFill/>
-        </p:spPr>
-        <p:txBody>
-          <a:bodyPr wrap="square">
-            <a:spAutoFit/>
-          </a:bodyPr>
-          <a:lstStyle/>
-          <a:p>
-            <a:pPr algn="l"/>
-            <a:r>
-              <a:rPr sz="1600" b="1">
-                <a:solidFill>
-                  <a:srgbClr val="1A1A2E"/>
-                </a:solidFill>
-                <a:latin typeface="Segoe UI"/>
-              </a:rPr>
-              <a:t>T: silver → gold</a:t>
-            </a:r>
-          </a:p>
-        </p:txBody>
-      </p:sp>
-      <p:sp>
-        <p:nvSpPr>
-          <p:cNvPr id="10" name="TextBox 9"/>
-          <p:cNvSpPr txBox="1"/>
-          <p:nvPr/>
-        </p:nvSpPr>
-        <p:spPr>
-          <a:xfrm>
-            <a:off x="3749039" y="2734056"/>
-            <a:ext cx="8321040" cy="603503"/>
-          </a:xfrm>
-          <a:prstGeom prst="rect">
-            <a:avLst/>
-          </a:prstGeom>
-          <a:noFill/>
-        </p:spPr>
-        <p:txBody>
-          <a:bodyPr wrap="square">
-            <a:spAutoFit/>
-          </a:bodyPr>
-          <a:lstStyle/>
-          <a:p>
-            <a:pPr algn="l"/>
-            <a:r>
-              <a:rPr sz="1300" b="0">
-                <a:solidFill>
-                  <a:srgbClr val="6B6B7B"/>
-                </a:solidFill>
-                <a:latin typeface="Segoe UI"/>
-              </a:rPr>
-              <a:t>Athena CTAS: integracja źródeł, flaga cywilów, czyszczenie pseudo-nulli</a:t>
-            </a:r>
-          </a:p>
-        </p:txBody>
-      </p:sp>
-      <p:sp>
-        <p:nvSpPr>
-          <p:cNvPr id="11" name="TextBox 10"/>
-          <p:cNvSpPr txBox="1"/>
-          <p:nvPr/>
-        </p:nvSpPr>
-        <p:spPr>
-          <a:xfrm>
-            <a:off x="548640" y="3392424"/>
-            <a:ext cx="3108960" cy="603503"/>
-          </a:xfrm>
-          <a:prstGeom prst="rect">
-            <a:avLst/>
-          </a:prstGeom>
-          <a:noFill/>
-        </p:spPr>
-        <p:txBody>
-          <a:bodyPr wrap="square">
-            <a:spAutoFit/>
-          </a:bodyPr>
-          <a:lstStyle/>
-          <a:p>
-            <a:pPr algn="l"/>
-            <a:r>
-              <a:rPr sz="1600" b="1">
-                <a:solidFill>
-                  <a:srgbClr val="1A1A2E"/>
-                </a:solidFill>
-                <a:latin typeface="Segoe UI"/>
-              </a:rPr>
-              <a:t>L: gold → wymiary</a:t>
-            </a:r>
-          </a:p>
-        </p:txBody>
-      </p:sp>
-      <p:sp>
-        <p:nvSpPr>
-          <p:cNvPr id="12" name="TextBox 11"/>
-          <p:cNvSpPr txBox="1"/>
-          <p:nvPr/>
-        </p:nvSpPr>
-        <p:spPr>
-          <a:xfrm>
-            <a:off x="3749039" y="3392424"/>
-            <a:ext cx="8321040" cy="603503"/>
-          </a:xfrm>
-          <a:prstGeom prst="rect">
-            <a:avLst/>
-          </a:prstGeom>
-          <a:noFill/>
-        </p:spPr>
-        <p:txBody>
-          <a:bodyPr wrap="square">
-            <a:spAutoFit/>
-          </a:bodyPr>
-          <a:lstStyle/>
-          <a:p>
-            <a:pPr algn="l"/>
-            <a:r>
-              <a:rPr sz="1300" b="0">
-                <a:solidFill>
-                  <a:srgbClr val="6B6B7B"/>
-                </a:solidFill>
-                <a:latin typeface="Segoe UI"/>
-              </a:rPr>
-              <a:t>klucze sztuczne + wiersz Unknown; kalendarz z sequence()</a:t>
-            </a:r>
-          </a:p>
-        </p:txBody>
-      </p:sp>
-      <p:sp>
-        <p:nvSpPr>
-          <p:cNvPr id="13" name="TextBox 12"/>
-          <p:cNvSpPr txBox="1"/>
-          <p:nvPr/>
-        </p:nvSpPr>
-        <p:spPr>
-          <a:xfrm>
-            <a:off x="548640" y="4050792"/>
-            <a:ext cx="3108960" cy="603503"/>
-          </a:xfrm>
-          <a:prstGeom prst="rect">
-            <a:avLst/>
-          </a:prstGeom>
-          <a:noFill/>
-        </p:spPr>
-        <p:txBody>
-          <a:bodyPr wrap="square">
-            <a:spAutoFit/>
-          </a:bodyPr>
-          <a:lstStyle/>
-          <a:p>
-            <a:pPr algn="l"/>
-            <a:r>
-              <a:rPr sz="1600" b="1">
-                <a:solidFill>
-                  <a:srgbClr val="1A1A2E"/>
-                </a:solidFill>
-                <a:latin typeface="Segoe UI"/>
-              </a:rPr>
-              <a:t>L: → fakt</a:t>
-            </a:r>
-          </a:p>
-        </p:txBody>
-      </p:sp>
-      <p:sp>
-        <p:nvSpPr>
-          <p:cNvPr id="14" name="TextBox 13"/>
-          <p:cNvSpPr txBox="1"/>
-          <p:nvPr/>
-        </p:nvSpPr>
-        <p:spPr>
-          <a:xfrm>
-            <a:off x="3749039" y="4050792"/>
-            <a:ext cx="8321040" cy="603503"/>
-          </a:xfrm>
-          <a:prstGeom prst="rect">
-            <a:avLst/>
-          </a:prstGeom>
-          <a:noFill/>
-        </p:spPr>
-        <p:txBody>
-          <a:bodyPr wrap="square">
-            <a:spAutoFit/>
-          </a:bodyPr>
-          <a:lstStyle/>
-          <a:p>
-            <a:pPr algn="l"/>
-            <a:r>
-              <a:rPr sz="1300" b="0">
-                <a:solidFill>
-                  <a:srgbClr val="6B6B7B"/>
-                </a:solidFill>
-                <a:latin typeface="Segoe UI"/>
-              </a:rPr>
-              <a:t>lookup surogatów; wyłącznie klucze i miary</a:t>
-            </a:r>
-          </a:p>
-        </p:txBody>
-      </p:sp>
-      <p:sp>
-        <p:nvSpPr>
-          <p:cNvPr id="15" name="TextBox 14"/>
-          <p:cNvSpPr txBox="1"/>
-          <p:nvPr/>
-        </p:nvSpPr>
-        <p:spPr>
-          <a:xfrm>
-            <a:off x="548640" y="4709160"/>
-            <a:ext cx="3108960" cy="603503"/>
-          </a:xfrm>
-          <a:prstGeom prst="rect">
-            <a:avLst/>
-          </a:prstGeom>
-          <a:noFill/>
-        </p:spPr>
-        <p:txBody>
-          <a:bodyPr wrap="square">
-            <a:spAutoFit/>
-          </a:bodyPr>
-          <a:lstStyle/>
-          <a:p>
-            <a:pPr algn="l"/>
-            <a:r>
-              <a:rPr sz="1600" b="1">
-                <a:solidFill>
-                  <a:srgbClr val="1A1A2E"/>
-                </a:solidFill>
-                <a:latin typeface="Segoe UI"/>
-              </a:rPr>
-              <a:t>Walidacja</a:t>
-            </a:r>
-          </a:p>
-        </p:txBody>
-      </p:sp>
-      <p:sp>
-        <p:nvSpPr>
-          <p:cNvPr id="16" name="TextBox 15"/>
-          <p:cNvSpPr txBox="1"/>
-          <p:nvPr/>
-        </p:nvSpPr>
-        <p:spPr>
-          <a:xfrm>
-            <a:off x="3749039" y="4709160"/>
-            <a:ext cx="8321040" cy="603503"/>
-          </a:xfrm>
-          <a:prstGeom prst="rect">
-            <a:avLst/>
-          </a:prstGeom>
-          <a:noFill/>
-        </p:spPr>
-        <p:txBody>
-          <a:bodyPr wrap="square">
-            <a:spAutoFit/>
-          </a:bodyPr>
-          <a:lstStyle/>
-          <a:p>
-            <a:pPr algn="l"/>
-            <a:r>
-              <a:rPr sz="1300" b="0">
-                <a:solidFill>
-                  <a:srgbClr val="6B6B7B"/>
-                </a:solidFill>
-                <a:latin typeface="Segoe UI"/>
-              </a:rPr>
-              <a:t>rekoncyliacja warstw: silver == gold == fakt (zdarzenia oraz ofiary)</a:t>
-            </a:r>
-          </a:p>
-        </p:txBody>
-      </p:sp>
-      <p:sp>
-        <p:nvSpPr>
-          <p:cNvPr id="17" name="Rectangle 16"/>
+              <a:t>Procesy ETL — architektura</a:t>
+            </a:r>
+          </a:p>
+        </p:txBody>
+      </p:sp>
+      <p:pic>
+        <p:nvPicPr>
+          <p:cNvPr id="4" name="Picture 3" descr="architecture.png"/>
+          <p:cNvPicPr>
+            <a:picLocks noChangeAspect="1"/>
+          </p:cNvPicPr>
+          <p:nvPr/>
+        </p:nvPicPr>
+        <p:blipFill>
+          <a:blip r:embed="rId2"/>
+          <a:stretch>
+            <a:fillRect/>
+          </a:stretch>
+        </p:blipFill>
+        <p:spPr>
+          <a:xfrm>
+            <a:off x="365760" y="2168415"/>
+            <a:ext cx="11460175" cy="2429730"/>
+          </a:xfrm>
+          <a:prstGeom prst="rect">
+            <a:avLst/>
+          </a:prstGeom>
+        </p:spPr>
+      </p:pic>
+      <p:sp>
+        <p:nvSpPr>
+          <p:cNvPr id="5" name="Rectangle 4"/>
           <p:cNvSpPr/>
           <p:nvPr/>
         </p:nvSpPr>
@@ -8019,7 +8055,7 @@
                 </a:solidFill>
                 <a:latin typeface="Segoe UI"/>
               </a:rPr>
-              <a:t>PYTANIE:  czy taka forma tabeli mapowań odpowiada wzorowi z Materiałów?</a:t>
+              <a:t>PYTANIE:  czy stack AWS + Airflow + Power BI jest właściwym zamiennikiem SSIS/SSAS/SSRS?</a:t>
             </a:r>
           </a:p>
         </p:txBody>
@@ -8123,7 +8159,7 @@
                 </a:solidFill>
                 <a:latin typeface="Segoe UI"/>
               </a:rPr>
-              <a:t>ETL uruchamiany na żywo — Airflow</a:t>
+              <a:t>Tabela mapowań (skrót)</a:t>
             </a:r>
           </a:p>
         </p:txBody>
@@ -8158,35 +8194,485 @@
                 </a:solidFill>
                 <a:latin typeface="Segoe UI"/>
               </a:rPr>
-              <a:t>pełny przebieg: crawler → Spark → gold → gwiazda → walidacja; kroki idempotentne — możemy uruchomić przy Pani</a:t>
-            </a:r>
-          </a:p>
-        </p:txBody>
-      </p:sp>
-      <p:pic>
-        <p:nvPicPr>
-          <p:cNvPr id="5" name="Picture 4" descr="01_graf.png"/>
-          <p:cNvPicPr>
-            <a:picLocks noChangeAspect="1"/>
-          </p:cNvPicPr>
-          <p:nvPr/>
-        </p:nvPicPr>
-        <p:blipFill>
-          <a:blip r:embed="rId2"/>
-          <a:stretch>
-            <a:fillRect/>
-          </a:stretch>
-        </p:blipFill>
-        <p:spPr>
-          <a:xfrm>
-            <a:off x="1926183" y="1234440"/>
-            <a:ext cx="8339328" cy="5212080"/>
-          </a:xfrm>
-          <a:prstGeom prst="rect">
-            <a:avLst/>
-          </a:prstGeom>
-        </p:spPr>
-      </p:pic>
+              <a:t>pełna wersja: docs/etl_mapowania.md — każda kolumna: źródło → transformacja → cel</a:t>
+            </a:r>
+          </a:p>
+        </p:txBody>
+      </p:sp>
+      <p:sp>
+        <p:nvSpPr>
+          <p:cNvPr id="5" name="TextBox 4"/>
+          <p:cNvSpPr txBox="1"/>
+          <p:nvPr/>
+        </p:nvSpPr>
+        <p:spPr>
+          <a:xfrm>
+            <a:off x="548640" y="1417320"/>
+            <a:ext cx="3108960" cy="603503"/>
+          </a:xfrm>
+          <a:prstGeom prst="rect">
+            <a:avLst/>
+          </a:prstGeom>
+          <a:noFill/>
+        </p:spPr>
+        <p:txBody>
+          <a:bodyPr wrap="square">
+            <a:spAutoFit/>
+          </a:bodyPr>
+          <a:lstStyle/>
+          <a:p>
+            <a:pPr algn="l"/>
+            <a:r>
+              <a:rPr sz="1600" b="1">
+                <a:solidFill>
+                  <a:srgbClr val="1A1A2E"/>
+                </a:solidFill>
+                <a:latin typeface="Segoe UI"/>
+              </a:rPr>
+              <a:t>E: API → bronze</a:t>
+            </a:r>
+          </a:p>
+        </p:txBody>
+      </p:sp>
+      <p:sp>
+        <p:nvSpPr>
+          <p:cNvPr id="6" name="TextBox 5"/>
+          <p:cNvSpPr txBox="1"/>
+          <p:nvPr/>
+        </p:nvSpPr>
+        <p:spPr>
+          <a:xfrm>
+            <a:off x="3749039" y="1417320"/>
+            <a:ext cx="8321040" cy="603503"/>
+          </a:xfrm>
+          <a:prstGeom prst="rect">
+            <a:avLst/>
+          </a:prstGeom>
+          <a:noFill/>
+        </p:spPr>
+        <p:txBody>
+          <a:bodyPr wrap="square">
+            <a:spAutoFit/>
+          </a:bodyPr>
+          <a:lstStyle/>
+          <a:p>
+            <a:pPr algn="l"/>
+            <a:r>
+              <a:rPr sz="1300" b="0">
+                <a:solidFill>
+                  <a:srgbClr val="6B6B7B"/>
+                </a:solidFill>
+                <a:latin typeface="Segoe UI"/>
+              </a:rPr>
+              <a:t>Python, OAuth, przyrostowo po znaczniku czasu; surowe CSV, append-only</a:t>
+            </a:r>
+          </a:p>
+        </p:txBody>
+      </p:sp>
+      <p:sp>
+        <p:nvSpPr>
+          <p:cNvPr id="7" name="TextBox 6"/>
+          <p:cNvSpPr txBox="1"/>
+          <p:nvPr/>
+        </p:nvSpPr>
+        <p:spPr>
+          <a:xfrm>
+            <a:off x="548640" y="2075688"/>
+            <a:ext cx="3108960" cy="603503"/>
+          </a:xfrm>
+          <a:prstGeom prst="rect">
+            <a:avLst/>
+          </a:prstGeom>
+          <a:noFill/>
+        </p:spPr>
+        <p:txBody>
+          <a:bodyPr wrap="square">
+            <a:spAutoFit/>
+          </a:bodyPr>
+          <a:lstStyle/>
+          <a:p>
+            <a:pPr algn="l"/>
+            <a:r>
+              <a:rPr sz="1600" b="1">
+                <a:solidFill>
+                  <a:srgbClr val="1A1A2E"/>
+                </a:solidFill>
+                <a:latin typeface="Segoe UI"/>
+              </a:rPr>
+              <a:t>T: bronze → silver</a:t>
+            </a:r>
+          </a:p>
+        </p:txBody>
+      </p:sp>
+      <p:sp>
+        <p:nvSpPr>
+          <p:cNvPr id="8" name="TextBox 7"/>
+          <p:cNvSpPr txBox="1"/>
+          <p:nvPr/>
+        </p:nvSpPr>
+        <p:spPr>
+          <a:xfrm>
+            <a:off x="3749039" y="2075688"/>
+            <a:ext cx="8321040" cy="603503"/>
+          </a:xfrm>
+          <a:prstGeom prst="rect">
+            <a:avLst/>
+          </a:prstGeom>
+          <a:noFill/>
+        </p:spPr>
+        <p:txBody>
+          <a:bodyPr wrap="square">
+            <a:spAutoFit/>
+          </a:bodyPr>
+          <a:lstStyle/>
+          <a:p>
+            <a:pPr algn="l"/>
+            <a:r>
+              <a:rPr sz="1300" b="0">
+                <a:solidFill>
+                  <a:srgbClr val="6B6B7B"/>
+                </a:solidFill>
+                <a:latin typeface="Segoe UI"/>
+              </a:rPr>
+              <a:t>Glue/Spark: deduplikacja (SCD typ 1), rejestr usunięć, typowanie, Parquet</a:t>
+            </a:r>
+          </a:p>
+        </p:txBody>
+      </p:sp>
+      <p:sp>
+        <p:nvSpPr>
+          <p:cNvPr id="9" name="TextBox 8"/>
+          <p:cNvSpPr txBox="1"/>
+          <p:nvPr/>
+        </p:nvSpPr>
+        <p:spPr>
+          <a:xfrm>
+            <a:off x="548640" y="2734056"/>
+            <a:ext cx="3108960" cy="603503"/>
+          </a:xfrm>
+          <a:prstGeom prst="rect">
+            <a:avLst/>
+          </a:prstGeom>
+          <a:noFill/>
+        </p:spPr>
+        <p:txBody>
+          <a:bodyPr wrap="square">
+            <a:spAutoFit/>
+          </a:bodyPr>
+          <a:lstStyle/>
+          <a:p>
+            <a:pPr algn="l"/>
+            <a:r>
+              <a:rPr sz="1600" b="1">
+                <a:solidFill>
+                  <a:srgbClr val="1A1A2E"/>
+                </a:solidFill>
+                <a:latin typeface="Segoe UI"/>
+              </a:rPr>
+              <a:t>T: silver → gold</a:t>
+            </a:r>
+          </a:p>
+        </p:txBody>
+      </p:sp>
+      <p:sp>
+        <p:nvSpPr>
+          <p:cNvPr id="10" name="TextBox 9"/>
+          <p:cNvSpPr txBox="1"/>
+          <p:nvPr/>
+        </p:nvSpPr>
+        <p:spPr>
+          <a:xfrm>
+            <a:off x="3749039" y="2734056"/>
+            <a:ext cx="8321040" cy="603503"/>
+          </a:xfrm>
+          <a:prstGeom prst="rect">
+            <a:avLst/>
+          </a:prstGeom>
+          <a:noFill/>
+        </p:spPr>
+        <p:txBody>
+          <a:bodyPr wrap="square">
+            <a:spAutoFit/>
+          </a:bodyPr>
+          <a:lstStyle/>
+          <a:p>
+            <a:pPr algn="l"/>
+            <a:r>
+              <a:rPr sz="1300" b="0">
+                <a:solidFill>
+                  <a:srgbClr val="6B6B7B"/>
+                </a:solidFill>
+                <a:latin typeface="Segoe UI"/>
+              </a:rPr>
+              <a:t>Athena CTAS: integracja źródeł, flaga cywilów, czyszczenie pseudo-nulli</a:t>
+            </a:r>
+          </a:p>
+        </p:txBody>
+      </p:sp>
+      <p:sp>
+        <p:nvSpPr>
+          <p:cNvPr id="11" name="TextBox 10"/>
+          <p:cNvSpPr txBox="1"/>
+          <p:nvPr/>
+        </p:nvSpPr>
+        <p:spPr>
+          <a:xfrm>
+            <a:off x="548640" y="3392424"/>
+            <a:ext cx="3108960" cy="603503"/>
+          </a:xfrm>
+          <a:prstGeom prst="rect">
+            <a:avLst/>
+          </a:prstGeom>
+          <a:noFill/>
+        </p:spPr>
+        <p:txBody>
+          <a:bodyPr wrap="square">
+            <a:spAutoFit/>
+          </a:bodyPr>
+          <a:lstStyle/>
+          <a:p>
+            <a:pPr algn="l"/>
+            <a:r>
+              <a:rPr sz="1600" b="1">
+                <a:solidFill>
+                  <a:srgbClr val="1A1A2E"/>
+                </a:solidFill>
+                <a:latin typeface="Segoe UI"/>
+              </a:rPr>
+              <a:t>L: gold → wymiary</a:t>
+            </a:r>
+          </a:p>
+        </p:txBody>
+      </p:sp>
+      <p:sp>
+        <p:nvSpPr>
+          <p:cNvPr id="12" name="TextBox 11"/>
+          <p:cNvSpPr txBox="1"/>
+          <p:nvPr/>
+        </p:nvSpPr>
+        <p:spPr>
+          <a:xfrm>
+            <a:off x="3749039" y="3392424"/>
+            <a:ext cx="8321040" cy="603503"/>
+          </a:xfrm>
+          <a:prstGeom prst="rect">
+            <a:avLst/>
+          </a:prstGeom>
+          <a:noFill/>
+        </p:spPr>
+        <p:txBody>
+          <a:bodyPr wrap="square">
+            <a:spAutoFit/>
+          </a:bodyPr>
+          <a:lstStyle/>
+          <a:p>
+            <a:pPr algn="l"/>
+            <a:r>
+              <a:rPr sz="1300" b="0">
+                <a:solidFill>
+                  <a:srgbClr val="6B6B7B"/>
+                </a:solidFill>
+                <a:latin typeface="Segoe UI"/>
+              </a:rPr>
+              <a:t>klucze sztuczne + wiersz Unknown; kalendarz z sequence()</a:t>
+            </a:r>
+          </a:p>
+        </p:txBody>
+      </p:sp>
+      <p:sp>
+        <p:nvSpPr>
+          <p:cNvPr id="13" name="TextBox 12"/>
+          <p:cNvSpPr txBox="1"/>
+          <p:nvPr/>
+        </p:nvSpPr>
+        <p:spPr>
+          <a:xfrm>
+            <a:off x="548640" y="4050792"/>
+            <a:ext cx="3108960" cy="603503"/>
+          </a:xfrm>
+          <a:prstGeom prst="rect">
+            <a:avLst/>
+          </a:prstGeom>
+          <a:noFill/>
+        </p:spPr>
+        <p:txBody>
+          <a:bodyPr wrap="square">
+            <a:spAutoFit/>
+          </a:bodyPr>
+          <a:lstStyle/>
+          <a:p>
+            <a:pPr algn="l"/>
+            <a:r>
+              <a:rPr sz="1600" b="1">
+                <a:solidFill>
+                  <a:srgbClr val="1A1A2E"/>
+                </a:solidFill>
+                <a:latin typeface="Segoe UI"/>
+              </a:rPr>
+              <a:t>L: → fakt</a:t>
+            </a:r>
+          </a:p>
+        </p:txBody>
+      </p:sp>
+      <p:sp>
+        <p:nvSpPr>
+          <p:cNvPr id="14" name="TextBox 13"/>
+          <p:cNvSpPr txBox="1"/>
+          <p:nvPr/>
+        </p:nvSpPr>
+        <p:spPr>
+          <a:xfrm>
+            <a:off x="3749039" y="4050792"/>
+            <a:ext cx="8321040" cy="603503"/>
+          </a:xfrm>
+          <a:prstGeom prst="rect">
+            <a:avLst/>
+          </a:prstGeom>
+          <a:noFill/>
+        </p:spPr>
+        <p:txBody>
+          <a:bodyPr wrap="square">
+            <a:spAutoFit/>
+          </a:bodyPr>
+          <a:lstStyle/>
+          <a:p>
+            <a:pPr algn="l"/>
+            <a:r>
+              <a:rPr sz="1300" b="0">
+                <a:solidFill>
+                  <a:srgbClr val="6B6B7B"/>
+                </a:solidFill>
+                <a:latin typeface="Segoe UI"/>
+              </a:rPr>
+              <a:t>lookup surogatów; wyłącznie klucze i miary</a:t>
+            </a:r>
+          </a:p>
+        </p:txBody>
+      </p:sp>
+      <p:sp>
+        <p:nvSpPr>
+          <p:cNvPr id="15" name="TextBox 14"/>
+          <p:cNvSpPr txBox="1"/>
+          <p:nvPr/>
+        </p:nvSpPr>
+        <p:spPr>
+          <a:xfrm>
+            <a:off x="548640" y="4709160"/>
+            <a:ext cx="3108960" cy="603503"/>
+          </a:xfrm>
+          <a:prstGeom prst="rect">
+            <a:avLst/>
+          </a:prstGeom>
+          <a:noFill/>
+        </p:spPr>
+        <p:txBody>
+          <a:bodyPr wrap="square">
+            <a:spAutoFit/>
+          </a:bodyPr>
+          <a:lstStyle/>
+          <a:p>
+            <a:pPr algn="l"/>
+            <a:r>
+              <a:rPr sz="1600" b="1">
+                <a:solidFill>
+                  <a:srgbClr val="1A1A2E"/>
+                </a:solidFill>
+                <a:latin typeface="Segoe UI"/>
+              </a:rPr>
+              <a:t>Walidacja</a:t>
+            </a:r>
+          </a:p>
+        </p:txBody>
+      </p:sp>
+      <p:sp>
+        <p:nvSpPr>
+          <p:cNvPr id="16" name="TextBox 15"/>
+          <p:cNvSpPr txBox="1"/>
+          <p:nvPr/>
+        </p:nvSpPr>
+        <p:spPr>
+          <a:xfrm>
+            <a:off x="3749039" y="4709160"/>
+            <a:ext cx="8321040" cy="603503"/>
+          </a:xfrm>
+          <a:prstGeom prst="rect">
+            <a:avLst/>
+          </a:prstGeom>
+          <a:noFill/>
+        </p:spPr>
+        <p:txBody>
+          <a:bodyPr wrap="square">
+            <a:spAutoFit/>
+          </a:bodyPr>
+          <a:lstStyle/>
+          <a:p>
+            <a:pPr algn="l"/>
+            <a:r>
+              <a:rPr sz="1300" b="0">
+                <a:solidFill>
+                  <a:srgbClr val="6B6B7B"/>
+                </a:solidFill>
+                <a:latin typeface="Segoe UI"/>
+              </a:rPr>
+              <a:t>rekoncyliacja warstw: silver == gold == fakt (zdarzenia oraz ofiary)</a:t>
+            </a:r>
+          </a:p>
+        </p:txBody>
+      </p:sp>
+      <p:sp>
+        <p:nvSpPr>
+          <p:cNvPr id="17" name="Rectangle 16"/>
+          <p:cNvSpPr/>
+          <p:nvPr/>
+        </p:nvSpPr>
+        <p:spPr>
+          <a:xfrm>
+            <a:off x="457200" y="5897880"/>
+            <a:ext cx="11277295" cy="685800"/>
+          </a:xfrm>
+          <a:prstGeom prst="rect">
+            <a:avLst/>
+          </a:prstGeom>
+          <a:solidFill>
+            <a:srgbClr val="FFFFFF"/>
+          </a:solidFill>
+          <a:ln w="15875">
+            <a:solidFill>
+              <a:srgbClr val="A50F15"/>
+            </a:solidFill>
+          </a:ln>
+        </p:spPr>
+        <p:style>
+          <a:lnRef idx="1">
+            <a:schemeClr val="accent1"/>
+          </a:lnRef>
+          <a:fillRef idx="3">
+            <a:schemeClr val="accent1"/>
+          </a:fillRef>
+          <a:effectRef idx="2">
+            <a:schemeClr val="accent1"/>
+          </a:effectRef>
+          <a:fontRef idx="minor">
+            <a:schemeClr val="lt1"/>
+          </a:fontRef>
+        </p:style>
+        <p:txBody>
+          <a:bodyPr rtlCol="0" anchor="ctr" wrap="square"/>
+          <a:lstStyle/>
+          <a:p>
+            <a:pPr algn="ctr"/>
+            <a:r>
+              <a:rPr sz="1400" b="1">
+                <a:solidFill>
+                  <a:srgbClr val="A50F15"/>
+                </a:solidFill>
+                <a:latin typeface="Segoe UI"/>
+              </a:rPr>
+              <a:t>PYTANIE:  czy taka forma tabeli mapowań odpowiada wzorowi z Materiałów?</a:t>
+            </a:r>
+          </a:p>
+        </p:txBody>
+      </p:sp>
     </p:spTree>
   </p:cSld>
   <p:clrMapOvr>
@@ -8286,7 +8772,7 @@
                 </a:solidFill>
                 <a:latin typeface="Segoe UI"/>
               </a:rPr>
-              <a:t>Dowody ładowania wymiarów i faktów</a:t>
+              <a:t>ETL uruchamiany na żywo — Airflow</a:t>
             </a:r>
           </a:p>
         </p:txBody>
@@ -8321,14 +8807,14 @@
                 </a:solidFill>
                 <a:latin typeface="Segoe UI"/>
               </a:rPr>
-              <a:t>komplet 13 zrzutów w repozytorium (katalog screeny/)</a:t>
+              <a:t>pełny przebieg: crawler → Spark → gold → gwiazda → walidacja; kroki idempotentne — możemy uruchomić przy Pani</a:t>
             </a:r>
           </a:p>
         </p:txBody>
       </p:sp>
       <p:pic>
         <p:nvPicPr>
-          <p:cNvPr id="5" name="Picture 4" descr="12_fact_events.png"/>
+          <p:cNvPr id="5" name="Picture 4" descr="01_graf.png"/>
           <p:cNvPicPr>
             <a:picLocks noChangeAspect="1"/>
           </p:cNvPicPr>
@@ -8342,162 +8828,14 @@
         </p:blipFill>
         <p:spPr>
           <a:xfrm>
-            <a:off x="365760" y="1611630"/>
-            <a:ext cx="5669280" cy="3543300"/>
+            <a:off x="1926183" y="1234440"/>
+            <a:ext cx="8339328" cy="5212080"/>
           </a:xfrm>
           <a:prstGeom prst="rect">
             <a:avLst/>
           </a:prstGeom>
         </p:spPr>
       </p:pic>
-      <p:pic>
-        <p:nvPicPr>
-          <p:cNvPr id="6" name="Picture 5" descr="13_validate.png"/>
-          <p:cNvPicPr>
-            <a:picLocks noChangeAspect="1"/>
-          </p:cNvPicPr>
-          <p:nvPr/>
-        </p:nvPicPr>
-        <p:blipFill>
-          <a:blip r:embed="rId3"/>
-          <a:stretch>
-            <a:fillRect/>
-          </a:stretch>
-        </p:blipFill>
-        <p:spPr>
-          <a:xfrm>
-            <a:off x="6172200" y="1611630"/>
-            <a:ext cx="5669280" cy="3543300"/>
-          </a:xfrm>
-          <a:prstGeom prst="rect">
-            <a:avLst/>
-          </a:prstGeom>
-        </p:spPr>
-      </p:pic>
-      <p:sp>
-        <p:nvSpPr>
-          <p:cNvPr id="7" name="TextBox 6"/>
-          <p:cNvSpPr txBox="1"/>
-          <p:nvPr/>
-        </p:nvSpPr>
-        <p:spPr>
-          <a:xfrm>
-            <a:off x="365760" y="5486400"/>
-            <a:ext cx="5669280" cy="365760"/>
-          </a:xfrm>
-          <a:prstGeom prst="rect">
-            <a:avLst/>
-          </a:prstGeom>
-          <a:noFill/>
-        </p:spPr>
-        <p:txBody>
-          <a:bodyPr wrap="square">
-            <a:spAutoFit/>
-          </a:bodyPr>
-          <a:lstStyle/>
-          <a:p>
-            <a:pPr algn="ctr"/>
-            <a:r>
-              <a:rPr sz="1300" b="0">
-                <a:solidFill>
-                  <a:srgbClr val="6B6B7B"/>
-                </a:solidFill>
-                <a:latin typeface="Segoe UI"/>
-              </a:rPr>
-              <a:t>ładowanie faktów — SUCCESS</a:t>
-            </a:r>
-          </a:p>
-        </p:txBody>
-      </p:sp>
-      <p:sp>
-        <p:nvSpPr>
-          <p:cNvPr id="8" name="TextBox 7"/>
-          <p:cNvSpPr txBox="1"/>
-          <p:nvPr/>
-        </p:nvSpPr>
-        <p:spPr>
-          <a:xfrm>
-            <a:off x="6172200" y="5486400"/>
-            <a:ext cx="5669280" cy="365760"/>
-          </a:xfrm>
-          <a:prstGeom prst="rect">
-            <a:avLst/>
-          </a:prstGeom>
-          <a:noFill/>
-        </p:spPr>
-        <p:txBody>
-          <a:bodyPr wrap="square">
-            <a:spAutoFit/>
-          </a:bodyPr>
-          <a:lstStyle/>
-          <a:p>
-            <a:pPr algn="ctr"/>
-            <a:r>
-              <a:rPr sz="1300" b="0">
-                <a:solidFill>
-                  <a:srgbClr val="6B6B7B"/>
-                </a:solidFill>
-                <a:latin typeface="Segoe UI"/>
-              </a:rPr>
-              <a:t>walidacja rekoncyliacji — SUCCESS</a:t>
-            </a:r>
-          </a:p>
-        </p:txBody>
-      </p:sp>
-      <p:sp>
-        <p:nvSpPr>
-          <p:cNvPr id="9" name="Rectangle 8"/>
-          <p:cNvSpPr/>
-          <p:nvPr/>
-        </p:nvSpPr>
-        <p:spPr>
-          <a:xfrm>
-            <a:off x="457200" y="5897880"/>
-            <a:ext cx="11277295" cy="685800"/>
-          </a:xfrm>
-          <a:prstGeom prst="rect">
-            <a:avLst/>
-          </a:prstGeom>
-          <a:solidFill>
-            <a:srgbClr val="FFFFFF"/>
-          </a:solidFill>
-          <a:ln w="15875">
-            <a:solidFill>
-              <a:srgbClr val="A50F15"/>
-            </a:solidFill>
-          </a:ln>
-        </p:spPr>
-        <p:style>
-          <a:lnRef idx="1">
-            <a:schemeClr val="accent1"/>
-          </a:lnRef>
-          <a:fillRef idx="3">
-            <a:schemeClr val="accent1"/>
-          </a:fillRef>
-          <a:effectRef idx="2">
-            <a:schemeClr val="accent1"/>
-          </a:effectRef>
-          <a:fontRef idx="minor">
-            <a:schemeClr val="lt1"/>
-          </a:fontRef>
-        </p:style>
-        <p:txBody>
-          <a:bodyPr rtlCol="0" anchor="ctr" wrap="square"/>
-          <a:lstStyle/>
-          <a:p>
-            <a:pPr algn="ctr"/>
-            <a:r>
-              <a:rPr sz="1400" b="1">
-                <a:solidFill>
-                  <a:srgbClr val="A50F15"/>
-                </a:solidFill>
-                <a:latin typeface="Segoe UI"/>
-              </a:rPr>
-              <a:t>PYTANIE:  czy zrzuty z zadań Airflow spełniają wymóg „momentu udanej operacji ładowania”?</a:t>
-            </a:r>
-          </a:p>
-        </p:txBody>
-      </p:sp>
     </p:spTree>
   </p:cSld>
   <p:clrMapOvr>
